--- a/Java/Java #3/TR/Java #3.pptx
+++ b/Java/Java #3/TR/Java #3.pptx
@@ -10,6 +10,8 @@
     <p:sldId id="256" r:id="rId5"/>
     <p:sldId id="257" r:id="rId6"/>
     <p:sldId id="258" r:id="rId7"/>
+    <p:sldId id="259" r:id="rId8"/>
+    <p:sldId id="260" r:id="rId9"/>
   </p:sldIdLst>
   <p:sldSz cx="9144000" cy="6858000"/>
   <p:notesSz cx="7772400" cy="10058400"/>
@@ -67,7 +69,7 @@
         <p:txBody>
           <a:bodyPr/>
           <a:p>
-            <a:fld id="{6A1A186E-4390-4FE4-8802-B290B805D674}" type="slidenum">
+            <a:fld id="{1B1AA42F-BB95-4096-B8EB-1E4F39FE9A40}" type="slidenum">
               <a:t>&lt;#&gt;</a:t>
             </a:fld>
           </a:p>
@@ -118,7 +120,7 @@
       </p:grpSpPr>
       <p:sp>
         <p:nvSpPr>
-          <p:cNvPr id="24" name="PlaceHolder 1"/>
+          <p:cNvPr id="26" name="PlaceHolder 1"/>
           <p:cNvSpPr>
             <a:spLocks noGrp="1"/>
           </p:cNvSpPr>
@@ -158,7 +160,7 @@
       </p:sp>
       <p:sp>
         <p:nvSpPr>
-          <p:cNvPr id="25" name="PlaceHolder 2"/>
+          <p:cNvPr id="27" name="PlaceHolder 2"/>
           <p:cNvSpPr>
             <a:spLocks noGrp="1"/>
           </p:cNvSpPr>
@@ -201,7 +203,7 @@
       </p:sp>
       <p:sp>
         <p:nvSpPr>
-          <p:cNvPr id="26" name="PlaceHolder 3"/>
+          <p:cNvPr id="28" name="PlaceHolder 3"/>
           <p:cNvSpPr>
             <a:spLocks noGrp="1"/>
           </p:cNvSpPr>
@@ -276,7 +278,7 @@
         <p:txBody>
           <a:bodyPr/>
           <a:p>
-            <a:fld id="{D010AC3C-1EE3-47D7-8D30-2F690B397E46}" type="slidenum">
+            <a:fld id="{1AA68B7B-3DCF-4B54-8201-5256A21F3477}" type="slidenum">
               <a:t>&lt;#&gt;</a:t>
             </a:fld>
           </a:p>
@@ -327,7 +329,7 @@
       </p:grpSpPr>
       <p:sp>
         <p:nvSpPr>
-          <p:cNvPr id="27" name="PlaceHolder 1"/>
+          <p:cNvPr id="29" name="PlaceHolder 1"/>
           <p:cNvSpPr>
             <a:spLocks noGrp="1"/>
           </p:cNvSpPr>
@@ -367,7 +369,7 @@
       </p:sp>
       <p:sp>
         <p:nvSpPr>
-          <p:cNvPr id="28" name="PlaceHolder 2"/>
+          <p:cNvPr id="30" name="PlaceHolder 2"/>
           <p:cNvSpPr>
             <a:spLocks noGrp="1"/>
           </p:cNvSpPr>
@@ -410,7 +412,7 @@
       </p:sp>
       <p:sp>
         <p:nvSpPr>
-          <p:cNvPr id="29" name="PlaceHolder 3"/>
+          <p:cNvPr id="31" name="PlaceHolder 3"/>
           <p:cNvSpPr>
             <a:spLocks noGrp="1"/>
           </p:cNvSpPr>
@@ -453,7 +455,7 @@
       </p:sp>
       <p:sp>
         <p:nvSpPr>
-          <p:cNvPr id="30" name="PlaceHolder 4"/>
+          <p:cNvPr id="32" name="PlaceHolder 4"/>
           <p:cNvSpPr>
             <a:spLocks noGrp="1"/>
           </p:cNvSpPr>
@@ -496,7 +498,7 @@
       </p:sp>
       <p:sp>
         <p:nvSpPr>
-          <p:cNvPr id="31" name="PlaceHolder 5"/>
+          <p:cNvPr id="33" name="PlaceHolder 5"/>
           <p:cNvSpPr>
             <a:spLocks noGrp="1"/>
           </p:cNvSpPr>
@@ -571,7 +573,7 @@
         <p:txBody>
           <a:bodyPr/>
           <a:p>
-            <a:fld id="{966E297C-4E7D-41F0-9BFE-803817413E26}" type="slidenum">
+            <a:fld id="{AB980247-6E79-4E42-BCA5-F27F0F6EDD11}" type="slidenum">
               <a:t>&lt;#&gt;</a:t>
             </a:fld>
           </a:p>
@@ -622,7 +624,7 @@
       </p:grpSpPr>
       <p:sp>
         <p:nvSpPr>
-          <p:cNvPr id="32" name="PlaceHolder 1"/>
+          <p:cNvPr id="34" name="PlaceHolder 1"/>
           <p:cNvSpPr>
             <a:spLocks noGrp="1"/>
           </p:cNvSpPr>
@@ -662,7 +664,7 @@
       </p:sp>
       <p:sp>
         <p:nvSpPr>
-          <p:cNvPr id="33" name="PlaceHolder 2"/>
+          <p:cNvPr id="35" name="PlaceHolder 2"/>
           <p:cNvSpPr>
             <a:spLocks noGrp="1"/>
           </p:cNvSpPr>
@@ -705,7 +707,7 @@
       </p:sp>
       <p:sp>
         <p:nvSpPr>
-          <p:cNvPr id="34" name="PlaceHolder 3"/>
+          <p:cNvPr id="36" name="PlaceHolder 3"/>
           <p:cNvSpPr>
             <a:spLocks noGrp="1"/>
           </p:cNvSpPr>
@@ -748,7 +750,7 @@
       </p:sp>
       <p:sp>
         <p:nvSpPr>
-          <p:cNvPr id="35" name="PlaceHolder 4"/>
+          <p:cNvPr id="37" name="PlaceHolder 4"/>
           <p:cNvSpPr>
             <a:spLocks noGrp="1"/>
           </p:cNvSpPr>
@@ -791,7 +793,7 @@
       </p:sp>
       <p:sp>
         <p:nvSpPr>
-          <p:cNvPr id="36" name="PlaceHolder 5"/>
+          <p:cNvPr id="38" name="PlaceHolder 5"/>
           <p:cNvSpPr>
             <a:spLocks noGrp="1"/>
           </p:cNvSpPr>
@@ -834,7 +836,7 @@
       </p:sp>
       <p:sp>
         <p:nvSpPr>
-          <p:cNvPr id="37" name="PlaceHolder 6"/>
+          <p:cNvPr id="39" name="PlaceHolder 6"/>
           <p:cNvSpPr>
             <a:spLocks noGrp="1"/>
           </p:cNvSpPr>
@@ -877,7 +879,7 @@
       </p:sp>
       <p:sp>
         <p:nvSpPr>
-          <p:cNvPr id="38" name="PlaceHolder 7"/>
+          <p:cNvPr id="40" name="PlaceHolder 7"/>
           <p:cNvSpPr>
             <a:spLocks noGrp="1"/>
           </p:cNvSpPr>
@@ -952,7 +954,7 @@
         <p:txBody>
           <a:bodyPr/>
           <a:p>
-            <a:fld id="{FEF4863A-BA8C-4B46-9723-37B1306EDA62}" type="slidenum">
+            <a:fld id="{B389BFAB-820A-47D9-AF6E-6A7FF5C4142B}" type="slidenum">
               <a:t>&lt;#&gt;</a:t>
             </a:fld>
           </a:p>
@@ -1001,67 +1003,6 @@
           <a:chExt cx="0" cy="0"/>
         </a:xfrm>
       </p:grpSpPr>
-      <p:sp>
-        <p:nvSpPr>
-          <p:cNvPr id="2" name="PlaceHolder 1"/>
-          <p:cNvSpPr>
-            <a:spLocks noGrp="1"/>
-          </p:cNvSpPr>
-          <p:nvPr>
-            <p:ph type="ftr" idx="4"/>
-          </p:nvPr>
-        </p:nvSpPr>
-        <p:spPr/>
-        <p:txBody>
-          <a:bodyPr/>
-          <a:p>
-            <a:r>
-              <a:t>Footer</a:t>
-            </a:r>
-          </a:p>
-        </p:txBody>
-      </p:sp>
-      <p:sp>
-        <p:nvSpPr>
-          <p:cNvPr id="3" name="PlaceHolder 2"/>
-          <p:cNvSpPr>
-            <a:spLocks noGrp="1"/>
-          </p:cNvSpPr>
-          <p:nvPr>
-            <p:ph type="sldNum" idx="5"/>
-          </p:nvPr>
-        </p:nvSpPr>
-        <p:spPr/>
-        <p:txBody>
-          <a:bodyPr/>
-          <a:p>
-            <a:fld id="{2EEBFD26-9E67-4454-AE17-0B1E9AF42514}" type="slidenum">
-              <a:t>&lt;#&gt;</a:t>
-            </a:fld>
-          </a:p>
-        </p:txBody>
-      </p:sp>
-      <p:sp>
-        <p:nvSpPr>
-          <p:cNvPr id="4" name="PlaceHolder 3"/>
-          <p:cNvSpPr>
-            <a:spLocks noGrp="1"/>
-          </p:cNvSpPr>
-          <p:nvPr>
-            <p:ph type="dt" idx="6"/>
-          </p:nvPr>
-        </p:nvSpPr>
-        <p:spPr/>
-        <p:txBody>
-          <a:bodyPr/>
-          <a:p>
-            <a:r>
-              <a:rPr lang="en-US"/>
-              <a:t/>
-            </a:r>
-          </a:p>
-        </p:txBody>
-      </p:sp>
     </p:spTree>
   </p:cSld>
 </p:sldLayout>
@@ -1086,7 +1027,7 @@
       </p:grpSpPr>
       <p:sp>
         <p:nvSpPr>
-          <p:cNvPr id="44" name="PlaceHolder 1"/>
+          <p:cNvPr id="41" name="PlaceHolder 1"/>
           <p:cNvSpPr>
             <a:spLocks noGrp="1"/>
           </p:cNvSpPr>
@@ -1126,7 +1067,7 @@
       </p:sp>
       <p:sp>
         <p:nvSpPr>
-          <p:cNvPr id="45" name="PlaceHolder 2"/>
+          <p:cNvPr id="42" name="PlaceHolder 2"/>
           <p:cNvSpPr>
             <a:spLocks noGrp="1"/>
           </p:cNvSpPr>
@@ -1161,67 +1102,6 @@
               </a:solidFill>
               <a:latin typeface="Arial"/>
             </a:endParaRPr>
-          </a:p>
-        </p:txBody>
-      </p:sp>
-      <p:sp>
-        <p:nvSpPr>
-          <p:cNvPr id="4" name="PlaceHolder 3"/>
-          <p:cNvSpPr>
-            <a:spLocks noGrp="1"/>
-          </p:cNvSpPr>
-          <p:nvPr>
-            <p:ph type="ftr" idx="4"/>
-          </p:nvPr>
-        </p:nvSpPr>
-        <p:spPr/>
-        <p:txBody>
-          <a:bodyPr/>
-          <a:p>
-            <a:r>
-              <a:t>Footer</a:t>
-            </a:r>
-          </a:p>
-        </p:txBody>
-      </p:sp>
-      <p:sp>
-        <p:nvSpPr>
-          <p:cNvPr id="5" name="PlaceHolder 4"/>
-          <p:cNvSpPr>
-            <a:spLocks noGrp="1"/>
-          </p:cNvSpPr>
-          <p:nvPr>
-            <p:ph type="sldNum" idx="5"/>
-          </p:nvPr>
-        </p:nvSpPr>
-        <p:spPr/>
-        <p:txBody>
-          <a:bodyPr/>
-          <a:p>
-            <a:fld id="{7106D4DD-511A-4F92-A99D-4FA0BA357EE9}" type="slidenum">
-              <a:t>&lt;#&gt;</a:t>
-            </a:fld>
-          </a:p>
-        </p:txBody>
-      </p:sp>
-      <p:sp>
-        <p:nvSpPr>
-          <p:cNvPr id="6" name="PlaceHolder 5"/>
-          <p:cNvSpPr>
-            <a:spLocks noGrp="1"/>
-          </p:cNvSpPr>
-          <p:nvPr>
-            <p:ph type="dt" idx="6"/>
-          </p:nvPr>
-        </p:nvSpPr>
-        <p:spPr/>
-        <p:txBody>
-          <a:bodyPr/>
-          <a:p>
-            <a:r>
-              <a:rPr lang="en-US"/>
-              <a:t/>
-            </a:r>
           </a:p>
         </p:txBody>
       </p:sp>
@@ -1249,7 +1129,7 @@
       </p:grpSpPr>
       <p:sp>
         <p:nvSpPr>
-          <p:cNvPr id="46" name="PlaceHolder 1"/>
+          <p:cNvPr id="43" name="PlaceHolder 1"/>
           <p:cNvSpPr>
             <a:spLocks noGrp="1"/>
           </p:cNvSpPr>
@@ -1289,7 +1169,7 @@
       </p:sp>
       <p:sp>
         <p:nvSpPr>
-          <p:cNvPr id="47" name="PlaceHolder 2"/>
+          <p:cNvPr id="44" name="PlaceHolder 2"/>
           <p:cNvSpPr>
             <a:spLocks noGrp="1"/>
           </p:cNvSpPr>
@@ -1327,67 +1207,6 @@
               </a:solidFill>
               <a:latin typeface="Arial"/>
             </a:endParaRPr>
-          </a:p>
-        </p:txBody>
-      </p:sp>
-      <p:sp>
-        <p:nvSpPr>
-          <p:cNvPr id="4" name="PlaceHolder 3"/>
-          <p:cNvSpPr>
-            <a:spLocks noGrp="1"/>
-          </p:cNvSpPr>
-          <p:nvPr>
-            <p:ph type="ftr" idx="4"/>
-          </p:nvPr>
-        </p:nvSpPr>
-        <p:spPr/>
-        <p:txBody>
-          <a:bodyPr/>
-          <a:p>
-            <a:r>
-              <a:t>Footer</a:t>
-            </a:r>
-          </a:p>
-        </p:txBody>
-      </p:sp>
-      <p:sp>
-        <p:nvSpPr>
-          <p:cNvPr id="5" name="PlaceHolder 4"/>
-          <p:cNvSpPr>
-            <a:spLocks noGrp="1"/>
-          </p:cNvSpPr>
-          <p:nvPr>
-            <p:ph type="sldNum" idx="5"/>
-          </p:nvPr>
-        </p:nvSpPr>
-        <p:spPr/>
-        <p:txBody>
-          <a:bodyPr/>
-          <a:p>
-            <a:fld id="{8DA9CDB6-43EA-4A4D-9A21-FB131811B4B3}" type="slidenum">
-              <a:t>&lt;#&gt;</a:t>
-            </a:fld>
-          </a:p>
-        </p:txBody>
-      </p:sp>
-      <p:sp>
-        <p:nvSpPr>
-          <p:cNvPr id="6" name="PlaceHolder 5"/>
-          <p:cNvSpPr>
-            <a:spLocks noGrp="1"/>
-          </p:cNvSpPr>
-          <p:nvPr>
-            <p:ph type="dt" idx="6"/>
-          </p:nvPr>
-        </p:nvSpPr>
-        <p:spPr/>
-        <p:txBody>
-          <a:bodyPr/>
-          <a:p>
-            <a:r>
-              <a:rPr lang="en-US"/>
-              <a:t/>
-            </a:r>
           </a:p>
         </p:txBody>
       </p:sp>
@@ -1415,7 +1234,7 @@
       </p:grpSpPr>
       <p:sp>
         <p:nvSpPr>
-          <p:cNvPr id="48" name="PlaceHolder 1"/>
+          <p:cNvPr id="45" name="PlaceHolder 1"/>
           <p:cNvSpPr>
             <a:spLocks noGrp="1"/>
           </p:cNvSpPr>
@@ -1455,7 +1274,7 @@
       </p:sp>
       <p:sp>
         <p:nvSpPr>
-          <p:cNvPr id="49" name="PlaceHolder 2"/>
+          <p:cNvPr id="46" name="PlaceHolder 2"/>
           <p:cNvSpPr>
             <a:spLocks noGrp="1"/>
           </p:cNvSpPr>
@@ -1498,7 +1317,7 @@
       </p:sp>
       <p:sp>
         <p:nvSpPr>
-          <p:cNvPr id="50" name="PlaceHolder 3"/>
+          <p:cNvPr id="47" name="PlaceHolder 3"/>
           <p:cNvSpPr>
             <a:spLocks noGrp="1"/>
           </p:cNvSpPr>
@@ -1536,67 +1355,6 @@
               </a:solidFill>
               <a:latin typeface="Arial"/>
             </a:endParaRPr>
-          </a:p>
-        </p:txBody>
-      </p:sp>
-      <p:sp>
-        <p:nvSpPr>
-          <p:cNvPr id="5" name="PlaceHolder 4"/>
-          <p:cNvSpPr>
-            <a:spLocks noGrp="1"/>
-          </p:cNvSpPr>
-          <p:nvPr>
-            <p:ph type="ftr" idx="4"/>
-          </p:nvPr>
-        </p:nvSpPr>
-        <p:spPr/>
-        <p:txBody>
-          <a:bodyPr/>
-          <a:p>
-            <a:r>
-              <a:t>Footer</a:t>
-            </a:r>
-          </a:p>
-        </p:txBody>
-      </p:sp>
-      <p:sp>
-        <p:nvSpPr>
-          <p:cNvPr id="6" name="PlaceHolder 5"/>
-          <p:cNvSpPr>
-            <a:spLocks noGrp="1"/>
-          </p:cNvSpPr>
-          <p:nvPr>
-            <p:ph type="sldNum" idx="5"/>
-          </p:nvPr>
-        </p:nvSpPr>
-        <p:spPr/>
-        <p:txBody>
-          <a:bodyPr/>
-          <a:p>
-            <a:fld id="{611995CC-6783-46E2-AE91-0226B7F2A74D}" type="slidenum">
-              <a:t>&lt;#&gt;</a:t>
-            </a:fld>
-          </a:p>
-        </p:txBody>
-      </p:sp>
-      <p:sp>
-        <p:nvSpPr>
-          <p:cNvPr id="7" name="PlaceHolder 6"/>
-          <p:cNvSpPr>
-            <a:spLocks noGrp="1"/>
-          </p:cNvSpPr>
-          <p:nvPr>
-            <p:ph type="dt" idx="6"/>
-          </p:nvPr>
-        </p:nvSpPr>
-        <p:spPr/>
-        <p:txBody>
-          <a:bodyPr/>
-          <a:p>
-            <a:r>
-              <a:rPr lang="en-US"/>
-              <a:t/>
-            </a:r>
           </a:p>
         </p:txBody>
       </p:sp>
@@ -1624,7 +1382,7 @@
       </p:grpSpPr>
       <p:sp>
         <p:nvSpPr>
-          <p:cNvPr id="51" name="PlaceHolder 1"/>
+          <p:cNvPr id="48" name="PlaceHolder 1"/>
           <p:cNvSpPr>
             <a:spLocks noGrp="1"/>
           </p:cNvSpPr>
@@ -1659,67 +1417,6 @@
               </a:solidFill>
               <a:latin typeface="Arial"/>
             </a:endParaRPr>
-          </a:p>
-        </p:txBody>
-      </p:sp>
-      <p:sp>
-        <p:nvSpPr>
-          <p:cNvPr id="3" name="PlaceHolder 2"/>
-          <p:cNvSpPr>
-            <a:spLocks noGrp="1"/>
-          </p:cNvSpPr>
-          <p:nvPr>
-            <p:ph type="ftr" idx="4"/>
-          </p:nvPr>
-        </p:nvSpPr>
-        <p:spPr/>
-        <p:txBody>
-          <a:bodyPr/>
-          <a:p>
-            <a:r>
-              <a:t>Footer</a:t>
-            </a:r>
-          </a:p>
-        </p:txBody>
-      </p:sp>
-      <p:sp>
-        <p:nvSpPr>
-          <p:cNvPr id="4" name="PlaceHolder 3"/>
-          <p:cNvSpPr>
-            <a:spLocks noGrp="1"/>
-          </p:cNvSpPr>
-          <p:nvPr>
-            <p:ph type="sldNum" idx="5"/>
-          </p:nvPr>
-        </p:nvSpPr>
-        <p:spPr/>
-        <p:txBody>
-          <a:bodyPr/>
-          <a:p>
-            <a:fld id="{54F396EA-2576-4FA6-9BD9-8C97FD09B696}" type="slidenum">
-              <a:t>&lt;#&gt;</a:t>
-            </a:fld>
-          </a:p>
-        </p:txBody>
-      </p:sp>
-      <p:sp>
-        <p:nvSpPr>
-          <p:cNvPr id="5" name="PlaceHolder 4"/>
-          <p:cNvSpPr>
-            <a:spLocks noGrp="1"/>
-          </p:cNvSpPr>
-          <p:nvPr>
-            <p:ph type="dt" idx="6"/>
-          </p:nvPr>
-        </p:nvSpPr>
-        <p:spPr/>
-        <p:txBody>
-          <a:bodyPr/>
-          <a:p>
-            <a:r>
-              <a:rPr lang="en-US"/>
-              <a:t/>
-            </a:r>
           </a:p>
         </p:txBody>
       </p:sp>
@@ -1747,7 +1444,7 @@
       </p:grpSpPr>
       <p:sp>
         <p:nvSpPr>
-          <p:cNvPr id="52" name="PlaceHolder 1"/>
+          <p:cNvPr id="49" name="PlaceHolder 1"/>
           <p:cNvSpPr>
             <a:spLocks noGrp="1"/>
           </p:cNvSpPr>
@@ -1780,67 +1477,6 @@
               </a:solidFill>
               <a:latin typeface="Arial"/>
             </a:endParaRPr>
-          </a:p>
-        </p:txBody>
-      </p:sp>
-      <p:sp>
-        <p:nvSpPr>
-          <p:cNvPr id="3" name="PlaceHolder 2"/>
-          <p:cNvSpPr>
-            <a:spLocks noGrp="1"/>
-          </p:cNvSpPr>
-          <p:nvPr>
-            <p:ph type="ftr" idx="4"/>
-          </p:nvPr>
-        </p:nvSpPr>
-        <p:spPr/>
-        <p:txBody>
-          <a:bodyPr/>
-          <a:p>
-            <a:r>
-              <a:t>Footer</a:t>
-            </a:r>
-          </a:p>
-        </p:txBody>
-      </p:sp>
-      <p:sp>
-        <p:nvSpPr>
-          <p:cNvPr id="4" name="PlaceHolder 3"/>
-          <p:cNvSpPr>
-            <a:spLocks noGrp="1"/>
-          </p:cNvSpPr>
-          <p:nvPr>
-            <p:ph type="sldNum" idx="5"/>
-          </p:nvPr>
-        </p:nvSpPr>
-        <p:spPr/>
-        <p:txBody>
-          <a:bodyPr/>
-          <a:p>
-            <a:fld id="{DE8B9D59-83BB-435C-B6C1-BBEF5AE5848F}" type="slidenum">
-              <a:t>&lt;#&gt;</a:t>
-            </a:fld>
-          </a:p>
-        </p:txBody>
-      </p:sp>
-      <p:sp>
-        <p:nvSpPr>
-          <p:cNvPr id="5" name="PlaceHolder 4"/>
-          <p:cNvSpPr>
-            <a:spLocks noGrp="1"/>
-          </p:cNvSpPr>
-          <p:nvPr>
-            <p:ph type="dt" idx="6"/>
-          </p:nvPr>
-        </p:nvSpPr>
-        <p:spPr/>
-        <p:txBody>
-          <a:bodyPr/>
-          <a:p>
-            <a:r>
-              <a:rPr lang="en-US"/>
-              <a:t/>
-            </a:r>
           </a:p>
         </p:txBody>
       </p:sp>
@@ -1868,7 +1504,7 @@
       </p:grpSpPr>
       <p:sp>
         <p:nvSpPr>
-          <p:cNvPr id="53" name="PlaceHolder 1"/>
+          <p:cNvPr id="50" name="PlaceHolder 1"/>
           <p:cNvSpPr>
             <a:spLocks noGrp="1"/>
           </p:cNvSpPr>
@@ -1908,7 +1544,7 @@
       </p:sp>
       <p:sp>
         <p:nvSpPr>
-          <p:cNvPr id="54" name="PlaceHolder 2"/>
+          <p:cNvPr id="51" name="PlaceHolder 2"/>
           <p:cNvSpPr>
             <a:spLocks noGrp="1"/>
           </p:cNvSpPr>
@@ -1951,7 +1587,7 @@
       </p:sp>
       <p:sp>
         <p:nvSpPr>
-          <p:cNvPr id="55" name="PlaceHolder 3"/>
+          <p:cNvPr id="52" name="PlaceHolder 3"/>
           <p:cNvSpPr>
             <a:spLocks noGrp="1"/>
           </p:cNvSpPr>
@@ -1994,7 +1630,7 @@
       </p:sp>
       <p:sp>
         <p:nvSpPr>
-          <p:cNvPr id="56" name="PlaceHolder 4"/>
+          <p:cNvPr id="53" name="PlaceHolder 4"/>
           <p:cNvSpPr>
             <a:spLocks noGrp="1"/>
           </p:cNvSpPr>
@@ -2032,67 +1668,6 @@
               </a:solidFill>
               <a:latin typeface="Arial"/>
             </a:endParaRPr>
-          </a:p>
-        </p:txBody>
-      </p:sp>
-      <p:sp>
-        <p:nvSpPr>
-          <p:cNvPr id="6" name="PlaceHolder 5"/>
-          <p:cNvSpPr>
-            <a:spLocks noGrp="1"/>
-          </p:cNvSpPr>
-          <p:nvPr>
-            <p:ph type="ftr" idx="4"/>
-          </p:nvPr>
-        </p:nvSpPr>
-        <p:spPr/>
-        <p:txBody>
-          <a:bodyPr/>
-          <a:p>
-            <a:r>
-              <a:t>Footer</a:t>
-            </a:r>
-          </a:p>
-        </p:txBody>
-      </p:sp>
-      <p:sp>
-        <p:nvSpPr>
-          <p:cNvPr id="7" name="PlaceHolder 6"/>
-          <p:cNvSpPr>
-            <a:spLocks noGrp="1"/>
-          </p:cNvSpPr>
-          <p:nvPr>
-            <p:ph type="sldNum" idx="5"/>
-          </p:nvPr>
-        </p:nvSpPr>
-        <p:spPr/>
-        <p:txBody>
-          <a:bodyPr/>
-          <a:p>
-            <a:fld id="{65E93BB7-B699-4CB1-9221-87541A2808FD}" type="slidenum">
-              <a:t>&lt;#&gt;</a:t>
-            </a:fld>
-          </a:p>
-        </p:txBody>
-      </p:sp>
-      <p:sp>
-        <p:nvSpPr>
-          <p:cNvPr id="8" name="PlaceHolder 7"/>
-          <p:cNvSpPr>
-            <a:spLocks noGrp="1"/>
-          </p:cNvSpPr>
-          <p:nvPr>
-            <p:ph type="dt" idx="6"/>
-          </p:nvPr>
-        </p:nvSpPr>
-        <p:spPr/>
-        <p:txBody>
-          <a:bodyPr/>
-          <a:p>
-            <a:r>
-              <a:rPr lang="en-US"/>
-              <a:t/>
-            </a:r>
           </a:p>
         </p:txBody>
       </p:sp>
@@ -2120,7 +1695,7 @@
       </p:grpSpPr>
       <p:sp>
         <p:nvSpPr>
-          <p:cNvPr id="3" name="PlaceHolder 1"/>
+          <p:cNvPr id="5" name="PlaceHolder 1"/>
           <p:cNvSpPr>
             <a:spLocks noGrp="1"/>
           </p:cNvSpPr>
@@ -2160,7 +1735,7 @@
       </p:sp>
       <p:sp>
         <p:nvSpPr>
-          <p:cNvPr id="4" name="PlaceHolder 2"/>
+          <p:cNvPr id="6" name="PlaceHolder 2"/>
           <p:cNvSpPr>
             <a:spLocks noGrp="1"/>
           </p:cNvSpPr>
@@ -2232,7 +1807,7 @@
         <p:txBody>
           <a:bodyPr/>
           <a:p>
-            <a:fld id="{B2FF5E16-1F91-4088-A5BE-471B5501D5F9}" type="slidenum">
+            <a:fld id="{61326EAB-B1B6-45AE-9B32-6B4DBB3484FB}" type="slidenum">
               <a:t>&lt;#&gt;</a:t>
             </a:fld>
           </a:p>
@@ -2283,7 +1858,7 @@
       </p:grpSpPr>
       <p:sp>
         <p:nvSpPr>
-          <p:cNvPr id="57" name="PlaceHolder 1"/>
+          <p:cNvPr id="54" name="PlaceHolder 1"/>
           <p:cNvSpPr>
             <a:spLocks noGrp="1"/>
           </p:cNvSpPr>
@@ -2323,7 +1898,7 @@
       </p:sp>
       <p:sp>
         <p:nvSpPr>
-          <p:cNvPr id="58" name="PlaceHolder 2"/>
+          <p:cNvPr id="55" name="PlaceHolder 2"/>
           <p:cNvSpPr>
             <a:spLocks noGrp="1"/>
           </p:cNvSpPr>
@@ -2366,7 +1941,7 @@
       </p:sp>
       <p:sp>
         <p:nvSpPr>
-          <p:cNvPr id="59" name="PlaceHolder 3"/>
+          <p:cNvPr id="56" name="PlaceHolder 3"/>
           <p:cNvSpPr>
             <a:spLocks noGrp="1"/>
           </p:cNvSpPr>
@@ -2409,7 +1984,7 @@
       </p:sp>
       <p:sp>
         <p:nvSpPr>
-          <p:cNvPr id="60" name="PlaceHolder 4"/>
+          <p:cNvPr id="57" name="PlaceHolder 4"/>
           <p:cNvSpPr>
             <a:spLocks noGrp="1"/>
           </p:cNvSpPr>
@@ -2447,67 +2022,6 @@
               </a:solidFill>
               <a:latin typeface="Arial"/>
             </a:endParaRPr>
-          </a:p>
-        </p:txBody>
-      </p:sp>
-      <p:sp>
-        <p:nvSpPr>
-          <p:cNvPr id="6" name="PlaceHolder 5"/>
-          <p:cNvSpPr>
-            <a:spLocks noGrp="1"/>
-          </p:cNvSpPr>
-          <p:nvPr>
-            <p:ph type="ftr" idx="4"/>
-          </p:nvPr>
-        </p:nvSpPr>
-        <p:spPr/>
-        <p:txBody>
-          <a:bodyPr/>
-          <a:p>
-            <a:r>
-              <a:t>Footer</a:t>
-            </a:r>
-          </a:p>
-        </p:txBody>
-      </p:sp>
-      <p:sp>
-        <p:nvSpPr>
-          <p:cNvPr id="7" name="PlaceHolder 6"/>
-          <p:cNvSpPr>
-            <a:spLocks noGrp="1"/>
-          </p:cNvSpPr>
-          <p:nvPr>
-            <p:ph type="sldNum" idx="5"/>
-          </p:nvPr>
-        </p:nvSpPr>
-        <p:spPr/>
-        <p:txBody>
-          <a:bodyPr/>
-          <a:p>
-            <a:fld id="{B56A6D78-4BFC-4D93-B7F6-AE0D53F36991}" type="slidenum">
-              <a:t>&lt;#&gt;</a:t>
-            </a:fld>
-          </a:p>
-        </p:txBody>
-      </p:sp>
-      <p:sp>
-        <p:nvSpPr>
-          <p:cNvPr id="8" name="PlaceHolder 7"/>
-          <p:cNvSpPr>
-            <a:spLocks noGrp="1"/>
-          </p:cNvSpPr>
-          <p:nvPr>
-            <p:ph type="dt" idx="6"/>
-          </p:nvPr>
-        </p:nvSpPr>
-        <p:spPr/>
-        <p:txBody>
-          <a:bodyPr/>
-          <a:p>
-            <a:r>
-              <a:rPr lang="en-US"/>
-              <a:t/>
-            </a:r>
           </a:p>
         </p:txBody>
       </p:sp>
@@ -2535,7 +2049,7 @@
       </p:grpSpPr>
       <p:sp>
         <p:nvSpPr>
-          <p:cNvPr id="61" name="PlaceHolder 1"/>
+          <p:cNvPr id="58" name="PlaceHolder 1"/>
           <p:cNvSpPr>
             <a:spLocks noGrp="1"/>
           </p:cNvSpPr>
@@ -2575,7 +2089,7 @@
       </p:sp>
       <p:sp>
         <p:nvSpPr>
-          <p:cNvPr id="62" name="PlaceHolder 2"/>
+          <p:cNvPr id="59" name="PlaceHolder 2"/>
           <p:cNvSpPr>
             <a:spLocks noGrp="1"/>
           </p:cNvSpPr>
@@ -2618,7 +2132,7 @@
       </p:sp>
       <p:sp>
         <p:nvSpPr>
-          <p:cNvPr id="63" name="PlaceHolder 3"/>
+          <p:cNvPr id="60" name="PlaceHolder 3"/>
           <p:cNvSpPr>
             <a:spLocks noGrp="1"/>
           </p:cNvSpPr>
@@ -2661,7 +2175,7 @@
       </p:sp>
       <p:sp>
         <p:nvSpPr>
-          <p:cNvPr id="64" name="PlaceHolder 4"/>
+          <p:cNvPr id="61" name="PlaceHolder 4"/>
           <p:cNvSpPr>
             <a:spLocks noGrp="1"/>
           </p:cNvSpPr>
@@ -2699,67 +2213,6 @@
               </a:solidFill>
               <a:latin typeface="Arial"/>
             </a:endParaRPr>
-          </a:p>
-        </p:txBody>
-      </p:sp>
-      <p:sp>
-        <p:nvSpPr>
-          <p:cNvPr id="6" name="PlaceHolder 5"/>
-          <p:cNvSpPr>
-            <a:spLocks noGrp="1"/>
-          </p:cNvSpPr>
-          <p:nvPr>
-            <p:ph type="ftr" idx="4"/>
-          </p:nvPr>
-        </p:nvSpPr>
-        <p:spPr/>
-        <p:txBody>
-          <a:bodyPr/>
-          <a:p>
-            <a:r>
-              <a:t>Footer</a:t>
-            </a:r>
-          </a:p>
-        </p:txBody>
-      </p:sp>
-      <p:sp>
-        <p:nvSpPr>
-          <p:cNvPr id="7" name="PlaceHolder 6"/>
-          <p:cNvSpPr>
-            <a:spLocks noGrp="1"/>
-          </p:cNvSpPr>
-          <p:nvPr>
-            <p:ph type="sldNum" idx="5"/>
-          </p:nvPr>
-        </p:nvSpPr>
-        <p:spPr/>
-        <p:txBody>
-          <a:bodyPr/>
-          <a:p>
-            <a:fld id="{89B97E39-1EE7-4109-8D57-9203DAB306FA}" type="slidenum">
-              <a:t>&lt;#&gt;</a:t>
-            </a:fld>
-          </a:p>
-        </p:txBody>
-      </p:sp>
-      <p:sp>
-        <p:nvSpPr>
-          <p:cNvPr id="8" name="PlaceHolder 7"/>
-          <p:cNvSpPr>
-            <a:spLocks noGrp="1"/>
-          </p:cNvSpPr>
-          <p:nvPr>
-            <p:ph type="dt" idx="6"/>
-          </p:nvPr>
-        </p:nvSpPr>
-        <p:spPr/>
-        <p:txBody>
-          <a:bodyPr/>
-          <a:p>
-            <a:r>
-              <a:rPr lang="en-US"/>
-              <a:t/>
-            </a:r>
           </a:p>
         </p:txBody>
       </p:sp>
@@ -2787,7 +2240,7 @@
       </p:grpSpPr>
       <p:sp>
         <p:nvSpPr>
-          <p:cNvPr id="65" name="PlaceHolder 1"/>
+          <p:cNvPr id="62" name="PlaceHolder 1"/>
           <p:cNvSpPr>
             <a:spLocks noGrp="1"/>
           </p:cNvSpPr>
@@ -2827,7 +2280,7 @@
       </p:sp>
       <p:sp>
         <p:nvSpPr>
-          <p:cNvPr id="66" name="PlaceHolder 2"/>
+          <p:cNvPr id="63" name="PlaceHolder 2"/>
           <p:cNvSpPr>
             <a:spLocks noGrp="1"/>
           </p:cNvSpPr>
@@ -2870,7 +2323,7 @@
       </p:sp>
       <p:sp>
         <p:nvSpPr>
-          <p:cNvPr id="67" name="PlaceHolder 3"/>
+          <p:cNvPr id="64" name="PlaceHolder 3"/>
           <p:cNvSpPr>
             <a:spLocks noGrp="1"/>
           </p:cNvSpPr>
@@ -2908,67 +2361,6 @@
               </a:solidFill>
               <a:latin typeface="Arial"/>
             </a:endParaRPr>
-          </a:p>
-        </p:txBody>
-      </p:sp>
-      <p:sp>
-        <p:nvSpPr>
-          <p:cNvPr id="5" name="PlaceHolder 4"/>
-          <p:cNvSpPr>
-            <a:spLocks noGrp="1"/>
-          </p:cNvSpPr>
-          <p:nvPr>
-            <p:ph type="ftr" idx="4"/>
-          </p:nvPr>
-        </p:nvSpPr>
-        <p:spPr/>
-        <p:txBody>
-          <a:bodyPr/>
-          <a:p>
-            <a:r>
-              <a:t>Footer</a:t>
-            </a:r>
-          </a:p>
-        </p:txBody>
-      </p:sp>
-      <p:sp>
-        <p:nvSpPr>
-          <p:cNvPr id="6" name="PlaceHolder 5"/>
-          <p:cNvSpPr>
-            <a:spLocks noGrp="1"/>
-          </p:cNvSpPr>
-          <p:nvPr>
-            <p:ph type="sldNum" idx="5"/>
-          </p:nvPr>
-        </p:nvSpPr>
-        <p:spPr/>
-        <p:txBody>
-          <a:bodyPr/>
-          <a:p>
-            <a:fld id="{25F5657A-0DE3-4B4F-A53B-15958A5F555B}" type="slidenum">
-              <a:t>&lt;#&gt;</a:t>
-            </a:fld>
-          </a:p>
-        </p:txBody>
-      </p:sp>
-      <p:sp>
-        <p:nvSpPr>
-          <p:cNvPr id="7" name="PlaceHolder 6"/>
-          <p:cNvSpPr>
-            <a:spLocks noGrp="1"/>
-          </p:cNvSpPr>
-          <p:nvPr>
-            <p:ph type="dt" idx="6"/>
-          </p:nvPr>
-        </p:nvSpPr>
-        <p:spPr/>
-        <p:txBody>
-          <a:bodyPr/>
-          <a:p>
-            <a:r>
-              <a:rPr lang="en-US"/>
-              <a:t/>
-            </a:r>
           </a:p>
         </p:txBody>
       </p:sp>
@@ -2996,7 +2388,7 @@
       </p:grpSpPr>
       <p:sp>
         <p:nvSpPr>
-          <p:cNvPr id="68" name="PlaceHolder 1"/>
+          <p:cNvPr id="65" name="PlaceHolder 1"/>
           <p:cNvSpPr>
             <a:spLocks noGrp="1"/>
           </p:cNvSpPr>
@@ -3036,7 +2428,7 @@
       </p:sp>
       <p:sp>
         <p:nvSpPr>
-          <p:cNvPr id="69" name="PlaceHolder 2"/>
+          <p:cNvPr id="66" name="PlaceHolder 2"/>
           <p:cNvSpPr>
             <a:spLocks noGrp="1"/>
           </p:cNvSpPr>
@@ -3079,7 +2471,7 @@
       </p:sp>
       <p:sp>
         <p:nvSpPr>
-          <p:cNvPr id="70" name="PlaceHolder 3"/>
+          <p:cNvPr id="67" name="PlaceHolder 3"/>
           <p:cNvSpPr>
             <a:spLocks noGrp="1"/>
           </p:cNvSpPr>
@@ -3122,7 +2514,7 @@
       </p:sp>
       <p:sp>
         <p:nvSpPr>
-          <p:cNvPr id="71" name="PlaceHolder 4"/>
+          <p:cNvPr id="68" name="PlaceHolder 4"/>
           <p:cNvSpPr>
             <a:spLocks noGrp="1"/>
           </p:cNvSpPr>
@@ -3165,7 +2557,7 @@
       </p:sp>
       <p:sp>
         <p:nvSpPr>
-          <p:cNvPr id="72" name="PlaceHolder 5"/>
+          <p:cNvPr id="69" name="PlaceHolder 5"/>
           <p:cNvSpPr>
             <a:spLocks noGrp="1"/>
           </p:cNvSpPr>
@@ -3203,67 +2595,6 @@
               </a:solidFill>
               <a:latin typeface="Arial"/>
             </a:endParaRPr>
-          </a:p>
-        </p:txBody>
-      </p:sp>
-      <p:sp>
-        <p:nvSpPr>
-          <p:cNvPr id="7" name="PlaceHolder 6"/>
-          <p:cNvSpPr>
-            <a:spLocks noGrp="1"/>
-          </p:cNvSpPr>
-          <p:nvPr>
-            <p:ph type="ftr" idx="4"/>
-          </p:nvPr>
-        </p:nvSpPr>
-        <p:spPr/>
-        <p:txBody>
-          <a:bodyPr/>
-          <a:p>
-            <a:r>
-              <a:t>Footer</a:t>
-            </a:r>
-          </a:p>
-        </p:txBody>
-      </p:sp>
-      <p:sp>
-        <p:nvSpPr>
-          <p:cNvPr id="8" name="PlaceHolder 7"/>
-          <p:cNvSpPr>
-            <a:spLocks noGrp="1"/>
-          </p:cNvSpPr>
-          <p:nvPr>
-            <p:ph type="sldNum" idx="5"/>
-          </p:nvPr>
-        </p:nvSpPr>
-        <p:spPr/>
-        <p:txBody>
-          <a:bodyPr/>
-          <a:p>
-            <a:fld id="{09613C4A-C5E3-445E-BBE1-C0FFF6B09F91}" type="slidenum">
-              <a:t>&lt;#&gt;</a:t>
-            </a:fld>
-          </a:p>
-        </p:txBody>
-      </p:sp>
-      <p:sp>
-        <p:nvSpPr>
-          <p:cNvPr id="9" name="PlaceHolder 8"/>
-          <p:cNvSpPr>
-            <a:spLocks noGrp="1"/>
-          </p:cNvSpPr>
-          <p:nvPr>
-            <p:ph type="dt" idx="6"/>
-          </p:nvPr>
-        </p:nvSpPr>
-        <p:spPr/>
-        <p:txBody>
-          <a:bodyPr/>
-          <a:p>
-            <a:r>
-              <a:rPr lang="en-US"/>
-              <a:t/>
-            </a:r>
           </a:p>
         </p:txBody>
       </p:sp>
@@ -3291,7 +2622,7 @@
       </p:grpSpPr>
       <p:sp>
         <p:nvSpPr>
-          <p:cNvPr id="73" name="PlaceHolder 1"/>
+          <p:cNvPr id="70" name="PlaceHolder 1"/>
           <p:cNvSpPr>
             <a:spLocks noGrp="1"/>
           </p:cNvSpPr>
@@ -3331,7 +2662,7 @@
       </p:sp>
       <p:sp>
         <p:nvSpPr>
-          <p:cNvPr id="74" name="PlaceHolder 2"/>
+          <p:cNvPr id="71" name="PlaceHolder 2"/>
           <p:cNvSpPr>
             <a:spLocks noGrp="1"/>
           </p:cNvSpPr>
@@ -3374,7 +2705,7 @@
       </p:sp>
       <p:sp>
         <p:nvSpPr>
-          <p:cNvPr id="75" name="PlaceHolder 3"/>
+          <p:cNvPr id="72" name="PlaceHolder 3"/>
           <p:cNvSpPr>
             <a:spLocks noGrp="1"/>
           </p:cNvSpPr>
@@ -3417,7 +2748,7 @@
       </p:sp>
       <p:sp>
         <p:nvSpPr>
-          <p:cNvPr id="76" name="PlaceHolder 4"/>
+          <p:cNvPr id="73" name="PlaceHolder 4"/>
           <p:cNvSpPr>
             <a:spLocks noGrp="1"/>
           </p:cNvSpPr>
@@ -3460,7 +2791,7 @@
       </p:sp>
       <p:sp>
         <p:nvSpPr>
-          <p:cNvPr id="77" name="PlaceHolder 5"/>
+          <p:cNvPr id="74" name="PlaceHolder 5"/>
           <p:cNvSpPr>
             <a:spLocks noGrp="1"/>
           </p:cNvSpPr>
@@ -3503,7 +2834,7 @@
       </p:sp>
       <p:sp>
         <p:nvSpPr>
-          <p:cNvPr id="78" name="PlaceHolder 6"/>
+          <p:cNvPr id="75" name="PlaceHolder 6"/>
           <p:cNvSpPr>
             <a:spLocks noGrp="1"/>
           </p:cNvSpPr>
@@ -3546,7 +2877,7 @@
       </p:sp>
       <p:sp>
         <p:nvSpPr>
-          <p:cNvPr id="79" name="PlaceHolder 7"/>
+          <p:cNvPr id="76" name="PlaceHolder 7"/>
           <p:cNvSpPr>
             <a:spLocks noGrp="1"/>
           </p:cNvSpPr>
@@ -3584,67 +2915,6 @@
               </a:solidFill>
               <a:latin typeface="Arial"/>
             </a:endParaRPr>
-          </a:p>
-        </p:txBody>
-      </p:sp>
-      <p:sp>
-        <p:nvSpPr>
-          <p:cNvPr id="9" name="PlaceHolder 8"/>
-          <p:cNvSpPr>
-            <a:spLocks noGrp="1"/>
-          </p:cNvSpPr>
-          <p:nvPr>
-            <p:ph type="ftr" idx="4"/>
-          </p:nvPr>
-        </p:nvSpPr>
-        <p:spPr/>
-        <p:txBody>
-          <a:bodyPr/>
-          <a:p>
-            <a:r>
-              <a:t>Footer</a:t>
-            </a:r>
-          </a:p>
-        </p:txBody>
-      </p:sp>
-      <p:sp>
-        <p:nvSpPr>
-          <p:cNvPr id="10" name="PlaceHolder 9"/>
-          <p:cNvSpPr>
-            <a:spLocks noGrp="1"/>
-          </p:cNvSpPr>
-          <p:nvPr>
-            <p:ph type="sldNum" idx="5"/>
-          </p:nvPr>
-        </p:nvSpPr>
-        <p:spPr/>
-        <p:txBody>
-          <a:bodyPr/>
-          <a:p>
-            <a:fld id="{47F210AE-7AE2-4DD8-B3BF-BDE86E4D1A1A}" type="slidenum">
-              <a:t>&lt;#&gt;</a:t>
-            </a:fld>
-          </a:p>
-        </p:txBody>
-      </p:sp>
-      <p:sp>
-        <p:nvSpPr>
-          <p:cNvPr id="11" name="PlaceHolder 10"/>
-          <p:cNvSpPr>
-            <a:spLocks noGrp="1"/>
-          </p:cNvSpPr>
-          <p:nvPr>
-            <p:ph type="dt" idx="6"/>
-          </p:nvPr>
-        </p:nvSpPr>
-        <p:spPr/>
-        <p:txBody>
-          <a:bodyPr/>
-          <a:p>
-            <a:r>
-              <a:rPr lang="en-US"/>
-              <a:t/>
-            </a:r>
           </a:p>
         </p:txBody>
       </p:sp>
@@ -3670,6 +2940,67 @@
           <a:chExt cx="0" cy="0"/>
         </a:xfrm>
       </p:grpSpPr>
+      <p:sp>
+        <p:nvSpPr>
+          <p:cNvPr id="2" name="PlaceHolder 1"/>
+          <p:cNvSpPr>
+            <a:spLocks noGrp="1"/>
+          </p:cNvSpPr>
+          <p:nvPr>
+            <p:ph type="ftr" idx="4"/>
+          </p:nvPr>
+        </p:nvSpPr>
+        <p:spPr/>
+        <p:txBody>
+          <a:bodyPr/>
+          <a:p>
+            <a:r>
+              <a:t>Footer</a:t>
+            </a:r>
+          </a:p>
+        </p:txBody>
+      </p:sp>
+      <p:sp>
+        <p:nvSpPr>
+          <p:cNvPr id="3" name="PlaceHolder 2"/>
+          <p:cNvSpPr>
+            <a:spLocks noGrp="1"/>
+          </p:cNvSpPr>
+          <p:nvPr>
+            <p:ph type="sldNum" idx="5"/>
+          </p:nvPr>
+        </p:nvSpPr>
+        <p:spPr/>
+        <p:txBody>
+          <a:bodyPr/>
+          <a:p>
+            <a:fld id="{CC6D7F46-31DF-4083-AEA4-AC2BB585547D}" type="slidenum">
+              <a:t>&lt;#&gt;</a:t>
+            </a:fld>
+          </a:p>
+        </p:txBody>
+      </p:sp>
+      <p:sp>
+        <p:nvSpPr>
+          <p:cNvPr id="4" name="PlaceHolder 3"/>
+          <p:cNvSpPr>
+            <a:spLocks noGrp="1"/>
+          </p:cNvSpPr>
+          <p:nvPr>
+            <p:ph type="dt" idx="6"/>
+          </p:nvPr>
+        </p:nvSpPr>
+        <p:spPr/>
+        <p:txBody>
+          <a:bodyPr/>
+          <a:p>
+            <a:r>
+              <a:rPr lang="en-US"/>
+              <a:t/>
+            </a:r>
+          </a:p>
+        </p:txBody>
+      </p:sp>
     </p:spTree>
   </p:cSld>
 </p:sldLayout>
@@ -3772,6 +3103,67 @@
           </a:p>
         </p:txBody>
       </p:sp>
+      <p:sp>
+        <p:nvSpPr>
+          <p:cNvPr id="4" name="PlaceHolder 3"/>
+          <p:cNvSpPr>
+            <a:spLocks noGrp="1"/>
+          </p:cNvSpPr>
+          <p:nvPr>
+            <p:ph type="ftr" idx="4"/>
+          </p:nvPr>
+        </p:nvSpPr>
+        <p:spPr/>
+        <p:txBody>
+          <a:bodyPr/>
+          <a:p>
+            <a:r>
+              <a:t>Footer</a:t>
+            </a:r>
+          </a:p>
+        </p:txBody>
+      </p:sp>
+      <p:sp>
+        <p:nvSpPr>
+          <p:cNvPr id="5" name="PlaceHolder 4"/>
+          <p:cNvSpPr>
+            <a:spLocks noGrp="1"/>
+          </p:cNvSpPr>
+          <p:nvPr>
+            <p:ph type="sldNum" idx="5"/>
+          </p:nvPr>
+        </p:nvSpPr>
+        <p:spPr/>
+        <p:txBody>
+          <a:bodyPr/>
+          <a:p>
+            <a:fld id="{1BBC2229-23C0-4CBA-8BF0-2D96CA447FD8}" type="slidenum">
+              <a:t>&lt;#&gt;</a:t>
+            </a:fld>
+          </a:p>
+        </p:txBody>
+      </p:sp>
+      <p:sp>
+        <p:nvSpPr>
+          <p:cNvPr id="6" name="PlaceHolder 5"/>
+          <p:cNvSpPr>
+            <a:spLocks noGrp="1"/>
+          </p:cNvSpPr>
+          <p:nvPr>
+            <p:ph type="dt" idx="6"/>
+          </p:nvPr>
+        </p:nvSpPr>
+        <p:spPr/>
+        <p:txBody>
+          <a:bodyPr/>
+          <a:p>
+            <a:r>
+              <a:rPr lang="en-US"/>
+              <a:t/>
+            </a:r>
+          </a:p>
+        </p:txBody>
+      </p:sp>
     </p:spTree>
   </p:cSld>
 </p:sldLayout>
@@ -3877,6 +3269,67 @@
           </a:p>
         </p:txBody>
       </p:sp>
+      <p:sp>
+        <p:nvSpPr>
+          <p:cNvPr id="4" name="PlaceHolder 3"/>
+          <p:cNvSpPr>
+            <a:spLocks noGrp="1"/>
+          </p:cNvSpPr>
+          <p:nvPr>
+            <p:ph type="ftr" idx="4"/>
+          </p:nvPr>
+        </p:nvSpPr>
+        <p:spPr/>
+        <p:txBody>
+          <a:bodyPr/>
+          <a:p>
+            <a:r>
+              <a:t>Footer</a:t>
+            </a:r>
+          </a:p>
+        </p:txBody>
+      </p:sp>
+      <p:sp>
+        <p:nvSpPr>
+          <p:cNvPr id="5" name="PlaceHolder 4"/>
+          <p:cNvSpPr>
+            <a:spLocks noGrp="1"/>
+          </p:cNvSpPr>
+          <p:nvPr>
+            <p:ph type="sldNum" idx="5"/>
+          </p:nvPr>
+        </p:nvSpPr>
+        <p:spPr/>
+        <p:txBody>
+          <a:bodyPr/>
+          <a:p>
+            <a:fld id="{9257ED2D-C25E-48F2-8473-FF4C4BF39A1F}" type="slidenum">
+              <a:t>&lt;#&gt;</a:t>
+            </a:fld>
+          </a:p>
+        </p:txBody>
+      </p:sp>
+      <p:sp>
+        <p:nvSpPr>
+          <p:cNvPr id="6" name="PlaceHolder 5"/>
+          <p:cNvSpPr>
+            <a:spLocks noGrp="1"/>
+          </p:cNvSpPr>
+          <p:nvPr>
+            <p:ph type="dt" idx="6"/>
+          </p:nvPr>
+        </p:nvSpPr>
+        <p:spPr/>
+        <p:txBody>
+          <a:bodyPr/>
+          <a:p>
+            <a:r>
+              <a:rPr lang="en-US"/>
+              <a:t/>
+            </a:r>
+          </a:p>
+        </p:txBody>
+      </p:sp>
     </p:spTree>
   </p:cSld>
 </p:sldLayout>
@@ -4025,6 +3478,67 @@
           </a:p>
         </p:txBody>
       </p:sp>
+      <p:sp>
+        <p:nvSpPr>
+          <p:cNvPr id="5" name="PlaceHolder 4"/>
+          <p:cNvSpPr>
+            <a:spLocks noGrp="1"/>
+          </p:cNvSpPr>
+          <p:nvPr>
+            <p:ph type="ftr" idx="4"/>
+          </p:nvPr>
+        </p:nvSpPr>
+        <p:spPr/>
+        <p:txBody>
+          <a:bodyPr/>
+          <a:p>
+            <a:r>
+              <a:t>Footer</a:t>
+            </a:r>
+          </a:p>
+        </p:txBody>
+      </p:sp>
+      <p:sp>
+        <p:nvSpPr>
+          <p:cNvPr id="6" name="PlaceHolder 5"/>
+          <p:cNvSpPr>
+            <a:spLocks noGrp="1"/>
+          </p:cNvSpPr>
+          <p:nvPr>
+            <p:ph type="sldNum" idx="5"/>
+          </p:nvPr>
+        </p:nvSpPr>
+        <p:spPr/>
+        <p:txBody>
+          <a:bodyPr/>
+          <a:p>
+            <a:fld id="{6E113D38-2FD8-4F08-9A95-49F157375406}" type="slidenum">
+              <a:t>&lt;#&gt;</a:t>
+            </a:fld>
+          </a:p>
+        </p:txBody>
+      </p:sp>
+      <p:sp>
+        <p:nvSpPr>
+          <p:cNvPr id="7" name="PlaceHolder 6"/>
+          <p:cNvSpPr>
+            <a:spLocks noGrp="1"/>
+          </p:cNvSpPr>
+          <p:nvPr>
+            <p:ph type="dt" idx="6"/>
+          </p:nvPr>
+        </p:nvSpPr>
+        <p:spPr/>
+        <p:txBody>
+          <a:bodyPr/>
+          <a:p>
+            <a:r>
+              <a:rPr lang="en-US"/>
+              <a:t/>
+            </a:r>
+          </a:p>
+        </p:txBody>
+      </p:sp>
     </p:spTree>
   </p:cSld>
 </p:sldLayout>
@@ -4087,6 +3601,67 @@
           </a:p>
         </p:txBody>
       </p:sp>
+      <p:sp>
+        <p:nvSpPr>
+          <p:cNvPr id="3" name="PlaceHolder 2"/>
+          <p:cNvSpPr>
+            <a:spLocks noGrp="1"/>
+          </p:cNvSpPr>
+          <p:nvPr>
+            <p:ph type="ftr" idx="4"/>
+          </p:nvPr>
+        </p:nvSpPr>
+        <p:spPr/>
+        <p:txBody>
+          <a:bodyPr/>
+          <a:p>
+            <a:r>
+              <a:t>Footer</a:t>
+            </a:r>
+          </a:p>
+        </p:txBody>
+      </p:sp>
+      <p:sp>
+        <p:nvSpPr>
+          <p:cNvPr id="4" name="PlaceHolder 3"/>
+          <p:cNvSpPr>
+            <a:spLocks noGrp="1"/>
+          </p:cNvSpPr>
+          <p:nvPr>
+            <p:ph type="sldNum" idx="5"/>
+          </p:nvPr>
+        </p:nvSpPr>
+        <p:spPr/>
+        <p:txBody>
+          <a:bodyPr/>
+          <a:p>
+            <a:fld id="{95933859-E98C-49BF-83FF-2D69E69D13AC}" type="slidenum">
+              <a:t>&lt;#&gt;</a:t>
+            </a:fld>
+          </a:p>
+        </p:txBody>
+      </p:sp>
+      <p:sp>
+        <p:nvSpPr>
+          <p:cNvPr id="5" name="PlaceHolder 4"/>
+          <p:cNvSpPr>
+            <a:spLocks noGrp="1"/>
+          </p:cNvSpPr>
+          <p:nvPr>
+            <p:ph type="dt" idx="6"/>
+          </p:nvPr>
+        </p:nvSpPr>
+        <p:spPr/>
+        <p:txBody>
+          <a:bodyPr/>
+          <a:p>
+            <a:r>
+              <a:rPr lang="en-US"/>
+              <a:t/>
+            </a:r>
+          </a:p>
+        </p:txBody>
+      </p:sp>
     </p:spTree>
   </p:cSld>
 </p:sldLayout>
@@ -4111,7 +3686,7 @@
       </p:grpSpPr>
       <p:sp>
         <p:nvSpPr>
-          <p:cNvPr id="5" name="PlaceHolder 1"/>
+          <p:cNvPr id="7" name="PlaceHolder 1"/>
           <p:cNvSpPr>
             <a:spLocks noGrp="1"/>
           </p:cNvSpPr>
@@ -4151,7 +3726,7 @@
       </p:sp>
       <p:sp>
         <p:nvSpPr>
-          <p:cNvPr id="6" name="PlaceHolder 2"/>
+          <p:cNvPr id="8" name="PlaceHolder 2"/>
           <p:cNvSpPr>
             <a:spLocks noGrp="1"/>
           </p:cNvSpPr>
@@ -4226,7 +3801,7 @@
         <p:txBody>
           <a:bodyPr/>
           <a:p>
-            <a:fld id="{7EA1ABC5-9A53-40E3-8EA6-C06E5C9A9D16}" type="slidenum">
+            <a:fld id="{C4004D3F-AA53-4ABB-A7F0-C20E4104DB97}" type="slidenum">
               <a:t>&lt;#&gt;</a:t>
             </a:fld>
           </a:p>
@@ -4313,6 +3888,67 @@
           </a:p>
         </p:txBody>
       </p:sp>
+      <p:sp>
+        <p:nvSpPr>
+          <p:cNvPr id="3" name="PlaceHolder 2"/>
+          <p:cNvSpPr>
+            <a:spLocks noGrp="1"/>
+          </p:cNvSpPr>
+          <p:nvPr>
+            <p:ph type="ftr" idx="4"/>
+          </p:nvPr>
+        </p:nvSpPr>
+        <p:spPr/>
+        <p:txBody>
+          <a:bodyPr/>
+          <a:p>
+            <a:r>
+              <a:t>Footer</a:t>
+            </a:r>
+          </a:p>
+        </p:txBody>
+      </p:sp>
+      <p:sp>
+        <p:nvSpPr>
+          <p:cNvPr id="4" name="PlaceHolder 3"/>
+          <p:cNvSpPr>
+            <a:spLocks noGrp="1"/>
+          </p:cNvSpPr>
+          <p:nvPr>
+            <p:ph type="sldNum" idx="5"/>
+          </p:nvPr>
+        </p:nvSpPr>
+        <p:spPr/>
+        <p:txBody>
+          <a:bodyPr/>
+          <a:p>
+            <a:fld id="{A3ADBAAC-3926-40A7-8C8E-0251D4DB69CB}" type="slidenum">
+              <a:t>&lt;#&gt;</a:t>
+            </a:fld>
+          </a:p>
+        </p:txBody>
+      </p:sp>
+      <p:sp>
+        <p:nvSpPr>
+          <p:cNvPr id="5" name="PlaceHolder 4"/>
+          <p:cNvSpPr>
+            <a:spLocks noGrp="1"/>
+          </p:cNvSpPr>
+          <p:nvPr>
+            <p:ph type="dt" idx="6"/>
+          </p:nvPr>
+        </p:nvSpPr>
+        <p:spPr/>
+        <p:txBody>
+          <a:bodyPr/>
+          <a:p>
+            <a:r>
+              <a:rPr lang="en-US"/>
+              <a:t/>
+            </a:r>
+          </a:p>
+        </p:txBody>
+      </p:sp>
     </p:spTree>
   </p:cSld>
 </p:sldLayout>
@@ -4504,6 +4140,67 @@
           </a:p>
         </p:txBody>
       </p:sp>
+      <p:sp>
+        <p:nvSpPr>
+          <p:cNvPr id="6" name="PlaceHolder 5"/>
+          <p:cNvSpPr>
+            <a:spLocks noGrp="1"/>
+          </p:cNvSpPr>
+          <p:nvPr>
+            <p:ph type="ftr" idx="4"/>
+          </p:nvPr>
+        </p:nvSpPr>
+        <p:spPr/>
+        <p:txBody>
+          <a:bodyPr/>
+          <a:p>
+            <a:r>
+              <a:t>Footer</a:t>
+            </a:r>
+          </a:p>
+        </p:txBody>
+      </p:sp>
+      <p:sp>
+        <p:nvSpPr>
+          <p:cNvPr id="7" name="PlaceHolder 6"/>
+          <p:cNvSpPr>
+            <a:spLocks noGrp="1"/>
+          </p:cNvSpPr>
+          <p:nvPr>
+            <p:ph type="sldNum" idx="5"/>
+          </p:nvPr>
+        </p:nvSpPr>
+        <p:spPr/>
+        <p:txBody>
+          <a:bodyPr/>
+          <a:p>
+            <a:fld id="{7030205F-65CF-433C-B5B0-D49B186437F9}" type="slidenum">
+              <a:t>&lt;#&gt;</a:t>
+            </a:fld>
+          </a:p>
+        </p:txBody>
+      </p:sp>
+      <p:sp>
+        <p:nvSpPr>
+          <p:cNvPr id="8" name="PlaceHolder 7"/>
+          <p:cNvSpPr>
+            <a:spLocks noGrp="1"/>
+          </p:cNvSpPr>
+          <p:nvPr>
+            <p:ph type="dt" idx="6"/>
+          </p:nvPr>
+        </p:nvSpPr>
+        <p:spPr/>
+        <p:txBody>
+          <a:bodyPr/>
+          <a:p>
+            <a:r>
+              <a:rPr lang="en-US"/>
+              <a:t/>
+            </a:r>
+          </a:p>
+        </p:txBody>
+      </p:sp>
     </p:spTree>
   </p:cSld>
 </p:sldLayout>
@@ -4695,6 +4392,67 @@
           </a:p>
         </p:txBody>
       </p:sp>
+      <p:sp>
+        <p:nvSpPr>
+          <p:cNvPr id="6" name="PlaceHolder 5"/>
+          <p:cNvSpPr>
+            <a:spLocks noGrp="1"/>
+          </p:cNvSpPr>
+          <p:nvPr>
+            <p:ph type="ftr" idx="4"/>
+          </p:nvPr>
+        </p:nvSpPr>
+        <p:spPr/>
+        <p:txBody>
+          <a:bodyPr/>
+          <a:p>
+            <a:r>
+              <a:t>Footer</a:t>
+            </a:r>
+          </a:p>
+        </p:txBody>
+      </p:sp>
+      <p:sp>
+        <p:nvSpPr>
+          <p:cNvPr id="7" name="PlaceHolder 6"/>
+          <p:cNvSpPr>
+            <a:spLocks noGrp="1"/>
+          </p:cNvSpPr>
+          <p:nvPr>
+            <p:ph type="sldNum" idx="5"/>
+          </p:nvPr>
+        </p:nvSpPr>
+        <p:spPr/>
+        <p:txBody>
+          <a:bodyPr/>
+          <a:p>
+            <a:fld id="{DA92F581-2551-4A66-A8D4-1D3FA2C15366}" type="slidenum">
+              <a:t>&lt;#&gt;</a:t>
+            </a:fld>
+          </a:p>
+        </p:txBody>
+      </p:sp>
+      <p:sp>
+        <p:nvSpPr>
+          <p:cNvPr id="8" name="PlaceHolder 7"/>
+          <p:cNvSpPr>
+            <a:spLocks noGrp="1"/>
+          </p:cNvSpPr>
+          <p:nvPr>
+            <p:ph type="dt" idx="6"/>
+          </p:nvPr>
+        </p:nvSpPr>
+        <p:spPr/>
+        <p:txBody>
+          <a:bodyPr/>
+          <a:p>
+            <a:r>
+              <a:rPr lang="en-US"/>
+              <a:t/>
+            </a:r>
+          </a:p>
+        </p:txBody>
+      </p:sp>
     </p:spTree>
   </p:cSld>
 </p:sldLayout>
@@ -4886,6 +4644,67 @@
           </a:p>
         </p:txBody>
       </p:sp>
+      <p:sp>
+        <p:nvSpPr>
+          <p:cNvPr id="6" name="PlaceHolder 5"/>
+          <p:cNvSpPr>
+            <a:spLocks noGrp="1"/>
+          </p:cNvSpPr>
+          <p:nvPr>
+            <p:ph type="ftr" idx="4"/>
+          </p:nvPr>
+        </p:nvSpPr>
+        <p:spPr/>
+        <p:txBody>
+          <a:bodyPr/>
+          <a:p>
+            <a:r>
+              <a:t>Footer</a:t>
+            </a:r>
+          </a:p>
+        </p:txBody>
+      </p:sp>
+      <p:sp>
+        <p:nvSpPr>
+          <p:cNvPr id="7" name="PlaceHolder 6"/>
+          <p:cNvSpPr>
+            <a:spLocks noGrp="1"/>
+          </p:cNvSpPr>
+          <p:nvPr>
+            <p:ph type="sldNum" idx="5"/>
+          </p:nvPr>
+        </p:nvSpPr>
+        <p:spPr/>
+        <p:txBody>
+          <a:bodyPr/>
+          <a:p>
+            <a:fld id="{8C4A8BB8-D95C-4B60-ADD8-31CFADFBB691}" type="slidenum">
+              <a:t>&lt;#&gt;</a:t>
+            </a:fld>
+          </a:p>
+        </p:txBody>
+      </p:sp>
+      <p:sp>
+        <p:nvSpPr>
+          <p:cNvPr id="8" name="PlaceHolder 7"/>
+          <p:cNvSpPr>
+            <a:spLocks noGrp="1"/>
+          </p:cNvSpPr>
+          <p:nvPr>
+            <p:ph type="dt" idx="6"/>
+          </p:nvPr>
+        </p:nvSpPr>
+        <p:spPr/>
+        <p:txBody>
+          <a:bodyPr/>
+          <a:p>
+            <a:r>
+              <a:rPr lang="en-US"/>
+              <a:t/>
+            </a:r>
+          </a:p>
+        </p:txBody>
+      </p:sp>
     </p:spTree>
   </p:cSld>
 </p:sldLayout>
@@ -5034,6 +4853,67 @@
           </a:p>
         </p:txBody>
       </p:sp>
+      <p:sp>
+        <p:nvSpPr>
+          <p:cNvPr id="5" name="PlaceHolder 4"/>
+          <p:cNvSpPr>
+            <a:spLocks noGrp="1"/>
+          </p:cNvSpPr>
+          <p:nvPr>
+            <p:ph type="ftr" idx="4"/>
+          </p:nvPr>
+        </p:nvSpPr>
+        <p:spPr/>
+        <p:txBody>
+          <a:bodyPr/>
+          <a:p>
+            <a:r>
+              <a:t>Footer</a:t>
+            </a:r>
+          </a:p>
+        </p:txBody>
+      </p:sp>
+      <p:sp>
+        <p:nvSpPr>
+          <p:cNvPr id="6" name="PlaceHolder 5"/>
+          <p:cNvSpPr>
+            <a:spLocks noGrp="1"/>
+          </p:cNvSpPr>
+          <p:nvPr>
+            <p:ph type="sldNum" idx="5"/>
+          </p:nvPr>
+        </p:nvSpPr>
+        <p:spPr/>
+        <p:txBody>
+          <a:bodyPr/>
+          <a:p>
+            <a:fld id="{6E5042D0-3C73-4EDC-AD61-32C9C89B7EA0}" type="slidenum">
+              <a:t>&lt;#&gt;</a:t>
+            </a:fld>
+          </a:p>
+        </p:txBody>
+      </p:sp>
+      <p:sp>
+        <p:nvSpPr>
+          <p:cNvPr id="7" name="PlaceHolder 6"/>
+          <p:cNvSpPr>
+            <a:spLocks noGrp="1"/>
+          </p:cNvSpPr>
+          <p:nvPr>
+            <p:ph type="dt" idx="6"/>
+          </p:nvPr>
+        </p:nvSpPr>
+        <p:spPr/>
+        <p:txBody>
+          <a:bodyPr/>
+          <a:p>
+            <a:r>
+              <a:rPr lang="en-US"/>
+              <a:t/>
+            </a:r>
+          </a:p>
+        </p:txBody>
+      </p:sp>
     </p:spTree>
   </p:cSld>
 </p:sldLayout>
@@ -5268,6 +5148,67 @@
           </a:p>
         </p:txBody>
       </p:sp>
+      <p:sp>
+        <p:nvSpPr>
+          <p:cNvPr id="7" name="PlaceHolder 6"/>
+          <p:cNvSpPr>
+            <a:spLocks noGrp="1"/>
+          </p:cNvSpPr>
+          <p:nvPr>
+            <p:ph type="ftr" idx="4"/>
+          </p:nvPr>
+        </p:nvSpPr>
+        <p:spPr/>
+        <p:txBody>
+          <a:bodyPr/>
+          <a:p>
+            <a:r>
+              <a:t>Footer</a:t>
+            </a:r>
+          </a:p>
+        </p:txBody>
+      </p:sp>
+      <p:sp>
+        <p:nvSpPr>
+          <p:cNvPr id="8" name="PlaceHolder 7"/>
+          <p:cNvSpPr>
+            <a:spLocks noGrp="1"/>
+          </p:cNvSpPr>
+          <p:nvPr>
+            <p:ph type="sldNum" idx="5"/>
+          </p:nvPr>
+        </p:nvSpPr>
+        <p:spPr/>
+        <p:txBody>
+          <a:bodyPr/>
+          <a:p>
+            <a:fld id="{E4D303D6-857E-4E27-9F5B-04F77EDB010E}" type="slidenum">
+              <a:t>&lt;#&gt;</a:t>
+            </a:fld>
+          </a:p>
+        </p:txBody>
+      </p:sp>
+      <p:sp>
+        <p:nvSpPr>
+          <p:cNvPr id="9" name="PlaceHolder 8"/>
+          <p:cNvSpPr>
+            <a:spLocks noGrp="1"/>
+          </p:cNvSpPr>
+          <p:nvPr>
+            <p:ph type="dt" idx="6"/>
+          </p:nvPr>
+        </p:nvSpPr>
+        <p:spPr/>
+        <p:txBody>
+          <a:bodyPr/>
+          <a:p>
+            <a:r>
+              <a:rPr lang="en-US"/>
+              <a:t/>
+            </a:r>
+          </a:p>
+        </p:txBody>
+      </p:sp>
     </p:spTree>
   </p:cSld>
 </p:sldLayout>
@@ -5588,6 +5529,67 @@
           </a:p>
         </p:txBody>
       </p:sp>
+      <p:sp>
+        <p:nvSpPr>
+          <p:cNvPr id="9" name="PlaceHolder 8"/>
+          <p:cNvSpPr>
+            <a:spLocks noGrp="1"/>
+          </p:cNvSpPr>
+          <p:nvPr>
+            <p:ph type="ftr" idx="4"/>
+          </p:nvPr>
+        </p:nvSpPr>
+        <p:spPr/>
+        <p:txBody>
+          <a:bodyPr/>
+          <a:p>
+            <a:r>
+              <a:t>Footer</a:t>
+            </a:r>
+          </a:p>
+        </p:txBody>
+      </p:sp>
+      <p:sp>
+        <p:nvSpPr>
+          <p:cNvPr id="10" name="PlaceHolder 9"/>
+          <p:cNvSpPr>
+            <a:spLocks noGrp="1"/>
+          </p:cNvSpPr>
+          <p:nvPr>
+            <p:ph type="sldNum" idx="5"/>
+          </p:nvPr>
+        </p:nvSpPr>
+        <p:spPr/>
+        <p:txBody>
+          <a:bodyPr/>
+          <a:p>
+            <a:fld id="{ECEED58C-D681-4966-826A-507DF045C469}" type="slidenum">
+              <a:t>&lt;#&gt;</a:t>
+            </a:fld>
+          </a:p>
+        </p:txBody>
+      </p:sp>
+      <p:sp>
+        <p:nvSpPr>
+          <p:cNvPr id="11" name="PlaceHolder 10"/>
+          <p:cNvSpPr>
+            <a:spLocks noGrp="1"/>
+          </p:cNvSpPr>
+          <p:nvPr>
+            <p:ph type="dt" idx="6"/>
+          </p:nvPr>
+        </p:nvSpPr>
+        <p:spPr/>
+        <p:txBody>
+          <a:bodyPr/>
+          <a:p>
+            <a:r>
+              <a:rPr lang="en-US"/>
+              <a:t/>
+            </a:r>
+          </a:p>
+        </p:txBody>
+      </p:sp>
     </p:spTree>
   </p:cSld>
 </p:sldLayout>
@@ -5612,7 +5614,7 @@
       </p:grpSpPr>
       <p:sp>
         <p:nvSpPr>
-          <p:cNvPr id="7" name="PlaceHolder 1"/>
+          <p:cNvPr id="9" name="PlaceHolder 1"/>
           <p:cNvSpPr>
             <a:spLocks noGrp="1"/>
           </p:cNvSpPr>
@@ -5652,7 +5654,7 @@
       </p:sp>
       <p:sp>
         <p:nvSpPr>
-          <p:cNvPr id="8" name="PlaceHolder 2"/>
+          <p:cNvPr id="10" name="PlaceHolder 2"/>
           <p:cNvSpPr>
             <a:spLocks noGrp="1"/>
           </p:cNvSpPr>
@@ -5695,7 +5697,7 @@
       </p:sp>
       <p:sp>
         <p:nvSpPr>
-          <p:cNvPr id="9" name="PlaceHolder 3"/>
+          <p:cNvPr id="11" name="PlaceHolder 3"/>
           <p:cNvSpPr>
             <a:spLocks noGrp="1"/>
           </p:cNvSpPr>
@@ -5770,7 +5772,7 @@
         <p:txBody>
           <a:bodyPr/>
           <a:p>
-            <a:fld id="{FD8AFBE1-4732-4CFC-A99E-B63C3F07E512}" type="slidenum">
+            <a:fld id="{887FAB41-5D70-4007-95E3-28CB7532E80B}" type="slidenum">
               <a:t>&lt;#&gt;</a:t>
             </a:fld>
           </a:p>
@@ -5821,7 +5823,7 @@
       </p:grpSpPr>
       <p:sp>
         <p:nvSpPr>
-          <p:cNvPr id="10" name="PlaceHolder 1"/>
+          <p:cNvPr id="12" name="PlaceHolder 1"/>
           <p:cNvSpPr>
             <a:spLocks noGrp="1"/>
           </p:cNvSpPr>
@@ -5893,7 +5895,7 @@
         <p:txBody>
           <a:bodyPr/>
           <a:p>
-            <a:fld id="{EF2EA4E7-8DE6-4A04-9F78-F14C132448B2}" type="slidenum">
+            <a:fld id="{05B87E38-432B-482D-AD6A-E50361C77649}" type="slidenum">
               <a:t>&lt;#&gt;</a:t>
             </a:fld>
           </a:p>
@@ -5944,7 +5946,7 @@
       </p:grpSpPr>
       <p:sp>
         <p:nvSpPr>
-          <p:cNvPr id="11" name="PlaceHolder 1"/>
+          <p:cNvPr id="13" name="PlaceHolder 1"/>
           <p:cNvSpPr>
             <a:spLocks noGrp="1"/>
           </p:cNvSpPr>
@@ -6014,7 +6016,7 @@
         <p:txBody>
           <a:bodyPr/>
           <a:p>
-            <a:fld id="{12C5F0E9-BB51-4A1C-B6DB-2E35C68CC0E3}" type="slidenum">
+            <a:fld id="{40F78345-5141-428E-8B5B-E385584B7FE9}" type="slidenum">
               <a:t>&lt;#&gt;</a:t>
             </a:fld>
           </a:p>
@@ -6065,7 +6067,7 @@
       </p:grpSpPr>
       <p:sp>
         <p:nvSpPr>
-          <p:cNvPr id="12" name="PlaceHolder 1"/>
+          <p:cNvPr id="14" name="PlaceHolder 1"/>
           <p:cNvSpPr>
             <a:spLocks noGrp="1"/>
           </p:cNvSpPr>
@@ -6105,7 +6107,7 @@
       </p:sp>
       <p:sp>
         <p:nvSpPr>
-          <p:cNvPr id="13" name="PlaceHolder 2"/>
+          <p:cNvPr id="15" name="PlaceHolder 2"/>
           <p:cNvSpPr>
             <a:spLocks noGrp="1"/>
           </p:cNvSpPr>
@@ -6148,7 +6150,7 @@
       </p:sp>
       <p:sp>
         <p:nvSpPr>
-          <p:cNvPr id="14" name="PlaceHolder 3"/>
+          <p:cNvPr id="16" name="PlaceHolder 3"/>
           <p:cNvSpPr>
             <a:spLocks noGrp="1"/>
           </p:cNvSpPr>
@@ -6191,7 +6193,7 @@
       </p:sp>
       <p:sp>
         <p:nvSpPr>
-          <p:cNvPr id="15" name="PlaceHolder 4"/>
+          <p:cNvPr id="17" name="PlaceHolder 4"/>
           <p:cNvSpPr>
             <a:spLocks noGrp="1"/>
           </p:cNvSpPr>
@@ -6266,7 +6268,7 @@
         <p:txBody>
           <a:bodyPr/>
           <a:p>
-            <a:fld id="{2D4BD4FF-1269-4F35-BA5F-4AFF1CE0DC6F}" type="slidenum">
+            <a:fld id="{628F851B-15FD-4DDD-BA57-D8D85C603DE7}" type="slidenum">
               <a:t>&lt;#&gt;</a:t>
             </a:fld>
           </a:p>
@@ -6317,7 +6319,7 @@
       </p:grpSpPr>
       <p:sp>
         <p:nvSpPr>
-          <p:cNvPr id="16" name="PlaceHolder 1"/>
+          <p:cNvPr id="18" name="PlaceHolder 1"/>
           <p:cNvSpPr>
             <a:spLocks noGrp="1"/>
           </p:cNvSpPr>
@@ -6357,7 +6359,7 @@
       </p:sp>
       <p:sp>
         <p:nvSpPr>
-          <p:cNvPr id="17" name="PlaceHolder 2"/>
+          <p:cNvPr id="19" name="PlaceHolder 2"/>
           <p:cNvSpPr>
             <a:spLocks noGrp="1"/>
           </p:cNvSpPr>
@@ -6400,7 +6402,7 @@
       </p:sp>
       <p:sp>
         <p:nvSpPr>
-          <p:cNvPr id="18" name="PlaceHolder 3"/>
+          <p:cNvPr id="20" name="PlaceHolder 3"/>
           <p:cNvSpPr>
             <a:spLocks noGrp="1"/>
           </p:cNvSpPr>
@@ -6443,7 +6445,7 @@
       </p:sp>
       <p:sp>
         <p:nvSpPr>
-          <p:cNvPr id="19" name="PlaceHolder 4"/>
+          <p:cNvPr id="21" name="PlaceHolder 4"/>
           <p:cNvSpPr>
             <a:spLocks noGrp="1"/>
           </p:cNvSpPr>
@@ -6518,7 +6520,7 @@
         <p:txBody>
           <a:bodyPr/>
           <a:p>
-            <a:fld id="{58202A86-BABC-4FE6-A58C-223BD03737C6}" type="slidenum">
+            <a:fld id="{763D8AA8-9575-4E77-B429-0282B02867A3}" type="slidenum">
               <a:t>&lt;#&gt;</a:t>
             </a:fld>
           </a:p>
@@ -6569,7 +6571,7 @@
       </p:grpSpPr>
       <p:sp>
         <p:nvSpPr>
-          <p:cNvPr id="20" name="PlaceHolder 1"/>
+          <p:cNvPr id="22" name="PlaceHolder 1"/>
           <p:cNvSpPr>
             <a:spLocks noGrp="1"/>
           </p:cNvSpPr>
@@ -6609,7 +6611,7 @@
       </p:sp>
       <p:sp>
         <p:nvSpPr>
-          <p:cNvPr id="21" name="PlaceHolder 2"/>
+          <p:cNvPr id="23" name="PlaceHolder 2"/>
           <p:cNvSpPr>
             <a:spLocks noGrp="1"/>
           </p:cNvSpPr>
@@ -6652,7 +6654,7 @@
       </p:sp>
       <p:sp>
         <p:nvSpPr>
-          <p:cNvPr id="22" name="PlaceHolder 3"/>
+          <p:cNvPr id="24" name="PlaceHolder 3"/>
           <p:cNvSpPr>
             <a:spLocks noGrp="1"/>
           </p:cNvSpPr>
@@ -6695,7 +6697,7 @@
       </p:sp>
       <p:sp>
         <p:nvSpPr>
-          <p:cNvPr id="23" name="PlaceHolder 4"/>
+          <p:cNvPr id="25" name="PlaceHolder 4"/>
           <p:cNvSpPr>
             <a:spLocks noGrp="1"/>
           </p:cNvSpPr>
@@ -6770,7 +6772,7 @@
         <p:txBody>
           <a:bodyPr/>
           <a:p>
-            <a:fld id="{E415A557-BB51-4A8E-8DAD-6EA3AE82DB08}" type="slidenum">
+            <a:fld id="{253CDE9E-4B26-43ED-AE99-B8572E90E4E9}" type="slidenum">
               <a:t>&lt;#&gt;</a:t>
             </a:fld>
           </a:p>
@@ -6839,7 +6841,7 @@
         <p:spPr>
           <a:xfrm>
             <a:off x="3124080" y="6356520"/>
-            <a:ext cx="2894400" cy="363960"/>
+            <a:ext cx="2893680" cy="363240"/>
           </a:xfrm>
           <a:prstGeom prst="rect">
             <a:avLst/>
@@ -6911,7 +6913,7 @@
         <p:spPr>
           <a:xfrm>
             <a:off x="6553080" y="6356520"/>
-            <a:ext cx="2132640" cy="363960"/>
+            <a:ext cx="2131920" cy="363240"/>
           </a:xfrm>
           <a:prstGeom prst="rect">
             <a:avLst/>
@@ -6952,7 +6954,7 @@
                 <a:tab algn="l" pos="0"/>
               </a:tabLst>
             </a:pPr>
-            <a:fld id="{9905F8BA-1D73-4B12-AB33-35F5E010A963}" type="slidenum">
+            <a:fld id="{90997D6C-D91F-4744-BB46-0094BA9322CC}" type="slidenum">
               <a:rPr b="0" lang="en-US" sz="1200" spc="-1" strike="noStrike">
                 <a:solidFill>
                   <a:srgbClr val="8b8b8b"/>
@@ -6983,7 +6985,7 @@
         <p:spPr>
           <a:xfrm>
             <a:off x="457200" y="6356520"/>
-            <a:ext cx="2132640" cy="363960"/>
+            <a:ext cx="2131920" cy="363240"/>
           </a:xfrm>
           <a:prstGeom prst="rect">
             <a:avLst/>
@@ -7026,6 +7028,280 @@
                 <a:srgbClr val="000000"/>
               </a:solidFill>
               <a:latin typeface="Times New Roman"/>
+            </a:endParaRPr>
+          </a:p>
+        </p:txBody>
+      </p:sp>
+      <p:sp>
+        <p:nvSpPr>
+          <p:cNvPr id="3" name="PlaceHolder 4"/>
+          <p:cNvSpPr>
+            <a:spLocks noGrp="1"/>
+          </p:cNvSpPr>
+          <p:nvPr>
+            <p:ph type="title"/>
+          </p:nvPr>
+        </p:nvSpPr>
+        <p:spPr>
+          <a:xfrm>
+            <a:off x="457200" y="273600"/>
+            <a:ext cx="8229240" cy="1144800"/>
+          </a:xfrm>
+          <a:prstGeom prst="rect">
+            <a:avLst/>
+          </a:prstGeom>
+          <a:noFill/>
+          <a:ln w="0">
+            <a:noFill/>
+          </a:ln>
+        </p:spPr>
+        <p:txBody>
+          <a:bodyPr lIns="0" rIns="0" tIns="0" bIns="0" anchor="ctr">
+            <a:noAutofit/>
+          </a:bodyPr>
+          <a:p>
+            <a:pPr indent="0" algn="ctr">
+              <a:buNone/>
+            </a:pPr>
+            <a:r>
+              <a:rPr b="0" lang="en-US" sz="4400" spc="-1" strike="noStrike">
+                <a:solidFill>
+                  <a:srgbClr val="000000"/>
+                </a:solidFill>
+                <a:latin typeface="Arial"/>
+              </a:rPr>
+              <a:t>Click to edit the title text format</a:t>
+            </a:r>
+            <a:endParaRPr b="0" lang="en-US" sz="4400" spc="-1" strike="noStrike">
+              <a:solidFill>
+                <a:srgbClr val="000000"/>
+              </a:solidFill>
+              <a:latin typeface="Arial"/>
+            </a:endParaRPr>
+          </a:p>
+        </p:txBody>
+      </p:sp>
+      <p:sp>
+        <p:nvSpPr>
+          <p:cNvPr id="4" name="PlaceHolder 5"/>
+          <p:cNvSpPr>
+            <a:spLocks noGrp="1"/>
+          </p:cNvSpPr>
+          <p:nvPr>
+            <p:ph type="body"/>
+          </p:nvPr>
+        </p:nvSpPr>
+        <p:spPr>
+          <a:xfrm>
+            <a:off x="457200" y="1604520"/>
+            <a:ext cx="8229240" cy="3977280"/>
+          </a:xfrm>
+          <a:prstGeom prst="rect">
+            <a:avLst/>
+          </a:prstGeom>
+          <a:noFill/>
+          <a:ln w="0">
+            <a:noFill/>
+          </a:ln>
+        </p:spPr>
+        <p:txBody>
+          <a:bodyPr lIns="0" rIns="0" tIns="0" bIns="0" anchor="t">
+            <a:normAutofit/>
+          </a:bodyPr>
+          <a:p>
+            <a:pPr marL="432000" indent="-324000">
+              <a:spcBef>
+                <a:spcPts val="1417"/>
+              </a:spcBef>
+              <a:buClr>
+                <a:srgbClr val="000000"/>
+              </a:buClr>
+              <a:buSzPct val="45000"/>
+              <a:buFont typeface="Wingdings" charset="2"/>
+              <a:buChar char=""/>
+            </a:pPr>
+            <a:r>
+              <a:rPr b="0" lang="en-US" sz="3200" spc="-1" strike="noStrike">
+                <a:solidFill>
+                  <a:srgbClr val="000000"/>
+                </a:solidFill>
+                <a:latin typeface="Arial"/>
+              </a:rPr>
+              <a:t>Click to edit the outline text format</a:t>
+            </a:r>
+            <a:endParaRPr b="0" lang="en-US" sz="3200" spc="-1" strike="noStrike">
+              <a:solidFill>
+                <a:srgbClr val="000000"/>
+              </a:solidFill>
+              <a:latin typeface="Arial"/>
+            </a:endParaRPr>
+          </a:p>
+          <a:p>
+            <a:pPr lvl="1" marL="864000" indent="-324000">
+              <a:spcBef>
+                <a:spcPts val="1134"/>
+              </a:spcBef>
+              <a:buClr>
+                <a:srgbClr val="000000"/>
+              </a:buClr>
+              <a:buSzPct val="75000"/>
+              <a:buFont typeface="Symbol" charset="2"/>
+              <a:buChar char=""/>
+            </a:pPr>
+            <a:r>
+              <a:rPr b="0" lang="en-US" sz="2800" spc="-1" strike="noStrike">
+                <a:solidFill>
+                  <a:srgbClr val="000000"/>
+                </a:solidFill>
+                <a:latin typeface="Arial"/>
+              </a:rPr>
+              <a:t>Second Outline Level</a:t>
+            </a:r>
+            <a:endParaRPr b="0" lang="en-US" sz="2800" spc="-1" strike="noStrike">
+              <a:solidFill>
+                <a:srgbClr val="000000"/>
+              </a:solidFill>
+              <a:latin typeface="Arial"/>
+            </a:endParaRPr>
+          </a:p>
+          <a:p>
+            <a:pPr lvl="2" marL="1296000" indent="-288000">
+              <a:spcBef>
+                <a:spcPts val="850"/>
+              </a:spcBef>
+              <a:buClr>
+                <a:srgbClr val="000000"/>
+              </a:buClr>
+              <a:buSzPct val="45000"/>
+              <a:buFont typeface="Wingdings" charset="2"/>
+              <a:buChar char=""/>
+            </a:pPr>
+            <a:r>
+              <a:rPr b="0" lang="en-US" sz="2400" spc="-1" strike="noStrike">
+                <a:solidFill>
+                  <a:srgbClr val="000000"/>
+                </a:solidFill>
+                <a:latin typeface="Arial"/>
+              </a:rPr>
+              <a:t>Third Outline Level</a:t>
+            </a:r>
+            <a:endParaRPr b="0" lang="en-US" sz="2400" spc="-1" strike="noStrike">
+              <a:solidFill>
+                <a:srgbClr val="000000"/>
+              </a:solidFill>
+              <a:latin typeface="Arial"/>
+            </a:endParaRPr>
+          </a:p>
+          <a:p>
+            <a:pPr lvl="3" marL="1728000" indent="-216000">
+              <a:spcBef>
+                <a:spcPts val="567"/>
+              </a:spcBef>
+              <a:buClr>
+                <a:srgbClr val="000000"/>
+              </a:buClr>
+              <a:buSzPct val="75000"/>
+              <a:buFont typeface="Symbol" charset="2"/>
+              <a:buChar char=""/>
+            </a:pPr>
+            <a:r>
+              <a:rPr b="0" lang="en-US" sz="2000" spc="-1" strike="noStrike">
+                <a:solidFill>
+                  <a:srgbClr val="000000"/>
+                </a:solidFill>
+                <a:latin typeface="Arial"/>
+              </a:rPr>
+              <a:t>Fourth Outline Level</a:t>
+            </a:r>
+            <a:endParaRPr b="0" lang="en-US" sz="2000" spc="-1" strike="noStrike">
+              <a:solidFill>
+                <a:srgbClr val="000000"/>
+              </a:solidFill>
+              <a:latin typeface="Arial"/>
+            </a:endParaRPr>
+          </a:p>
+          <a:p>
+            <a:pPr lvl="4" marL="2160000" indent="-216000">
+              <a:spcBef>
+                <a:spcPts val="283"/>
+              </a:spcBef>
+              <a:buClr>
+                <a:srgbClr val="000000"/>
+              </a:buClr>
+              <a:buSzPct val="45000"/>
+              <a:buFont typeface="Wingdings" charset="2"/>
+              <a:buChar char=""/>
+            </a:pPr>
+            <a:r>
+              <a:rPr b="0" lang="en-US" sz="2000" spc="-1" strike="noStrike">
+                <a:solidFill>
+                  <a:srgbClr val="000000"/>
+                </a:solidFill>
+                <a:latin typeface="Arial"/>
+              </a:rPr>
+              <a:t>Fifth Outline Level</a:t>
+            </a:r>
+            <a:endParaRPr b="0" lang="en-US" sz="2000" spc="-1" strike="noStrike">
+              <a:solidFill>
+                <a:srgbClr val="000000"/>
+              </a:solidFill>
+              <a:latin typeface="Arial"/>
+            </a:endParaRPr>
+          </a:p>
+          <a:p>
+            <a:pPr lvl="5" marL="2592000" indent="-216000">
+              <a:spcBef>
+                <a:spcPts val="283"/>
+              </a:spcBef>
+              <a:buClr>
+                <a:srgbClr val="000000"/>
+              </a:buClr>
+              <a:buSzPct val="45000"/>
+              <a:buFont typeface="Wingdings" charset="2"/>
+              <a:buChar char=""/>
+            </a:pPr>
+            <a:r>
+              <a:rPr b="0" lang="en-US" sz="2000" spc="-1" strike="noStrike">
+                <a:solidFill>
+                  <a:srgbClr val="000000"/>
+                </a:solidFill>
+                <a:latin typeface="Arial"/>
+              </a:rPr>
+              <a:t>Sixth Outline Level</a:t>
+            </a:r>
+            <a:endParaRPr b="0" lang="en-US" sz="2000" spc="-1" strike="noStrike">
+              <a:solidFill>
+                <a:srgbClr val="000000"/>
+              </a:solidFill>
+              <a:latin typeface="Arial"/>
+            </a:endParaRPr>
+          </a:p>
+          <a:p>
+            <a:pPr lvl="6" marL="3024000" indent="-216000">
+              <a:spcBef>
+                <a:spcPts val="283"/>
+              </a:spcBef>
+              <a:buClr>
+                <a:srgbClr val="000000"/>
+              </a:buClr>
+              <a:buSzPct val="45000"/>
+              <a:buFont typeface="Wingdings" charset="2"/>
+              <a:buChar char=""/>
+            </a:pPr>
+            <a:r>
+              <a:rPr b="0" lang="en-US" sz="2000" spc="-1" strike="noStrike">
+                <a:solidFill>
+                  <a:srgbClr val="000000"/>
+                </a:solidFill>
+                <a:latin typeface="Arial"/>
+              </a:rPr>
+              <a:t>Seventh Outline Level</a:t>
+            </a:r>
+            <a:endParaRPr b="0" lang="en-US" sz="2000" spc="-1" strike="noStrike">
+              <a:solidFill>
+                <a:srgbClr val="000000"/>
+              </a:solidFill>
+              <a:latin typeface="Arial"/>
             </a:endParaRPr>
           </a:p>
         </p:txBody>
@@ -7074,484 +7350,6 @@
           <a:chExt cx="0" cy="0"/>
         </a:xfrm>
       </p:grpSpPr>
-      <p:sp>
-        <p:nvSpPr>
-          <p:cNvPr id="39" name="PlaceHolder 1"/>
-          <p:cNvSpPr>
-            <a:spLocks noGrp="1"/>
-          </p:cNvSpPr>
-          <p:nvPr>
-            <p:ph type="ftr" idx="4"/>
-          </p:nvPr>
-        </p:nvSpPr>
-        <p:spPr>
-          <a:xfrm>
-            <a:off x="3124080" y="6356520"/>
-            <a:ext cx="2894040" cy="363600"/>
-          </a:xfrm>
-          <a:prstGeom prst="rect">
-            <a:avLst/>
-          </a:prstGeom>
-          <a:noFill/>
-          <a:ln w="0">
-            <a:noFill/>
-          </a:ln>
-        </p:spPr>
-        <p:txBody>
-          <a:bodyPr lIns="90000" rIns="90000" tIns="45000" bIns="45000" anchor="ctr">
-            <a:noAutofit/>
-          </a:bodyPr>
-          <a:lstStyle>
-            <a:lvl1pPr indent="0" algn="ctr">
-              <a:lnSpc>
-                <a:spcPct val="100000"/>
-              </a:lnSpc>
-              <a:buNone/>
-              <a:tabLst>
-                <a:tab algn="l" pos="0"/>
-              </a:tabLst>
-              <a:defRPr b="0" lang="en-US" sz="1400" spc="-1" strike="noStrike">
-                <a:solidFill>
-                  <a:srgbClr val="000000"/>
-                </a:solidFill>
-                <a:latin typeface="Times New Roman"/>
-              </a:defRPr>
-            </a:lvl1pPr>
-          </a:lstStyle>
-          <a:p>
-            <a:pPr indent="0" algn="ctr">
-              <a:lnSpc>
-                <a:spcPct val="100000"/>
-              </a:lnSpc>
-              <a:buNone/>
-              <a:tabLst>
-                <a:tab algn="l" pos="0"/>
-              </a:tabLst>
-            </a:pPr>
-            <a:r>
-              <a:rPr b="0" lang="en-US" sz="1400" spc="-1" strike="noStrike">
-                <a:solidFill>
-                  <a:srgbClr val="000000"/>
-                </a:solidFill>
-                <a:latin typeface="Times New Roman"/>
-              </a:rPr>
-              <a:t>&lt;footer&gt;</a:t>
-            </a:r>
-            <a:endParaRPr b="0" lang="en-US" sz="1400" spc="-1" strike="noStrike">
-              <a:solidFill>
-                <a:srgbClr val="000000"/>
-              </a:solidFill>
-              <a:latin typeface="Times New Roman"/>
-            </a:endParaRPr>
-          </a:p>
-        </p:txBody>
-      </p:sp>
-      <p:sp>
-        <p:nvSpPr>
-          <p:cNvPr id="40" name="PlaceHolder 2"/>
-          <p:cNvSpPr>
-            <a:spLocks noGrp="1"/>
-          </p:cNvSpPr>
-          <p:nvPr>
-            <p:ph type="sldNum" idx="5"/>
-          </p:nvPr>
-        </p:nvSpPr>
-        <p:spPr>
-          <a:xfrm>
-            <a:off x="6553080" y="6356520"/>
-            <a:ext cx="2132280" cy="363600"/>
-          </a:xfrm>
-          <a:prstGeom prst="rect">
-            <a:avLst/>
-          </a:prstGeom>
-          <a:noFill/>
-          <a:ln w="0">
-            <a:noFill/>
-          </a:ln>
-        </p:spPr>
-        <p:txBody>
-          <a:bodyPr lIns="90000" rIns="90000" tIns="45000" bIns="45000" anchor="ctr">
-            <a:noAutofit/>
-          </a:bodyPr>
-          <a:lstStyle>
-            <a:lvl1pPr indent="0" algn="r">
-              <a:lnSpc>
-                <a:spcPct val="100000"/>
-              </a:lnSpc>
-              <a:buNone/>
-              <a:tabLst>
-                <a:tab algn="l" pos="0"/>
-              </a:tabLst>
-              <a:defRPr b="0" lang="en-US" sz="1200" spc="-1" strike="noStrike">
-                <a:solidFill>
-                  <a:srgbClr val="8b8b8b"/>
-                </a:solidFill>
-                <a:latin typeface="Calibri"/>
-              </a:defRPr>
-            </a:lvl1pPr>
-          </a:lstStyle>
-          <a:p>
-            <a:pPr indent="0" algn="r">
-              <a:lnSpc>
-                <a:spcPct val="100000"/>
-              </a:lnSpc>
-              <a:buNone/>
-              <a:tabLst>
-                <a:tab algn="l" pos="0"/>
-              </a:tabLst>
-            </a:pPr>
-            <a:fld id="{7EBCE699-E743-4AC5-BA9A-7363FFF06DF1}" type="slidenum">
-              <a:rPr b="0" lang="en-US" sz="1200" spc="-1" strike="noStrike">
-                <a:solidFill>
-                  <a:srgbClr val="8b8b8b"/>
-                </a:solidFill>
-                <a:latin typeface="Calibri"/>
-              </a:rPr>
-              <a:t>&lt;number&gt;</a:t>
-            </a:fld>
-            <a:endParaRPr b="0" lang="en-US" sz="1200" spc="-1" strike="noStrike">
-              <a:solidFill>
-                <a:srgbClr val="000000"/>
-              </a:solidFill>
-              <a:latin typeface="Times New Roman"/>
-            </a:endParaRPr>
-          </a:p>
-        </p:txBody>
-      </p:sp>
-      <p:sp>
-        <p:nvSpPr>
-          <p:cNvPr id="41" name="PlaceHolder 3"/>
-          <p:cNvSpPr>
-            <a:spLocks noGrp="1"/>
-          </p:cNvSpPr>
-          <p:nvPr>
-            <p:ph type="dt" idx="6"/>
-          </p:nvPr>
-        </p:nvSpPr>
-        <p:spPr>
-          <a:xfrm>
-            <a:off x="457200" y="6356520"/>
-            <a:ext cx="2132280" cy="363600"/>
-          </a:xfrm>
-          <a:prstGeom prst="rect">
-            <a:avLst/>
-          </a:prstGeom>
-          <a:noFill/>
-          <a:ln w="0">
-            <a:noFill/>
-          </a:ln>
-        </p:spPr>
-        <p:txBody>
-          <a:bodyPr lIns="90000" rIns="90000" tIns="45000" bIns="45000" anchor="ctr">
-            <a:noAutofit/>
-          </a:bodyPr>
-          <a:lstStyle>
-            <a:lvl1pPr indent="0">
-              <a:buNone/>
-              <a:defRPr b="0" lang="en-US" sz="1400" spc="-1" strike="noStrike">
-                <a:solidFill>
-                  <a:srgbClr val="000000"/>
-                </a:solidFill>
-                <a:latin typeface="Times New Roman"/>
-              </a:defRPr>
-            </a:lvl1pPr>
-          </a:lstStyle>
-          <a:p>
-            <a:pPr indent="0">
-              <a:buNone/>
-            </a:pPr>
-            <a:r>
-              <a:rPr b="0" lang="en-US" sz="1400" spc="-1" strike="noStrike">
-                <a:solidFill>
-                  <a:srgbClr val="000000"/>
-                </a:solidFill>
-                <a:latin typeface="Times New Roman"/>
-              </a:rPr>
-              <a:t>&lt;date/time&gt;</a:t>
-            </a:r>
-            <a:endParaRPr b="0" lang="en-US" sz="1400" spc="-1" strike="noStrike">
-              <a:solidFill>
-                <a:srgbClr val="000000"/>
-              </a:solidFill>
-              <a:latin typeface="Times New Roman"/>
-            </a:endParaRPr>
-          </a:p>
-        </p:txBody>
-      </p:sp>
-      <p:sp>
-        <p:nvSpPr>
-          <p:cNvPr id="42" name="PlaceHolder 4"/>
-          <p:cNvSpPr>
-            <a:spLocks noGrp="1"/>
-          </p:cNvSpPr>
-          <p:nvPr>
-            <p:ph type="title"/>
-          </p:nvPr>
-        </p:nvSpPr>
-        <p:spPr>
-          <a:xfrm>
-            <a:off x="457200" y="273600"/>
-            <a:ext cx="8229240" cy="1144800"/>
-          </a:xfrm>
-          <a:prstGeom prst="rect">
-            <a:avLst/>
-          </a:prstGeom>
-          <a:noFill/>
-          <a:ln w="0">
-            <a:noFill/>
-          </a:ln>
-        </p:spPr>
-        <p:txBody>
-          <a:bodyPr lIns="0" rIns="0" tIns="0" bIns="0" anchor="ctr">
-            <a:noAutofit/>
-          </a:bodyPr>
-          <a:p>
-            <a:pPr indent="0" algn="ctr">
-              <a:buNone/>
-            </a:pPr>
-            <a:r>
-              <a:rPr b="0" lang="en-US" sz="4400" spc="-1" strike="noStrike">
-                <a:solidFill>
-                  <a:srgbClr val="000000"/>
-                </a:solidFill>
-                <a:latin typeface="Arial"/>
-              </a:rPr>
-              <a:t>Click to edit the title text format</a:t>
-            </a:r>
-            <a:endParaRPr b="0" lang="en-US" sz="4400" spc="-1" strike="noStrike">
-              <a:solidFill>
-                <a:srgbClr val="000000"/>
-              </a:solidFill>
-              <a:latin typeface="Arial"/>
-            </a:endParaRPr>
-          </a:p>
-        </p:txBody>
-      </p:sp>
-      <p:sp>
-        <p:nvSpPr>
-          <p:cNvPr id="43" name="PlaceHolder 5"/>
-          <p:cNvSpPr>
-            <a:spLocks noGrp="1"/>
-          </p:cNvSpPr>
-          <p:nvPr>
-            <p:ph type="body"/>
-          </p:nvPr>
-        </p:nvSpPr>
-        <p:spPr>
-          <a:xfrm>
-            <a:off x="457200" y="1604520"/>
-            <a:ext cx="8229240" cy="3977280"/>
-          </a:xfrm>
-          <a:prstGeom prst="rect">
-            <a:avLst/>
-          </a:prstGeom>
-          <a:noFill/>
-          <a:ln w="0">
-            <a:noFill/>
-          </a:ln>
-        </p:spPr>
-        <p:txBody>
-          <a:bodyPr lIns="0" rIns="0" tIns="0" bIns="0" anchor="t">
-            <a:normAutofit/>
-          </a:bodyPr>
-          <a:p>
-            <a:pPr marL="432000" indent="-324000">
-              <a:spcBef>
-                <a:spcPts val="1417"/>
-              </a:spcBef>
-              <a:buClr>
-                <a:srgbClr val="000000"/>
-              </a:buClr>
-              <a:buSzPct val="45000"/>
-              <a:buFont typeface="Wingdings" charset="2"/>
-              <a:buChar char=""/>
-            </a:pPr>
-            <a:r>
-              <a:rPr b="0" lang="en-US" sz="3200" spc="-1" strike="noStrike">
-                <a:solidFill>
-                  <a:srgbClr val="000000"/>
-                </a:solidFill>
-                <a:latin typeface="Arial"/>
-              </a:rPr>
-              <a:t>Click to edit the outline text format</a:t>
-            </a:r>
-            <a:endParaRPr b="0" lang="en-US" sz="3200" spc="-1" strike="noStrike">
-              <a:solidFill>
-                <a:srgbClr val="000000"/>
-              </a:solidFill>
-              <a:latin typeface="Arial"/>
-            </a:endParaRPr>
-          </a:p>
-          <a:p>
-            <a:pPr lvl="1" marL="864000" indent="-324000">
-              <a:spcBef>
-                <a:spcPts val="1134"/>
-              </a:spcBef>
-              <a:buClr>
-                <a:srgbClr val="000000"/>
-              </a:buClr>
-              <a:buSzPct val="75000"/>
-              <a:buFont typeface="Symbol" charset="2"/>
-              <a:buChar char=""/>
-            </a:pPr>
-            <a:r>
-              <a:rPr b="0" lang="en-US" sz="2800" spc="-1" strike="noStrike">
-                <a:solidFill>
-                  <a:srgbClr val="000000"/>
-                </a:solidFill>
-                <a:latin typeface="Arial"/>
-              </a:rPr>
-              <a:t>Second Outline Level</a:t>
-            </a:r>
-            <a:endParaRPr b="0" lang="en-US" sz="2800" spc="-1" strike="noStrike">
-              <a:solidFill>
-                <a:srgbClr val="000000"/>
-              </a:solidFill>
-              <a:latin typeface="Arial"/>
-            </a:endParaRPr>
-          </a:p>
-          <a:p>
-            <a:pPr lvl="2" marL="1296000" indent="-288000">
-              <a:spcBef>
-                <a:spcPts val="850"/>
-              </a:spcBef>
-              <a:buClr>
-                <a:srgbClr val="000000"/>
-              </a:buClr>
-              <a:buSzPct val="45000"/>
-              <a:buFont typeface="Wingdings" charset="2"/>
-              <a:buChar char=""/>
-            </a:pPr>
-            <a:r>
-              <a:rPr b="0" lang="en-US" sz="2400" spc="-1" strike="noStrike">
-                <a:solidFill>
-                  <a:srgbClr val="000000"/>
-                </a:solidFill>
-                <a:latin typeface="Arial"/>
-              </a:rPr>
-              <a:t>Third Outline Level</a:t>
-            </a:r>
-            <a:endParaRPr b="0" lang="en-US" sz="2400" spc="-1" strike="noStrike">
-              <a:solidFill>
-                <a:srgbClr val="000000"/>
-              </a:solidFill>
-              <a:latin typeface="Arial"/>
-            </a:endParaRPr>
-          </a:p>
-          <a:p>
-            <a:pPr lvl="3" marL="1728000" indent="-216000">
-              <a:spcBef>
-                <a:spcPts val="567"/>
-              </a:spcBef>
-              <a:buClr>
-                <a:srgbClr val="000000"/>
-              </a:buClr>
-              <a:buSzPct val="75000"/>
-              <a:buFont typeface="Symbol" charset="2"/>
-              <a:buChar char=""/>
-            </a:pPr>
-            <a:r>
-              <a:rPr b="0" lang="en-US" sz="2000" spc="-1" strike="noStrike">
-                <a:solidFill>
-                  <a:srgbClr val="000000"/>
-                </a:solidFill>
-                <a:latin typeface="Arial"/>
-              </a:rPr>
-              <a:t>Fourth Outline Level</a:t>
-            </a:r>
-            <a:endParaRPr b="0" lang="en-US" sz="2000" spc="-1" strike="noStrike">
-              <a:solidFill>
-                <a:srgbClr val="000000"/>
-              </a:solidFill>
-              <a:latin typeface="Arial"/>
-            </a:endParaRPr>
-          </a:p>
-          <a:p>
-            <a:pPr lvl="4" marL="2160000" indent="-216000">
-              <a:spcBef>
-                <a:spcPts val="283"/>
-              </a:spcBef>
-              <a:buClr>
-                <a:srgbClr val="000000"/>
-              </a:buClr>
-              <a:buSzPct val="45000"/>
-              <a:buFont typeface="Wingdings" charset="2"/>
-              <a:buChar char=""/>
-            </a:pPr>
-            <a:r>
-              <a:rPr b="0" lang="en-US" sz="2000" spc="-1" strike="noStrike">
-                <a:solidFill>
-                  <a:srgbClr val="000000"/>
-                </a:solidFill>
-                <a:latin typeface="Arial"/>
-              </a:rPr>
-              <a:t>Fifth Outline Level</a:t>
-            </a:r>
-            <a:endParaRPr b="0" lang="en-US" sz="2000" spc="-1" strike="noStrike">
-              <a:solidFill>
-                <a:srgbClr val="000000"/>
-              </a:solidFill>
-              <a:latin typeface="Arial"/>
-            </a:endParaRPr>
-          </a:p>
-          <a:p>
-            <a:pPr lvl="5" marL="2592000" indent="-216000">
-              <a:spcBef>
-                <a:spcPts val="283"/>
-              </a:spcBef>
-              <a:buClr>
-                <a:srgbClr val="000000"/>
-              </a:buClr>
-              <a:buSzPct val="45000"/>
-              <a:buFont typeface="Wingdings" charset="2"/>
-              <a:buChar char=""/>
-            </a:pPr>
-            <a:r>
-              <a:rPr b="0" lang="en-US" sz="2000" spc="-1" strike="noStrike">
-                <a:solidFill>
-                  <a:srgbClr val="000000"/>
-                </a:solidFill>
-                <a:latin typeface="Arial"/>
-              </a:rPr>
-              <a:t>Sixth Outline Level</a:t>
-            </a:r>
-            <a:endParaRPr b="0" lang="en-US" sz="2000" spc="-1" strike="noStrike">
-              <a:solidFill>
-                <a:srgbClr val="000000"/>
-              </a:solidFill>
-              <a:latin typeface="Arial"/>
-            </a:endParaRPr>
-          </a:p>
-          <a:p>
-            <a:pPr lvl="6" marL="3024000" indent="-216000">
-              <a:spcBef>
-                <a:spcPts val="283"/>
-              </a:spcBef>
-              <a:buClr>
-                <a:srgbClr val="000000"/>
-              </a:buClr>
-              <a:buSzPct val="45000"/>
-              <a:buFont typeface="Wingdings" charset="2"/>
-              <a:buChar char=""/>
-            </a:pPr>
-            <a:r>
-              <a:rPr b="0" lang="en-US" sz="2000" spc="-1" strike="noStrike">
-                <a:solidFill>
-                  <a:srgbClr val="000000"/>
-                </a:solidFill>
-                <a:latin typeface="Arial"/>
-              </a:rPr>
-              <a:t>Seventh Outline Level</a:t>
-            </a:r>
-            <a:endParaRPr b="0" lang="en-US" sz="2000" spc="-1" strike="noStrike">
-              <a:solidFill>
-                <a:srgbClr val="000000"/>
-              </a:solidFill>
-              <a:latin typeface="Arial"/>
-            </a:endParaRPr>
-          </a:p>
-        </p:txBody>
-      </p:sp>
     </p:spTree>
   </p:cSld>
   <p:clrMap bg1="lt1" bg2="lt2" tx1="dk1" tx2="dk2" accent1="accent1" accent2="accent2" accent3="accent3" accent4="accent4" accent5="accent5" accent6="accent6" hlink="hlink" folHlink="folHlink"/>
@@ -7598,7 +7396,211 @@
       </p:grpSpPr>
       <p:sp>
         <p:nvSpPr>
-          <p:cNvPr id="80" name="PlaceHolder 1"/>
+          <p:cNvPr id="77" name="PlaceHolder 1"/>
+          <p:cNvSpPr>
+            <a:spLocks noGrp="1"/>
+          </p:cNvSpPr>
+          <p:nvPr>
+            <p:ph type="ftr" idx="4"/>
+          </p:nvPr>
+        </p:nvSpPr>
+        <p:spPr>
+          <a:xfrm>
+            <a:off x="3124080" y="6356520"/>
+            <a:ext cx="2894400" cy="363960"/>
+          </a:xfrm>
+          <a:prstGeom prst="rect">
+            <a:avLst/>
+          </a:prstGeom>
+          <a:noFill/>
+          <a:ln w="0">
+            <a:noFill/>
+          </a:ln>
+        </p:spPr>
+        <p:txBody>
+          <a:bodyPr lIns="90000" rIns="90000" tIns="45000" bIns="45000" anchor="ctr">
+            <a:noAutofit/>
+          </a:bodyPr>
+          <a:lstStyle>
+            <a:lvl1pPr indent="0" algn="ctr">
+              <a:lnSpc>
+                <a:spcPct val="100000"/>
+              </a:lnSpc>
+              <a:buNone/>
+              <a:tabLst>
+                <a:tab algn="l" pos="0"/>
+              </a:tabLst>
+              <a:defRPr b="0" lang="en-US" sz="1400" spc="-1" strike="noStrike">
+                <a:solidFill>
+                  <a:srgbClr val="000000"/>
+                </a:solidFill>
+                <a:latin typeface="Times New Roman"/>
+              </a:defRPr>
+            </a:lvl1pPr>
+          </a:lstStyle>
+          <a:p>
+            <a:pPr indent="0" algn="ctr">
+              <a:lnSpc>
+                <a:spcPct val="100000"/>
+              </a:lnSpc>
+              <a:buNone/>
+              <a:tabLst>
+                <a:tab algn="l" pos="0"/>
+              </a:tabLst>
+            </a:pPr>
+            <a:r>
+              <a:rPr b="0" lang="en-US" sz="1400" spc="-1" strike="noStrike">
+                <a:solidFill>
+                  <a:srgbClr val="000000"/>
+                </a:solidFill>
+                <a:latin typeface="Times New Roman"/>
+              </a:rPr>
+              <a:t>&lt;footer&gt;</a:t>
+            </a:r>
+            <a:endParaRPr b="0" lang="en-US" sz="1400" spc="-1" strike="noStrike">
+              <a:solidFill>
+                <a:srgbClr val="000000"/>
+              </a:solidFill>
+              <a:latin typeface="Times New Roman"/>
+            </a:endParaRPr>
+          </a:p>
+        </p:txBody>
+      </p:sp>
+      <p:sp>
+        <p:nvSpPr>
+          <p:cNvPr id="78" name="PlaceHolder 2"/>
+          <p:cNvSpPr>
+            <a:spLocks noGrp="1"/>
+          </p:cNvSpPr>
+          <p:nvPr>
+            <p:ph type="sldNum" idx="5"/>
+          </p:nvPr>
+        </p:nvSpPr>
+        <p:spPr>
+          <a:xfrm>
+            <a:off x="6553080" y="6356520"/>
+            <a:ext cx="2132640" cy="363960"/>
+          </a:xfrm>
+          <a:prstGeom prst="rect">
+            <a:avLst/>
+          </a:prstGeom>
+          <a:noFill/>
+          <a:ln w="0">
+            <a:noFill/>
+          </a:ln>
+        </p:spPr>
+        <p:txBody>
+          <a:bodyPr lIns="90000" rIns="90000" tIns="45000" bIns="45000" anchor="ctr">
+            <a:noAutofit/>
+          </a:bodyPr>
+          <a:lstStyle>
+            <a:lvl1pPr indent="0" algn="r">
+              <a:lnSpc>
+                <a:spcPct val="100000"/>
+              </a:lnSpc>
+              <a:buNone/>
+              <a:tabLst>
+                <a:tab algn="l" pos="0"/>
+              </a:tabLst>
+              <a:defRPr b="0" lang="en-US" sz="1200" spc="-1" strike="noStrike">
+                <a:solidFill>
+                  <a:srgbClr val="8b8b8b"/>
+                </a:solidFill>
+                <a:latin typeface="Calibri"/>
+              </a:defRPr>
+            </a:lvl1pPr>
+          </a:lstStyle>
+          <a:p>
+            <a:pPr indent="0" algn="r">
+              <a:lnSpc>
+                <a:spcPct val="100000"/>
+              </a:lnSpc>
+              <a:buNone/>
+              <a:tabLst>
+                <a:tab algn="l" pos="0"/>
+              </a:tabLst>
+            </a:pPr>
+            <a:fld id="{CBDADEA6-315A-4386-8054-1EC9589C5056}" type="slidenum">
+              <a:rPr b="0" lang="en-US" sz="1200" spc="-1" strike="noStrike">
+                <a:solidFill>
+                  <a:srgbClr val="8b8b8b"/>
+                </a:solidFill>
+                <a:latin typeface="Calibri"/>
+              </a:rPr>
+              <a:t>&lt;number&gt;</a:t>
+            </a:fld>
+            <a:endParaRPr b="0" lang="en-US" sz="1200" spc="-1" strike="noStrike">
+              <a:solidFill>
+                <a:srgbClr val="000000"/>
+              </a:solidFill>
+              <a:latin typeface="Times New Roman"/>
+            </a:endParaRPr>
+          </a:p>
+        </p:txBody>
+      </p:sp>
+      <p:sp>
+        <p:nvSpPr>
+          <p:cNvPr id="79" name="PlaceHolder 3"/>
+          <p:cNvSpPr>
+            <a:spLocks noGrp="1"/>
+          </p:cNvSpPr>
+          <p:nvPr>
+            <p:ph type="dt" idx="6"/>
+          </p:nvPr>
+        </p:nvSpPr>
+        <p:spPr>
+          <a:xfrm>
+            <a:off x="457200" y="6356520"/>
+            <a:ext cx="2132640" cy="363960"/>
+          </a:xfrm>
+          <a:prstGeom prst="rect">
+            <a:avLst/>
+          </a:prstGeom>
+          <a:noFill/>
+          <a:ln w="0">
+            <a:noFill/>
+          </a:ln>
+        </p:spPr>
+        <p:txBody>
+          <a:bodyPr lIns="90000" rIns="90000" tIns="45000" bIns="45000" anchor="ctr">
+            <a:noAutofit/>
+          </a:bodyPr>
+          <a:lstStyle>
+            <a:lvl1pPr indent="0">
+              <a:buNone/>
+              <a:defRPr b="0" lang="en-US" sz="1400" spc="-1" strike="noStrike">
+                <a:solidFill>
+                  <a:srgbClr val="000000"/>
+                </a:solidFill>
+                <a:latin typeface="Times New Roman"/>
+              </a:defRPr>
+            </a:lvl1pPr>
+          </a:lstStyle>
+          <a:p>
+            <a:pPr indent="0">
+              <a:buNone/>
+            </a:pPr>
+            <a:r>
+              <a:rPr b="0" lang="en-US" sz="1400" spc="-1" strike="noStrike">
+                <a:solidFill>
+                  <a:srgbClr val="000000"/>
+                </a:solidFill>
+                <a:latin typeface="Times New Roman"/>
+              </a:rPr>
+              <a:t>&lt;date/time&gt;</a:t>
+            </a:r>
+            <a:endParaRPr b="0" lang="en-US" sz="1400" spc="-1" strike="noStrike">
+              <a:solidFill>
+                <a:srgbClr val="000000"/>
+              </a:solidFill>
+              <a:latin typeface="Times New Roman"/>
+            </a:endParaRPr>
+          </a:p>
+        </p:txBody>
+      </p:sp>
+      <p:sp>
+        <p:nvSpPr>
+          <p:cNvPr id="80" name="PlaceHolder 4"/>
           <p:cNvSpPr>
             <a:spLocks noGrp="1"/>
           </p:cNvSpPr>
@@ -7647,7 +7649,7 @@
       </p:sp>
       <p:sp>
         <p:nvSpPr>
-          <p:cNvPr id="81" name="PlaceHolder 2"/>
+          <p:cNvPr id="81" name="PlaceHolder 5"/>
           <p:cNvSpPr>
             <a:spLocks noGrp="1"/>
           </p:cNvSpPr>
@@ -7916,7 +7918,7 @@
         <p:spPr>
           <a:xfrm>
             <a:off x="0" y="0"/>
-            <a:ext cx="12187440" cy="6856560"/>
+            <a:ext cx="12187080" cy="6856200"/>
           </a:xfrm>
           <a:prstGeom prst="rect">
             <a:avLst/>
@@ -7952,6 +7954,11 @@
             <a:noAutofit/>
           </a:bodyPr>
           <a:p>
+            <a:pPr>
+              <a:lnSpc>
+                <a:spcPct val="100000"/>
+              </a:lnSpc>
+            </a:pPr>
             <a:endParaRPr b="0" lang="en-US" sz="1800" spc="-1" strike="noStrike">
               <a:solidFill>
                 <a:schemeClr val="lt1"/>
@@ -7971,7 +7978,7 @@
         <p:spPr>
           <a:xfrm>
             <a:off x="0" y="0"/>
-            <a:ext cx="16920" cy="6856560"/>
+            <a:ext cx="16560" cy="6856200"/>
           </a:xfrm>
           <a:prstGeom prst="rect">
             <a:avLst/>
@@ -8007,6 +8014,11 @@
             <a:noAutofit/>
           </a:bodyPr>
           <a:p>
+            <a:pPr>
+              <a:lnSpc>
+                <a:spcPct val="100000"/>
+              </a:lnSpc>
+            </a:pPr>
             <a:endParaRPr b="0" lang="en-US" sz="1800" spc="-1" strike="noStrike">
               <a:solidFill>
                 <a:schemeClr val="lt1"/>
@@ -8026,7 +8038,7 @@
         <p:spPr>
           <a:xfrm>
             <a:off x="914400" y="0"/>
-            <a:ext cx="16920" cy="6856560"/>
+            <a:ext cx="16560" cy="6856200"/>
           </a:xfrm>
           <a:prstGeom prst="rect">
             <a:avLst/>
@@ -8062,6 +8074,11 @@
             <a:noAutofit/>
           </a:bodyPr>
           <a:p>
+            <a:pPr>
+              <a:lnSpc>
+                <a:spcPct val="100000"/>
+              </a:lnSpc>
+            </a:pPr>
             <a:endParaRPr b="0" lang="en-US" sz="1800" spc="-1" strike="noStrike">
               <a:solidFill>
                 <a:schemeClr val="lt1"/>
@@ -8081,7 +8098,7 @@
         <p:spPr>
           <a:xfrm>
             <a:off x="1828800" y="0"/>
-            <a:ext cx="16920" cy="6856560"/>
+            <a:ext cx="16560" cy="6856200"/>
           </a:xfrm>
           <a:prstGeom prst="rect">
             <a:avLst/>
@@ -8117,6 +8134,11 @@
             <a:noAutofit/>
           </a:bodyPr>
           <a:p>
+            <a:pPr>
+              <a:lnSpc>
+                <a:spcPct val="100000"/>
+              </a:lnSpc>
+            </a:pPr>
             <a:endParaRPr b="0" lang="en-US" sz="1800" spc="-1" strike="noStrike">
               <a:solidFill>
                 <a:schemeClr val="lt1"/>
@@ -8136,7 +8158,7 @@
         <p:spPr>
           <a:xfrm>
             <a:off x="2743200" y="0"/>
-            <a:ext cx="16920" cy="6856560"/>
+            <a:ext cx="16560" cy="6856200"/>
           </a:xfrm>
           <a:prstGeom prst="rect">
             <a:avLst/>
@@ -8172,6 +8194,11 @@
             <a:noAutofit/>
           </a:bodyPr>
           <a:p>
+            <a:pPr>
+              <a:lnSpc>
+                <a:spcPct val="100000"/>
+              </a:lnSpc>
+            </a:pPr>
             <a:endParaRPr b="0" lang="en-US" sz="1800" spc="-1" strike="noStrike">
               <a:solidFill>
                 <a:schemeClr val="lt1"/>
@@ -8191,7 +8218,7 @@
         <p:spPr>
           <a:xfrm>
             <a:off x="3657600" y="0"/>
-            <a:ext cx="16920" cy="6856560"/>
+            <a:ext cx="16560" cy="6856200"/>
           </a:xfrm>
           <a:prstGeom prst="rect">
             <a:avLst/>
@@ -8227,6 +8254,11 @@
             <a:noAutofit/>
           </a:bodyPr>
           <a:p>
+            <a:pPr>
+              <a:lnSpc>
+                <a:spcPct val="100000"/>
+              </a:lnSpc>
+            </a:pPr>
             <a:endParaRPr b="0" lang="en-US" sz="1800" spc="-1" strike="noStrike">
               <a:solidFill>
                 <a:schemeClr val="lt1"/>
@@ -8246,7 +8278,7 @@
         <p:spPr>
           <a:xfrm>
             <a:off x="4572000" y="0"/>
-            <a:ext cx="16920" cy="6856560"/>
+            <a:ext cx="16560" cy="6856200"/>
           </a:xfrm>
           <a:prstGeom prst="rect">
             <a:avLst/>
@@ -8282,6 +8314,11 @@
             <a:noAutofit/>
           </a:bodyPr>
           <a:p>
+            <a:pPr>
+              <a:lnSpc>
+                <a:spcPct val="100000"/>
+              </a:lnSpc>
+            </a:pPr>
             <a:endParaRPr b="0" lang="en-US" sz="1800" spc="-1" strike="noStrike">
               <a:solidFill>
                 <a:schemeClr val="lt1"/>
@@ -8301,7 +8338,7 @@
         <p:spPr>
           <a:xfrm>
             <a:off x="5486400" y="0"/>
-            <a:ext cx="16920" cy="6856560"/>
+            <a:ext cx="16560" cy="6856200"/>
           </a:xfrm>
           <a:prstGeom prst="rect">
             <a:avLst/>
@@ -8337,6 +8374,11 @@
             <a:noAutofit/>
           </a:bodyPr>
           <a:p>
+            <a:pPr>
+              <a:lnSpc>
+                <a:spcPct val="100000"/>
+              </a:lnSpc>
+            </a:pPr>
             <a:endParaRPr b="0" lang="en-US" sz="1800" spc="-1" strike="noStrike">
               <a:solidFill>
                 <a:schemeClr val="lt1"/>
@@ -8356,7 +8398,7 @@
         <p:spPr>
           <a:xfrm>
             <a:off x="6400800" y="0"/>
-            <a:ext cx="16920" cy="6856560"/>
+            <a:ext cx="16560" cy="6856200"/>
           </a:xfrm>
           <a:prstGeom prst="rect">
             <a:avLst/>
@@ -8392,6 +8434,11 @@
             <a:noAutofit/>
           </a:bodyPr>
           <a:p>
+            <a:pPr>
+              <a:lnSpc>
+                <a:spcPct val="100000"/>
+              </a:lnSpc>
+            </a:pPr>
             <a:endParaRPr b="0" lang="en-US" sz="1800" spc="-1" strike="noStrike">
               <a:solidFill>
                 <a:schemeClr val="lt1"/>
@@ -8411,7 +8458,7 @@
         <p:spPr>
           <a:xfrm>
             <a:off x="7315200" y="0"/>
-            <a:ext cx="16920" cy="6856560"/>
+            <a:ext cx="16560" cy="6856200"/>
           </a:xfrm>
           <a:prstGeom prst="rect">
             <a:avLst/>
@@ -8447,6 +8494,11 @@
             <a:noAutofit/>
           </a:bodyPr>
           <a:p>
+            <a:pPr>
+              <a:lnSpc>
+                <a:spcPct val="100000"/>
+              </a:lnSpc>
+            </a:pPr>
             <a:endParaRPr b="0" lang="en-US" sz="1800" spc="-1" strike="noStrike">
               <a:solidFill>
                 <a:schemeClr val="lt1"/>
@@ -8466,7 +8518,7 @@
         <p:spPr>
           <a:xfrm>
             <a:off x="8229600" y="0"/>
-            <a:ext cx="16920" cy="6856560"/>
+            <a:ext cx="16560" cy="6856200"/>
           </a:xfrm>
           <a:prstGeom prst="rect">
             <a:avLst/>
@@ -8502,6 +8554,11 @@
             <a:noAutofit/>
           </a:bodyPr>
           <a:p>
+            <a:pPr>
+              <a:lnSpc>
+                <a:spcPct val="100000"/>
+              </a:lnSpc>
+            </a:pPr>
             <a:endParaRPr b="0" lang="en-US" sz="1800" spc="-1" strike="noStrike">
               <a:solidFill>
                 <a:schemeClr val="lt1"/>
@@ -8521,7 +8578,7 @@
         <p:spPr>
           <a:xfrm>
             <a:off x="9144000" y="0"/>
-            <a:ext cx="16920" cy="6856560"/>
+            <a:ext cx="16560" cy="6856200"/>
           </a:xfrm>
           <a:prstGeom prst="rect">
             <a:avLst/>
@@ -8557,6 +8614,11 @@
             <a:noAutofit/>
           </a:bodyPr>
           <a:p>
+            <a:pPr>
+              <a:lnSpc>
+                <a:spcPct val="100000"/>
+              </a:lnSpc>
+            </a:pPr>
             <a:endParaRPr b="0" lang="en-US" sz="1800" spc="-1" strike="noStrike">
               <a:solidFill>
                 <a:schemeClr val="lt1"/>
@@ -8576,7 +8638,7 @@
         <p:spPr>
           <a:xfrm>
             <a:off x="10058400" y="0"/>
-            <a:ext cx="16920" cy="6856560"/>
+            <a:ext cx="16560" cy="6856200"/>
           </a:xfrm>
           <a:prstGeom prst="rect">
             <a:avLst/>
@@ -8612,6 +8674,11 @@
             <a:noAutofit/>
           </a:bodyPr>
           <a:p>
+            <a:pPr>
+              <a:lnSpc>
+                <a:spcPct val="100000"/>
+              </a:lnSpc>
+            </a:pPr>
             <a:endParaRPr b="0" lang="en-US" sz="1800" spc="-1" strike="noStrike">
               <a:solidFill>
                 <a:schemeClr val="lt1"/>
@@ -8631,7 +8698,7 @@
         <p:spPr>
           <a:xfrm>
             <a:off x="10972800" y="0"/>
-            <a:ext cx="16920" cy="6856560"/>
+            <a:ext cx="16560" cy="6856200"/>
           </a:xfrm>
           <a:prstGeom prst="rect">
             <a:avLst/>
@@ -8667,6 +8734,11 @@
             <a:noAutofit/>
           </a:bodyPr>
           <a:p>
+            <a:pPr>
+              <a:lnSpc>
+                <a:spcPct val="100000"/>
+              </a:lnSpc>
+            </a:pPr>
             <a:endParaRPr b="0" lang="en-US" sz="1800" spc="-1" strike="noStrike">
               <a:solidFill>
                 <a:schemeClr val="lt1"/>
@@ -8686,7 +8758,7 @@
         <p:spPr>
           <a:xfrm>
             <a:off x="11887200" y="0"/>
-            <a:ext cx="16920" cy="6856560"/>
+            <a:ext cx="16560" cy="6856200"/>
           </a:xfrm>
           <a:prstGeom prst="rect">
             <a:avLst/>
@@ -8722,6 +8794,11 @@
             <a:noAutofit/>
           </a:bodyPr>
           <a:p>
+            <a:pPr>
+              <a:lnSpc>
+                <a:spcPct val="100000"/>
+              </a:lnSpc>
+            </a:pPr>
             <a:endParaRPr b="0" lang="en-US" sz="1800" spc="-1" strike="noStrike">
               <a:solidFill>
                 <a:schemeClr val="lt1"/>
@@ -8741,7 +8818,7 @@
         <p:spPr>
           <a:xfrm>
             <a:off x="0" y="0"/>
-            <a:ext cx="318600" cy="6856560"/>
+            <a:ext cx="318240" cy="6856200"/>
           </a:xfrm>
           <a:prstGeom prst="rect">
             <a:avLst/>
@@ -8777,6 +8854,11 @@
             <a:noAutofit/>
           </a:bodyPr>
           <a:p>
+            <a:pPr>
+              <a:lnSpc>
+                <a:spcPct val="100000"/>
+              </a:lnSpc>
+            </a:pPr>
             <a:endParaRPr b="0" lang="en-US" sz="1800" spc="-1" strike="noStrike">
               <a:solidFill>
                 <a:schemeClr val="lt1"/>
@@ -8796,7 +8878,7 @@
         <p:spPr>
           <a:xfrm>
             <a:off x="9875520" y="365760"/>
-            <a:ext cx="2010240" cy="501480"/>
+            <a:ext cx="2009880" cy="501120"/>
           </a:xfrm>
           <a:prstGeom prst="roundRect">
             <a:avLst>
@@ -9001,7 +9083,7 @@
         <p:spPr>
           <a:xfrm>
             <a:off x="987480" y="3182040"/>
-            <a:ext cx="3290400" cy="2741760"/>
+            <a:ext cx="3290040" cy="2741400"/>
           </a:xfrm>
           <a:prstGeom prst="roundRect">
             <a:avLst>
@@ -9039,6 +9121,11 @@
             <a:noAutofit/>
           </a:bodyPr>
           <a:p>
+            <a:pPr>
+              <a:lnSpc>
+                <a:spcPct val="100000"/>
+              </a:lnSpc>
+            </a:pPr>
             <a:endParaRPr b="0" lang="en-US" sz="1800" spc="-1" strike="noStrike">
               <a:solidFill>
                 <a:schemeClr val="lt1"/>
@@ -9058,7 +9145,7 @@
         <p:spPr>
           <a:xfrm>
             <a:off x="914400" y="3108960"/>
-            <a:ext cx="3290400" cy="3291480"/>
+            <a:ext cx="3290040" cy="3291120"/>
           </a:xfrm>
           <a:prstGeom prst="roundRect">
             <a:avLst>
@@ -9391,7 +9478,7 @@
         <p:spPr>
           <a:xfrm>
             <a:off x="4507920" y="3182040"/>
-            <a:ext cx="3290400" cy="2741760"/>
+            <a:ext cx="3290040" cy="2741400"/>
           </a:xfrm>
           <a:prstGeom prst="roundRect">
             <a:avLst>
@@ -9429,6 +9516,11 @@
             <a:noAutofit/>
           </a:bodyPr>
           <a:p>
+            <a:pPr>
+              <a:lnSpc>
+                <a:spcPct val="100000"/>
+              </a:lnSpc>
+            </a:pPr>
             <a:endParaRPr b="0" lang="en-US" sz="1800" spc="-1" strike="noStrike">
               <a:solidFill>
                 <a:schemeClr val="lt1"/>
@@ -9448,7 +9540,7 @@
         <p:spPr>
           <a:xfrm>
             <a:off x="4434840" y="3108960"/>
-            <a:ext cx="3290400" cy="2741760"/>
+            <a:ext cx="3290040" cy="2741400"/>
           </a:xfrm>
           <a:prstGeom prst="roundRect">
             <a:avLst>
@@ -9706,7 +9798,7 @@
         <p:spPr>
           <a:xfrm>
             <a:off x="8028360" y="3182040"/>
-            <a:ext cx="3290400" cy="2741760"/>
+            <a:ext cx="3290040" cy="2741400"/>
           </a:xfrm>
           <a:prstGeom prst="roundRect">
             <a:avLst>
@@ -9744,6 +9836,11 @@
             <a:noAutofit/>
           </a:bodyPr>
           <a:p>
+            <a:pPr>
+              <a:lnSpc>
+                <a:spcPct val="100000"/>
+              </a:lnSpc>
+            </a:pPr>
             <a:endParaRPr b="0" lang="en-US" sz="1800" spc="-1" strike="noStrike">
               <a:solidFill>
                 <a:schemeClr val="lt1"/>
@@ -9763,7 +9860,7 @@
         <p:spPr>
           <a:xfrm>
             <a:off x="7955280" y="3108960"/>
-            <a:ext cx="3474360" cy="3291480"/>
+            <a:ext cx="3474000" cy="3291120"/>
           </a:xfrm>
           <a:prstGeom prst="roundRect">
             <a:avLst>
@@ -10100,7 +10197,7 @@
         <p:spPr>
           <a:xfrm>
             <a:off x="4600080" y="6446520"/>
-            <a:ext cx="3051360" cy="363960"/>
+            <a:ext cx="3051000" cy="363960"/>
           </a:xfrm>
           <a:prstGeom prst="rect">
             <a:avLst/>
@@ -10184,7 +10281,7 @@
         <p:spPr>
           <a:xfrm>
             <a:off x="0" y="0"/>
-            <a:ext cx="12187440" cy="6856560"/>
+            <a:ext cx="12187080" cy="6856200"/>
           </a:xfrm>
           <a:prstGeom prst="rect">
             <a:avLst/>
@@ -10220,6 +10317,11 @@
             <a:noAutofit/>
           </a:bodyPr>
           <a:p>
+            <a:pPr>
+              <a:lnSpc>
+                <a:spcPct val="100000"/>
+              </a:lnSpc>
+            </a:pPr>
             <a:endParaRPr b="0" lang="en-US" sz="1800" spc="-1" strike="noStrike">
               <a:solidFill>
                 <a:schemeClr val="lt1"/>
@@ -10239,7 +10341,7 @@
         <p:spPr>
           <a:xfrm>
             <a:off x="0" y="0"/>
-            <a:ext cx="16920" cy="6856560"/>
+            <a:ext cx="16560" cy="6856200"/>
           </a:xfrm>
           <a:prstGeom prst="rect">
             <a:avLst/>
@@ -10275,6 +10377,11 @@
             <a:noAutofit/>
           </a:bodyPr>
           <a:p>
+            <a:pPr>
+              <a:lnSpc>
+                <a:spcPct val="100000"/>
+              </a:lnSpc>
+            </a:pPr>
             <a:endParaRPr b="0" lang="en-US" sz="1800" spc="-1" strike="noStrike">
               <a:solidFill>
                 <a:schemeClr val="lt1"/>
@@ -10294,7 +10401,7 @@
         <p:spPr>
           <a:xfrm>
             <a:off x="914400" y="0"/>
-            <a:ext cx="16920" cy="6856560"/>
+            <a:ext cx="16560" cy="6856200"/>
           </a:xfrm>
           <a:prstGeom prst="rect">
             <a:avLst/>
@@ -10330,6 +10437,11 @@
             <a:noAutofit/>
           </a:bodyPr>
           <a:p>
+            <a:pPr>
+              <a:lnSpc>
+                <a:spcPct val="100000"/>
+              </a:lnSpc>
+            </a:pPr>
             <a:endParaRPr b="0" lang="en-US" sz="1800" spc="-1" strike="noStrike">
               <a:solidFill>
                 <a:schemeClr val="lt1"/>
@@ -10349,7 +10461,7 @@
         <p:spPr>
           <a:xfrm>
             <a:off x="1828800" y="0"/>
-            <a:ext cx="16920" cy="6856560"/>
+            <a:ext cx="16560" cy="6856200"/>
           </a:xfrm>
           <a:prstGeom prst="rect">
             <a:avLst/>
@@ -10385,6 +10497,11 @@
             <a:noAutofit/>
           </a:bodyPr>
           <a:p>
+            <a:pPr>
+              <a:lnSpc>
+                <a:spcPct val="100000"/>
+              </a:lnSpc>
+            </a:pPr>
             <a:endParaRPr b="0" lang="en-US" sz="1800" spc="-1" strike="noStrike">
               <a:solidFill>
                 <a:schemeClr val="lt1"/>
@@ -10404,7 +10521,7 @@
         <p:spPr>
           <a:xfrm>
             <a:off x="2743200" y="0"/>
-            <a:ext cx="16920" cy="6856560"/>
+            <a:ext cx="16560" cy="6856200"/>
           </a:xfrm>
           <a:prstGeom prst="rect">
             <a:avLst/>
@@ -10440,6 +10557,11 @@
             <a:noAutofit/>
           </a:bodyPr>
           <a:p>
+            <a:pPr>
+              <a:lnSpc>
+                <a:spcPct val="100000"/>
+              </a:lnSpc>
+            </a:pPr>
             <a:endParaRPr b="0" lang="en-US" sz="1800" spc="-1" strike="noStrike">
               <a:solidFill>
                 <a:schemeClr val="lt1"/>
@@ -10459,7 +10581,7 @@
         <p:spPr>
           <a:xfrm>
             <a:off x="3657600" y="0"/>
-            <a:ext cx="16920" cy="6856560"/>
+            <a:ext cx="16560" cy="6856200"/>
           </a:xfrm>
           <a:prstGeom prst="rect">
             <a:avLst/>
@@ -10495,6 +10617,11 @@
             <a:noAutofit/>
           </a:bodyPr>
           <a:p>
+            <a:pPr>
+              <a:lnSpc>
+                <a:spcPct val="100000"/>
+              </a:lnSpc>
+            </a:pPr>
             <a:endParaRPr b="0" lang="en-US" sz="1800" spc="-1" strike="noStrike">
               <a:solidFill>
                 <a:schemeClr val="lt1"/>
@@ -10514,7 +10641,7 @@
         <p:spPr>
           <a:xfrm>
             <a:off x="4572000" y="0"/>
-            <a:ext cx="16920" cy="6856560"/>
+            <a:ext cx="16560" cy="6856200"/>
           </a:xfrm>
           <a:prstGeom prst="rect">
             <a:avLst/>
@@ -10550,6 +10677,11 @@
             <a:noAutofit/>
           </a:bodyPr>
           <a:p>
+            <a:pPr>
+              <a:lnSpc>
+                <a:spcPct val="100000"/>
+              </a:lnSpc>
+            </a:pPr>
             <a:endParaRPr b="0" lang="en-US" sz="1800" spc="-1" strike="noStrike">
               <a:solidFill>
                 <a:schemeClr val="lt1"/>
@@ -10569,7 +10701,7 @@
         <p:spPr>
           <a:xfrm>
             <a:off x="5486400" y="0"/>
-            <a:ext cx="16920" cy="6856560"/>
+            <a:ext cx="16560" cy="6856200"/>
           </a:xfrm>
           <a:prstGeom prst="rect">
             <a:avLst/>
@@ -10605,6 +10737,11 @@
             <a:noAutofit/>
           </a:bodyPr>
           <a:p>
+            <a:pPr>
+              <a:lnSpc>
+                <a:spcPct val="100000"/>
+              </a:lnSpc>
+            </a:pPr>
             <a:endParaRPr b="0" lang="en-US" sz="1800" spc="-1" strike="noStrike">
               <a:solidFill>
                 <a:schemeClr val="lt1"/>
@@ -10624,7 +10761,7 @@
         <p:spPr>
           <a:xfrm>
             <a:off x="6400800" y="0"/>
-            <a:ext cx="16920" cy="6856560"/>
+            <a:ext cx="16560" cy="6856200"/>
           </a:xfrm>
           <a:prstGeom prst="rect">
             <a:avLst/>
@@ -10660,6 +10797,11 @@
             <a:noAutofit/>
           </a:bodyPr>
           <a:p>
+            <a:pPr>
+              <a:lnSpc>
+                <a:spcPct val="100000"/>
+              </a:lnSpc>
+            </a:pPr>
             <a:endParaRPr b="0" lang="en-US" sz="1800" spc="-1" strike="noStrike">
               <a:solidFill>
                 <a:schemeClr val="lt1"/>
@@ -10679,7 +10821,7 @@
         <p:spPr>
           <a:xfrm>
             <a:off x="7315200" y="0"/>
-            <a:ext cx="16920" cy="6856560"/>
+            <a:ext cx="16560" cy="6856200"/>
           </a:xfrm>
           <a:prstGeom prst="rect">
             <a:avLst/>
@@ -10715,6 +10857,11 @@
             <a:noAutofit/>
           </a:bodyPr>
           <a:p>
+            <a:pPr>
+              <a:lnSpc>
+                <a:spcPct val="100000"/>
+              </a:lnSpc>
+            </a:pPr>
             <a:endParaRPr b="0" lang="en-US" sz="1800" spc="-1" strike="noStrike">
               <a:solidFill>
                 <a:schemeClr val="lt1"/>
@@ -10734,7 +10881,7 @@
         <p:spPr>
           <a:xfrm>
             <a:off x="8229600" y="0"/>
-            <a:ext cx="16920" cy="6856560"/>
+            <a:ext cx="16560" cy="6856200"/>
           </a:xfrm>
           <a:prstGeom prst="rect">
             <a:avLst/>
@@ -10770,6 +10917,11 @@
             <a:noAutofit/>
           </a:bodyPr>
           <a:p>
+            <a:pPr>
+              <a:lnSpc>
+                <a:spcPct val="100000"/>
+              </a:lnSpc>
+            </a:pPr>
             <a:endParaRPr b="0" lang="en-US" sz="1800" spc="-1" strike="noStrike">
               <a:solidFill>
                 <a:schemeClr val="lt1"/>
@@ -10789,7 +10941,7 @@
         <p:spPr>
           <a:xfrm>
             <a:off x="9144000" y="0"/>
-            <a:ext cx="16920" cy="6856560"/>
+            <a:ext cx="16560" cy="6856200"/>
           </a:xfrm>
           <a:prstGeom prst="rect">
             <a:avLst/>
@@ -10825,6 +10977,11 @@
             <a:noAutofit/>
           </a:bodyPr>
           <a:p>
+            <a:pPr>
+              <a:lnSpc>
+                <a:spcPct val="100000"/>
+              </a:lnSpc>
+            </a:pPr>
             <a:endParaRPr b="0" lang="en-US" sz="1800" spc="-1" strike="noStrike">
               <a:solidFill>
                 <a:schemeClr val="lt1"/>
@@ -10844,7 +11001,7 @@
         <p:spPr>
           <a:xfrm>
             <a:off x="10058400" y="0"/>
-            <a:ext cx="16920" cy="6856560"/>
+            <a:ext cx="16560" cy="6856200"/>
           </a:xfrm>
           <a:prstGeom prst="rect">
             <a:avLst/>
@@ -10880,6 +11037,11 @@
             <a:noAutofit/>
           </a:bodyPr>
           <a:p>
+            <a:pPr>
+              <a:lnSpc>
+                <a:spcPct val="100000"/>
+              </a:lnSpc>
+            </a:pPr>
             <a:endParaRPr b="0" lang="en-US" sz="1800" spc="-1" strike="noStrike">
               <a:solidFill>
                 <a:schemeClr val="lt1"/>
@@ -10899,7 +11061,7 @@
         <p:spPr>
           <a:xfrm>
             <a:off x="10972800" y="0"/>
-            <a:ext cx="16920" cy="6856560"/>
+            <a:ext cx="16560" cy="6856200"/>
           </a:xfrm>
           <a:prstGeom prst="rect">
             <a:avLst/>
@@ -10935,6 +11097,11 @@
             <a:noAutofit/>
           </a:bodyPr>
           <a:p>
+            <a:pPr>
+              <a:lnSpc>
+                <a:spcPct val="100000"/>
+              </a:lnSpc>
+            </a:pPr>
             <a:endParaRPr b="0" lang="en-US" sz="1800" spc="-1" strike="noStrike">
               <a:solidFill>
                 <a:schemeClr val="lt1"/>
@@ -10954,7 +11121,7 @@
         <p:spPr>
           <a:xfrm>
             <a:off x="11887200" y="0"/>
-            <a:ext cx="16920" cy="6856560"/>
+            <a:ext cx="16560" cy="6856200"/>
           </a:xfrm>
           <a:prstGeom prst="rect">
             <a:avLst/>
@@ -10990,6 +11157,11 @@
             <a:noAutofit/>
           </a:bodyPr>
           <a:p>
+            <a:pPr>
+              <a:lnSpc>
+                <a:spcPct val="100000"/>
+              </a:lnSpc>
+            </a:pPr>
             <a:endParaRPr b="0" lang="en-US" sz="1800" spc="-1" strike="noStrike">
               <a:solidFill>
                 <a:schemeClr val="lt1"/>
@@ -11009,7 +11181,7 @@
         <p:spPr>
           <a:xfrm>
             <a:off x="0" y="0"/>
-            <a:ext cx="318600" cy="6856560"/>
+            <a:ext cx="318240" cy="6856200"/>
           </a:xfrm>
           <a:prstGeom prst="rect">
             <a:avLst/>
@@ -11045,6 +11217,11 @@
             <a:noAutofit/>
           </a:bodyPr>
           <a:p>
+            <a:pPr>
+              <a:lnSpc>
+                <a:spcPct val="100000"/>
+              </a:lnSpc>
+            </a:pPr>
             <a:endParaRPr b="0" lang="en-US" sz="1800" spc="-1" strike="noStrike">
               <a:solidFill>
                 <a:schemeClr val="lt1"/>
@@ -11064,7 +11241,7 @@
         <p:spPr>
           <a:xfrm>
             <a:off x="9875520" y="365760"/>
-            <a:ext cx="2010240" cy="501480"/>
+            <a:ext cx="2009880" cy="501120"/>
           </a:xfrm>
           <a:prstGeom prst="roundRect">
             <a:avLst>
@@ -11246,7 +11423,7 @@
         <p:spPr>
           <a:xfrm>
             <a:off x="987480" y="3182040"/>
-            <a:ext cx="3290400" cy="2741760"/>
+            <a:ext cx="3290040" cy="2741400"/>
           </a:xfrm>
           <a:prstGeom prst="roundRect">
             <a:avLst>
@@ -11284,6 +11461,11 @@
             <a:noAutofit/>
           </a:bodyPr>
           <a:p>
+            <a:pPr>
+              <a:lnSpc>
+                <a:spcPct val="100000"/>
+              </a:lnSpc>
+            </a:pPr>
             <a:endParaRPr b="0" lang="en-US" sz="1800" spc="-1" strike="noStrike">
               <a:solidFill>
                 <a:schemeClr val="lt1"/>
@@ -11303,7 +11485,7 @@
         <p:spPr>
           <a:xfrm>
             <a:off x="931680" y="2925720"/>
-            <a:ext cx="3183120" cy="3703680"/>
+            <a:ext cx="3182760" cy="3703320"/>
           </a:xfrm>
           <a:prstGeom prst="roundRect">
             <a:avLst>
@@ -11587,7 +11769,7 @@
         <p:spPr>
           <a:xfrm>
             <a:off x="4507920" y="3182040"/>
-            <a:ext cx="3290400" cy="2741760"/>
+            <a:ext cx="3290040" cy="2741400"/>
           </a:xfrm>
           <a:prstGeom prst="roundRect">
             <a:avLst>
@@ -11625,6 +11807,11 @@
             <a:noAutofit/>
           </a:bodyPr>
           <a:p>
+            <a:pPr>
+              <a:lnSpc>
+                <a:spcPct val="100000"/>
+              </a:lnSpc>
+            </a:pPr>
             <a:endParaRPr b="0" lang="en-US" sz="1800" spc="-1" strike="noStrike">
               <a:solidFill>
                 <a:schemeClr val="lt1"/>
@@ -11644,7 +11831,7 @@
         <p:spPr>
           <a:xfrm>
             <a:off x="4434840" y="3108960"/>
-            <a:ext cx="3290400" cy="3062880"/>
+            <a:ext cx="3290040" cy="3062520"/>
           </a:xfrm>
           <a:prstGeom prst="roundRect">
             <a:avLst>
@@ -11942,7 +12129,7 @@
         <p:spPr>
           <a:xfrm>
             <a:off x="8028360" y="3182040"/>
-            <a:ext cx="3290400" cy="2741760"/>
+            <a:ext cx="3290040" cy="2741400"/>
           </a:xfrm>
           <a:prstGeom prst="roundRect">
             <a:avLst>
@@ -11980,6 +12167,11 @@
             <a:noAutofit/>
           </a:bodyPr>
           <a:p>
+            <a:pPr>
+              <a:lnSpc>
+                <a:spcPct val="100000"/>
+              </a:lnSpc>
+            </a:pPr>
             <a:endParaRPr b="0" lang="en-US" sz="1800" spc="-1" strike="noStrike">
               <a:solidFill>
                 <a:schemeClr val="lt1"/>
@@ -11999,7 +12191,7 @@
         <p:spPr>
           <a:xfrm>
             <a:off x="7955280" y="2971800"/>
-            <a:ext cx="3703320" cy="3428640"/>
+            <a:ext cx="3702960" cy="3428280"/>
           </a:xfrm>
           <a:prstGeom prst="roundRect">
             <a:avLst>
@@ -12366,7 +12558,7 @@
         <p:spPr>
           <a:xfrm>
             <a:off x="4600080" y="6446520"/>
-            <a:ext cx="3051360" cy="363960"/>
+            <a:ext cx="3051000" cy="363960"/>
           </a:xfrm>
           <a:prstGeom prst="rect">
             <a:avLst/>
@@ -12450,7 +12642,7 @@
         <p:spPr>
           <a:xfrm>
             <a:off x="0" y="0"/>
-            <a:ext cx="12187440" cy="6856560"/>
+            <a:ext cx="12187080" cy="6856200"/>
           </a:xfrm>
           <a:prstGeom prst="rect">
             <a:avLst/>
@@ -12486,6 +12678,11 @@
             <a:noAutofit/>
           </a:bodyPr>
           <a:p>
+            <a:pPr>
+              <a:lnSpc>
+                <a:spcPct val="100000"/>
+              </a:lnSpc>
+            </a:pPr>
             <a:endParaRPr b="0" lang="en-US" sz="1800" spc="-1" strike="noStrike">
               <a:solidFill>
                 <a:schemeClr val="lt1"/>
@@ -12505,7 +12702,7 @@
         <p:spPr>
           <a:xfrm>
             <a:off x="0" y="0"/>
-            <a:ext cx="16920" cy="6856560"/>
+            <a:ext cx="16560" cy="6856200"/>
           </a:xfrm>
           <a:prstGeom prst="rect">
             <a:avLst/>
@@ -12541,6 +12738,11 @@
             <a:noAutofit/>
           </a:bodyPr>
           <a:p>
+            <a:pPr>
+              <a:lnSpc>
+                <a:spcPct val="100000"/>
+              </a:lnSpc>
+            </a:pPr>
             <a:endParaRPr b="0" lang="en-US" sz="1800" spc="-1" strike="noStrike">
               <a:solidFill>
                 <a:schemeClr val="lt1"/>
@@ -12560,7 +12762,7 @@
         <p:spPr>
           <a:xfrm>
             <a:off x="914400" y="0"/>
-            <a:ext cx="16920" cy="6856560"/>
+            <a:ext cx="16560" cy="6856200"/>
           </a:xfrm>
           <a:prstGeom prst="rect">
             <a:avLst/>
@@ -12596,6 +12798,11 @@
             <a:noAutofit/>
           </a:bodyPr>
           <a:p>
+            <a:pPr>
+              <a:lnSpc>
+                <a:spcPct val="100000"/>
+              </a:lnSpc>
+            </a:pPr>
             <a:endParaRPr b="0" lang="en-US" sz="1800" spc="-1" strike="noStrike">
               <a:solidFill>
                 <a:schemeClr val="lt1"/>
@@ -12615,7 +12822,7 @@
         <p:spPr>
           <a:xfrm>
             <a:off x="1828800" y="0"/>
-            <a:ext cx="16920" cy="6856560"/>
+            <a:ext cx="16560" cy="6856200"/>
           </a:xfrm>
           <a:prstGeom prst="rect">
             <a:avLst/>
@@ -12651,6 +12858,11 @@
             <a:noAutofit/>
           </a:bodyPr>
           <a:p>
+            <a:pPr>
+              <a:lnSpc>
+                <a:spcPct val="100000"/>
+              </a:lnSpc>
+            </a:pPr>
             <a:endParaRPr b="0" lang="en-US" sz="1800" spc="-1" strike="noStrike">
               <a:solidFill>
                 <a:schemeClr val="lt1"/>
@@ -12670,7 +12882,7 @@
         <p:spPr>
           <a:xfrm>
             <a:off x="2743200" y="0"/>
-            <a:ext cx="16920" cy="6856560"/>
+            <a:ext cx="16560" cy="6856200"/>
           </a:xfrm>
           <a:prstGeom prst="rect">
             <a:avLst/>
@@ -12706,6 +12918,11 @@
             <a:noAutofit/>
           </a:bodyPr>
           <a:p>
+            <a:pPr>
+              <a:lnSpc>
+                <a:spcPct val="100000"/>
+              </a:lnSpc>
+            </a:pPr>
             <a:endParaRPr b="0" lang="en-US" sz="1800" spc="-1" strike="noStrike">
               <a:solidFill>
                 <a:schemeClr val="lt1"/>
@@ -12725,7 +12942,7 @@
         <p:spPr>
           <a:xfrm>
             <a:off x="3657600" y="0"/>
-            <a:ext cx="16920" cy="6856560"/>
+            <a:ext cx="16560" cy="6856200"/>
           </a:xfrm>
           <a:prstGeom prst="rect">
             <a:avLst/>
@@ -12761,6 +12978,11 @@
             <a:noAutofit/>
           </a:bodyPr>
           <a:p>
+            <a:pPr>
+              <a:lnSpc>
+                <a:spcPct val="100000"/>
+              </a:lnSpc>
+            </a:pPr>
             <a:endParaRPr b="0" lang="en-US" sz="1800" spc="-1" strike="noStrike">
               <a:solidFill>
                 <a:schemeClr val="lt1"/>
@@ -12780,7 +13002,7 @@
         <p:spPr>
           <a:xfrm>
             <a:off x="4572000" y="0"/>
-            <a:ext cx="16920" cy="6856560"/>
+            <a:ext cx="16560" cy="6856200"/>
           </a:xfrm>
           <a:prstGeom prst="rect">
             <a:avLst/>
@@ -12816,6 +13038,11 @@
             <a:noAutofit/>
           </a:bodyPr>
           <a:p>
+            <a:pPr>
+              <a:lnSpc>
+                <a:spcPct val="100000"/>
+              </a:lnSpc>
+            </a:pPr>
             <a:endParaRPr b="0" lang="en-US" sz="1800" spc="-1" strike="noStrike">
               <a:solidFill>
                 <a:schemeClr val="lt1"/>
@@ -12835,7 +13062,7 @@
         <p:spPr>
           <a:xfrm>
             <a:off x="5486400" y="0"/>
-            <a:ext cx="16920" cy="6856560"/>
+            <a:ext cx="16560" cy="6856200"/>
           </a:xfrm>
           <a:prstGeom prst="rect">
             <a:avLst/>
@@ -12871,6 +13098,11 @@
             <a:noAutofit/>
           </a:bodyPr>
           <a:p>
+            <a:pPr>
+              <a:lnSpc>
+                <a:spcPct val="100000"/>
+              </a:lnSpc>
+            </a:pPr>
             <a:endParaRPr b="0" lang="en-US" sz="1800" spc="-1" strike="noStrike">
               <a:solidFill>
                 <a:schemeClr val="lt1"/>
@@ -12890,7 +13122,7 @@
         <p:spPr>
           <a:xfrm>
             <a:off x="6400800" y="0"/>
-            <a:ext cx="16920" cy="6856560"/>
+            <a:ext cx="16560" cy="6856200"/>
           </a:xfrm>
           <a:prstGeom prst="rect">
             <a:avLst/>
@@ -12926,6 +13158,11 @@
             <a:noAutofit/>
           </a:bodyPr>
           <a:p>
+            <a:pPr>
+              <a:lnSpc>
+                <a:spcPct val="100000"/>
+              </a:lnSpc>
+            </a:pPr>
             <a:endParaRPr b="0" lang="en-US" sz="1800" spc="-1" strike="noStrike">
               <a:solidFill>
                 <a:schemeClr val="lt1"/>
@@ -12945,7 +13182,7 @@
         <p:spPr>
           <a:xfrm>
             <a:off x="7315200" y="0"/>
-            <a:ext cx="16920" cy="6856560"/>
+            <a:ext cx="16560" cy="6856200"/>
           </a:xfrm>
           <a:prstGeom prst="rect">
             <a:avLst/>
@@ -12981,6 +13218,11 @@
             <a:noAutofit/>
           </a:bodyPr>
           <a:p>
+            <a:pPr>
+              <a:lnSpc>
+                <a:spcPct val="100000"/>
+              </a:lnSpc>
+            </a:pPr>
             <a:endParaRPr b="0" lang="en-US" sz="1800" spc="-1" strike="noStrike">
               <a:solidFill>
                 <a:schemeClr val="lt1"/>
@@ -13000,7 +13242,7 @@
         <p:spPr>
           <a:xfrm>
             <a:off x="8229600" y="0"/>
-            <a:ext cx="16920" cy="6856560"/>
+            <a:ext cx="16560" cy="6856200"/>
           </a:xfrm>
           <a:prstGeom prst="rect">
             <a:avLst/>
@@ -13036,6 +13278,11 @@
             <a:noAutofit/>
           </a:bodyPr>
           <a:p>
+            <a:pPr>
+              <a:lnSpc>
+                <a:spcPct val="100000"/>
+              </a:lnSpc>
+            </a:pPr>
             <a:endParaRPr b="0" lang="en-US" sz="1800" spc="-1" strike="noStrike">
               <a:solidFill>
                 <a:schemeClr val="lt1"/>
@@ -13055,7 +13302,7 @@
         <p:spPr>
           <a:xfrm>
             <a:off x="9144000" y="0"/>
-            <a:ext cx="16920" cy="6856560"/>
+            <a:ext cx="16560" cy="6856200"/>
           </a:xfrm>
           <a:prstGeom prst="rect">
             <a:avLst/>
@@ -13091,6 +13338,11 @@
             <a:noAutofit/>
           </a:bodyPr>
           <a:p>
+            <a:pPr>
+              <a:lnSpc>
+                <a:spcPct val="100000"/>
+              </a:lnSpc>
+            </a:pPr>
             <a:endParaRPr b="0" lang="en-US" sz="1800" spc="-1" strike="noStrike">
               <a:solidFill>
                 <a:schemeClr val="lt1"/>
@@ -13110,7 +13362,7 @@
         <p:spPr>
           <a:xfrm>
             <a:off x="10058400" y="0"/>
-            <a:ext cx="16920" cy="6856560"/>
+            <a:ext cx="16560" cy="6856200"/>
           </a:xfrm>
           <a:prstGeom prst="rect">
             <a:avLst/>
@@ -13146,6 +13398,11 @@
             <a:noAutofit/>
           </a:bodyPr>
           <a:p>
+            <a:pPr>
+              <a:lnSpc>
+                <a:spcPct val="100000"/>
+              </a:lnSpc>
+            </a:pPr>
             <a:endParaRPr b="0" lang="en-US" sz="1800" spc="-1" strike="noStrike">
               <a:solidFill>
                 <a:schemeClr val="lt1"/>
@@ -13165,7 +13422,7 @@
         <p:spPr>
           <a:xfrm>
             <a:off x="10972800" y="0"/>
-            <a:ext cx="16920" cy="6856560"/>
+            <a:ext cx="16560" cy="6856200"/>
           </a:xfrm>
           <a:prstGeom prst="rect">
             <a:avLst/>
@@ -13201,6 +13458,11 @@
             <a:noAutofit/>
           </a:bodyPr>
           <a:p>
+            <a:pPr>
+              <a:lnSpc>
+                <a:spcPct val="100000"/>
+              </a:lnSpc>
+            </a:pPr>
             <a:endParaRPr b="0" lang="en-US" sz="1800" spc="-1" strike="noStrike">
               <a:solidFill>
                 <a:schemeClr val="lt1"/>
@@ -13220,7 +13482,7 @@
         <p:spPr>
           <a:xfrm>
             <a:off x="11887200" y="0"/>
-            <a:ext cx="16920" cy="6856560"/>
+            <a:ext cx="16560" cy="6856200"/>
           </a:xfrm>
           <a:prstGeom prst="rect">
             <a:avLst/>
@@ -13256,6 +13518,11 @@
             <a:noAutofit/>
           </a:bodyPr>
           <a:p>
+            <a:pPr>
+              <a:lnSpc>
+                <a:spcPct val="100000"/>
+              </a:lnSpc>
+            </a:pPr>
             <a:endParaRPr b="0" lang="en-US" sz="1800" spc="-1" strike="noStrike">
               <a:solidFill>
                 <a:schemeClr val="lt1"/>
@@ -13275,7 +13542,7 @@
         <p:spPr>
           <a:xfrm>
             <a:off x="0" y="0"/>
-            <a:ext cx="318600" cy="6856560"/>
+            <a:ext cx="318240" cy="6856200"/>
           </a:xfrm>
           <a:prstGeom prst="rect">
             <a:avLst/>
@@ -13311,6 +13578,11 @@
             <a:noAutofit/>
           </a:bodyPr>
           <a:p>
+            <a:pPr>
+              <a:lnSpc>
+                <a:spcPct val="100000"/>
+              </a:lnSpc>
+            </a:pPr>
             <a:endParaRPr b="0" lang="en-US" sz="1800" spc="-1" strike="noStrike">
               <a:solidFill>
                 <a:schemeClr val="lt1"/>
@@ -13330,7 +13602,7 @@
         <p:spPr>
           <a:xfrm>
             <a:off x="9875520" y="365760"/>
-            <a:ext cx="2010240" cy="501480"/>
+            <a:ext cx="2009880" cy="501120"/>
           </a:xfrm>
           <a:prstGeom prst="roundRect">
             <a:avLst>
@@ -13404,7 +13676,7 @@
         <p:spPr>
           <a:xfrm>
             <a:off x="1357920" y="1005840"/>
-            <a:ext cx="8256600" cy="699840"/>
+            <a:ext cx="8256240" cy="699120"/>
           </a:xfrm>
           <a:prstGeom prst="rect">
             <a:avLst/>
@@ -13458,7 +13730,7 @@
         <p:spPr>
           <a:xfrm>
             <a:off x="1810800" y="1846080"/>
-            <a:ext cx="7409520" cy="668520"/>
+            <a:ext cx="7409160" cy="668520"/>
           </a:xfrm>
           <a:prstGeom prst="rect">
             <a:avLst/>
@@ -13535,7 +13807,7 @@
         <p:spPr>
           <a:xfrm>
             <a:off x="987480" y="3182040"/>
-            <a:ext cx="3290400" cy="2741760"/>
+            <a:ext cx="3290040" cy="2741400"/>
           </a:xfrm>
           <a:prstGeom prst="roundRect">
             <a:avLst>
@@ -13573,6 +13845,11 @@
             <a:noAutofit/>
           </a:bodyPr>
           <a:p>
+            <a:pPr>
+              <a:lnSpc>
+                <a:spcPct val="100000"/>
+              </a:lnSpc>
+            </a:pPr>
             <a:endParaRPr b="0" lang="en-US" sz="1800" spc="-1" strike="noStrike">
               <a:solidFill>
                 <a:schemeClr val="lt1"/>
@@ -13592,7 +13869,7 @@
         <p:spPr>
           <a:xfrm>
             <a:off x="685800" y="2743200"/>
-            <a:ext cx="3519000" cy="3657600"/>
+            <a:ext cx="3518640" cy="3657240"/>
           </a:xfrm>
           <a:prstGeom prst="roundRect">
             <a:avLst>
@@ -13866,7 +14143,7 @@
         <p:spPr>
           <a:xfrm>
             <a:off x="4507920" y="3182040"/>
-            <a:ext cx="3290400" cy="2741760"/>
+            <a:ext cx="3290040" cy="2741400"/>
           </a:xfrm>
           <a:prstGeom prst="roundRect">
             <a:avLst>
@@ -13904,6 +14181,11 @@
             <a:noAutofit/>
           </a:bodyPr>
           <a:p>
+            <a:pPr>
+              <a:lnSpc>
+                <a:spcPct val="100000"/>
+              </a:lnSpc>
+            </a:pPr>
             <a:endParaRPr b="0" lang="en-US" sz="1800" spc="-1" strike="noStrike">
               <a:solidFill>
                 <a:schemeClr val="lt1"/>
@@ -13923,7 +14205,7 @@
         <p:spPr>
           <a:xfrm>
             <a:off x="4343400" y="2743200"/>
-            <a:ext cx="3381840" cy="3657240"/>
+            <a:ext cx="3381480" cy="3656880"/>
           </a:xfrm>
           <a:prstGeom prst="roundRect">
             <a:avLst>
@@ -14429,7 +14711,7 @@
         <p:spPr>
           <a:xfrm>
             <a:off x="8028360" y="3182040"/>
-            <a:ext cx="3290400" cy="2741760"/>
+            <a:ext cx="3290040" cy="2741400"/>
           </a:xfrm>
           <a:prstGeom prst="roundRect">
             <a:avLst>
@@ -14467,6 +14749,11 @@
             <a:noAutofit/>
           </a:bodyPr>
           <a:p>
+            <a:pPr>
+              <a:lnSpc>
+                <a:spcPct val="100000"/>
+              </a:lnSpc>
+            </a:pPr>
             <a:endParaRPr b="0" lang="en-US" sz="1800" spc="-1" strike="noStrike">
               <a:solidFill>
                 <a:schemeClr val="lt1"/>
@@ -14486,7 +14773,7 @@
         <p:spPr>
           <a:xfrm>
             <a:off x="7955280" y="2971800"/>
-            <a:ext cx="3702960" cy="3200040"/>
+            <a:ext cx="3702600" cy="3199680"/>
           </a:xfrm>
           <a:prstGeom prst="roundRect">
             <a:avLst>
@@ -14913,7 +15200,4715 @@
         <p:spPr>
           <a:xfrm>
             <a:off x="4600080" y="6446520"/>
-            <a:ext cx="3051360" cy="363960"/>
+            <a:ext cx="3051000" cy="363960"/>
+          </a:xfrm>
+          <a:prstGeom prst="rect">
+            <a:avLst/>
+          </a:prstGeom>
+          <a:noFill/>
+          <a:ln w="0">
+            <a:noFill/>
+          </a:ln>
+        </p:spPr>
+        <p:style>
+          <a:lnRef idx="0"/>
+          <a:fillRef idx="0"/>
+          <a:effectRef idx="0"/>
+          <a:fontRef idx="minor"/>
+        </p:style>
+        <p:txBody>
+          <a:bodyPr wrap="none" lIns="90000" rIns="90000" tIns="45000" bIns="45000" anchor="t">
+            <a:spAutoFit/>
+          </a:bodyPr>
+          <a:p>
+            <a:pPr>
+              <a:lnSpc>
+                <a:spcPct val="100000"/>
+              </a:lnSpc>
+            </a:pPr>
+            <a:r>
+              <a:rPr b="0" lang="en-US" sz="1800" spc="-1" strike="noStrike">
+                <a:solidFill>
+                  <a:srgbClr val="000000"/>
+                </a:solidFill>
+                <a:latin typeface="Calibri"/>
+                <a:ea typeface="DejaVu Sans"/>
+              </a:rPr>
+              <a:t>Java • Ultra Premium Template</a:t>
+            </a:r>
+            <a:endParaRPr b="0" lang="en-US" sz="1800" spc="-1" strike="noStrike">
+              <a:solidFill>
+                <a:srgbClr val="000000"/>
+              </a:solidFill>
+              <a:latin typeface="Arial"/>
+            </a:endParaRPr>
+          </a:p>
+        </p:txBody>
+      </p:sp>
+    </p:spTree>
+  </p:cSld>
+  <mc:AlternateContent>
+    <mc:Choice Requires="p14">
+      <p:transition spd="slow" p14:dur="2000"/>
+    </mc:Choice>
+    <mc:Fallback>
+      <p:transition spd="slow"/>
+    </mc:Fallback>
+  </mc:AlternateContent>
+</p:sld>
+</file>
+
+<file path=ppt/slides/slide4.xml><?xml version="1.0" encoding="utf-8"?>
+<p:sld xmlns:a="http://schemas.openxmlformats.org/drawingml/2006/main" xmlns:p="http://schemas.openxmlformats.org/presentationml/2006/main" xmlns:r="http://schemas.openxmlformats.org/officeDocument/2006/relationships" xmlns:p14="http://schemas.microsoft.com/office/powerpoint/2010/main" xmlns:p15="http://schemas.microsoft.com/office/powerpoint/2012/main" xmlns:mc="http://schemas.openxmlformats.org/markup-compatibility/2006">
+  <p:cSld>
+    <p:spTree>
+      <p:nvGrpSpPr>
+        <p:cNvPr id="1" name=""/>
+        <p:cNvGrpSpPr/>
+        <p:nvPr/>
+      </p:nvGrpSpPr>
+      <p:grpSpPr>
+        <a:xfrm>
+          <a:off x="0" y="0"/>
+          <a:ext cx="0" cy="0"/>
+          <a:chOff x="0" y="0"/>
+          <a:chExt cx="0" cy="0"/>
+        </a:xfrm>
+      </p:grpSpPr>
+      <p:sp>
+        <p:nvSpPr>
+          <p:cNvPr id="196" name="Rectangle 80"/>
+          <p:cNvSpPr/>
+          <p:nvPr/>
+        </p:nvSpPr>
+        <p:spPr>
+          <a:xfrm>
+            <a:off x="0" y="0"/>
+            <a:ext cx="12187800" cy="6856920"/>
+          </a:xfrm>
+          <a:prstGeom prst="rect">
+            <a:avLst/>
+          </a:prstGeom>
+          <a:solidFill>
+            <a:srgbClr val="0b0b0d"/>
+          </a:solidFill>
+          <a:ln>
+            <a:noFill/>
+          </a:ln>
+          <a:effectLst>
+            <a:outerShdw blurRad="39960" dir="5400000" dist="23040" rotWithShape="0">
+              <a:srgbClr val="000000">
+                <a:alpha val="35000"/>
+              </a:srgbClr>
+            </a:outerShdw>
+          </a:effectLst>
+        </p:spPr>
+        <p:style>
+          <a:lnRef idx="1">
+            <a:schemeClr val="accent1"/>
+          </a:lnRef>
+          <a:fillRef idx="3">
+            <a:schemeClr val="accent1"/>
+          </a:fillRef>
+          <a:effectRef idx="2">
+            <a:schemeClr val="accent1"/>
+          </a:effectRef>
+          <a:fontRef idx="minor"/>
+        </p:style>
+        <p:txBody>
+          <a:bodyPr lIns="90000" rIns="90000" tIns="45000" bIns="45000" anchor="ctr">
+            <a:noAutofit/>
+          </a:bodyPr>
+          <a:p>
+            <a:endParaRPr b="0" lang="en-US" sz="1800" spc="-1" strike="noStrike">
+              <a:solidFill>
+                <a:schemeClr val="lt1"/>
+              </a:solidFill>
+              <a:latin typeface="Calibri"/>
+              <a:ea typeface="DejaVu Sans"/>
+            </a:endParaRPr>
+          </a:p>
+        </p:txBody>
+      </p:sp>
+      <p:sp>
+        <p:nvSpPr>
+          <p:cNvPr id="197" name="Rectangle 64"/>
+          <p:cNvSpPr/>
+          <p:nvPr/>
+        </p:nvSpPr>
+        <p:spPr>
+          <a:xfrm>
+            <a:off x="0" y="0"/>
+            <a:ext cx="17280" cy="6856920"/>
+          </a:xfrm>
+          <a:prstGeom prst="rect">
+            <a:avLst/>
+          </a:prstGeom>
+          <a:solidFill>
+            <a:srgbClr val="121216"/>
+          </a:solidFill>
+          <a:ln>
+            <a:noFill/>
+          </a:ln>
+          <a:effectLst>
+            <a:outerShdw blurRad="39960" dir="5400000" dist="23040" rotWithShape="0">
+              <a:srgbClr val="000000">
+                <a:alpha val="35000"/>
+              </a:srgbClr>
+            </a:outerShdw>
+          </a:effectLst>
+        </p:spPr>
+        <p:style>
+          <a:lnRef idx="1">
+            <a:schemeClr val="accent1"/>
+          </a:lnRef>
+          <a:fillRef idx="3">
+            <a:schemeClr val="accent1"/>
+          </a:fillRef>
+          <a:effectRef idx="2">
+            <a:schemeClr val="accent1"/>
+          </a:effectRef>
+          <a:fontRef idx="minor"/>
+        </p:style>
+        <p:txBody>
+          <a:bodyPr lIns="90000" rIns="90000" tIns="45000" bIns="45000" anchor="ctr">
+            <a:noAutofit/>
+          </a:bodyPr>
+          <a:p>
+            <a:endParaRPr b="0" lang="en-US" sz="1800" spc="-1" strike="noStrike">
+              <a:solidFill>
+                <a:schemeClr val="lt1"/>
+              </a:solidFill>
+              <a:latin typeface="Calibri"/>
+              <a:ea typeface="DejaVu Sans"/>
+            </a:endParaRPr>
+          </a:p>
+        </p:txBody>
+      </p:sp>
+      <p:sp>
+        <p:nvSpPr>
+          <p:cNvPr id="198" name="Rectangle 65"/>
+          <p:cNvSpPr/>
+          <p:nvPr/>
+        </p:nvSpPr>
+        <p:spPr>
+          <a:xfrm>
+            <a:off x="914400" y="0"/>
+            <a:ext cx="17280" cy="6856920"/>
+          </a:xfrm>
+          <a:prstGeom prst="rect">
+            <a:avLst/>
+          </a:prstGeom>
+          <a:solidFill>
+            <a:srgbClr val="121216"/>
+          </a:solidFill>
+          <a:ln>
+            <a:noFill/>
+          </a:ln>
+          <a:effectLst>
+            <a:outerShdw blurRad="39960" dir="5400000" dist="23040" rotWithShape="0">
+              <a:srgbClr val="000000">
+                <a:alpha val="35000"/>
+              </a:srgbClr>
+            </a:outerShdw>
+          </a:effectLst>
+        </p:spPr>
+        <p:style>
+          <a:lnRef idx="1">
+            <a:schemeClr val="accent1"/>
+          </a:lnRef>
+          <a:fillRef idx="3">
+            <a:schemeClr val="accent1"/>
+          </a:fillRef>
+          <a:effectRef idx="2">
+            <a:schemeClr val="accent1"/>
+          </a:effectRef>
+          <a:fontRef idx="minor"/>
+        </p:style>
+        <p:txBody>
+          <a:bodyPr lIns="90000" rIns="90000" tIns="45000" bIns="45000" anchor="ctr">
+            <a:noAutofit/>
+          </a:bodyPr>
+          <a:p>
+            <a:endParaRPr b="0" lang="en-US" sz="1800" spc="-1" strike="noStrike">
+              <a:solidFill>
+                <a:schemeClr val="lt1"/>
+              </a:solidFill>
+              <a:latin typeface="Calibri"/>
+              <a:ea typeface="DejaVu Sans"/>
+            </a:endParaRPr>
+          </a:p>
+        </p:txBody>
+      </p:sp>
+      <p:sp>
+        <p:nvSpPr>
+          <p:cNvPr id="199" name="Rectangle 66"/>
+          <p:cNvSpPr/>
+          <p:nvPr/>
+        </p:nvSpPr>
+        <p:spPr>
+          <a:xfrm>
+            <a:off x="1828800" y="0"/>
+            <a:ext cx="17280" cy="6856920"/>
+          </a:xfrm>
+          <a:prstGeom prst="rect">
+            <a:avLst/>
+          </a:prstGeom>
+          <a:solidFill>
+            <a:srgbClr val="121216"/>
+          </a:solidFill>
+          <a:ln>
+            <a:noFill/>
+          </a:ln>
+          <a:effectLst>
+            <a:outerShdw blurRad="39960" dir="5400000" dist="23040" rotWithShape="0">
+              <a:srgbClr val="000000">
+                <a:alpha val="35000"/>
+              </a:srgbClr>
+            </a:outerShdw>
+          </a:effectLst>
+        </p:spPr>
+        <p:style>
+          <a:lnRef idx="1">
+            <a:schemeClr val="accent1"/>
+          </a:lnRef>
+          <a:fillRef idx="3">
+            <a:schemeClr val="accent1"/>
+          </a:fillRef>
+          <a:effectRef idx="2">
+            <a:schemeClr val="accent1"/>
+          </a:effectRef>
+          <a:fontRef idx="minor"/>
+        </p:style>
+        <p:txBody>
+          <a:bodyPr lIns="90000" rIns="90000" tIns="45000" bIns="45000" anchor="ctr">
+            <a:noAutofit/>
+          </a:bodyPr>
+          <a:p>
+            <a:endParaRPr b="0" lang="en-US" sz="1800" spc="-1" strike="noStrike">
+              <a:solidFill>
+                <a:schemeClr val="lt1"/>
+              </a:solidFill>
+              <a:latin typeface="Calibri"/>
+              <a:ea typeface="DejaVu Sans"/>
+            </a:endParaRPr>
+          </a:p>
+        </p:txBody>
+      </p:sp>
+      <p:sp>
+        <p:nvSpPr>
+          <p:cNvPr id="200" name="Rectangle 67"/>
+          <p:cNvSpPr/>
+          <p:nvPr/>
+        </p:nvSpPr>
+        <p:spPr>
+          <a:xfrm>
+            <a:off x="2743200" y="0"/>
+            <a:ext cx="17280" cy="6856920"/>
+          </a:xfrm>
+          <a:prstGeom prst="rect">
+            <a:avLst/>
+          </a:prstGeom>
+          <a:solidFill>
+            <a:srgbClr val="121216"/>
+          </a:solidFill>
+          <a:ln>
+            <a:noFill/>
+          </a:ln>
+          <a:effectLst>
+            <a:outerShdw blurRad="39960" dir="5400000" dist="23040" rotWithShape="0">
+              <a:srgbClr val="000000">
+                <a:alpha val="35000"/>
+              </a:srgbClr>
+            </a:outerShdw>
+          </a:effectLst>
+        </p:spPr>
+        <p:style>
+          <a:lnRef idx="1">
+            <a:schemeClr val="accent1"/>
+          </a:lnRef>
+          <a:fillRef idx="3">
+            <a:schemeClr val="accent1"/>
+          </a:fillRef>
+          <a:effectRef idx="2">
+            <a:schemeClr val="accent1"/>
+          </a:effectRef>
+          <a:fontRef idx="minor"/>
+        </p:style>
+        <p:txBody>
+          <a:bodyPr lIns="90000" rIns="90000" tIns="45000" bIns="45000" anchor="ctr">
+            <a:noAutofit/>
+          </a:bodyPr>
+          <a:p>
+            <a:endParaRPr b="0" lang="en-US" sz="1800" spc="-1" strike="noStrike">
+              <a:solidFill>
+                <a:schemeClr val="lt1"/>
+              </a:solidFill>
+              <a:latin typeface="Calibri"/>
+              <a:ea typeface="DejaVu Sans"/>
+            </a:endParaRPr>
+          </a:p>
+        </p:txBody>
+      </p:sp>
+      <p:sp>
+        <p:nvSpPr>
+          <p:cNvPr id="201" name="Rectangle 68"/>
+          <p:cNvSpPr/>
+          <p:nvPr/>
+        </p:nvSpPr>
+        <p:spPr>
+          <a:xfrm>
+            <a:off x="3657600" y="0"/>
+            <a:ext cx="17280" cy="6856920"/>
+          </a:xfrm>
+          <a:prstGeom prst="rect">
+            <a:avLst/>
+          </a:prstGeom>
+          <a:solidFill>
+            <a:srgbClr val="121216"/>
+          </a:solidFill>
+          <a:ln>
+            <a:noFill/>
+          </a:ln>
+          <a:effectLst>
+            <a:outerShdw blurRad="39960" dir="5400000" dist="23040" rotWithShape="0">
+              <a:srgbClr val="000000">
+                <a:alpha val="35000"/>
+              </a:srgbClr>
+            </a:outerShdw>
+          </a:effectLst>
+        </p:spPr>
+        <p:style>
+          <a:lnRef idx="1">
+            <a:schemeClr val="accent1"/>
+          </a:lnRef>
+          <a:fillRef idx="3">
+            <a:schemeClr val="accent1"/>
+          </a:fillRef>
+          <a:effectRef idx="2">
+            <a:schemeClr val="accent1"/>
+          </a:effectRef>
+          <a:fontRef idx="minor"/>
+        </p:style>
+        <p:txBody>
+          <a:bodyPr lIns="90000" rIns="90000" tIns="45000" bIns="45000" anchor="ctr">
+            <a:noAutofit/>
+          </a:bodyPr>
+          <a:p>
+            <a:endParaRPr b="0" lang="en-US" sz="1800" spc="-1" strike="noStrike">
+              <a:solidFill>
+                <a:schemeClr val="lt1"/>
+              </a:solidFill>
+              <a:latin typeface="Calibri"/>
+              <a:ea typeface="DejaVu Sans"/>
+            </a:endParaRPr>
+          </a:p>
+        </p:txBody>
+      </p:sp>
+      <p:sp>
+        <p:nvSpPr>
+          <p:cNvPr id="202" name="Rectangle 69"/>
+          <p:cNvSpPr/>
+          <p:nvPr/>
+        </p:nvSpPr>
+        <p:spPr>
+          <a:xfrm>
+            <a:off x="4572000" y="0"/>
+            <a:ext cx="17280" cy="6856920"/>
+          </a:xfrm>
+          <a:prstGeom prst="rect">
+            <a:avLst/>
+          </a:prstGeom>
+          <a:solidFill>
+            <a:srgbClr val="121216"/>
+          </a:solidFill>
+          <a:ln>
+            <a:noFill/>
+          </a:ln>
+          <a:effectLst>
+            <a:outerShdw blurRad="39960" dir="5400000" dist="23040" rotWithShape="0">
+              <a:srgbClr val="000000">
+                <a:alpha val="35000"/>
+              </a:srgbClr>
+            </a:outerShdw>
+          </a:effectLst>
+        </p:spPr>
+        <p:style>
+          <a:lnRef idx="1">
+            <a:schemeClr val="accent1"/>
+          </a:lnRef>
+          <a:fillRef idx="3">
+            <a:schemeClr val="accent1"/>
+          </a:fillRef>
+          <a:effectRef idx="2">
+            <a:schemeClr val="accent1"/>
+          </a:effectRef>
+          <a:fontRef idx="minor"/>
+        </p:style>
+        <p:txBody>
+          <a:bodyPr lIns="90000" rIns="90000" tIns="45000" bIns="45000" anchor="ctr">
+            <a:noAutofit/>
+          </a:bodyPr>
+          <a:p>
+            <a:endParaRPr b="0" lang="en-US" sz="1800" spc="-1" strike="noStrike">
+              <a:solidFill>
+                <a:schemeClr val="lt1"/>
+              </a:solidFill>
+              <a:latin typeface="Calibri"/>
+              <a:ea typeface="DejaVu Sans"/>
+            </a:endParaRPr>
+          </a:p>
+        </p:txBody>
+      </p:sp>
+      <p:sp>
+        <p:nvSpPr>
+          <p:cNvPr id="203" name="Rectangle 70"/>
+          <p:cNvSpPr/>
+          <p:nvPr/>
+        </p:nvSpPr>
+        <p:spPr>
+          <a:xfrm>
+            <a:off x="5486400" y="0"/>
+            <a:ext cx="17280" cy="6856920"/>
+          </a:xfrm>
+          <a:prstGeom prst="rect">
+            <a:avLst/>
+          </a:prstGeom>
+          <a:solidFill>
+            <a:srgbClr val="121216"/>
+          </a:solidFill>
+          <a:ln>
+            <a:noFill/>
+          </a:ln>
+          <a:effectLst>
+            <a:outerShdw blurRad="39960" dir="5400000" dist="23040" rotWithShape="0">
+              <a:srgbClr val="000000">
+                <a:alpha val="35000"/>
+              </a:srgbClr>
+            </a:outerShdw>
+          </a:effectLst>
+        </p:spPr>
+        <p:style>
+          <a:lnRef idx="1">
+            <a:schemeClr val="accent1"/>
+          </a:lnRef>
+          <a:fillRef idx="3">
+            <a:schemeClr val="accent1"/>
+          </a:fillRef>
+          <a:effectRef idx="2">
+            <a:schemeClr val="accent1"/>
+          </a:effectRef>
+          <a:fontRef idx="minor"/>
+        </p:style>
+        <p:txBody>
+          <a:bodyPr lIns="90000" rIns="90000" tIns="45000" bIns="45000" anchor="ctr">
+            <a:noAutofit/>
+          </a:bodyPr>
+          <a:p>
+            <a:endParaRPr b="0" lang="en-US" sz="1800" spc="-1" strike="noStrike">
+              <a:solidFill>
+                <a:schemeClr val="lt1"/>
+              </a:solidFill>
+              <a:latin typeface="Calibri"/>
+              <a:ea typeface="DejaVu Sans"/>
+            </a:endParaRPr>
+          </a:p>
+        </p:txBody>
+      </p:sp>
+      <p:sp>
+        <p:nvSpPr>
+          <p:cNvPr id="204" name="Rectangle 71"/>
+          <p:cNvSpPr/>
+          <p:nvPr/>
+        </p:nvSpPr>
+        <p:spPr>
+          <a:xfrm>
+            <a:off x="6400800" y="0"/>
+            <a:ext cx="17280" cy="6856920"/>
+          </a:xfrm>
+          <a:prstGeom prst="rect">
+            <a:avLst/>
+          </a:prstGeom>
+          <a:solidFill>
+            <a:srgbClr val="121216"/>
+          </a:solidFill>
+          <a:ln>
+            <a:noFill/>
+          </a:ln>
+          <a:effectLst>
+            <a:outerShdw blurRad="39960" dir="5400000" dist="23040" rotWithShape="0">
+              <a:srgbClr val="000000">
+                <a:alpha val="35000"/>
+              </a:srgbClr>
+            </a:outerShdw>
+          </a:effectLst>
+        </p:spPr>
+        <p:style>
+          <a:lnRef idx="1">
+            <a:schemeClr val="accent1"/>
+          </a:lnRef>
+          <a:fillRef idx="3">
+            <a:schemeClr val="accent1"/>
+          </a:fillRef>
+          <a:effectRef idx="2">
+            <a:schemeClr val="accent1"/>
+          </a:effectRef>
+          <a:fontRef idx="minor"/>
+        </p:style>
+        <p:txBody>
+          <a:bodyPr lIns="90000" rIns="90000" tIns="45000" bIns="45000" anchor="ctr">
+            <a:noAutofit/>
+          </a:bodyPr>
+          <a:p>
+            <a:endParaRPr b="0" lang="en-US" sz="1800" spc="-1" strike="noStrike">
+              <a:solidFill>
+                <a:schemeClr val="lt1"/>
+              </a:solidFill>
+              <a:latin typeface="Calibri"/>
+              <a:ea typeface="DejaVu Sans"/>
+            </a:endParaRPr>
+          </a:p>
+        </p:txBody>
+      </p:sp>
+      <p:sp>
+        <p:nvSpPr>
+          <p:cNvPr id="205" name="Rectangle 72"/>
+          <p:cNvSpPr/>
+          <p:nvPr/>
+        </p:nvSpPr>
+        <p:spPr>
+          <a:xfrm>
+            <a:off x="7315200" y="0"/>
+            <a:ext cx="17280" cy="6856920"/>
+          </a:xfrm>
+          <a:prstGeom prst="rect">
+            <a:avLst/>
+          </a:prstGeom>
+          <a:solidFill>
+            <a:srgbClr val="121216"/>
+          </a:solidFill>
+          <a:ln>
+            <a:noFill/>
+          </a:ln>
+          <a:effectLst>
+            <a:outerShdw blurRad="39960" dir="5400000" dist="23040" rotWithShape="0">
+              <a:srgbClr val="000000">
+                <a:alpha val="35000"/>
+              </a:srgbClr>
+            </a:outerShdw>
+          </a:effectLst>
+        </p:spPr>
+        <p:style>
+          <a:lnRef idx="1">
+            <a:schemeClr val="accent1"/>
+          </a:lnRef>
+          <a:fillRef idx="3">
+            <a:schemeClr val="accent1"/>
+          </a:fillRef>
+          <a:effectRef idx="2">
+            <a:schemeClr val="accent1"/>
+          </a:effectRef>
+          <a:fontRef idx="minor"/>
+        </p:style>
+        <p:txBody>
+          <a:bodyPr lIns="90000" rIns="90000" tIns="45000" bIns="45000" anchor="ctr">
+            <a:noAutofit/>
+          </a:bodyPr>
+          <a:p>
+            <a:endParaRPr b="0" lang="en-US" sz="1800" spc="-1" strike="noStrike">
+              <a:solidFill>
+                <a:schemeClr val="lt1"/>
+              </a:solidFill>
+              <a:latin typeface="Calibri"/>
+              <a:ea typeface="DejaVu Sans"/>
+            </a:endParaRPr>
+          </a:p>
+        </p:txBody>
+      </p:sp>
+      <p:sp>
+        <p:nvSpPr>
+          <p:cNvPr id="206" name="Rectangle 73"/>
+          <p:cNvSpPr/>
+          <p:nvPr/>
+        </p:nvSpPr>
+        <p:spPr>
+          <a:xfrm>
+            <a:off x="8229600" y="0"/>
+            <a:ext cx="17280" cy="6856920"/>
+          </a:xfrm>
+          <a:prstGeom prst="rect">
+            <a:avLst/>
+          </a:prstGeom>
+          <a:solidFill>
+            <a:srgbClr val="121216"/>
+          </a:solidFill>
+          <a:ln>
+            <a:noFill/>
+          </a:ln>
+          <a:effectLst>
+            <a:outerShdw blurRad="39960" dir="5400000" dist="23040" rotWithShape="0">
+              <a:srgbClr val="000000">
+                <a:alpha val="35000"/>
+              </a:srgbClr>
+            </a:outerShdw>
+          </a:effectLst>
+        </p:spPr>
+        <p:style>
+          <a:lnRef idx="1">
+            <a:schemeClr val="accent1"/>
+          </a:lnRef>
+          <a:fillRef idx="3">
+            <a:schemeClr val="accent1"/>
+          </a:fillRef>
+          <a:effectRef idx="2">
+            <a:schemeClr val="accent1"/>
+          </a:effectRef>
+          <a:fontRef idx="minor"/>
+        </p:style>
+        <p:txBody>
+          <a:bodyPr lIns="90000" rIns="90000" tIns="45000" bIns="45000" anchor="ctr">
+            <a:noAutofit/>
+          </a:bodyPr>
+          <a:p>
+            <a:endParaRPr b="0" lang="en-US" sz="1800" spc="-1" strike="noStrike">
+              <a:solidFill>
+                <a:schemeClr val="lt1"/>
+              </a:solidFill>
+              <a:latin typeface="Calibri"/>
+              <a:ea typeface="DejaVu Sans"/>
+            </a:endParaRPr>
+          </a:p>
+        </p:txBody>
+      </p:sp>
+      <p:sp>
+        <p:nvSpPr>
+          <p:cNvPr id="207" name="Rectangle 74"/>
+          <p:cNvSpPr/>
+          <p:nvPr/>
+        </p:nvSpPr>
+        <p:spPr>
+          <a:xfrm>
+            <a:off x="9144000" y="0"/>
+            <a:ext cx="17280" cy="6856920"/>
+          </a:xfrm>
+          <a:prstGeom prst="rect">
+            <a:avLst/>
+          </a:prstGeom>
+          <a:solidFill>
+            <a:srgbClr val="121216"/>
+          </a:solidFill>
+          <a:ln>
+            <a:noFill/>
+          </a:ln>
+          <a:effectLst>
+            <a:outerShdw blurRad="39960" dir="5400000" dist="23040" rotWithShape="0">
+              <a:srgbClr val="000000">
+                <a:alpha val="35000"/>
+              </a:srgbClr>
+            </a:outerShdw>
+          </a:effectLst>
+        </p:spPr>
+        <p:style>
+          <a:lnRef idx="1">
+            <a:schemeClr val="accent1"/>
+          </a:lnRef>
+          <a:fillRef idx="3">
+            <a:schemeClr val="accent1"/>
+          </a:fillRef>
+          <a:effectRef idx="2">
+            <a:schemeClr val="accent1"/>
+          </a:effectRef>
+          <a:fontRef idx="minor"/>
+        </p:style>
+        <p:txBody>
+          <a:bodyPr lIns="90000" rIns="90000" tIns="45000" bIns="45000" anchor="ctr">
+            <a:noAutofit/>
+          </a:bodyPr>
+          <a:p>
+            <a:endParaRPr b="0" lang="en-US" sz="1800" spc="-1" strike="noStrike">
+              <a:solidFill>
+                <a:schemeClr val="lt1"/>
+              </a:solidFill>
+              <a:latin typeface="Calibri"/>
+              <a:ea typeface="DejaVu Sans"/>
+            </a:endParaRPr>
+          </a:p>
+        </p:txBody>
+      </p:sp>
+      <p:sp>
+        <p:nvSpPr>
+          <p:cNvPr id="208" name="Rectangle 75"/>
+          <p:cNvSpPr/>
+          <p:nvPr/>
+        </p:nvSpPr>
+        <p:spPr>
+          <a:xfrm>
+            <a:off x="10058400" y="0"/>
+            <a:ext cx="17280" cy="6856920"/>
+          </a:xfrm>
+          <a:prstGeom prst="rect">
+            <a:avLst/>
+          </a:prstGeom>
+          <a:solidFill>
+            <a:srgbClr val="121216"/>
+          </a:solidFill>
+          <a:ln>
+            <a:noFill/>
+          </a:ln>
+          <a:effectLst>
+            <a:outerShdw blurRad="39960" dir="5400000" dist="23040" rotWithShape="0">
+              <a:srgbClr val="000000">
+                <a:alpha val="35000"/>
+              </a:srgbClr>
+            </a:outerShdw>
+          </a:effectLst>
+        </p:spPr>
+        <p:style>
+          <a:lnRef idx="1">
+            <a:schemeClr val="accent1"/>
+          </a:lnRef>
+          <a:fillRef idx="3">
+            <a:schemeClr val="accent1"/>
+          </a:fillRef>
+          <a:effectRef idx="2">
+            <a:schemeClr val="accent1"/>
+          </a:effectRef>
+          <a:fontRef idx="minor"/>
+        </p:style>
+        <p:txBody>
+          <a:bodyPr lIns="90000" rIns="90000" tIns="45000" bIns="45000" anchor="ctr">
+            <a:noAutofit/>
+          </a:bodyPr>
+          <a:p>
+            <a:endParaRPr b="0" lang="en-US" sz="1800" spc="-1" strike="noStrike">
+              <a:solidFill>
+                <a:schemeClr val="lt1"/>
+              </a:solidFill>
+              <a:latin typeface="Calibri"/>
+              <a:ea typeface="DejaVu Sans"/>
+            </a:endParaRPr>
+          </a:p>
+        </p:txBody>
+      </p:sp>
+      <p:sp>
+        <p:nvSpPr>
+          <p:cNvPr id="209" name="Rectangle 76"/>
+          <p:cNvSpPr/>
+          <p:nvPr/>
+        </p:nvSpPr>
+        <p:spPr>
+          <a:xfrm>
+            <a:off x="10972800" y="0"/>
+            <a:ext cx="17280" cy="6856920"/>
+          </a:xfrm>
+          <a:prstGeom prst="rect">
+            <a:avLst/>
+          </a:prstGeom>
+          <a:solidFill>
+            <a:srgbClr val="121216"/>
+          </a:solidFill>
+          <a:ln>
+            <a:noFill/>
+          </a:ln>
+          <a:effectLst>
+            <a:outerShdw blurRad="39960" dir="5400000" dist="23040" rotWithShape="0">
+              <a:srgbClr val="000000">
+                <a:alpha val="35000"/>
+              </a:srgbClr>
+            </a:outerShdw>
+          </a:effectLst>
+        </p:spPr>
+        <p:style>
+          <a:lnRef idx="1">
+            <a:schemeClr val="accent1"/>
+          </a:lnRef>
+          <a:fillRef idx="3">
+            <a:schemeClr val="accent1"/>
+          </a:fillRef>
+          <a:effectRef idx="2">
+            <a:schemeClr val="accent1"/>
+          </a:effectRef>
+          <a:fontRef idx="minor"/>
+        </p:style>
+        <p:txBody>
+          <a:bodyPr lIns="90000" rIns="90000" tIns="45000" bIns="45000" anchor="ctr">
+            <a:noAutofit/>
+          </a:bodyPr>
+          <a:p>
+            <a:endParaRPr b="0" lang="en-US" sz="1800" spc="-1" strike="noStrike">
+              <a:solidFill>
+                <a:schemeClr val="lt1"/>
+              </a:solidFill>
+              <a:latin typeface="Calibri"/>
+              <a:ea typeface="DejaVu Sans"/>
+            </a:endParaRPr>
+          </a:p>
+        </p:txBody>
+      </p:sp>
+      <p:sp>
+        <p:nvSpPr>
+          <p:cNvPr id="210" name="Rectangle 77"/>
+          <p:cNvSpPr/>
+          <p:nvPr/>
+        </p:nvSpPr>
+        <p:spPr>
+          <a:xfrm>
+            <a:off x="11887200" y="0"/>
+            <a:ext cx="17280" cy="6856920"/>
+          </a:xfrm>
+          <a:prstGeom prst="rect">
+            <a:avLst/>
+          </a:prstGeom>
+          <a:solidFill>
+            <a:srgbClr val="121216"/>
+          </a:solidFill>
+          <a:ln>
+            <a:noFill/>
+          </a:ln>
+          <a:effectLst>
+            <a:outerShdw blurRad="39960" dir="5400000" dist="23040" rotWithShape="0">
+              <a:srgbClr val="000000">
+                <a:alpha val="35000"/>
+              </a:srgbClr>
+            </a:outerShdw>
+          </a:effectLst>
+        </p:spPr>
+        <p:style>
+          <a:lnRef idx="1">
+            <a:schemeClr val="accent1"/>
+          </a:lnRef>
+          <a:fillRef idx="3">
+            <a:schemeClr val="accent1"/>
+          </a:fillRef>
+          <a:effectRef idx="2">
+            <a:schemeClr val="accent1"/>
+          </a:effectRef>
+          <a:fontRef idx="minor"/>
+        </p:style>
+        <p:txBody>
+          <a:bodyPr lIns="90000" rIns="90000" tIns="45000" bIns="45000" anchor="ctr">
+            <a:noAutofit/>
+          </a:bodyPr>
+          <a:p>
+            <a:endParaRPr b="0" lang="en-US" sz="1800" spc="-1" strike="noStrike">
+              <a:solidFill>
+                <a:schemeClr val="lt1"/>
+              </a:solidFill>
+              <a:latin typeface="Calibri"/>
+              <a:ea typeface="DejaVu Sans"/>
+            </a:endParaRPr>
+          </a:p>
+        </p:txBody>
+      </p:sp>
+      <p:sp>
+        <p:nvSpPr>
+          <p:cNvPr id="211" name="Rectangle 78"/>
+          <p:cNvSpPr/>
+          <p:nvPr/>
+        </p:nvSpPr>
+        <p:spPr>
+          <a:xfrm>
+            <a:off x="0" y="0"/>
+            <a:ext cx="318960" cy="6856920"/>
+          </a:xfrm>
+          <a:prstGeom prst="rect">
+            <a:avLst/>
+          </a:prstGeom>
+          <a:solidFill>
+            <a:srgbClr val="ff8c00"/>
+          </a:solidFill>
+          <a:ln>
+            <a:noFill/>
+          </a:ln>
+          <a:effectLst>
+            <a:outerShdw blurRad="39960" dir="5400000" dist="23040" rotWithShape="0">
+              <a:srgbClr val="000000">
+                <a:alpha val="35000"/>
+              </a:srgbClr>
+            </a:outerShdw>
+          </a:effectLst>
+        </p:spPr>
+        <p:style>
+          <a:lnRef idx="1">
+            <a:schemeClr val="accent1"/>
+          </a:lnRef>
+          <a:fillRef idx="3">
+            <a:schemeClr val="accent1"/>
+          </a:fillRef>
+          <a:effectRef idx="2">
+            <a:schemeClr val="accent1"/>
+          </a:effectRef>
+          <a:fontRef idx="minor"/>
+        </p:style>
+        <p:txBody>
+          <a:bodyPr lIns="90000" rIns="90000" tIns="45000" bIns="45000" anchor="ctr">
+            <a:noAutofit/>
+          </a:bodyPr>
+          <a:p>
+            <a:endParaRPr b="0" lang="en-US" sz="1800" spc="-1" strike="noStrike">
+              <a:solidFill>
+                <a:schemeClr val="lt1"/>
+              </a:solidFill>
+              <a:latin typeface="Calibri"/>
+              <a:ea typeface="DejaVu Sans"/>
+            </a:endParaRPr>
+          </a:p>
+        </p:txBody>
+      </p:sp>
+      <p:sp>
+        <p:nvSpPr>
+          <p:cNvPr id="212" name="Rounded Rectangle 29"/>
+          <p:cNvSpPr/>
+          <p:nvPr/>
+        </p:nvSpPr>
+        <p:spPr>
+          <a:xfrm>
+            <a:off x="9875520" y="365760"/>
+            <a:ext cx="2010600" cy="501840"/>
+          </a:xfrm>
+          <a:prstGeom prst="roundRect">
+            <a:avLst>
+              <a:gd name="adj" fmla="val 16667"/>
+            </a:avLst>
+          </a:prstGeom>
+          <a:solidFill>
+            <a:srgbClr val="1e1e24"/>
+          </a:solidFill>
+          <a:ln>
+            <a:solidFill>
+              <a:srgbClr val="ff8c00"/>
+            </a:solidFill>
+            <a:round/>
+          </a:ln>
+          <a:effectLst>
+            <a:outerShdw blurRad="39960" dir="5400000" dist="23040" rotWithShape="0">
+              <a:srgbClr val="000000">
+                <a:alpha val="35000"/>
+              </a:srgbClr>
+            </a:outerShdw>
+          </a:effectLst>
+        </p:spPr>
+        <p:style>
+          <a:lnRef idx="1">
+            <a:schemeClr val="accent1"/>
+          </a:lnRef>
+          <a:fillRef idx="3">
+            <a:schemeClr val="accent1"/>
+          </a:fillRef>
+          <a:effectRef idx="2">
+            <a:schemeClr val="accent1"/>
+          </a:effectRef>
+          <a:fontRef idx="minor"/>
+        </p:style>
+        <p:txBody>
+          <a:bodyPr lIns="90000" rIns="90000" tIns="45000" bIns="45000" anchor="ctr">
+            <a:noAutofit/>
+          </a:bodyPr>
+          <a:p>
+            <a:pPr algn="ctr">
+              <a:lnSpc>
+                <a:spcPct val="100000"/>
+              </a:lnSpc>
+            </a:pPr>
+            <a:r>
+              <a:rPr b="1" lang="en-US" sz="1400" spc="-1" strike="noStrike">
+                <a:solidFill>
+                  <a:srgbClr val="ffb45a"/>
+                </a:solidFill>
+                <a:latin typeface="Calibri"/>
+                <a:ea typeface="DejaVu Sans"/>
+              </a:rPr>
+              <a:t>JAVA TEMELLERI</a:t>
+            </a:r>
+            <a:endParaRPr b="0" lang="en-US" sz="1400" spc="-1" strike="noStrike">
+              <a:solidFill>
+                <a:srgbClr val="ffffff"/>
+              </a:solidFill>
+              <a:latin typeface="Arial"/>
+            </a:endParaRPr>
+          </a:p>
+        </p:txBody>
+      </p:sp>
+      <p:sp>
+        <p:nvSpPr>
+          <p:cNvPr id="213" name="TextBox 13"/>
+          <p:cNvSpPr/>
+          <p:nvPr/>
+        </p:nvSpPr>
+        <p:spPr>
+          <a:xfrm>
+            <a:off x="2441520" y="1005840"/>
+            <a:ext cx="6087960" cy="820800"/>
+          </a:xfrm>
+          <a:prstGeom prst="rect">
+            <a:avLst/>
+          </a:prstGeom>
+          <a:noFill/>
+          <a:ln w="0">
+            <a:noFill/>
+          </a:ln>
+        </p:spPr>
+        <p:style>
+          <a:lnRef idx="0"/>
+          <a:fillRef idx="0"/>
+          <a:effectRef idx="0"/>
+          <a:fontRef idx="minor"/>
+        </p:style>
+        <p:txBody>
+          <a:bodyPr wrap="none" lIns="90000" rIns="90000" tIns="45000" bIns="45000" anchor="t">
+            <a:spAutoFit/>
+          </a:bodyPr>
+          <a:p>
+            <a:pPr>
+              <a:lnSpc>
+                <a:spcPct val="100000"/>
+              </a:lnSpc>
+            </a:pPr>
+            <a:r>
+              <a:rPr b="1" lang="en-US" sz="4800" spc="-1" strike="noStrike">
+                <a:solidFill>
+                  <a:srgbClr val="f5f5f5"/>
+                </a:solidFill>
+                <a:latin typeface="Calibri"/>
+                <a:ea typeface="DejaVu Sans"/>
+              </a:rPr>
+              <a:t>REFERANS VERİ TİPLERİ</a:t>
+            </a:r>
+            <a:endParaRPr b="0" lang="en-US" sz="4800" spc="-1" strike="noStrike">
+              <a:solidFill>
+                <a:srgbClr val="000000"/>
+              </a:solidFill>
+              <a:latin typeface="Arial"/>
+            </a:endParaRPr>
+          </a:p>
+        </p:txBody>
+      </p:sp>
+      <p:sp>
+        <p:nvSpPr>
+          <p:cNvPr id="214" name="TextBox 14"/>
+          <p:cNvSpPr/>
+          <p:nvPr/>
+        </p:nvSpPr>
+        <p:spPr>
+          <a:xfrm>
+            <a:off x="2802600" y="2074680"/>
+            <a:ext cx="5367240" cy="668520"/>
+          </a:xfrm>
+          <a:prstGeom prst="rect">
+            <a:avLst/>
+          </a:prstGeom>
+          <a:noFill/>
+          <a:ln w="0">
+            <a:noFill/>
+          </a:ln>
+        </p:spPr>
+        <p:style>
+          <a:lnRef idx="0"/>
+          <a:fillRef idx="0"/>
+          <a:effectRef idx="0"/>
+          <a:fontRef idx="minor"/>
+        </p:style>
+        <p:txBody>
+          <a:bodyPr wrap="none" lIns="90000" rIns="90000" tIns="45000" bIns="45000" anchor="t">
+            <a:spAutoFit/>
+          </a:bodyPr>
+          <a:p>
+            <a:pPr>
+              <a:lnSpc>
+                <a:spcPct val="100000"/>
+              </a:lnSpc>
+            </a:pPr>
+            <a:r>
+              <a:rPr b="0" lang="en-US" sz="1900" spc="-1" strike="noStrike">
+                <a:solidFill>
+                  <a:srgbClr val="aaaaaa"/>
+                </a:solidFill>
+                <a:latin typeface="Calibri"/>
+                <a:ea typeface="DejaVu Sans"/>
+              </a:rPr>
+              <a:t>Referans veri tipleri, gerçek değerleri değil nesnelere </a:t>
+            </a:r>
+            <a:endParaRPr b="0" lang="en-US" sz="1900" spc="-1" strike="noStrike">
+              <a:solidFill>
+                <a:srgbClr val="000000"/>
+              </a:solidFill>
+              <a:latin typeface="Arial"/>
+            </a:endParaRPr>
+          </a:p>
+          <a:p>
+            <a:pPr>
+              <a:lnSpc>
+                <a:spcPct val="100000"/>
+              </a:lnSpc>
+            </a:pPr>
+            <a:r>
+              <a:rPr b="0" lang="en-US" sz="1900" spc="-1" strike="noStrike">
+                <a:solidFill>
+                  <a:srgbClr val="aaaaaa"/>
+                </a:solidFill>
+                <a:latin typeface="Calibri"/>
+                <a:ea typeface="DejaVu Sans"/>
+              </a:rPr>
+              <a:t>ait referansları (bellek adreslerini) saklar.</a:t>
+            </a:r>
+            <a:endParaRPr b="0" lang="en-US" sz="1900" spc="-1" strike="noStrike">
+              <a:solidFill>
+                <a:srgbClr val="000000"/>
+              </a:solidFill>
+              <a:latin typeface="Arial"/>
+            </a:endParaRPr>
+          </a:p>
+        </p:txBody>
+      </p:sp>
+      <p:sp>
+        <p:nvSpPr>
+          <p:cNvPr id="215" name="Rounded Rectangle 30"/>
+          <p:cNvSpPr/>
+          <p:nvPr/>
+        </p:nvSpPr>
+        <p:spPr>
+          <a:xfrm>
+            <a:off x="987480" y="3182040"/>
+            <a:ext cx="3290760" cy="2742120"/>
+          </a:xfrm>
+          <a:prstGeom prst="roundRect">
+            <a:avLst>
+              <a:gd name="adj" fmla="val 16667"/>
+            </a:avLst>
+          </a:prstGeom>
+          <a:solidFill>
+            <a:srgbClr val="08080a"/>
+          </a:solidFill>
+          <a:ln>
+            <a:noFill/>
+          </a:ln>
+          <a:effectLst>
+            <a:outerShdw blurRad="39960" dir="5400000" dist="23040" rotWithShape="0">
+              <a:srgbClr val="000000">
+                <a:alpha val="35000"/>
+              </a:srgbClr>
+            </a:outerShdw>
+          </a:effectLst>
+        </p:spPr>
+        <p:style>
+          <a:lnRef idx="1">
+            <a:schemeClr val="accent1"/>
+          </a:lnRef>
+          <a:fillRef idx="3">
+            <a:schemeClr val="accent1"/>
+          </a:fillRef>
+          <a:effectRef idx="2">
+            <a:schemeClr val="accent1"/>
+          </a:effectRef>
+          <a:fontRef idx="minor"/>
+        </p:style>
+        <p:txBody>
+          <a:bodyPr lIns="90000" rIns="90000" tIns="45000" bIns="45000" anchor="ctr">
+            <a:noAutofit/>
+          </a:bodyPr>
+          <a:p>
+            <a:endParaRPr b="0" lang="en-US" sz="1800" spc="-1" strike="noStrike">
+              <a:solidFill>
+                <a:schemeClr val="lt1"/>
+              </a:solidFill>
+              <a:latin typeface="Calibri"/>
+              <a:ea typeface="DejaVu Sans"/>
+            </a:endParaRPr>
+          </a:p>
+        </p:txBody>
+      </p:sp>
+      <p:sp>
+        <p:nvSpPr>
+          <p:cNvPr id="216" name="Rounded Rectangle 31"/>
+          <p:cNvSpPr/>
+          <p:nvPr/>
+        </p:nvSpPr>
+        <p:spPr>
+          <a:xfrm>
+            <a:off x="685800" y="2971800"/>
+            <a:ext cx="3519360" cy="3657600"/>
+          </a:xfrm>
+          <a:prstGeom prst="roundRect">
+            <a:avLst>
+              <a:gd name="adj" fmla="val 16667"/>
+            </a:avLst>
+          </a:prstGeom>
+          <a:solidFill>
+            <a:srgbClr val="16161c"/>
+          </a:solidFill>
+          <a:ln>
+            <a:solidFill>
+              <a:srgbClr val="464655"/>
+            </a:solidFill>
+            <a:round/>
+          </a:ln>
+          <a:effectLst>
+            <a:outerShdw blurRad="39960" dir="5400000" dist="23040" rotWithShape="0">
+              <a:srgbClr val="000000">
+                <a:alpha val="35000"/>
+              </a:srgbClr>
+            </a:outerShdw>
+          </a:effectLst>
+        </p:spPr>
+        <p:style>
+          <a:lnRef idx="1">
+            <a:schemeClr val="accent1"/>
+          </a:lnRef>
+          <a:fillRef idx="3">
+            <a:schemeClr val="accent1"/>
+          </a:fillRef>
+          <a:effectRef idx="2">
+            <a:schemeClr val="accent1"/>
+          </a:effectRef>
+          <a:fontRef idx="minor"/>
+        </p:style>
+        <p:txBody>
+          <a:bodyPr lIns="90000" rIns="90000" tIns="45000" bIns="45000" anchor="ctr">
+            <a:noAutofit/>
+          </a:bodyPr>
+          <a:p>
+            <a:pPr>
+              <a:lnSpc>
+                <a:spcPct val="100000"/>
+              </a:lnSpc>
+            </a:pPr>
+            <a:r>
+              <a:rPr b="0" lang="en-US" sz="1400" spc="-1" strike="noStrike">
+                <a:solidFill>
+                  <a:schemeClr val="lt1"/>
+                </a:solidFill>
+                <a:latin typeface="Calibri"/>
+                <a:ea typeface="DejaVu Sans"/>
+              </a:rPr>
+              <a:t>• </a:t>
+            </a:r>
+            <a:r>
+              <a:rPr b="1" lang="en-US" sz="1400" spc="-1" strike="noStrike">
+                <a:solidFill>
+                  <a:schemeClr val="lt1"/>
+                </a:solidFill>
+                <a:latin typeface="Calibri"/>
+                <a:ea typeface="DejaVu Sans"/>
+              </a:rPr>
+              <a:t>Nesne Tabanlı Tipler</a:t>
+            </a:r>
+            <a:endParaRPr b="0" lang="en-US" sz="1400" spc="-1" strike="noStrike">
+              <a:solidFill>
+                <a:srgbClr val="ffffff"/>
+              </a:solidFill>
+              <a:latin typeface="Arial"/>
+            </a:endParaRPr>
+          </a:p>
+          <a:p>
+            <a:pPr>
+              <a:lnSpc>
+                <a:spcPct val="100000"/>
+              </a:lnSpc>
+            </a:pPr>
+            <a:r>
+              <a:rPr b="0" lang="en-US" sz="1400" spc="-1" strike="noStrike">
+                <a:solidFill>
+                  <a:schemeClr val="lt1"/>
+                </a:solidFill>
+                <a:latin typeface="Calibri"/>
+                <a:ea typeface="DejaVu Sans"/>
+              </a:rPr>
+              <a:t>Referans tipleri, sınıflardan oluşturulan nesneleri temsil eder.</a:t>
+            </a:r>
+            <a:endParaRPr b="0" lang="en-US" sz="1400" spc="-1" strike="noStrike">
+              <a:solidFill>
+                <a:srgbClr val="ffffff"/>
+              </a:solidFill>
+              <a:latin typeface="Arial"/>
+            </a:endParaRPr>
+          </a:p>
+          <a:p>
+            <a:pPr>
+              <a:lnSpc>
+                <a:spcPct val="100000"/>
+              </a:lnSpc>
+            </a:pPr>
+            <a:endParaRPr b="0" lang="en-US" sz="1400" spc="-1" strike="noStrike">
+              <a:solidFill>
+                <a:srgbClr val="ffffff"/>
+              </a:solidFill>
+              <a:latin typeface="Arial"/>
+            </a:endParaRPr>
+          </a:p>
+          <a:p>
+            <a:pPr>
+              <a:lnSpc>
+                <a:spcPct val="100000"/>
+              </a:lnSpc>
+            </a:pPr>
+            <a:r>
+              <a:rPr b="0" lang="en-US" sz="1400" spc="-1" strike="noStrike">
+                <a:solidFill>
+                  <a:schemeClr val="lt1"/>
+                </a:solidFill>
+                <a:latin typeface="Calibri"/>
+                <a:ea typeface="DejaVu Sans"/>
+              </a:rPr>
+              <a:t>• </a:t>
+            </a:r>
+            <a:r>
+              <a:rPr b="1" lang="en-US" sz="1400" spc="-1" strike="noStrike">
+                <a:solidFill>
+                  <a:schemeClr val="lt1"/>
+                </a:solidFill>
+                <a:latin typeface="Calibri"/>
+                <a:ea typeface="DejaVu Sans"/>
+              </a:rPr>
+              <a:t>Bellek Referansı</a:t>
+            </a:r>
+            <a:endParaRPr b="0" lang="en-US" sz="1400" spc="-1" strike="noStrike">
+              <a:solidFill>
+                <a:srgbClr val="ffffff"/>
+              </a:solidFill>
+              <a:latin typeface="Arial"/>
+            </a:endParaRPr>
+          </a:p>
+          <a:p>
+            <a:pPr>
+              <a:lnSpc>
+                <a:spcPct val="100000"/>
+              </a:lnSpc>
+            </a:pPr>
+            <a:r>
+              <a:rPr b="0" lang="en-US" sz="1400" spc="-1" strike="noStrike">
+                <a:solidFill>
+                  <a:schemeClr val="lt1"/>
+                </a:solidFill>
+                <a:latin typeface="Calibri"/>
+                <a:ea typeface="DejaVu Sans"/>
+              </a:rPr>
+              <a:t>Gerçek verinin kendisi yerine nesnenin bellekteki adresi saklanır.</a:t>
+            </a:r>
+            <a:endParaRPr b="0" lang="en-US" sz="1400" spc="-1" strike="noStrike">
+              <a:solidFill>
+                <a:srgbClr val="ffffff"/>
+              </a:solidFill>
+              <a:latin typeface="Arial"/>
+            </a:endParaRPr>
+          </a:p>
+          <a:p>
+            <a:pPr>
+              <a:lnSpc>
+                <a:spcPct val="100000"/>
+              </a:lnSpc>
+            </a:pPr>
+            <a:endParaRPr b="0" lang="en-US" sz="1400" spc="-1" strike="noStrike">
+              <a:solidFill>
+                <a:srgbClr val="ffffff"/>
+              </a:solidFill>
+              <a:latin typeface="Arial"/>
+            </a:endParaRPr>
+          </a:p>
+          <a:p>
+            <a:pPr>
+              <a:lnSpc>
+                <a:spcPct val="100000"/>
+              </a:lnSpc>
+            </a:pPr>
+            <a:r>
+              <a:rPr b="0" lang="en-US" sz="1400" spc="-1" strike="noStrike">
+                <a:solidFill>
+                  <a:schemeClr val="lt1"/>
+                </a:solidFill>
+                <a:latin typeface="Calibri"/>
+                <a:ea typeface="DejaVu Sans"/>
+              </a:rPr>
+              <a:t>• </a:t>
+            </a:r>
+            <a:r>
+              <a:rPr b="1" lang="en-US" sz="1400" spc="-1" strike="noStrike">
+                <a:solidFill>
+                  <a:schemeClr val="lt1"/>
+                </a:solidFill>
+                <a:latin typeface="Calibri"/>
+                <a:ea typeface="DejaVu Sans"/>
+              </a:rPr>
+              <a:t>Yaygın Örnekler</a:t>
+            </a:r>
+            <a:endParaRPr b="0" lang="en-US" sz="1400" spc="-1" strike="noStrike">
+              <a:solidFill>
+                <a:srgbClr val="ffffff"/>
+              </a:solidFill>
+              <a:latin typeface="Arial"/>
+            </a:endParaRPr>
+          </a:p>
+          <a:p>
+            <a:pPr>
+              <a:lnSpc>
+                <a:spcPct val="100000"/>
+              </a:lnSpc>
+            </a:pPr>
+            <a:r>
+              <a:rPr b="0" lang="en-US" sz="1400" spc="-1" strike="noStrike">
+                <a:solidFill>
+                  <a:schemeClr val="lt1"/>
+                </a:solidFill>
+                <a:latin typeface="Calibri"/>
+                <a:ea typeface="DejaVu Sans"/>
+              </a:rPr>
+              <a:t>Örnekler arasında String, diziler (arrays), sınıflar (classes) ve nesneler (objects) bulunur.</a:t>
+            </a:r>
+            <a:endParaRPr b="0" lang="en-US" sz="1400" spc="-1" strike="noStrike">
+              <a:solidFill>
+                <a:srgbClr val="ffffff"/>
+              </a:solidFill>
+              <a:latin typeface="Arial"/>
+            </a:endParaRPr>
+          </a:p>
+          <a:p>
+            <a:pPr>
+              <a:lnSpc>
+                <a:spcPct val="100000"/>
+              </a:lnSpc>
+            </a:pPr>
+            <a:endParaRPr b="0" lang="en-US" sz="1400" spc="-1" strike="noStrike">
+              <a:solidFill>
+                <a:srgbClr val="ffffff"/>
+              </a:solidFill>
+              <a:latin typeface="Arial"/>
+            </a:endParaRPr>
+          </a:p>
+          <a:p>
+            <a:pPr>
+              <a:lnSpc>
+                <a:spcPct val="100000"/>
+              </a:lnSpc>
+            </a:pPr>
+            <a:r>
+              <a:rPr b="0" lang="en-US" sz="1400" spc="-1" strike="noStrike">
+                <a:solidFill>
+                  <a:schemeClr val="lt1"/>
+                </a:solidFill>
+                <a:latin typeface="Calibri"/>
+                <a:ea typeface="DejaVu Sans"/>
+              </a:rPr>
+              <a:t>• </a:t>
+            </a:r>
+            <a:r>
+              <a:rPr b="1" lang="en-US" sz="1400" spc="-1" strike="noStrike">
+                <a:solidFill>
+                  <a:schemeClr val="lt1"/>
+                </a:solidFill>
+                <a:latin typeface="Calibri"/>
+                <a:ea typeface="DejaVu Sans"/>
+              </a:rPr>
+              <a:t>Esnek Yapı</a:t>
+            </a:r>
+            <a:endParaRPr b="0" lang="en-US" sz="1400" spc="-1" strike="noStrike">
+              <a:solidFill>
+                <a:srgbClr val="ffffff"/>
+              </a:solidFill>
+              <a:latin typeface="Arial"/>
+            </a:endParaRPr>
+          </a:p>
+          <a:p>
+            <a:pPr>
+              <a:lnSpc>
+                <a:spcPct val="100000"/>
+              </a:lnSpc>
+            </a:pPr>
+            <a:r>
+              <a:rPr b="0" lang="en-US" sz="1400" spc="-1" strike="noStrike">
+                <a:solidFill>
+                  <a:schemeClr val="lt1"/>
+                </a:solidFill>
+                <a:latin typeface="Calibri"/>
+                <a:ea typeface="DejaVu Sans"/>
+              </a:rPr>
+              <a:t>Referans tipleri, karmaşık veri yapılarının ve birden fazla değerin saklanmasına olanak tanır.</a:t>
+            </a:r>
+            <a:endParaRPr b="0" lang="en-US" sz="1400" spc="-1" strike="noStrike">
+              <a:solidFill>
+                <a:srgbClr val="ffffff"/>
+              </a:solidFill>
+              <a:latin typeface="Arial"/>
+            </a:endParaRPr>
+          </a:p>
+        </p:txBody>
+      </p:sp>
+      <p:sp>
+        <p:nvSpPr>
+          <p:cNvPr id="217" name="Rounded Rectangle 32"/>
+          <p:cNvSpPr/>
+          <p:nvPr/>
+        </p:nvSpPr>
+        <p:spPr>
+          <a:xfrm>
+            <a:off x="4507920" y="3182040"/>
+            <a:ext cx="3290760" cy="2742120"/>
+          </a:xfrm>
+          <a:prstGeom prst="roundRect">
+            <a:avLst>
+              <a:gd name="adj" fmla="val 16667"/>
+            </a:avLst>
+          </a:prstGeom>
+          <a:solidFill>
+            <a:srgbClr val="08080a"/>
+          </a:solidFill>
+          <a:ln>
+            <a:noFill/>
+          </a:ln>
+          <a:effectLst>
+            <a:outerShdw blurRad="39960" dir="5400000" dist="23040" rotWithShape="0">
+              <a:srgbClr val="000000">
+                <a:alpha val="35000"/>
+              </a:srgbClr>
+            </a:outerShdw>
+          </a:effectLst>
+        </p:spPr>
+        <p:style>
+          <a:lnRef idx="1">
+            <a:schemeClr val="accent1"/>
+          </a:lnRef>
+          <a:fillRef idx="3">
+            <a:schemeClr val="accent1"/>
+          </a:fillRef>
+          <a:effectRef idx="2">
+            <a:schemeClr val="accent1"/>
+          </a:effectRef>
+          <a:fontRef idx="minor"/>
+        </p:style>
+        <p:txBody>
+          <a:bodyPr lIns="90000" rIns="90000" tIns="45000" bIns="45000" anchor="ctr">
+            <a:noAutofit/>
+          </a:bodyPr>
+          <a:p>
+            <a:endParaRPr b="0" lang="en-US" sz="1800" spc="-1" strike="noStrike">
+              <a:solidFill>
+                <a:schemeClr val="lt1"/>
+              </a:solidFill>
+              <a:latin typeface="Calibri"/>
+              <a:ea typeface="DejaVu Sans"/>
+            </a:endParaRPr>
+          </a:p>
+        </p:txBody>
+      </p:sp>
+      <p:sp>
+        <p:nvSpPr>
+          <p:cNvPr id="218" name="Rounded Rectangle 33"/>
+          <p:cNvSpPr/>
+          <p:nvPr/>
+        </p:nvSpPr>
+        <p:spPr>
+          <a:xfrm>
+            <a:off x="4434840" y="3108960"/>
+            <a:ext cx="3290760" cy="2742120"/>
+          </a:xfrm>
+          <a:prstGeom prst="roundRect">
+            <a:avLst>
+              <a:gd name="adj" fmla="val 16667"/>
+            </a:avLst>
+          </a:prstGeom>
+          <a:solidFill>
+            <a:srgbClr val="16161c"/>
+          </a:solidFill>
+          <a:ln>
+            <a:solidFill>
+              <a:srgbClr val="464655"/>
+            </a:solidFill>
+            <a:round/>
+          </a:ln>
+          <a:effectLst>
+            <a:outerShdw blurRad="39960" dir="5400000" dist="23040" rotWithShape="0">
+              <a:srgbClr val="000000">
+                <a:alpha val="35000"/>
+              </a:srgbClr>
+            </a:outerShdw>
+          </a:effectLst>
+        </p:spPr>
+        <p:style>
+          <a:lnRef idx="1">
+            <a:schemeClr val="accent1"/>
+          </a:lnRef>
+          <a:fillRef idx="3">
+            <a:schemeClr val="accent1"/>
+          </a:fillRef>
+          <a:effectRef idx="2">
+            <a:schemeClr val="accent1"/>
+          </a:effectRef>
+          <a:fontRef idx="minor"/>
+        </p:style>
+        <p:txBody>
+          <a:bodyPr lIns="90000" rIns="90000" tIns="45000" bIns="45000" anchor="ctr">
+            <a:noAutofit/>
+          </a:bodyPr>
+          <a:p>
+            <a:pPr>
+              <a:lnSpc>
+                <a:spcPct val="100000"/>
+              </a:lnSpc>
+            </a:pPr>
+            <a:r>
+              <a:rPr b="0" lang="en-US" sz="2200" spc="-1" strike="noStrike">
+                <a:solidFill>
+                  <a:schemeClr val="lt1"/>
+                </a:solidFill>
+                <a:latin typeface="Calibri"/>
+                <a:ea typeface="DejaVu Sans"/>
+              </a:rPr>
+              <a:t>Referans Tipleri</a:t>
+            </a:r>
+            <a:endParaRPr b="0" lang="en-US" sz="2200" spc="-1" strike="noStrike">
+              <a:solidFill>
+                <a:srgbClr val="ffffff"/>
+              </a:solidFill>
+              <a:latin typeface="Arial"/>
+            </a:endParaRPr>
+          </a:p>
+          <a:p>
+            <a:pPr>
+              <a:lnSpc>
+                <a:spcPct val="100000"/>
+              </a:lnSpc>
+            </a:pPr>
+            <a:r>
+              <a:rPr b="0" lang="en-US" sz="2200" spc="-1" strike="noStrike">
+                <a:solidFill>
+                  <a:schemeClr val="lt1"/>
+                </a:solidFill>
+                <a:latin typeface="Calibri"/>
+                <a:ea typeface="DejaVu Sans"/>
+              </a:rPr>
+              <a:t>      │</a:t>
+            </a:r>
+            <a:endParaRPr b="0" lang="en-US" sz="2200" spc="-1" strike="noStrike">
+              <a:solidFill>
+                <a:srgbClr val="ffffff"/>
+              </a:solidFill>
+              <a:latin typeface="Arial"/>
+            </a:endParaRPr>
+          </a:p>
+          <a:p>
+            <a:pPr>
+              <a:lnSpc>
+                <a:spcPct val="100000"/>
+              </a:lnSpc>
+            </a:pPr>
+            <a:r>
+              <a:rPr b="0" lang="en-US" sz="2200" spc="-1" strike="noStrike">
+                <a:solidFill>
+                  <a:schemeClr val="lt1"/>
+                </a:solidFill>
+                <a:latin typeface="Calibri"/>
+                <a:ea typeface="DejaVu Sans"/>
+              </a:rPr>
+              <a:t>      ├── </a:t>
+            </a:r>
+            <a:r>
+              <a:rPr b="0" lang="en-US" sz="2200" spc="-1" strike="noStrike">
+                <a:solidFill>
+                  <a:schemeClr val="lt1"/>
+                </a:solidFill>
+                <a:latin typeface="Calibri"/>
+                <a:ea typeface="DejaVu Sans"/>
+              </a:rPr>
+              <a:t>String</a:t>
+            </a:r>
+            <a:endParaRPr b="0" lang="en-US" sz="2200" spc="-1" strike="noStrike">
+              <a:solidFill>
+                <a:srgbClr val="ffffff"/>
+              </a:solidFill>
+              <a:latin typeface="Arial"/>
+            </a:endParaRPr>
+          </a:p>
+          <a:p>
+            <a:pPr>
+              <a:lnSpc>
+                <a:spcPct val="100000"/>
+              </a:lnSpc>
+            </a:pPr>
+            <a:r>
+              <a:rPr b="0" lang="en-US" sz="2200" spc="-1" strike="noStrike">
+                <a:solidFill>
+                  <a:schemeClr val="lt1"/>
+                </a:solidFill>
+                <a:latin typeface="Calibri"/>
+                <a:ea typeface="DejaVu Sans"/>
+              </a:rPr>
+              <a:t>      ├── </a:t>
+            </a:r>
+            <a:r>
+              <a:rPr b="0" lang="en-US" sz="2200" spc="-1" strike="noStrike">
+                <a:solidFill>
+                  <a:schemeClr val="lt1"/>
+                </a:solidFill>
+                <a:latin typeface="Calibri"/>
+                <a:ea typeface="DejaVu Sans"/>
+              </a:rPr>
+              <a:t>Diziler (Arrays)</a:t>
+            </a:r>
+            <a:endParaRPr b="0" lang="en-US" sz="2200" spc="-1" strike="noStrike">
+              <a:solidFill>
+                <a:srgbClr val="ffffff"/>
+              </a:solidFill>
+              <a:latin typeface="Arial"/>
+            </a:endParaRPr>
+          </a:p>
+          <a:p>
+            <a:pPr>
+              <a:lnSpc>
+                <a:spcPct val="100000"/>
+              </a:lnSpc>
+            </a:pPr>
+            <a:r>
+              <a:rPr b="0" lang="en-US" sz="2200" spc="-1" strike="noStrike">
+                <a:solidFill>
+                  <a:schemeClr val="lt1"/>
+                </a:solidFill>
+                <a:latin typeface="Calibri"/>
+                <a:ea typeface="DejaVu Sans"/>
+              </a:rPr>
+              <a:t>      ├── </a:t>
+            </a:r>
+            <a:r>
+              <a:rPr b="0" lang="en-US" sz="2200" spc="-1" strike="noStrike">
+                <a:solidFill>
+                  <a:schemeClr val="lt1"/>
+                </a:solidFill>
+                <a:latin typeface="Calibri"/>
+                <a:ea typeface="DejaVu Sans"/>
+              </a:rPr>
+              <a:t>Sınıflar (Classes)</a:t>
+            </a:r>
+            <a:endParaRPr b="0" lang="en-US" sz="2200" spc="-1" strike="noStrike">
+              <a:solidFill>
+                <a:srgbClr val="ffffff"/>
+              </a:solidFill>
+              <a:latin typeface="Arial"/>
+            </a:endParaRPr>
+          </a:p>
+          <a:p>
+            <a:pPr>
+              <a:lnSpc>
+                <a:spcPct val="100000"/>
+              </a:lnSpc>
+            </a:pPr>
+            <a:r>
+              <a:rPr b="0" lang="en-US" sz="2200" spc="-1" strike="noStrike">
+                <a:solidFill>
+                  <a:schemeClr val="lt1"/>
+                </a:solidFill>
+                <a:latin typeface="Calibri"/>
+                <a:ea typeface="DejaVu Sans"/>
+              </a:rPr>
+              <a:t>      └── </a:t>
+            </a:r>
+            <a:r>
+              <a:rPr b="0" lang="en-US" sz="2200" spc="-1" strike="noStrike">
+                <a:solidFill>
+                  <a:schemeClr val="lt1"/>
+                </a:solidFill>
+                <a:latin typeface="Calibri"/>
+                <a:ea typeface="DejaVu Sans"/>
+              </a:rPr>
+              <a:t>Nesneler (Objects)</a:t>
+            </a:r>
+            <a:endParaRPr b="0" lang="en-US" sz="2200" spc="-1" strike="noStrike">
+              <a:solidFill>
+                <a:srgbClr val="ffffff"/>
+              </a:solidFill>
+              <a:latin typeface="Arial"/>
+            </a:endParaRPr>
+          </a:p>
+        </p:txBody>
+      </p:sp>
+      <p:sp>
+        <p:nvSpPr>
+          <p:cNvPr id="219" name="Rounded Rectangle 34"/>
+          <p:cNvSpPr/>
+          <p:nvPr/>
+        </p:nvSpPr>
+        <p:spPr>
+          <a:xfrm>
+            <a:off x="8028360" y="3182040"/>
+            <a:ext cx="3290760" cy="2742120"/>
+          </a:xfrm>
+          <a:prstGeom prst="roundRect">
+            <a:avLst>
+              <a:gd name="adj" fmla="val 16667"/>
+            </a:avLst>
+          </a:prstGeom>
+          <a:solidFill>
+            <a:srgbClr val="08080a"/>
+          </a:solidFill>
+          <a:ln>
+            <a:noFill/>
+          </a:ln>
+          <a:effectLst>
+            <a:outerShdw blurRad="39960" dir="5400000" dist="23040" rotWithShape="0">
+              <a:srgbClr val="000000">
+                <a:alpha val="35000"/>
+              </a:srgbClr>
+            </a:outerShdw>
+          </a:effectLst>
+        </p:spPr>
+        <p:style>
+          <a:lnRef idx="1">
+            <a:schemeClr val="accent1"/>
+          </a:lnRef>
+          <a:fillRef idx="3">
+            <a:schemeClr val="accent1"/>
+          </a:fillRef>
+          <a:effectRef idx="2">
+            <a:schemeClr val="accent1"/>
+          </a:effectRef>
+          <a:fontRef idx="minor"/>
+        </p:style>
+        <p:txBody>
+          <a:bodyPr lIns="90000" rIns="90000" tIns="45000" bIns="45000" anchor="ctr">
+            <a:noAutofit/>
+          </a:bodyPr>
+          <a:p>
+            <a:endParaRPr b="0" lang="en-US" sz="1800" spc="-1" strike="noStrike">
+              <a:solidFill>
+                <a:schemeClr val="lt1"/>
+              </a:solidFill>
+              <a:latin typeface="Calibri"/>
+              <a:ea typeface="DejaVu Sans"/>
+            </a:endParaRPr>
+          </a:p>
+        </p:txBody>
+      </p:sp>
+      <p:sp>
+        <p:nvSpPr>
+          <p:cNvPr id="220" name="Rounded Rectangle 35"/>
+          <p:cNvSpPr/>
+          <p:nvPr/>
+        </p:nvSpPr>
+        <p:spPr>
+          <a:xfrm>
+            <a:off x="7955280" y="3108960"/>
+            <a:ext cx="3703320" cy="3063240"/>
+          </a:xfrm>
+          <a:prstGeom prst="roundRect">
+            <a:avLst>
+              <a:gd name="adj" fmla="val 16667"/>
+            </a:avLst>
+          </a:prstGeom>
+          <a:solidFill>
+            <a:srgbClr val="16161c"/>
+          </a:solidFill>
+          <a:ln>
+            <a:solidFill>
+              <a:srgbClr val="464655"/>
+            </a:solidFill>
+            <a:round/>
+          </a:ln>
+          <a:effectLst>
+            <a:outerShdw blurRad="39960" dir="5400000" dist="23040" rotWithShape="0">
+              <a:srgbClr val="000000">
+                <a:alpha val="35000"/>
+              </a:srgbClr>
+            </a:outerShdw>
+          </a:effectLst>
+        </p:spPr>
+        <p:style>
+          <a:lnRef idx="1">
+            <a:schemeClr val="accent1"/>
+          </a:lnRef>
+          <a:fillRef idx="3">
+            <a:schemeClr val="accent1"/>
+          </a:fillRef>
+          <a:effectRef idx="2">
+            <a:schemeClr val="accent1"/>
+          </a:effectRef>
+          <a:fontRef idx="minor"/>
+        </p:style>
+        <p:txBody>
+          <a:bodyPr lIns="90000" rIns="90000" tIns="45000" bIns="45000" anchor="ctr">
+            <a:noAutofit/>
+          </a:bodyPr>
+          <a:p>
+            <a:pPr algn="ctr">
+              <a:lnSpc>
+                <a:spcPct val="100000"/>
+              </a:lnSpc>
+            </a:pPr>
+            <a:r>
+              <a:rPr b="0" lang="en-US" sz="1400" spc="-1" strike="noStrike">
+                <a:solidFill>
+                  <a:srgbClr val="78ffc8"/>
+                </a:solidFill>
+                <a:latin typeface="Consolas"/>
+                <a:ea typeface="DejaVu Sans"/>
+              </a:rPr>
+              <a:t>public class ReferansOrnegi {</a:t>
+            </a:r>
+            <a:endParaRPr b="0" lang="en-US" sz="1400" spc="-1" strike="noStrike">
+              <a:solidFill>
+                <a:srgbClr val="ffffff"/>
+              </a:solidFill>
+              <a:latin typeface="Arial"/>
+            </a:endParaRPr>
+          </a:p>
+          <a:p>
+            <a:pPr algn="ctr">
+              <a:lnSpc>
+                <a:spcPct val="100000"/>
+              </a:lnSpc>
+            </a:pPr>
+            <a:endParaRPr b="0" lang="en-US" sz="1400" spc="-1" strike="noStrike">
+              <a:solidFill>
+                <a:srgbClr val="ffffff"/>
+              </a:solidFill>
+              <a:latin typeface="Arial"/>
+            </a:endParaRPr>
+          </a:p>
+          <a:p>
+            <a:pPr algn="ctr">
+              <a:lnSpc>
+                <a:spcPct val="100000"/>
+              </a:lnSpc>
+            </a:pPr>
+            <a:r>
+              <a:rPr b="0" lang="en-US" sz="1400" spc="-1" strike="noStrike">
+                <a:solidFill>
+                  <a:srgbClr val="78ffc8"/>
+                </a:solidFill>
+                <a:latin typeface="Consolas"/>
+                <a:ea typeface="DejaVu Sans"/>
+              </a:rPr>
+              <a:t>    </a:t>
+            </a:r>
+            <a:r>
+              <a:rPr b="0" lang="en-US" sz="1400" spc="-1" strike="noStrike">
+                <a:solidFill>
+                  <a:srgbClr val="78ffc8"/>
+                </a:solidFill>
+                <a:latin typeface="Consolas"/>
+                <a:ea typeface="DejaVu Sans"/>
+              </a:rPr>
+              <a:t>public static void main(String[] args) {</a:t>
+            </a:r>
+            <a:endParaRPr b="0" lang="en-US" sz="1400" spc="-1" strike="noStrike">
+              <a:solidFill>
+                <a:srgbClr val="ffffff"/>
+              </a:solidFill>
+              <a:latin typeface="Arial"/>
+            </a:endParaRPr>
+          </a:p>
+          <a:p>
+            <a:pPr algn="ctr">
+              <a:lnSpc>
+                <a:spcPct val="100000"/>
+              </a:lnSpc>
+            </a:pPr>
+            <a:r>
+              <a:rPr b="0" lang="en-US" sz="1400" spc="-1" strike="noStrike">
+                <a:solidFill>
+                  <a:srgbClr val="78ffc8"/>
+                </a:solidFill>
+                <a:latin typeface="Consolas"/>
+                <a:ea typeface="DejaVu Sans"/>
+              </a:rPr>
+              <a:t>        </a:t>
+            </a:r>
+            <a:r>
+              <a:rPr b="0" lang="en-US" sz="1400" spc="-1" strike="noStrike">
+                <a:solidFill>
+                  <a:srgbClr val="78ffc8"/>
+                </a:solidFill>
+                <a:latin typeface="Consolas"/>
+                <a:ea typeface="DejaVu Sans"/>
+              </a:rPr>
+              <a:t>String isim = "Java";</a:t>
+            </a:r>
+            <a:endParaRPr b="0" lang="en-US" sz="1400" spc="-1" strike="noStrike">
+              <a:solidFill>
+                <a:srgbClr val="ffffff"/>
+              </a:solidFill>
+              <a:latin typeface="Arial"/>
+            </a:endParaRPr>
+          </a:p>
+          <a:p>
+            <a:pPr algn="ctr">
+              <a:lnSpc>
+                <a:spcPct val="100000"/>
+              </a:lnSpc>
+            </a:pPr>
+            <a:r>
+              <a:rPr b="0" lang="en-US" sz="1400" spc="-1" strike="noStrike">
+                <a:solidFill>
+                  <a:srgbClr val="78ffc8"/>
+                </a:solidFill>
+                <a:latin typeface="Consolas"/>
+                <a:ea typeface="DejaVu Sans"/>
+              </a:rPr>
+              <a:t>        </a:t>
+            </a:r>
+            <a:r>
+              <a:rPr b="0" lang="en-US" sz="1400" spc="-1" strike="noStrike">
+                <a:solidFill>
+                  <a:srgbClr val="78ffc8"/>
+                </a:solidFill>
+                <a:latin typeface="Consolas"/>
+                <a:ea typeface="DejaVu Sans"/>
+              </a:rPr>
+              <a:t>int[] sayilar = {10, 20, 30};</a:t>
+            </a:r>
+            <a:endParaRPr b="0" lang="en-US" sz="1400" spc="-1" strike="noStrike">
+              <a:solidFill>
+                <a:srgbClr val="ffffff"/>
+              </a:solidFill>
+              <a:latin typeface="Arial"/>
+            </a:endParaRPr>
+          </a:p>
+          <a:p>
+            <a:pPr algn="ctr">
+              <a:lnSpc>
+                <a:spcPct val="100000"/>
+              </a:lnSpc>
+            </a:pPr>
+            <a:r>
+              <a:rPr b="0" lang="en-US" sz="1400" spc="-1" strike="noStrike">
+                <a:solidFill>
+                  <a:srgbClr val="78ffc8"/>
+                </a:solidFill>
+                <a:latin typeface="Consolas"/>
+                <a:ea typeface="DejaVu Sans"/>
+              </a:rPr>
+              <a:t>        </a:t>
+            </a:r>
+            <a:r>
+              <a:rPr b="0" lang="en-US" sz="1400" spc="-1" strike="noStrike">
+                <a:solidFill>
+                  <a:srgbClr val="78ffc8"/>
+                </a:solidFill>
+                <a:latin typeface="Consolas"/>
+                <a:ea typeface="DejaVu Sans"/>
+              </a:rPr>
+              <a:t>System.out.println(isim);</a:t>
+            </a:r>
+            <a:endParaRPr b="0" lang="en-US" sz="1400" spc="-1" strike="noStrike">
+              <a:solidFill>
+                <a:srgbClr val="ffffff"/>
+              </a:solidFill>
+              <a:latin typeface="Arial"/>
+            </a:endParaRPr>
+          </a:p>
+          <a:p>
+            <a:pPr algn="ctr">
+              <a:lnSpc>
+                <a:spcPct val="100000"/>
+              </a:lnSpc>
+            </a:pPr>
+            <a:r>
+              <a:rPr b="0" lang="en-US" sz="1400" spc="-1" strike="noStrike">
+                <a:solidFill>
+                  <a:srgbClr val="78ffc8"/>
+                </a:solidFill>
+                <a:latin typeface="Consolas"/>
+                <a:ea typeface="DejaVu Sans"/>
+              </a:rPr>
+              <a:t>        </a:t>
+            </a:r>
+            <a:r>
+              <a:rPr b="0" lang="en-US" sz="1400" spc="-1" strike="noStrike">
+                <a:solidFill>
+                  <a:srgbClr val="78ffc8"/>
+                </a:solidFill>
+                <a:latin typeface="Consolas"/>
+                <a:ea typeface="DejaVu Sans"/>
+              </a:rPr>
+              <a:t>System.out.println(sayilar[0]);</a:t>
+            </a:r>
+            <a:endParaRPr b="0" lang="en-US" sz="1400" spc="-1" strike="noStrike">
+              <a:solidFill>
+                <a:srgbClr val="ffffff"/>
+              </a:solidFill>
+              <a:latin typeface="Arial"/>
+            </a:endParaRPr>
+          </a:p>
+          <a:p>
+            <a:pPr algn="ctr">
+              <a:lnSpc>
+                <a:spcPct val="100000"/>
+              </a:lnSpc>
+            </a:pPr>
+            <a:r>
+              <a:rPr b="0" lang="en-US" sz="1400" spc="-1" strike="noStrike">
+                <a:solidFill>
+                  <a:srgbClr val="78ffc8"/>
+                </a:solidFill>
+                <a:latin typeface="Consolas"/>
+                <a:ea typeface="DejaVu Sans"/>
+              </a:rPr>
+              <a:t>    </a:t>
+            </a:r>
+            <a:r>
+              <a:rPr b="0" lang="en-US" sz="1400" spc="-1" strike="noStrike">
+                <a:solidFill>
+                  <a:srgbClr val="78ffc8"/>
+                </a:solidFill>
+                <a:latin typeface="Consolas"/>
+                <a:ea typeface="DejaVu Sans"/>
+              </a:rPr>
+              <a:t>}</a:t>
+            </a:r>
+            <a:endParaRPr b="0" lang="en-US" sz="1400" spc="-1" strike="noStrike">
+              <a:solidFill>
+                <a:srgbClr val="ffffff"/>
+              </a:solidFill>
+              <a:latin typeface="Arial"/>
+            </a:endParaRPr>
+          </a:p>
+          <a:p>
+            <a:pPr algn="ctr">
+              <a:lnSpc>
+                <a:spcPct val="100000"/>
+              </a:lnSpc>
+            </a:pPr>
+            <a:r>
+              <a:rPr b="0" lang="en-US" sz="1400" spc="-1" strike="noStrike">
+                <a:solidFill>
+                  <a:srgbClr val="78ffc8"/>
+                </a:solidFill>
+                <a:latin typeface="Consolas"/>
+                <a:ea typeface="DejaVu Sans"/>
+              </a:rPr>
+              <a:t>}</a:t>
+            </a:r>
+            <a:endParaRPr b="0" lang="en-US" sz="1400" spc="-1" strike="noStrike">
+              <a:solidFill>
+                <a:srgbClr val="ffffff"/>
+              </a:solidFill>
+              <a:latin typeface="Arial"/>
+            </a:endParaRPr>
+          </a:p>
+        </p:txBody>
+      </p:sp>
+      <p:sp>
+        <p:nvSpPr>
+          <p:cNvPr id="221" name="TextBox 15"/>
+          <p:cNvSpPr/>
+          <p:nvPr/>
+        </p:nvSpPr>
+        <p:spPr>
+          <a:xfrm>
+            <a:off x="4600080" y="6446520"/>
+            <a:ext cx="3051720" cy="363960"/>
+          </a:xfrm>
+          <a:prstGeom prst="rect">
+            <a:avLst/>
+          </a:prstGeom>
+          <a:noFill/>
+          <a:ln w="0">
+            <a:noFill/>
+          </a:ln>
+        </p:spPr>
+        <p:style>
+          <a:lnRef idx="0"/>
+          <a:fillRef idx="0"/>
+          <a:effectRef idx="0"/>
+          <a:fontRef idx="minor"/>
+        </p:style>
+        <p:txBody>
+          <a:bodyPr wrap="none" lIns="90000" rIns="90000" tIns="45000" bIns="45000" anchor="t">
+            <a:spAutoFit/>
+          </a:bodyPr>
+          <a:p>
+            <a:pPr>
+              <a:lnSpc>
+                <a:spcPct val="100000"/>
+              </a:lnSpc>
+            </a:pPr>
+            <a:r>
+              <a:rPr b="0" lang="en-US" sz="1800" spc="-1" strike="noStrike">
+                <a:solidFill>
+                  <a:srgbClr val="000000"/>
+                </a:solidFill>
+                <a:latin typeface="Calibri"/>
+                <a:ea typeface="DejaVu Sans"/>
+              </a:rPr>
+              <a:t>Java • Ultra Premium Template</a:t>
+            </a:r>
+            <a:endParaRPr b="0" lang="en-US" sz="1800" spc="-1" strike="noStrike">
+              <a:solidFill>
+                <a:srgbClr val="000000"/>
+              </a:solidFill>
+              <a:latin typeface="Arial"/>
+            </a:endParaRPr>
+          </a:p>
+        </p:txBody>
+      </p:sp>
+    </p:spTree>
+  </p:cSld>
+  <mc:AlternateContent>
+    <mc:Choice Requires="p14">
+      <p:transition spd="slow" p14:dur="2000"/>
+    </mc:Choice>
+    <mc:Fallback>
+      <p:transition spd="slow"/>
+    </mc:Fallback>
+  </mc:AlternateContent>
+</p:sld>
+</file>
+
+<file path=ppt/slides/slide5.xml><?xml version="1.0" encoding="utf-8"?>
+<p:sld xmlns:a="http://schemas.openxmlformats.org/drawingml/2006/main" xmlns:p="http://schemas.openxmlformats.org/presentationml/2006/main" xmlns:r="http://schemas.openxmlformats.org/officeDocument/2006/relationships" xmlns:p14="http://schemas.microsoft.com/office/powerpoint/2010/main" xmlns:p15="http://schemas.microsoft.com/office/powerpoint/2012/main" xmlns:mc="http://schemas.openxmlformats.org/markup-compatibility/2006">
+  <p:cSld>
+    <p:spTree>
+      <p:nvGrpSpPr>
+        <p:cNvPr id="1" name=""/>
+        <p:cNvGrpSpPr/>
+        <p:nvPr/>
+      </p:nvGrpSpPr>
+      <p:grpSpPr>
+        <a:xfrm>
+          <a:off x="0" y="0"/>
+          <a:ext cx="0" cy="0"/>
+          <a:chOff x="0" y="0"/>
+          <a:chExt cx="0" cy="0"/>
+        </a:xfrm>
+      </p:grpSpPr>
+      <p:sp>
+        <p:nvSpPr>
+          <p:cNvPr id="222" name="Rectangle 79"/>
+          <p:cNvSpPr/>
+          <p:nvPr/>
+        </p:nvSpPr>
+        <p:spPr>
+          <a:xfrm>
+            <a:off x="0" y="0"/>
+            <a:ext cx="12187800" cy="6856920"/>
+          </a:xfrm>
+          <a:prstGeom prst="rect">
+            <a:avLst/>
+          </a:prstGeom>
+          <a:solidFill>
+            <a:srgbClr val="0b0b0d"/>
+          </a:solidFill>
+          <a:ln>
+            <a:noFill/>
+          </a:ln>
+          <a:effectLst>
+            <a:outerShdw blurRad="39960" dir="5400000" dist="23040" rotWithShape="0">
+              <a:srgbClr val="000000">
+                <a:alpha val="35000"/>
+              </a:srgbClr>
+            </a:outerShdw>
+          </a:effectLst>
+        </p:spPr>
+        <p:style>
+          <a:lnRef idx="1">
+            <a:schemeClr val="accent1"/>
+          </a:lnRef>
+          <a:fillRef idx="3">
+            <a:schemeClr val="accent1"/>
+          </a:fillRef>
+          <a:effectRef idx="2">
+            <a:schemeClr val="accent1"/>
+          </a:effectRef>
+          <a:fontRef idx="minor"/>
+        </p:style>
+        <p:txBody>
+          <a:bodyPr lIns="90000" rIns="90000" tIns="45000" bIns="45000" anchor="ctr">
+            <a:noAutofit/>
+          </a:bodyPr>
+          <a:p>
+            <a:endParaRPr b="0" lang="en-US" sz="1800" spc="-1" strike="noStrike">
+              <a:solidFill>
+                <a:schemeClr val="lt1"/>
+              </a:solidFill>
+              <a:latin typeface="Calibri"/>
+              <a:ea typeface="DejaVu Sans"/>
+            </a:endParaRPr>
+          </a:p>
+        </p:txBody>
+      </p:sp>
+      <p:sp>
+        <p:nvSpPr>
+          <p:cNvPr id="223" name="Rectangle 81"/>
+          <p:cNvSpPr/>
+          <p:nvPr/>
+        </p:nvSpPr>
+        <p:spPr>
+          <a:xfrm>
+            <a:off x="0" y="0"/>
+            <a:ext cx="17280" cy="6856920"/>
+          </a:xfrm>
+          <a:prstGeom prst="rect">
+            <a:avLst/>
+          </a:prstGeom>
+          <a:solidFill>
+            <a:srgbClr val="121216"/>
+          </a:solidFill>
+          <a:ln>
+            <a:noFill/>
+          </a:ln>
+          <a:effectLst>
+            <a:outerShdw blurRad="39960" dir="5400000" dist="23040" rotWithShape="0">
+              <a:srgbClr val="000000">
+                <a:alpha val="35000"/>
+              </a:srgbClr>
+            </a:outerShdw>
+          </a:effectLst>
+        </p:spPr>
+        <p:style>
+          <a:lnRef idx="1">
+            <a:schemeClr val="accent1"/>
+          </a:lnRef>
+          <a:fillRef idx="3">
+            <a:schemeClr val="accent1"/>
+          </a:fillRef>
+          <a:effectRef idx="2">
+            <a:schemeClr val="accent1"/>
+          </a:effectRef>
+          <a:fontRef idx="minor"/>
+        </p:style>
+        <p:txBody>
+          <a:bodyPr lIns="90000" rIns="90000" tIns="45000" bIns="45000" anchor="ctr">
+            <a:noAutofit/>
+          </a:bodyPr>
+          <a:p>
+            <a:endParaRPr b="0" lang="en-US" sz="1800" spc="-1" strike="noStrike">
+              <a:solidFill>
+                <a:schemeClr val="lt1"/>
+              </a:solidFill>
+              <a:latin typeface="Calibri"/>
+              <a:ea typeface="DejaVu Sans"/>
+            </a:endParaRPr>
+          </a:p>
+        </p:txBody>
+      </p:sp>
+      <p:sp>
+        <p:nvSpPr>
+          <p:cNvPr id="224" name="Rectangle 82"/>
+          <p:cNvSpPr/>
+          <p:nvPr/>
+        </p:nvSpPr>
+        <p:spPr>
+          <a:xfrm>
+            <a:off x="914400" y="0"/>
+            <a:ext cx="17280" cy="6856920"/>
+          </a:xfrm>
+          <a:prstGeom prst="rect">
+            <a:avLst/>
+          </a:prstGeom>
+          <a:solidFill>
+            <a:srgbClr val="121216"/>
+          </a:solidFill>
+          <a:ln>
+            <a:noFill/>
+          </a:ln>
+          <a:effectLst>
+            <a:outerShdw blurRad="39960" dir="5400000" dist="23040" rotWithShape="0">
+              <a:srgbClr val="000000">
+                <a:alpha val="35000"/>
+              </a:srgbClr>
+            </a:outerShdw>
+          </a:effectLst>
+        </p:spPr>
+        <p:style>
+          <a:lnRef idx="1">
+            <a:schemeClr val="accent1"/>
+          </a:lnRef>
+          <a:fillRef idx="3">
+            <a:schemeClr val="accent1"/>
+          </a:fillRef>
+          <a:effectRef idx="2">
+            <a:schemeClr val="accent1"/>
+          </a:effectRef>
+          <a:fontRef idx="minor"/>
+        </p:style>
+        <p:txBody>
+          <a:bodyPr lIns="90000" rIns="90000" tIns="45000" bIns="45000" anchor="ctr">
+            <a:noAutofit/>
+          </a:bodyPr>
+          <a:p>
+            <a:endParaRPr b="0" lang="en-US" sz="1800" spc="-1" strike="noStrike">
+              <a:solidFill>
+                <a:schemeClr val="lt1"/>
+              </a:solidFill>
+              <a:latin typeface="Calibri"/>
+              <a:ea typeface="DejaVu Sans"/>
+            </a:endParaRPr>
+          </a:p>
+        </p:txBody>
+      </p:sp>
+      <p:sp>
+        <p:nvSpPr>
+          <p:cNvPr id="225" name="Rectangle 83"/>
+          <p:cNvSpPr/>
+          <p:nvPr/>
+        </p:nvSpPr>
+        <p:spPr>
+          <a:xfrm>
+            <a:off x="1828800" y="0"/>
+            <a:ext cx="17280" cy="6856920"/>
+          </a:xfrm>
+          <a:prstGeom prst="rect">
+            <a:avLst/>
+          </a:prstGeom>
+          <a:solidFill>
+            <a:srgbClr val="121216"/>
+          </a:solidFill>
+          <a:ln>
+            <a:noFill/>
+          </a:ln>
+          <a:effectLst>
+            <a:outerShdw blurRad="39960" dir="5400000" dist="23040" rotWithShape="0">
+              <a:srgbClr val="000000">
+                <a:alpha val="35000"/>
+              </a:srgbClr>
+            </a:outerShdw>
+          </a:effectLst>
+        </p:spPr>
+        <p:style>
+          <a:lnRef idx="1">
+            <a:schemeClr val="accent1"/>
+          </a:lnRef>
+          <a:fillRef idx="3">
+            <a:schemeClr val="accent1"/>
+          </a:fillRef>
+          <a:effectRef idx="2">
+            <a:schemeClr val="accent1"/>
+          </a:effectRef>
+          <a:fontRef idx="minor"/>
+        </p:style>
+        <p:txBody>
+          <a:bodyPr lIns="90000" rIns="90000" tIns="45000" bIns="45000" anchor="ctr">
+            <a:noAutofit/>
+          </a:bodyPr>
+          <a:p>
+            <a:endParaRPr b="0" lang="en-US" sz="1800" spc="-1" strike="noStrike">
+              <a:solidFill>
+                <a:schemeClr val="lt1"/>
+              </a:solidFill>
+              <a:latin typeface="Calibri"/>
+              <a:ea typeface="DejaVu Sans"/>
+            </a:endParaRPr>
+          </a:p>
+        </p:txBody>
+      </p:sp>
+      <p:sp>
+        <p:nvSpPr>
+          <p:cNvPr id="226" name="Rectangle 84"/>
+          <p:cNvSpPr/>
+          <p:nvPr/>
+        </p:nvSpPr>
+        <p:spPr>
+          <a:xfrm>
+            <a:off x="2743200" y="0"/>
+            <a:ext cx="17280" cy="6856920"/>
+          </a:xfrm>
+          <a:prstGeom prst="rect">
+            <a:avLst/>
+          </a:prstGeom>
+          <a:solidFill>
+            <a:srgbClr val="121216"/>
+          </a:solidFill>
+          <a:ln>
+            <a:noFill/>
+          </a:ln>
+          <a:effectLst>
+            <a:outerShdw blurRad="39960" dir="5400000" dist="23040" rotWithShape="0">
+              <a:srgbClr val="000000">
+                <a:alpha val="35000"/>
+              </a:srgbClr>
+            </a:outerShdw>
+          </a:effectLst>
+        </p:spPr>
+        <p:style>
+          <a:lnRef idx="1">
+            <a:schemeClr val="accent1"/>
+          </a:lnRef>
+          <a:fillRef idx="3">
+            <a:schemeClr val="accent1"/>
+          </a:fillRef>
+          <a:effectRef idx="2">
+            <a:schemeClr val="accent1"/>
+          </a:effectRef>
+          <a:fontRef idx="minor"/>
+        </p:style>
+        <p:txBody>
+          <a:bodyPr lIns="90000" rIns="90000" tIns="45000" bIns="45000" anchor="ctr">
+            <a:noAutofit/>
+          </a:bodyPr>
+          <a:p>
+            <a:endParaRPr b="0" lang="en-US" sz="1800" spc="-1" strike="noStrike">
+              <a:solidFill>
+                <a:schemeClr val="lt1"/>
+              </a:solidFill>
+              <a:latin typeface="Calibri"/>
+              <a:ea typeface="DejaVu Sans"/>
+            </a:endParaRPr>
+          </a:p>
+        </p:txBody>
+      </p:sp>
+      <p:sp>
+        <p:nvSpPr>
+          <p:cNvPr id="227" name="Rectangle 85"/>
+          <p:cNvSpPr/>
+          <p:nvPr/>
+        </p:nvSpPr>
+        <p:spPr>
+          <a:xfrm>
+            <a:off x="3657600" y="0"/>
+            <a:ext cx="17280" cy="6856920"/>
+          </a:xfrm>
+          <a:prstGeom prst="rect">
+            <a:avLst/>
+          </a:prstGeom>
+          <a:solidFill>
+            <a:srgbClr val="121216"/>
+          </a:solidFill>
+          <a:ln>
+            <a:noFill/>
+          </a:ln>
+          <a:effectLst>
+            <a:outerShdw blurRad="39960" dir="5400000" dist="23040" rotWithShape="0">
+              <a:srgbClr val="000000">
+                <a:alpha val="35000"/>
+              </a:srgbClr>
+            </a:outerShdw>
+          </a:effectLst>
+        </p:spPr>
+        <p:style>
+          <a:lnRef idx="1">
+            <a:schemeClr val="accent1"/>
+          </a:lnRef>
+          <a:fillRef idx="3">
+            <a:schemeClr val="accent1"/>
+          </a:fillRef>
+          <a:effectRef idx="2">
+            <a:schemeClr val="accent1"/>
+          </a:effectRef>
+          <a:fontRef idx="minor"/>
+        </p:style>
+        <p:txBody>
+          <a:bodyPr lIns="90000" rIns="90000" tIns="45000" bIns="45000" anchor="ctr">
+            <a:noAutofit/>
+          </a:bodyPr>
+          <a:p>
+            <a:endParaRPr b="0" lang="en-US" sz="1800" spc="-1" strike="noStrike">
+              <a:solidFill>
+                <a:schemeClr val="lt1"/>
+              </a:solidFill>
+              <a:latin typeface="Calibri"/>
+              <a:ea typeface="DejaVu Sans"/>
+            </a:endParaRPr>
+          </a:p>
+        </p:txBody>
+      </p:sp>
+      <p:sp>
+        <p:nvSpPr>
+          <p:cNvPr id="228" name="Rectangle 86"/>
+          <p:cNvSpPr/>
+          <p:nvPr/>
+        </p:nvSpPr>
+        <p:spPr>
+          <a:xfrm>
+            <a:off x="4572000" y="0"/>
+            <a:ext cx="17280" cy="6856920"/>
+          </a:xfrm>
+          <a:prstGeom prst="rect">
+            <a:avLst/>
+          </a:prstGeom>
+          <a:solidFill>
+            <a:srgbClr val="121216"/>
+          </a:solidFill>
+          <a:ln>
+            <a:noFill/>
+          </a:ln>
+          <a:effectLst>
+            <a:outerShdw blurRad="39960" dir="5400000" dist="23040" rotWithShape="0">
+              <a:srgbClr val="000000">
+                <a:alpha val="35000"/>
+              </a:srgbClr>
+            </a:outerShdw>
+          </a:effectLst>
+        </p:spPr>
+        <p:style>
+          <a:lnRef idx="1">
+            <a:schemeClr val="accent1"/>
+          </a:lnRef>
+          <a:fillRef idx="3">
+            <a:schemeClr val="accent1"/>
+          </a:fillRef>
+          <a:effectRef idx="2">
+            <a:schemeClr val="accent1"/>
+          </a:effectRef>
+          <a:fontRef idx="minor"/>
+        </p:style>
+        <p:txBody>
+          <a:bodyPr lIns="90000" rIns="90000" tIns="45000" bIns="45000" anchor="ctr">
+            <a:noAutofit/>
+          </a:bodyPr>
+          <a:p>
+            <a:endParaRPr b="0" lang="en-US" sz="1800" spc="-1" strike="noStrike">
+              <a:solidFill>
+                <a:schemeClr val="lt1"/>
+              </a:solidFill>
+              <a:latin typeface="Calibri"/>
+              <a:ea typeface="DejaVu Sans"/>
+            </a:endParaRPr>
+          </a:p>
+        </p:txBody>
+      </p:sp>
+      <p:sp>
+        <p:nvSpPr>
+          <p:cNvPr id="229" name="Rectangle 87"/>
+          <p:cNvSpPr/>
+          <p:nvPr/>
+        </p:nvSpPr>
+        <p:spPr>
+          <a:xfrm>
+            <a:off x="5486400" y="0"/>
+            <a:ext cx="17280" cy="6856920"/>
+          </a:xfrm>
+          <a:prstGeom prst="rect">
+            <a:avLst/>
+          </a:prstGeom>
+          <a:solidFill>
+            <a:srgbClr val="121216"/>
+          </a:solidFill>
+          <a:ln>
+            <a:noFill/>
+          </a:ln>
+          <a:effectLst>
+            <a:outerShdw blurRad="39960" dir="5400000" dist="23040" rotWithShape="0">
+              <a:srgbClr val="000000">
+                <a:alpha val="35000"/>
+              </a:srgbClr>
+            </a:outerShdw>
+          </a:effectLst>
+        </p:spPr>
+        <p:style>
+          <a:lnRef idx="1">
+            <a:schemeClr val="accent1"/>
+          </a:lnRef>
+          <a:fillRef idx="3">
+            <a:schemeClr val="accent1"/>
+          </a:fillRef>
+          <a:effectRef idx="2">
+            <a:schemeClr val="accent1"/>
+          </a:effectRef>
+          <a:fontRef idx="minor"/>
+        </p:style>
+        <p:txBody>
+          <a:bodyPr lIns="90000" rIns="90000" tIns="45000" bIns="45000" anchor="ctr">
+            <a:noAutofit/>
+          </a:bodyPr>
+          <a:p>
+            <a:endParaRPr b="0" lang="en-US" sz="1800" spc="-1" strike="noStrike">
+              <a:solidFill>
+                <a:schemeClr val="lt1"/>
+              </a:solidFill>
+              <a:latin typeface="Calibri"/>
+              <a:ea typeface="DejaVu Sans"/>
+            </a:endParaRPr>
+          </a:p>
+        </p:txBody>
+      </p:sp>
+      <p:sp>
+        <p:nvSpPr>
+          <p:cNvPr id="230" name="Rectangle 88"/>
+          <p:cNvSpPr/>
+          <p:nvPr/>
+        </p:nvSpPr>
+        <p:spPr>
+          <a:xfrm>
+            <a:off x="6400800" y="0"/>
+            <a:ext cx="17280" cy="6856920"/>
+          </a:xfrm>
+          <a:prstGeom prst="rect">
+            <a:avLst/>
+          </a:prstGeom>
+          <a:solidFill>
+            <a:srgbClr val="121216"/>
+          </a:solidFill>
+          <a:ln>
+            <a:noFill/>
+          </a:ln>
+          <a:effectLst>
+            <a:outerShdw blurRad="39960" dir="5400000" dist="23040" rotWithShape="0">
+              <a:srgbClr val="000000">
+                <a:alpha val="35000"/>
+              </a:srgbClr>
+            </a:outerShdw>
+          </a:effectLst>
+        </p:spPr>
+        <p:style>
+          <a:lnRef idx="1">
+            <a:schemeClr val="accent1"/>
+          </a:lnRef>
+          <a:fillRef idx="3">
+            <a:schemeClr val="accent1"/>
+          </a:fillRef>
+          <a:effectRef idx="2">
+            <a:schemeClr val="accent1"/>
+          </a:effectRef>
+          <a:fontRef idx="minor"/>
+        </p:style>
+        <p:txBody>
+          <a:bodyPr lIns="90000" rIns="90000" tIns="45000" bIns="45000" anchor="ctr">
+            <a:noAutofit/>
+          </a:bodyPr>
+          <a:p>
+            <a:endParaRPr b="0" lang="en-US" sz="1800" spc="-1" strike="noStrike">
+              <a:solidFill>
+                <a:schemeClr val="lt1"/>
+              </a:solidFill>
+              <a:latin typeface="Calibri"/>
+              <a:ea typeface="DejaVu Sans"/>
+            </a:endParaRPr>
+          </a:p>
+        </p:txBody>
+      </p:sp>
+      <p:sp>
+        <p:nvSpPr>
+          <p:cNvPr id="231" name="Rectangle 89"/>
+          <p:cNvSpPr/>
+          <p:nvPr/>
+        </p:nvSpPr>
+        <p:spPr>
+          <a:xfrm>
+            <a:off x="7315200" y="0"/>
+            <a:ext cx="17280" cy="6856920"/>
+          </a:xfrm>
+          <a:prstGeom prst="rect">
+            <a:avLst/>
+          </a:prstGeom>
+          <a:solidFill>
+            <a:srgbClr val="121216"/>
+          </a:solidFill>
+          <a:ln>
+            <a:noFill/>
+          </a:ln>
+          <a:effectLst>
+            <a:outerShdw blurRad="39960" dir="5400000" dist="23040" rotWithShape="0">
+              <a:srgbClr val="000000">
+                <a:alpha val="35000"/>
+              </a:srgbClr>
+            </a:outerShdw>
+          </a:effectLst>
+        </p:spPr>
+        <p:style>
+          <a:lnRef idx="1">
+            <a:schemeClr val="accent1"/>
+          </a:lnRef>
+          <a:fillRef idx="3">
+            <a:schemeClr val="accent1"/>
+          </a:fillRef>
+          <a:effectRef idx="2">
+            <a:schemeClr val="accent1"/>
+          </a:effectRef>
+          <a:fontRef idx="minor"/>
+        </p:style>
+        <p:txBody>
+          <a:bodyPr lIns="90000" rIns="90000" tIns="45000" bIns="45000" anchor="ctr">
+            <a:noAutofit/>
+          </a:bodyPr>
+          <a:p>
+            <a:endParaRPr b="0" lang="en-US" sz="1800" spc="-1" strike="noStrike">
+              <a:solidFill>
+                <a:schemeClr val="lt1"/>
+              </a:solidFill>
+              <a:latin typeface="Calibri"/>
+              <a:ea typeface="DejaVu Sans"/>
+            </a:endParaRPr>
+          </a:p>
+        </p:txBody>
+      </p:sp>
+      <p:sp>
+        <p:nvSpPr>
+          <p:cNvPr id="232" name="Rectangle 90"/>
+          <p:cNvSpPr/>
+          <p:nvPr/>
+        </p:nvSpPr>
+        <p:spPr>
+          <a:xfrm>
+            <a:off x="8229600" y="0"/>
+            <a:ext cx="17280" cy="6856920"/>
+          </a:xfrm>
+          <a:prstGeom prst="rect">
+            <a:avLst/>
+          </a:prstGeom>
+          <a:solidFill>
+            <a:srgbClr val="121216"/>
+          </a:solidFill>
+          <a:ln>
+            <a:noFill/>
+          </a:ln>
+          <a:effectLst>
+            <a:outerShdw blurRad="39960" dir="5400000" dist="23040" rotWithShape="0">
+              <a:srgbClr val="000000">
+                <a:alpha val="35000"/>
+              </a:srgbClr>
+            </a:outerShdw>
+          </a:effectLst>
+        </p:spPr>
+        <p:style>
+          <a:lnRef idx="1">
+            <a:schemeClr val="accent1"/>
+          </a:lnRef>
+          <a:fillRef idx="3">
+            <a:schemeClr val="accent1"/>
+          </a:fillRef>
+          <a:effectRef idx="2">
+            <a:schemeClr val="accent1"/>
+          </a:effectRef>
+          <a:fontRef idx="minor"/>
+        </p:style>
+        <p:txBody>
+          <a:bodyPr lIns="90000" rIns="90000" tIns="45000" bIns="45000" anchor="ctr">
+            <a:noAutofit/>
+          </a:bodyPr>
+          <a:p>
+            <a:endParaRPr b="0" lang="en-US" sz="1800" spc="-1" strike="noStrike">
+              <a:solidFill>
+                <a:schemeClr val="lt1"/>
+              </a:solidFill>
+              <a:latin typeface="Calibri"/>
+              <a:ea typeface="DejaVu Sans"/>
+            </a:endParaRPr>
+          </a:p>
+        </p:txBody>
+      </p:sp>
+      <p:sp>
+        <p:nvSpPr>
+          <p:cNvPr id="233" name="Rectangle 91"/>
+          <p:cNvSpPr/>
+          <p:nvPr/>
+        </p:nvSpPr>
+        <p:spPr>
+          <a:xfrm>
+            <a:off x="9144000" y="0"/>
+            <a:ext cx="17280" cy="6856920"/>
+          </a:xfrm>
+          <a:prstGeom prst="rect">
+            <a:avLst/>
+          </a:prstGeom>
+          <a:solidFill>
+            <a:srgbClr val="121216"/>
+          </a:solidFill>
+          <a:ln>
+            <a:noFill/>
+          </a:ln>
+          <a:effectLst>
+            <a:outerShdw blurRad="39960" dir="5400000" dist="23040" rotWithShape="0">
+              <a:srgbClr val="000000">
+                <a:alpha val="35000"/>
+              </a:srgbClr>
+            </a:outerShdw>
+          </a:effectLst>
+        </p:spPr>
+        <p:style>
+          <a:lnRef idx="1">
+            <a:schemeClr val="accent1"/>
+          </a:lnRef>
+          <a:fillRef idx="3">
+            <a:schemeClr val="accent1"/>
+          </a:fillRef>
+          <a:effectRef idx="2">
+            <a:schemeClr val="accent1"/>
+          </a:effectRef>
+          <a:fontRef idx="minor"/>
+        </p:style>
+        <p:txBody>
+          <a:bodyPr lIns="90000" rIns="90000" tIns="45000" bIns="45000" anchor="ctr">
+            <a:noAutofit/>
+          </a:bodyPr>
+          <a:p>
+            <a:endParaRPr b="0" lang="en-US" sz="1800" spc="-1" strike="noStrike">
+              <a:solidFill>
+                <a:schemeClr val="lt1"/>
+              </a:solidFill>
+              <a:latin typeface="Calibri"/>
+              <a:ea typeface="DejaVu Sans"/>
+            </a:endParaRPr>
+          </a:p>
+        </p:txBody>
+      </p:sp>
+      <p:sp>
+        <p:nvSpPr>
+          <p:cNvPr id="234" name="Rectangle 92"/>
+          <p:cNvSpPr/>
+          <p:nvPr/>
+        </p:nvSpPr>
+        <p:spPr>
+          <a:xfrm>
+            <a:off x="10058400" y="0"/>
+            <a:ext cx="17280" cy="6856920"/>
+          </a:xfrm>
+          <a:prstGeom prst="rect">
+            <a:avLst/>
+          </a:prstGeom>
+          <a:solidFill>
+            <a:srgbClr val="121216"/>
+          </a:solidFill>
+          <a:ln>
+            <a:noFill/>
+          </a:ln>
+          <a:effectLst>
+            <a:outerShdw blurRad="39960" dir="5400000" dist="23040" rotWithShape="0">
+              <a:srgbClr val="000000">
+                <a:alpha val="35000"/>
+              </a:srgbClr>
+            </a:outerShdw>
+          </a:effectLst>
+        </p:spPr>
+        <p:style>
+          <a:lnRef idx="1">
+            <a:schemeClr val="accent1"/>
+          </a:lnRef>
+          <a:fillRef idx="3">
+            <a:schemeClr val="accent1"/>
+          </a:fillRef>
+          <a:effectRef idx="2">
+            <a:schemeClr val="accent1"/>
+          </a:effectRef>
+          <a:fontRef idx="minor"/>
+        </p:style>
+        <p:txBody>
+          <a:bodyPr lIns="90000" rIns="90000" tIns="45000" bIns="45000" anchor="ctr">
+            <a:noAutofit/>
+          </a:bodyPr>
+          <a:p>
+            <a:endParaRPr b="0" lang="en-US" sz="1800" spc="-1" strike="noStrike">
+              <a:solidFill>
+                <a:schemeClr val="lt1"/>
+              </a:solidFill>
+              <a:latin typeface="Calibri"/>
+              <a:ea typeface="DejaVu Sans"/>
+            </a:endParaRPr>
+          </a:p>
+        </p:txBody>
+      </p:sp>
+      <p:sp>
+        <p:nvSpPr>
+          <p:cNvPr id="235" name="Rectangle 93"/>
+          <p:cNvSpPr/>
+          <p:nvPr/>
+        </p:nvSpPr>
+        <p:spPr>
+          <a:xfrm>
+            <a:off x="10972800" y="0"/>
+            <a:ext cx="17280" cy="6856920"/>
+          </a:xfrm>
+          <a:prstGeom prst="rect">
+            <a:avLst/>
+          </a:prstGeom>
+          <a:solidFill>
+            <a:srgbClr val="121216"/>
+          </a:solidFill>
+          <a:ln>
+            <a:noFill/>
+          </a:ln>
+          <a:effectLst>
+            <a:outerShdw blurRad="39960" dir="5400000" dist="23040" rotWithShape="0">
+              <a:srgbClr val="000000">
+                <a:alpha val="35000"/>
+              </a:srgbClr>
+            </a:outerShdw>
+          </a:effectLst>
+        </p:spPr>
+        <p:style>
+          <a:lnRef idx="1">
+            <a:schemeClr val="accent1"/>
+          </a:lnRef>
+          <a:fillRef idx="3">
+            <a:schemeClr val="accent1"/>
+          </a:fillRef>
+          <a:effectRef idx="2">
+            <a:schemeClr val="accent1"/>
+          </a:effectRef>
+          <a:fontRef idx="minor"/>
+        </p:style>
+        <p:txBody>
+          <a:bodyPr lIns="90000" rIns="90000" tIns="45000" bIns="45000" anchor="ctr">
+            <a:noAutofit/>
+          </a:bodyPr>
+          <a:p>
+            <a:endParaRPr b="0" lang="en-US" sz="1800" spc="-1" strike="noStrike">
+              <a:solidFill>
+                <a:schemeClr val="lt1"/>
+              </a:solidFill>
+              <a:latin typeface="Calibri"/>
+              <a:ea typeface="DejaVu Sans"/>
+            </a:endParaRPr>
+          </a:p>
+        </p:txBody>
+      </p:sp>
+      <p:sp>
+        <p:nvSpPr>
+          <p:cNvPr id="236" name="Rectangle 94"/>
+          <p:cNvSpPr/>
+          <p:nvPr/>
+        </p:nvSpPr>
+        <p:spPr>
+          <a:xfrm>
+            <a:off x="11887200" y="0"/>
+            <a:ext cx="17280" cy="6856920"/>
+          </a:xfrm>
+          <a:prstGeom prst="rect">
+            <a:avLst/>
+          </a:prstGeom>
+          <a:solidFill>
+            <a:srgbClr val="121216"/>
+          </a:solidFill>
+          <a:ln>
+            <a:noFill/>
+          </a:ln>
+          <a:effectLst>
+            <a:outerShdw blurRad="39960" dir="5400000" dist="23040" rotWithShape="0">
+              <a:srgbClr val="000000">
+                <a:alpha val="35000"/>
+              </a:srgbClr>
+            </a:outerShdw>
+          </a:effectLst>
+        </p:spPr>
+        <p:style>
+          <a:lnRef idx="1">
+            <a:schemeClr val="accent1"/>
+          </a:lnRef>
+          <a:fillRef idx="3">
+            <a:schemeClr val="accent1"/>
+          </a:fillRef>
+          <a:effectRef idx="2">
+            <a:schemeClr val="accent1"/>
+          </a:effectRef>
+          <a:fontRef idx="minor"/>
+        </p:style>
+        <p:txBody>
+          <a:bodyPr lIns="90000" rIns="90000" tIns="45000" bIns="45000" anchor="ctr">
+            <a:noAutofit/>
+          </a:bodyPr>
+          <a:p>
+            <a:endParaRPr b="0" lang="en-US" sz="1800" spc="-1" strike="noStrike">
+              <a:solidFill>
+                <a:schemeClr val="lt1"/>
+              </a:solidFill>
+              <a:latin typeface="Calibri"/>
+              <a:ea typeface="DejaVu Sans"/>
+            </a:endParaRPr>
+          </a:p>
+        </p:txBody>
+      </p:sp>
+      <p:sp>
+        <p:nvSpPr>
+          <p:cNvPr id="237" name="Rectangle 95"/>
+          <p:cNvSpPr/>
+          <p:nvPr/>
+        </p:nvSpPr>
+        <p:spPr>
+          <a:xfrm>
+            <a:off x="0" y="0"/>
+            <a:ext cx="318960" cy="6856920"/>
+          </a:xfrm>
+          <a:prstGeom prst="rect">
+            <a:avLst/>
+          </a:prstGeom>
+          <a:solidFill>
+            <a:srgbClr val="ff8c00"/>
+          </a:solidFill>
+          <a:ln>
+            <a:noFill/>
+          </a:ln>
+          <a:effectLst>
+            <a:outerShdw blurRad="39960" dir="5400000" dist="23040" rotWithShape="0">
+              <a:srgbClr val="000000">
+                <a:alpha val="35000"/>
+              </a:srgbClr>
+            </a:outerShdw>
+          </a:effectLst>
+        </p:spPr>
+        <p:style>
+          <a:lnRef idx="1">
+            <a:schemeClr val="accent1"/>
+          </a:lnRef>
+          <a:fillRef idx="3">
+            <a:schemeClr val="accent1"/>
+          </a:fillRef>
+          <a:effectRef idx="2">
+            <a:schemeClr val="accent1"/>
+          </a:effectRef>
+          <a:fontRef idx="minor"/>
+        </p:style>
+        <p:txBody>
+          <a:bodyPr lIns="90000" rIns="90000" tIns="45000" bIns="45000" anchor="ctr">
+            <a:noAutofit/>
+          </a:bodyPr>
+          <a:p>
+            <a:endParaRPr b="0" lang="en-US" sz="1800" spc="-1" strike="noStrike">
+              <a:solidFill>
+                <a:schemeClr val="lt1"/>
+              </a:solidFill>
+              <a:latin typeface="Calibri"/>
+              <a:ea typeface="DejaVu Sans"/>
+            </a:endParaRPr>
+          </a:p>
+        </p:txBody>
+      </p:sp>
+      <p:sp>
+        <p:nvSpPr>
+          <p:cNvPr id="238" name="Rounded Rectangle 36"/>
+          <p:cNvSpPr/>
+          <p:nvPr/>
+        </p:nvSpPr>
+        <p:spPr>
+          <a:xfrm>
+            <a:off x="9875520" y="365760"/>
+            <a:ext cx="2010600" cy="501840"/>
+          </a:xfrm>
+          <a:prstGeom prst="roundRect">
+            <a:avLst>
+              <a:gd name="adj" fmla="val 16667"/>
+            </a:avLst>
+          </a:prstGeom>
+          <a:solidFill>
+            <a:srgbClr val="1e1e24"/>
+          </a:solidFill>
+          <a:ln>
+            <a:solidFill>
+              <a:srgbClr val="ff8c00"/>
+            </a:solidFill>
+            <a:round/>
+          </a:ln>
+          <a:effectLst>
+            <a:outerShdw blurRad="39960" dir="5400000" dist="23040" rotWithShape="0">
+              <a:srgbClr val="000000">
+                <a:alpha val="35000"/>
+              </a:srgbClr>
+            </a:outerShdw>
+          </a:effectLst>
+        </p:spPr>
+        <p:style>
+          <a:lnRef idx="1">
+            <a:schemeClr val="accent1"/>
+          </a:lnRef>
+          <a:fillRef idx="3">
+            <a:schemeClr val="accent1"/>
+          </a:fillRef>
+          <a:effectRef idx="2">
+            <a:schemeClr val="accent1"/>
+          </a:effectRef>
+          <a:fontRef idx="minor"/>
+        </p:style>
+        <p:txBody>
+          <a:bodyPr lIns="90000" rIns="90000" tIns="45000" bIns="45000" anchor="ctr">
+            <a:noAutofit/>
+          </a:bodyPr>
+          <a:p>
+            <a:pPr algn="ctr">
+              <a:lnSpc>
+                <a:spcPct val="100000"/>
+              </a:lnSpc>
+            </a:pPr>
+            <a:r>
+              <a:rPr b="1" lang="en-US" sz="1400" spc="-1" strike="noStrike">
+                <a:solidFill>
+                  <a:srgbClr val="ffb45a"/>
+                </a:solidFill>
+                <a:latin typeface="Calibri"/>
+                <a:ea typeface="DejaVu Sans"/>
+              </a:rPr>
+              <a:t>JAVA TEMELLERI</a:t>
+            </a:r>
+            <a:endParaRPr b="0" lang="en-US" sz="1400" spc="-1" strike="noStrike">
+              <a:solidFill>
+                <a:srgbClr val="ffffff"/>
+              </a:solidFill>
+              <a:latin typeface="Arial"/>
+            </a:endParaRPr>
+          </a:p>
+        </p:txBody>
+      </p:sp>
+      <p:sp>
+        <p:nvSpPr>
+          <p:cNvPr id="239" name="TextBox 16"/>
+          <p:cNvSpPr/>
+          <p:nvPr/>
+        </p:nvSpPr>
+        <p:spPr>
+          <a:xfrm>
+            <a:off x="1422000" y="1005840"/>
+            <a:ext cx="8127360" cy="639000"/>
+          </a:xfrm>
+          <a:prstGeom prst="rect">
+            <a:avLst/>
+          </a:prstGeom>
+          <a:noFill/>
+          <a:ln w="0">
+            <a:noFill/>
+          </a:ln>
+        </p:spPr>
+        <p:style>
+          <a:lnRef idx="0"/>
+          <a:fillRef idx="0"/>
+          <a:effectRef idx="0"/>
+          <a:fontRef idx="minor"/>
+        </p:style>
+        <p:txBody>
+          <a:bodyPr wrap="none" lIns="90000" rIns="90000" tIns="45000" bIns="45000" anchor="t">
+            <a:spAutoFit/>
+          </a:bodyPr>
+          <a:p>
+            <a:pPr>
+              <a:lnSpc>
+                <a:spcPct val="100000"/>
+              </a:lnSpc>
+            </a:pPr>
+            <a:r>
+              <a:rPr b="1" lang="en-US" sz="3600" spc="-1" strike="noStrike">
+                <a:solidFill>
+                  <a:srgbClr val="f5f5f5"/>
+                </a:solidFill>
+                <a:latin typeface="Calibri"/>
+                <a:ea typeface="DejaVu Sans"/>
+              </a:rPr>
+              <a:t>İLKESEL (PRIMITIVE) VE REFERANS TİPLERİ</a:t>
+            </a:r>
+            <a:endParaRPr b="0" lang="en-US" sz="3600" spc="-1" strike="noStrike">
+              <a:solidFill>
+                <a:srgbClr val="000000"/>
+              </a:solidFill>
+              <a:latin typeface="Arial"/>
+            </a:endParaRPr>
+          </a:p>
+        </p:txBody>
+      </p:sp>
+      <p:sp>
+        <p:nvSpPr>
+          <p:cNvPr id="240" name="TextBox 17"/>
+          <p:cNvSpPr/>
+          <p:nvPr/>
+        </p:nvSpPr>
+        <p:spPr>
+          <a:xfrm>
+            <a:off x="1388160" y="2057400"/>
+            <a:ext cx="8782560" cy="668520"/>
+          </a:xfrm>
+          <a:prstGeom prst="rect">
+            <a:avLst/>
+          </a:prstGeom>
+          <a:noFill/>
+          <a:ln w="0">
+            <a:noFill/>
+          </a:ln>
+        </p:spPr>
+        <p:style>
+          <a:lnRef idx="0"/>
+          <a:fillRef idx="0"/>
+          <a:effectRef idx="0"/>
+          <a:fontRef idx="minor"/>
+        </p:style>
+        <p:txBody>
+          <a:bodyPr wrap="none" lIns="90000" rIns="90000" tIns="45000" bIns="45000" anchor="t">
+            <a:spAutoFit/>
+          </a:bodyPr>
+          <a:p>
+            <a:pPr>
+              <a:lnSpc>
+                <a:spcPct val="100000"/>
+              </a:lnSpc>
+            </a:pPr>
+            <a:r>
+              <a:rPr b="0" lang="en-US" sz="1900" spc="-1" strike="noStrike">
+                <a:solidFill>
+                  <a:srgbClr val="aaaaaa"/>
+                </a:solidFill>
+                <a:latin typeface="Calibri"/>
+                <a:ea typeface="DejaVu Sans"/>
+              </a:rPr>
+              <a:t>Java veri tipleri iki ana kategoriye ayrılır: ilkel (primitive) tipler ve referans tipleri.</a:t>
+            </a:r>
+            <a:endParaRPr b="0" lang="en-US" sz="1900" spc="-1" strike="noStrike">
+              <a:solidFill>
+                <a:srgbClr val="000000"/>
+              </a:solidFill>
+              <a:latin typeface="Arial"/>
+            </a:endParaRPr>
+          </a:p>
+          <a:p>
+            <a:pPr>
+              <a:lnSpc>
+                <a:spcPct val="100000"/>
+              </a:lnSpc>
+            </a:pPr>
+            <a:r>
+              <a:rPr b="0" lang="en-US" sz="1900" spc="-1" strike="noStrike">
+                <a:solidFill>
+                  <a:srgbClr val="aaaaaa"/>
+                </a:solidFill>
+                <a:latin typeface="Calibri"/>
+                <a:ea typeface="DejaVu Sans"/>
+              </a:rPr>
+              <a:t>İlkel tipler gerçek değerleri saklarken, referans tipleri nesnelerin bellek adreslerini saklar.</a:t>
+            </a:r>
+            <a:endParaRPr b="0" lang="en-US" sz="1900" spc="-1" strike="noStrike">
+              <a:solidFill>
+                <a:srgbClr val="000000"/>
+              </a:solidFill>
+              <a:latin typeface="Arial"/>
+            </a:endParaRPr>
+          </a:p>
+        </p:txBody>
+      </p:sp>
+      <p:sp>
+        <p:nvSpPr>
+          <p:cNvPr id="241" name="Rounded Rectangle 37"/>
+          <p:cNvSpPr/>
+          <p:nvPr/>
+        </p:nvSpPr>
+        <p:spPr>
+          <a:xfrm>
+            <a:off x="987480" y="3182040"/>
+            <a:ext cx="3290760" cy="2742120"/>
+          </a:xfrm>
+          <a:prstGeom prst="roundRect">
+            <a:avLst>
+              <a:gd name="adj" fmla="val 16667"/>
+            </a:avLst>
+          </a:prstGeom>
+          <a:solidFill>
+            <a:srgbClr val="08080a"/>
+          </a:solidFill>
+          <a:ln>
+            <a:noFill/>
+          </a:ln>
+          <a:effectLst>
+            <a:outerShdw blurRad="39960" dir="5400000" dist="23040" rotWithShape="0">
+              <a:srgbClr val="000000">
+                <a:alpha val="35000"/>
+              </a:srgbClr>
+            </a:outerShdw>
+          </a:effectLst>
+        </p:spPr>
+        <p:style>
+          <a:lnRef idx="1">
+            <a:schemeClr val="accent1"/>
+          </a:lnRef>
+          <a:fillRef idx="3">
+            <a:schemeClr val="accent1"/>
+          </a:fillRef>
+          <a:effectRef idx="2">
+            <a:schemeClr val="accent1"/>
+          </a:effectRef>
+          <a:fontRef idx="minor"/>
+        </p:style>
+        <p:txBody>
+          <a:bodyPr lIns="90000" rIns="90000" tIns="45000" bIns="45000" anchor="ctr">
+            <a:noAutofit/>
+          </a:bodyPr>
+          <a:p>
+            <a:endParaRPr b="0" lang="en-US" sz="1800" spc="-1" strike="noStrike">
+              <a:solidFill>
+                <a:schemeClr val="lt1"/>
+              </a:solidFill>
+              <a:latin typeface="Calibri"/>
+              <a:ea typeface="DejaVu Sans"/>
+            </a:endParaRPr>
+          </a:p>
+        </p:txBody>
+      </p:sp>
+      <p:sp>
+        <p:nvSpPr>
+          <p:cNvPr id="242" name="Rounded Rectangle 38"/>
+          <p:cNvSpPr/>
+          <p:nvPr/>
+        </p:nvSpPr>
+        <p:spPr>
+          <a:xfrm>
+            <a:off x="457200" y="2971800"/>
+            <a:ext cx="3747960" cy="3429000"/>
+          </a:xfrm>
+          <a:prstGeom prst="roundRect">
+            <a:avLst>
+              <a:gd name="adj" fmla="val 16667"/>
+            </a:avLst>
+          </a:prstGeom>
+          <a:solidFill>
+            <a:srgbClr val="16161c"/>
+          </a:solidFill>
+          <a:ln>
+            <a:solidFill>
+              <a:srgbClr val="464655"/>
+            </a:solidFill>
+            <a:round/>
+          </a:ln>
+          <a:effectLst>
+            <a:outerShdw blurRad="39960" dir="5400000" dist="23040" rotWithShape="0">
+              <a:srgbClr val="000000">
+                <a:alpha val="35000"/>
+              </a:srgbClr>
+            </a:outerShdw>
+          </a:effectLst>
+        </p:spPr>
+        <p:style>
+          <a:lnRef idx="1">
+            <a:schemeClr val="accent1"/>
+          </a:lnRef>
+          <a:fillRef idx="3">
+            <a:schemeClr val="accent1"/>
+          </a:fillRef>
+          <a:effectRef idx="2">
+            <a:schemeClr val="accent1"/>
+          </a:effectRef>
+          <a:fontRef idx="minor"/>
+        </p:style>
+        <p:txBody>
+          <a:bodyPr lIns="90000" rIns="90000" tIns="45000" bIns="45000" anchor="ctr">
+            <a:noAutofit/>
+          </a:bodyPr>
+          <a:p>
+            <a:pPr>
+              <a:lnSpc>
+                <a:spcPct val="100000"/>
+              </a:lnSpc>
+            </a:pPr>
+            <a:r>
+              <a:rPr b="1" lang="en-US" sz="1200" spc="-1" strike="noStrike">
+                <a:solidFill>
+                  <a:schemeClr val="lt1"/>
+                </a:solidFill>
+                <a:latin typeface="Calibri"/>
+                <a:ea typeface="DejaVu Sans"/>
+              </a:rPr>
+              <a:t>İlkel Tipler (Primitive Types)</a:t>
+            </a:r>
+            <a:endParaRPr b="0" lang="en-US" sz="1200" spc="-1" strike="noStrike">
+              <a:solidFill>
+                <a:srgbClr val="ffffff"/>
+              </a:solidFill>
+              <a:latin typeface="Arial"/>
+            </a:endParaRPr>
+          </a:p>
+          <a:p>
+            <a:pPr>
+              <a:lnSpc>
+                <a:spcPct val="100000"/>
+              </a:lnSpc>
+            </a:pPr>
+            <a:r>
+              <a:rPr b="0" lang="en-US" sz="1200" spc="-1" strike="noStrike">
+                <a:solidFill>
+                  <a:schemeClr val="lt1"/>
+                </a:solidFill>
+                <a:latin typeface="Calibri"/>
+                <a:ea typeface="DejaVu Sans"/>
+              </a:rPr>
+              <a:t>İlkel veri tipleri gerçek değeri doğrudan bellekte saklar.</a:t>
+            </a:r>
+            <a:endParaRPr b="0" lang="en-US" sz="1200" spc="-1" strike="noStrike">
+              <a:solidFill>
+                <a:srgbClr val="ffffff"/>
+              </a:solidFill>
+              <a:latin typeface="Arial"/>
+            </a:endParaRPr>
+          </a:p>
+          <a:p>
+            <a:pPr>
+              <a:lnSpc>
+                <a:spcPct val="100000"/>
+              </a:lnSpc>
+            </a:pPr>
+            <a:r>
+              <a:rPr b="0" lang="en-US" sz="1200" spc="-1" strike="noStrike">
+                <a:solidFill>
+                  <a:schemeClr val="lt1"/>
+                </a:solidFill>
+                <a:latin typeface="Calibri"/>
+                <a:ea typeface="DejaVu Sans"/>
+              </a:rPr>
+              <a:t>Örnekler: int, double, char, boolean.</a:t>
+            </a:r>
+            <a:endParaRPr b="0" lang="en-US" sz="1200" spc="-1" strike="noStrike">
+              <a:solidFill>
+                <a:srgbClr val="ffffff"/>
+              </a:solidFill>
+              <a:latin typeface="Arial"/>
+            </a:endParaRPr>
+          </a:p>
+          <a:p>
+            <a:pPr>
+              <a:lnSpc>
+                <a:spcPct val="100000"/>
+              </a:lnSpc>
+            </a:pPr>
+            <a:endParaRPr b="0" lang="en-US" sz="1200" spc="-1" strike="noStrike">
+              <a:solidFill>
+                <a:srgbClr val="ffffff"/>
+              </a:solidFill>
+              <a:latin typeface="Arial"/>
+            </a:endParaRPr>
+          </a:p>
+          <a:p>
+            <a:pPr>
+              <a:lnSpc>
+                <a:spcPct val="100000"/>
+              </a:lnSpc>
+            </a:pPr>
+            <a:r>
+              <a:rPr b="1" lang="en-US" sz="1200" spc="-1" strike="noStrike">
+                <a:solidFill>
+                  <a:schemeClr val="lt1"/>
+                </a:solidFill>
+                <a:latin typeface="Calibri"/>
+                <a:ea typeface="DejaVu Sans"/>
+              </a:rPr>
+              <a:t>Referans Tipleri (Reference Types)</a:t>
+            </a:r>
+            <a:endParaRPr b="0" lang="en-US" sz="1200" spc="-1" strike="noStrike">
+              <a:solidFill>
+                <a:srgbClr val="ffffff"/>
+              </a:solidFill>
+              <a:latin typeface="Arial"/>
+            </a:endParaRPr>
+          </a:p>
+          <a:p>
+            <a:pPr>
+              <a:lnSpc>
+                <a:spcPct val="100000"/>
+              </a:lnSpc>
+            </a:pPr>
+            <a:r>
+              <a:rPr b="0" lang="en-US" sz="1200" spc="-1" strike="noStrike">
+                <a:solidFill>
+                  <a:schemeClr val="lt1"/>
+                </a:solidFill>
+                <a:latin typeface="Calibri"/>
+                <a:ea typeface="DejaVu Sans"/>
+              </a:rPr>
+              <a:t>Referans tipleri nesnenin kendisini değil, bellekteki adresini saklar.</a:t>
+            </a:r>
+            <a:endParaRPr b="0" lang="en-US" sz="1200" spc="-1" strike="noStrike">
+              <a:solidFill>
+                <a:srgbClr val="ffffff"/>
+              </a:solidFill>
+              <a:latin typeface="Arial"/>
+            </a:endParaRPr>
+          </a:p>
+          <a:p>
+            <a:pPr>
+              <a:lnSpc>
+                <a:spcPct val="100000"/>
+              </a:lnSpc>
+            </a:pPr>
+            <a:r>
+              <a:rPr b="0" lang="en-US" sz="1200" spc="-1" strike="noStrike">
+                <a:solidFill>
+                  <a:schemeClr val="lt1"/>
+                </a:solidFill>
+                <a:latin typeface="Calibri"/>
+                <a:ea typeface="DejaVu Sans"/>
+              </a:rPr>
+              <a:t>Örnekler: String, diziler (arrays) ve sınıf nesneleri.</a:t>
+            </a:r>
+            <a:endParaRPr b="0" lang="en-US" sz="1200" spc="-1" strike="noStrike">
+              <a:solidFill>
+                <a:srgbClr val="ffffff"/>
+              </a:solidFill>
+              <a:latin typeface="Arial"/>
+            </a:endParaRPr>
+          </a:p>
+          <a:p>
+            <a:pPr>
+              <a:lnSpc>
+                <a:spcPct val="100000"/>
+              </a:lnSpc>
+            </a:pPr>
+            <a:endParaRPr b="0" lang="en-US" sz="1200" spc="-1" strike="noStrike">
+              <a:solidFill>
+                <a:srgbClr val="ffffff"/>
+              </a:solidFill>
+              <a:latin typeface="Arial"/>
+            </a:endParaRPr>
+          </a:p>
+          <a:p>
+            <a:pPr>
+              <a:lnSpc>
+                <a:spcPct val="100000"/>
+              </a:lnSpc>
+            </a:pPr>
+            <a:r>
+              <a:rPr b="1" lang="en-US" sz="1200" spc="-1" strike="noStrike">
+                <a:solidFill>
+                  <a:schemeClr val="lt1"/>
+                </a:solidFill>
+                <a:latin typeface="Calibri"/>
+                <a:ea typeface="DejaVu Sans"/>
+              </a:rPr>
+              <a:t>Bellek Saklama (Memory Storage)</a:t>
+            </a:r>
+            <a:endParaRPr b="0" lang="en-US" sz="1200" spc="-1" strike="noStrike">
+              <a:solidFill>
+                <a:srgbClr val="ffffff"/>
+              </a:solidFill>
+              <a:latin typeface="Arial"/>
+            </a:endParaRPr>
+          </a:p>
+          <a:p>
+            <a:pPr>
+              <a:lnSpc>
+                <a:spcPct val="100000"/>
+              </a:lnSpc>
+            </a:pPr>
+            <a:r>
+              <a:rPr b="0" lang="en-US" sz="1200" spc="-1" strike="noStrike">
+                <a:solidFill>
+                  <a:schemeClr val="lt1"/>
+                </a:solidFill>
+                <a:latin typeface="Calibri"/>
+                <a:ea typeface="DejaVu Sans"/>
+              </a:rPr>
+              <a:t>İlkel değerler doğrudan bellekte tutulur, referans tipleri ise bellekteki nesnelere işaret eder.</a:t>
+            </a:r>
+            <a:endParaRPr b="0" lang="en-US" sz="1200" spc="-1" strike="noStrike">
+              <a:solidFill>
+                <a:srgbClr val="ffffff"/>
+              </a:solidFill>
+              <a:latin typeface="Arial"/>
+            </a:endParaRPr>
+          </a:p>
+          <a:p>
+            <a:pPr>
+              <a:lnSpc>
+                <a:spcPct val="100000"/>
+              </a:lnSpc>
+            </a:pPr>
+            <a:endParaRPr b="0" lang="en-US" sz="1200" spc="-1" strike="noStrike">
+              <a:solidFill>
+                <a:srgbClr val="ffffff"/>
+              </a:solidFill>
+              <a:latin typeface="Arial"/>
+            </a:endParaRPr>
+          </a:p>
+          <a:p>
+            <a:pPr>
+              <a:lnSpc>
+                <a:spcPct val="100000"/>
+              </a:lnSpc>
+            </a:pPr>
+            <a:r>
+              <a:rPr b="1" lang="en-US" sz="1200" spc="-1" strike="noStrike">
+                <a:solidFill>
+                  <a:schemeClr val="lt1"/>
+                </a:solidFill>
+                <a:latin typeface="Calibri"/>
+                <a:ea typeface="DejaVu Sans"/>
+              </a:rPr>
+              <a:t>Kullanım Farkı (Usage Difference)</a:t>
+            </a:r>
+            <a:endParaRPr b="0" lang="en-US" sz="1200" spc="-1" strike="noStrike">
+              <a:solidFill>
+                <a:srgbClr val="ffffff"/>
+              </a:solidFill>
+              <a:latin typeface="Arial"/>
+            </a:endParaRPr>
+          </a:p>
+          <a:p>
+            <a:pPr>
+              <a:lnSpc>
+                <a:spcPct val="100000"/>
+              </a:lnSpc>
+            </a:pPr>
+            <a:r>
+              <a:rPr b="0" lang="en-US" sz="1200" spc="-1" strike="noStrike">
+                <a:solidFill>
+                  <a:schemeClr val="lt1"/>
+                </a:solidFill>
+                <a:latin typeface="Calibri"/>
+                <a:ea typeface="DejaVu Sans"/>
+              </a:rPr>
+              <a:t>İlkel tipler basit değerler için kullanılırken, referans tipleri daha karmaşık veri yapıları ve nesneler için kullanılır.</a:t>
+            </a:r>
+            <a:endParaRPr b="0" lang="en-US" sz="1200" spc="-1" strike="noStrike">
+              <a:solidFill>
+                <a:srgbClr val="ffffff"/>
+              </a:solidFill>
+              <a:latin typeface="Arial"/>
+            </a:endParaRPr>
+          </a:p>
+        </p:txBody>
+      </p:sp>
+      <p:sp>
+        <p:nvSpPr>
+          <p:cNvPr id="243" name="Rounded Rectangle 39"/>
+          <p:cNvSpPr/>
+          <p:nvPr/>
+        </p:nvSpPr>
+        <p:spPr>
+          <a:xfrm>
+            <a:off x="4507920" y="3182040"/>
+            <a:ext cx="3290760" cy="2742120"/>
+          </a:xfrm>
+          <a:prstGeom prst="roundRect">
+            <a:avLst>
+              <a:gd name="adj" fmla="val 16667"/>
+            </a:avLst>
+          </a:prstGeom>
+          <a:solidFill>
+            <a:srgbClr val="08080a"/>
+          </a:solidFill>
+          <a:ln>
+            <a:noFill/>
+          </a:ln>
+          <a:effectLst>
+            <a:outerShdw blurRad="39960" dir="5400000" dist="23040" rotWithShape="0">
+              <a:srgbClr val="000000">
+                <a:alpha val="35000"/>
+              </a:srgbClr>
+            </a:outerShdw>
+          </a:effectLst>
+        </p:spPr>
+        <p:style>
+          <a:lnRef idx="1">
+            <a:schemeClr val="accent1"/>
+          </a:lnRef>
+          <a:fillRef idx="3">
+            <a:schemeClr val="accent1"/>
+          </a:fillRef>
+          <a:effectRef idx="2">
+            <a:schemeClr val="accent1"/>
+          </a:effectRef>
+          <a:fontRef idx="minor"/>
+        </p:style>
+        <p:txBody>
+          <a:bodyPr lIns="90000" rIns="90000" tIns="45000" bIns="45000" anchor="ctr">
+            <a:noAutofit/>
+          </a:bodyPr>
+          <a:p>
+            <a:endParaRPr b="0" lang="en-US" sz="1800" spc="-1" strike="noStrike">
+              <a:solidFill>
+                <a:schemeClr val="lt1"/>
+              </a:solidFill>
+              <a:latin typeface="Calibri"/>
+              <a:ea typeface="DejaVu Sans"/>
+            </a:endParaRPr>
+          </a:p>
+        </p:txBody>
+      </p:sp>
+      <p:sp>
+        <p:nvSpPr>
+          <p:cNvPr id="244" name="Rounded Rectangle 40"/>
+          <p:cNvSpPr/>
+          <p:nvPr/>
+        </p:nvSpPr>
+        <p:spPr>
+          <a:xfrm>
+            <a:off x="4343400" y="2971800"/>
+            <a:ext cx="3429000" cy="3291840"/>
+          </a:xfrm>
+          <a:prstGeom prst="roundRect">
+            <a:avLst>
+              <a:gd name="adj" fmla="val 16667"/>
+            </a:avLst>
+          </a:prstGeom>
+          <a:solidFill>
+            <a:srgbClr val="16161c"/>
+          </a:solidFill>
+          <a:ln>
+            <a:solidFill>
+              <a:srgbClr val="464655"/>
+            </a:solidFill>
+            <a:round/>
+          </a:ln>
+          <a:effectLst>
+            <a:outerShdw blurRad="39960" dir="5400000" dist="23040" rotWithShape="0">
+              <a:srgbClr val="000000">
+                <a:alpha val="35000"/>
+              </a:srgbClr>
+            </a:outerShdw>
+          </a:effectLst>
+        </p:spPr>
+        <p:style>
+          <a:lnRef idx="1">
+            <a:schemeClr val="accent1"/>
+          </a:lnRef>
+          <a:fillRef idx="3">
+            <a:schemeClr val="accent1"/>
+          </a:fillRef>
+          <a:effectRef idx="2">
+            <a:schemeClr val="accent1"/>
+          </a:effectRef>
+          <a:fontRef idx="minor"/>
+        </p:style>
+        <p:txBody>
+          <a:bodyPr lIns="90000" rIns="90000" tIns="45000" bIns="45000" anchor="ctr">
+            <a:noAutofit/>
+          </a:bodyPr>
+          <a:p>
+            <a:pPr>
+              <a:lnSpc>
+                <a:spcPct val="100000"/>
+              </a:lnSpc>
+            </a:pPr>
+            <a:r>
+              <a:rPr b="0" lang="en-US" sz="1800" spc="-1" strike="noStrike">
+                <a:solidFill>
+                  <a:schemeClr val="lt1"/>
+                </a:solidFill>
+                <a:latin typeface="Calibri"/>
+                <a:ea typeface="DejaVu Sans"/>
+              </a:rPr>
+              <a:t>Java Veri Tipleri</a:t>
+            </a:r>
+            <a:endParaRPr b="0" lang="en-US" sz="1800" spc="-1" strike="noStrike">
+              <a:solidFill>
+                <a:srgbClr val="ffffff"/>
+              </a:solidFill>
+              <a:latin typeface="Arial"/>
+            </a:endParaRPr>
+          </a:p>
+          <a:p>
+            <a:pPr>
+              <a:lnSpc>
+                <a:spcPct val="100000"/>
+              </a:lnSpc>
+            </a:pPr>
+            <a:r>
+              <a:rPr b="0" lang="en-US" sz="1800" spc="-1" strike="noStrike">
+                <a:solidFill>
+                  <a:schemeClr val="lt1"/>
+                </a:solidFill>
+                <a:latin typeface="Calibri"/>
+                <a:ea typeface="DejaVu Sans"/>
+              </a:rPr>
+              <a:t>      │</a:t>
+            </a:r>
+            <a:endParaRPr b="0" lang="en-US" sz="1800" spc="-1" strike="noStrike">
+              <a:solidFill>
+                <a:srgbClr val="ffffff"/>
+              </a:solidFill>
+              <a:latin typeface="Arial"/>
+            </a:endParaRPr>
+          </a:p>
+          <a:p>
+            <a:pPr>
+              <a:lnSpc>
+                <a:spcPct val="100000"/>
+              </a:lnSpc>
+            </a:pPr>
+            <a:r>
+              <a:rPr b="0" lang="en-US" sz="1800" spc="-1" strike="noStrike">
+                <a:solidFill>
+                  <a:schemeClr val="lt1"/>
+                </a:solidFill>
+                <a:latin typeface="Calibri"/>
+                <a:ea typeface="DejaVu Sans"/>
+              </a:rPr>
+              <a:t>      ├── </a:t>
+            </a:r>
+            <a:r>
+              <a:rPr b="0" lang="en-US" sz="1800" spc="-1" strike="noStrike">
+                <a:solidFill>
+                  <a:schemeClr val="lt1"/>
+                </a:solidFill>
+                <a:latin typeface="Calibri"/>
+                <a:ea typeface="DejaVu Sans"/>
+              </a:rPr>
+              <a:t>İlkel Tipler</a:t>
+            </a:r>
+            <a:endParaRPr b="0" lang="en-US" sz="1800" spc="-1" strike="noStrike">
+              <a:solidFill>
+                <a:srgbClr val="ffffff"/>
+              </a:solidFill>
+              <a:latin typeface="Arial"/>
+            </a:endParaRPr>
+          </a:p>
+          <a:p>
+            <a:pPr>
+              <a:lnSpc>
+                <a:spcPct val="100000"/>
+              </a:lnSpc>
+            </a:pPr>
+            <a:r>
+              <a:rPr b="0" lang="en-US" sz="1800" spc="-1" strike="noStrike">
+                <a:solidFill>
+                  <a:schemeClr val="lt1"/>
+                </a:solidFill>
+                <a:latin typeface="Calibri"/>
+                <a:ea typeface="DejaVu Sans"/>
+              </a:rPr>
+              <a:t>      │       ├─ </a:t>
+            </a:r>
+            <a:r>
+              <a:rPr b="0" lang="en-US" sz="1800" spc="-1" strike="noStrike">
+                <a:solidFill>
+                  <a:schemeClr val="lt1"/>
+                </a:solidFill>
+                <a:latin typeface="Calibri"/>
+                <a:ea typeface="DejaVu Sans"/>
+              </a:rPr>
+              <a:t>int</a:t>
+            </a:r>
+            <a:endParaRPr b="0" lang="en-US" sz="1800" spc="-1" strike="noStrike">
+              <a:solidFill>
+                <a:srgbClr val="ffffff"/>
+              </a:solidFill>
+              <a:latin typeface="Arial"/>
+            </a:endParaRPr>
+          </a:p>
+          <a:p>
+            <a:pPr>
+              <a:lnSpc>
+                <a:spcPct val="100000"/>
+              </a:lnSpc>
+            </a:pPr>
+            <a:r>
+              <a:rPr b="0" lang="en-US" sz="1800" spc="-1" strike="noStrike">
+                <a:solidFill>
+                  <a:schemeClr val="lt1"/>
+                </a:solidFill>
+                <a:latin typeface="Calibri"/>
+                <a:ea typeface="DejaVu Sans"/>
+              </a:rPr>
+              <a:t>      │       ├─ </a:t>
+            </a:r>
+            <a:r>
+              <a:rPr b="0" lang="en-US" sz="1800" spc="-1" strike="noStrike">
+                <a:solidFill>
+                  <a:schemeClr val="lt1"/>
+                </a:solidFill>
+                <a:latin typeface="Calibri"/>
+                <a:ea typeface="DejaVu Sans"/>
+              </a:rPr>
+              <a:t>double</a:t>
+            </a:r>
+            <a:endParaRPr b="0" lang="en-US" sz="1800" spc="-1" strike="noStrike">
+              <a:solidFill>
+                <a:srgbClr val="ffffff"/>
+              </a:solidFill>
+              <a:latin typeface="Arial"/>
+            </a:endParaRPr>
+          </a:p>
+          <a:p>
+            <a:pPr>
+              <a:lnSpc>
+                <a:spcPct val="100000"/>
+              </a:lnSpc>
+            </a:pPr>
+            <a:r>
+              <a:rPr b="0" lang="en-US" sz="1800" spc="-1" strike="noStrike">
+                <a:solidFill>
+                  <a:schemeClr val="lt1"/>
+                </a:solidFill>
+                <a:latin typeface="Calibri"/>
+                <a:ea typeface="DejaVu Sans"/>
+              </a:rPr>
+              <a:t>      │       ├─ </a:t>
+            </a:r>
+            <a:r>
+              <a:rPr b="0" lang="en-US" sz="1800" spc="-1" strike="noStrike">
+                <a:solidFill>
+                  <a:schemeClr val="lt1"/>
+                </a:solidFill>
+                <a:latin typeface="Calibri"/>
+                <a:ea typeface="DejaVu Sans"/>
+              </a:rPr>
+              <a:t>char</a:t>
+            </a:r>
+            <a:endParaRPr b="0" lang="en-US" sz="1800" spc="-1" strike="noStrike">
+              <a:solidFill>
+                <a:srgbClr val="ffffff"/>
+              </a:solidFill>
+              <a:latin typeface="Arial"/>
+            </a:endParaRPr>
+          </a:p>
+          <a:p>
+            <a:pPr>
+              <a:lnSpc>
+                <a:spcPct val="100000"/>
+              </a:lnSpc>
+            </a:pPr>
+            <a:r>
+              <a:rPr b="0" lang="en-US" sz="1800" spc="-1" strike="noStrike">
+                <a:solidFill>
+                  <a:schemeClr val="lt1"/>
+                </a:solidFill>
+                <a:latin typeface="Calibri"/>
+                <a:ea typeface="DejaVu Sans"/>
+              </a:rPr>
+              <a:t>      │       └─ </a:t>
+            </a:r>
+            <a:r>
+              <a:rPr b="0" lang="en-US" sz="1800" spc="-1" strike="noStrike">
+                <a:solidFill>
+                  <a:schemeClr val="lt1"/>
+                </a:solidFill>
+                <a:latin typeface="Calibri"/>
+                <a:ea typeface="DejaVu Sans"/>
+              </a:rPr>
+              <a:t>boolean</a:t>
+            </a:r>
+            <a:endParaRPr b="0" lang="en-US" sz="1800" spc="-1" strike="noStrike">
+              <a:solidFill>
+                <a:srgbClr val="ffffff"/>
+              </a:solidFill>
+              <a:latin typeface="Arial"/>
+            </a:endParaRPr>
+          </a:p>
+          <a:p>
+            <a:pPr>
+              <a:lnSpc>
+                <a:spcPct val="100000"/>
+              </a:lnSpc>
+            </a:pPr>
+            <a:r>
+              <a:rPr b="0" lang="en-US" sz="1800" spc="-1" strike="noStrike">
+                <a:solidFill>
+                  <a:schemeClr val="lt1"/>
+                </a:solidFill>
+                <a:latin typeface="Calibri"/>
+                <a:ea typeface="DejaVu Sans"/>
+              </a:rPr>
+              <a:t>      │</a:t>
+            </a:r>
+            <a:endParaRPr b="0" lang="en-US" sz="1800" spc="-1" strike="noStrike">
+              <a:solidFill>
+                <a:srgbClr val="ffffff"/>
+              </a:solidFill>
+              <a:latin typeface="Arial"/>
+            </a:endParaRPr>
+          </a:p>
+          <a:p>
+            <a:pPr>
+              <a:lnSpc>
+                <a:spcPct val="100000"/>
+              </a:lnSpc>
+            </a:pPr>
+            <a:r>
+              <a:rPr b="0" lang="en-US" sz="1800" spc="-1" strike="noStrike">
+                <a:solidFill>
+                  <a:schemeClr val="lt1"/>
+                </a:solidFill>
+                <a:latin typeface="Calibri"/>
+                <a:ea typeface="DejaVu Sans"/>
+              </a:rPr>
+              <a:t>      └── </a:t>
+            </a:r>
+            <a:r>
+              <a:rPr b="0" lang="en-US" sz="1800" spc="-1" strike="noStrike">
+                <a:solidFill>
+                  <a:schemeClr val="lt1"/>
+                </a:solidFill>
+                <a:latin typeface="Calibri"/>
+                <a:ea typeface="DejaVu Sans"/>
+              </a:rPr>
+              <a:t>Referans Tipleri</a:t>
+            </a:r>
+            <a:endParaRPr b="0" lang="en-US" sz="1800" spc="-1" strike="noStrike">
+              <a:solidFill>
+                <a:srgbClr val="ffffff"/>
+              </a:solidFill>
+              <a:latin typeface="Arial"/>
+            </a:endParaRPr>
+          </a:p>
+          <a:p>
+            <a:pPr>
+              <a:lnSpc>
+                <a:spcPct val="100000"/>
+              </a:lnSpc>
+            </a:pPr>
+            <a:r>
+              <a:rPr b="0" lang="en-US" sz="1800" spc="-1" strike="noStrike">
+                <a:solidFill>
+                  <a:schemeClr val="lt1"/>
+                </a:solidFill>
+                <a:latin typeface="Calibri"/>
+                <a:ea typeface="DejaVu Sans"/>
+              </a:rPr>
+              <a:t>              ├─ </a:t>
+            </a:r>
+            <a:r>
+              <a:rPr b="0" lang="en-US" sz="1800" spc="-1" strike="noStrike">
+                <a:solidFill>
+                  <a:schemeClr val="lt1"/>
+                </a:solidFill>
+                <a:latin typeface="Calibri"/>
+                <a:ea typeface="DejaVu Sans"/>
+              </a:rPr>
+              <a:t>String</a:t>
+            </a:r>
+            <a:endParaRPr b="0" lang="en-US" sz="1800" spc="-1" strike="noStrike">
+              <a:solidFill>
+                <a:srgbClr val="ffffff"/>
+              </a:solidFill>
+              <a:latin typeface="Arial"/>
+            </a:endParaRPr>
+          </a:p>
+          <a:p>
+            <a:pPr>
+              <a:lnSpc>
+                <a:spcPct val="100000"/>
+              </a:lnSpc>
+            </a:pPr>
+            <a:r>
+              <a:rPr b="0" lang="en-US" sz="1800" spc="-1" strike="noStrike">
+                <a:solidFill>
+                  <a:schemeClr val="lt1"/>
+                </a:solidFill>
+                <a:latin typeface="Calibri"/>
+                <a:ea typeface="DejaVu Sans"/>
+              </a:rPr>
+              <a:t>              ├─ </a:t>
+            </a:r>
+            <a:r>
+              <a:rPr b="0" lang="en-US" sz="1800" spc="-1" strike="noStrike">
+                <a:solidFill>
+                  <a:schemeClr val="lt1"/>
+                </a:solidFill>
+                <a:latin typeface="Calibri"/>
+                <a:ea typeface="DejaVu Sans"/>
+              </a:rPr>
+              <a:t>Diziler (Arrays)</a:t>
+            </a:r>
+            <a:endParaRPr b="0" lang="en-US" sz="1800" spc="-1" strike="noStrike">
+              <a:solidFill>
+                <a:srgbClr val="ffffff"/>
+              </a:solidFill>
+              <a:latin typeface="Arial"/>
+            </a:endParaRPr>
+          </a:p>
+          <a:p>
+            <a:pPr>
+              <a:lnSpc>
+                <a:spcPct val="100000"/>
+              </a:lnSpc>
+            </a:pPr>
+            <a:r>
+              <a:rPr b="0" lang="en-US" sz="1800" spc="-1" strike="noStrike">
+                <a:solidFill>
+                  <a:schemeClr val="lt1"/>
+                </a:solidFill>
+                <a:latin typeface="Calibri"/>
+                <a:ea typeface="DejaVu Sans"/>
+              </a:rPr>
+              <a:t>              └─ </a:t>
+            </a:r>
+            <a:r>
+              <a:rPr b="0" lang="en-US" sz="1800" spc="-1" strike="noStrike">
+                <a:solidFill>
+                  <a:schemeClr val="lt1"/>
+                </a:solidFill>
+                <a:latin typeface="Calibri"/>
+                <a:ea typeface="DejaVu Sans"/>
+              </a:rPr>
+              <a:t>Nesneler (Objects)</a:t>
+            </a:r>
+            <a:endParaRPr b="0" lang="en-US" sz="1800" spc="-1" strike="noStrike">
+              <a:solidFill>
+                <a:srgbClr val="ffffff"/>
+              </a:solidFill>
+              <a:latin typeface="Arial"/>
+            </a:endParaRPr>
+          </a:p>
+        </p:txBody>
+      </p:sp>
+      <p:sp>
+        <p:nvSpPr>
+          <p:cNvPr id="245" name="Rounded Rectangle 41"/>
+          <p:cNvSpPr/>
+          <p:nvPr/>
+        </p:nvSpPr>
+        <p:spPr>
+          <a:xfrm>
+            <a:off x="8028360" y="3182040"/>
+            <a:ext cx="3290760" cy="2742120"/>
+          </a:xfrm>
+          <a:prstGeom prst="roundRect">
+            <a:avLst>
+              <a:gd name="adj" fmla="val 16667"/>
+            </a:avLst>
+          </a:prstGeom>
+          <a:solidFill>
+            <a:srgbClr val="08080a"/>
+          </a:solidFill>
+          <a:ln>
+            <a:noFill/>
+          </a:ln>
+          <a:effectLst>
+            <a:outerShdw blurRad="39960" dir="5400000" dist="23040" rotWithShape="0">
+              <a:srgbClr val="000000">
+                <a:alpha val="35000"/>
+              </a:srgbClr>
+            </a:outerShdw>
+          </a:effectLst>
+        </p:spPr>
+        <p:style>
+          <a:lnRef idx="1">
+            <a:schemeClr val="accent1"/>
+          </a:lnRef>
+          <a:fillRef idx="3">
+            <a:schemeClr val="accent1"/>
+          </a:fillRef>
+          <a:effectRef idx="2">
+            <a:schemeClr val="accent1"/>
+          </a:effectRef>
+          <a:fontRef idx="minor"/>
+        </p:style>
+        <p:txBody>
+          <a:bodyPr lIns="90000" rIns="90000" tIns="45000" bIns="45000" anchor="ctr">
+            <a:noAutofit/>
+          </a:bodyPr>
+          <a:p>
+            <a:endParaRPr b="0" lang="en-US" sz="1800" spc="-1" strike="noStrike">
+              <a:solidFill>
+                <a:schemeClr val="lt1"/>
+              </a:solidFill>
+              <a:latin typeface="Calibri"/>
+              <a:ea typeface="DejaVu Sans"/>
+            </a:endParaRPr>
+          </a:p>
+        </p:txBody>
+      </p:sp>
+      <p:sp>
+        <p:nvSpPr>
+          <p:cNvPr id="246" name="Rounded Rectangle 42"/>
+          <p:cNvSpPr/>
+          <p:nvPr/>
+        </p:nvSpPr>
+        <p:spPr>
+          <a:xfrm>
+            <a:off x="7955280" y="3108960"/>
+            <a:ext cx="3703320" cy="3063240"/>
+          </a:xfrm>
+          <a:prstGeom prst="roundRect">
+            <a:avLst>
+              <a:gd name="adj" fmla="val 16667"/>
+            </a:avLst>
+          </a:prstGeom>
+          <a:solidFill>
+            <a:srgbClr val="16161c"/>
+          </a:solidFill>
+          <a:ln>
+            <a:solidFill>
+              <a:srgbClr val="464655"/>
+            </a:solidFill>
+            <a:round/>
+          </a:ln>
+          <a:effectLst>
+            <a:outerShdw blurRad="39960" dir="5400000" dist="23040" rotWithShape="0">
+              <a:srgbClr val="000000">
+                <a:alpha val="35000"/>
+              </a:srgbClr>
+            </a:outerShdw>
+          </a:effectLst>
+        </p:spPr>
+        <p:style>
+          <a:lnRef idx="1">
+            <a:schemeClr val="accent1"/>
+          </a:lnRef>
+          <a:fillRef idx="3">
+            <a:schemeClr val="accent1"/>
+          </a:fillRef>
+          <a:effectRef idx="2">
+            <a:schemeClr val="accent1"/>
+          </a:effectRef>
+          <a:fontRef idx="minor"/>
+        </p:style>
+        <p:txBody>
+          <a:bodyPr lIns="90000" rIns="90000" tIns="45000" bIns="45000" anchor="ctr">
+            <a:noAutofit/>
+          </a:bodyPr>
+          <a:p>
+            <a:pPr algn="ctr">
+              <a:lnSpc>
+                <a:spcPct val="100000"/>
+              </a:lnSpc>
+            </a:pPr>
+            <a:r>
+              <a:rPr b="0" lang="en-US" sz="1100" spc="-1" strike="noStrike">
+                <a:solidFill>
+                  <a:srgbClr val="78ffc8"/>
+                </a:solidFill>
+                <a:latin typeface="Consolas"/>
+                <a:ea typeface="DejaVu Sans"/>
+              </a:rPr>
+              <a:t>public class PrimitiveVsReference {</a:t>
+            </a:r>
+            <a:endParaRPr b="0" lang="en-US" sz="1100" spc="-1" strike="noStrike">
+              <a:solidFill>
+                <a:srgbClr val="ffffff"/>
+              </a:solidFill>
+              <a:latin typeface="Arial"/>
+            </a:endParaRPr>
+          </a:p>
+          <a:p>
+            <a:pPr algn="ctr">
+              <a:lnSpc>
+                <a:spcPct val="100000"/>
+              </a:lnSpc>
+            </a:pPr>
+            <a:endParaRPr b="0" lang="en-US" sz="1100" spc="-1" strike="noStrike">
+              <a:solidFill>
+                <a:srgbClr val="ffffff"/>
+              </a:solidFill>
+              <a:latin typeface="Arial"/>
+            </a:endParaRPr>
+          </a:p>
+          <a:p>
+            <a:pPr algn="ctr">
+              <a:lnSpc>
+                <a:spcPct val="100000"/>
+              </a:lnSpc>
+            </a:pPr>
+            <a:r>
+              <a:rPr b="0" lang="en-US" sz="1100" spc="-1" strike="noStrike">
+                <a:solidFill>
+                  <a:srgbClr val="78ffc8"/>
+                </a:solidFill>
+                <a:latin typeface="Consolas"/>
+                <a:ea typeface="DejaVu Sans"/>
+              </a:rPr>
+              <a:t>    </a:t>
+            </a:r>
+            <a:r>
+              <a:rPr b="0" lang="en-US" sz="1100" spc="-1" strike="noStrike">
+                <a:solidFill>
+                  <a:srgbClr val="78ffc8"/>
+                </a:solidFill>
+                <a:latin typeface="Consolas"/>
+                <a:ea typeface="DejaVu Sans"/>
+              </a:rPr>
+              <a:t>public static void main(String[] args) {</a:t>
+            </a:r>
+            <a:endParaRPr b="0" lang="en-US" sz="1100" spc="-1" strike="noStrike">
+              <a:solidFill>
+                <a:srgbClr val="ffffff"/>
+              </a:solidFill>
+              <a:latin typeface="Arial"/>
+            </a:endParaRPr>
+          </a:p>
+          <a:p>
+            <a:pPr algn="ctr">
+              <a:lnSpc>
+                <a:spcPct val="100000"/>
+              </a:lnSpc>
+            </a:pPr>
+            <a:r>
+              <a:rPr b="0" lang="en-US" sz="1100" spc="-1" strike="noStrike">
+                <a:solidFill>
+                  <a:srgbClr val="78ffc8"/>
+                </a:solidFill>
+                <a:latin typeface="Consolas"/>
+                <a:ea typeface="DejaVu Sans"/>
+              </a:rPr>
+              <a:t>        </a:t>
+            </a:r>
+            <a:r>
+              <a:rPr b="0" lang="en-US" sz="1100" spc="-1" strike="noStrike">
+                <a:solidFill>
+                  <a:srgbClr val="78ffc8"/>
+                </a:solidFill>
+                <a:latin typeface="Consolas"/>
+                <a:ea typeface="DejaVu Sans"/>
+              </a:rPr>
+              <a:t>int sayi = 10;           // ilkel tip</a:t>
+            </a:r>
+            <a:endParaRPr b="0" lang="en-US" sz="1100" spc="-1" strike="noStrike">
+              <a:solidFill>
+                <a:srgbClr val="ffffff"/>
+              </a:solidFill>
+              <a:latin typeface="Arial"/>
+            </a:endParaRPr>
+          </a:p>
+          <a:p>
+            <a:pPr algn="ctr">
+              <a:lnSpc>
+                <a:spcPct val="100000"/>
+              </a:lnSpc>
+            </a:pPr>
+            <a:r>
+              <a:rPr b="0" lang="en-US" sz="1100" spc="-1" strike="noStrike">
+                <a:solidFill>
+                  <a:srgbClr val="78ffc8"/>
+                </a:solidFill>
+                <a:latin typeface="Consolas"/>
+                <a:ea typeface="DejaVu Sans"/>
+              </a:rPr>
+              <a:t>        </a:t>
+            </a:r>
+            <a:r>
+              <a:rPr b="0" lang="en-US" sz="1100" spc="-1" strike="noStrike">
+                <a:solidFill>
+                  <a:srgbClr val="78ffc8"/>
+                </a:solidFill>
+                <a:latin typeface="Consolas"/>
+                <a:ea typeface="DejaVu Sans"/>
+              </a:rPr>
+              <a:t>double fiyat = 19.99;    // ilkel tip</a:t>
+            </a:r>
+            <a:endParaRPr b="0" lang="en-US" sz="1100" spc="-1" strike="noStrike">
+              <a:solidFill>
+                <a:srgbClr val="ffffff"/>
+              </a:solidFill>
+              <a:latin typeface="Arial"/>
+            </a:endParaRPr>
+          </a:p>
+          <a:p>
+            <a:pPr algn="ctr">
+              <a:lnSpc>
+                <a:spcPct val="100000"/>
+              </a:lnSpc>
+            </a:pPr>
+            <a:r>
+              <a:rPr b="0" lang="en-US" sz="1100" spc="-1" strike="noStrike">
+                <a:solidFill>
+                  <a:srgbClr val="78ffc8"/>
+                </a:solidFill>
+                <a:latin typeface="Consolas"/>
+                <a:ea typeface="DejaVu Sans"/>
+              </a:rPr>
+              <a:t>        </a:t>
+            </a:r>
+            <a:r>
+              <a:rPr b="0" lang="en-US" sz="1100" spc="-1" strike="noStrike">
+                <a:solidFill>
+                  <a:srgbClr val="78ffc8"/>
+                </a:solidFill>
+                <a:latin typeface="Consolas"/>
+                <a:ea typeface="DejaVu Sans"/>
+              </a:rPr>
+              <a:t>String metin = "Java";   // referans tip</a:t>
+            </a:r>
+            <a:endParaRPr b="0" lang="en-US" sz="1100" spc="-1" strike="noStrike">
+              <a:solidFill>
+                <a:srgbClr val="ffffff"/>
+              </a:solidFill>
+              <a:latin typeface="Arial"/>
+            </a:endParaRPr>
+          </a:p>
+          <a:p>
+            <a:pPr algn="ctr">
+              <a:lnSpc>
+                <a:spcPct val="100000"/>
+              </a:lnSpc>
+            </a:pPr>
+            <a:r>
+              <a:rPr b="0" lang="en-US" sz="1100" spc="-1" strike="noStrike">
+                <a:solidFill>
+                  <a:srgbClr val="78ffc8"/>
+                </a:solidFill>
+                <a:latin typeface="Consolas"/>
+                <a:ea typeface="DejaVu Sans"/>
+              </a:rPr>
+              <a:t>        </a:t>
+            </a:r>
+            <a:r>
+              <a:rPr b="0" lang="en-US" sz="1100" spc="-1" strike="noStrike">
+                <a:solidFill>
+                  <a:srgbClr val="78ffc8"/>
+                </a:solidFill>
+                <a:latin typeface="Consolas"/>
+                <a:ea typeface="DejaVu Sans"/>
+              </a:rPr>
+              <a:t>int[] sayilar = {1, 2, 3}; // referans tip</a:t>
+            </a:r>
+            <a:endParaRPr b="0" lang="en-US" sz="1100" spc="-1" strike="noStrike">
+              <a:solidFill>
+                <a:srgbClr val="ffffff"/>
+              </a:solidFill>
+              <a:latin typeface="Arial"/>
+            </a:endParaRPr>
+          </a:p>
+          <a:p>
+            <a:pPr algn="ctr">
+              <a:lnSpc>
+                <a:spcPct val="100000"/>
+              </a:lnSpc>
+            </a:pPr>
+            <a:r>
+              <a:rPr b="0" lang="en-US" sz="1100" spc="-1" strike="noStrike">
+                <a:solidFill>
+                  <a:srgbClr val="78ffc8"/>
+                </a:solidFill>
+                <a:latin typeface="Consolas"/>
+                <a:ea typeface="DejaVu Sans"/>
+              </a:rPr>
+              <a:t>        </a:t>
+            </a:r>
+            <a:r>
+              <a:rPr b="0" lang="en-US" sz="1100" spc="-1" strike="noStrike">
+                <a:solidFill>
+                  <a:srgbClr val="78ffc8"/>
+                </a:solidFill>
+                <a:latin typeface="Consolas"/>
+                <a:ea typeface="DejaVu Sans"/>
+              </a:rPr>
+              <a:t>System.out.println(sayi);</a:t>
+            </a:r>
+            <a:endParaRPr b="0" lang="en-US" sz="1100" spc="-1" strike="noStrike">
+              <a:solidFill>
+                <a:srgbClr val="ffffff"/>
+              </a:solidFill>
+              <a:latin typeface="Arial"/>
+            </a:endParaRPr>
+          </a:p>
+          <a:p>
+            <a:pPr algn="ctr">
+              <a:lnSpc>
+                <a:spcPct val="100000"/>
+              </a:lnSpc>
+            </a:pPr>
+            <a:r>
+              <a:rPr b="0" lang="en-US" sz="1100" spc="-1" strike="noStrike">
+                <a:solidFill>
+                  <a:srgbClr val="78ffc8"/>
+                </a:solidFill>
+                <a:latin typeface="Consolas"/>
+                <a:ea typeface="DejaVu Sans"/>
+              </a:rPr>
+              <a:t>        </a:t>
+            </a:r>
+            <a:r>
+              <a:rPr b="0" lang="en-US" sz="1100" spc="-1" strike="noStrike">
+                <a:solidFill>
+                  <a:srgbClr val="78ffc8"/>
+                </a:solidFill>
+                <a:latin typeface="Consolas"/>
+                <a:ea typeface="DejaVu Sans"/>
+              </a:rPr>
+              <a:t>System.out.println(fiyat);</a:t>
+            </a:r>
+            <a:endParaRPr b="0" lang="en-US" sz="1100" spc="-1" strike="noStrike">
+              <a:solidFill>
+                <a:srgbClr val="ffffff"/>
+              </a:solidFill>
+              <a:latin typeface="Arial"/>
+            </a:endParaRPr>
+          </a:p>
+          <a:p>
+            <a:pPr algn="ctr">
+              <a:lnSpc>
+                <a:spcPct val="100000"/>
+              </a:lnSpc>
+            </a:pPr>
+            <a:r>
+              <a:rPr b="0" lang="en-US" sz="1100" spc="-1" strike="noStrike">
+                <a:solidFill>
+                  <a:srgbClr val="78ffc8"/>
+                </a:solidFill>
+                <a:latin typeface="Consolas"/>
+                <a:ea typeface="DejaVu Sans"/>
+              </a:rPr>
+              <a:t>        </a:t>
+            </a:r>
+            <a:r>
+              <a:rPr b="0" lang="en-US" sz="1100" spc="-1" strike="noStrike">
+                <a:solidFill>
+                  <a:srgbClr val="78ffc8"/>
+                </a:solidFill>
+                <a:latin typeface="Consolas"/>
+                <a:ea typeface="DejaVu Sans"/>
+              </a:rPr>
+              <a:t>System.out.println(metin);</a:t>
+            </a:r>
+            <a:endParaRPr b="0" lang="en-US" sz="1100" spc="-1" strike="noStrike">
+              <a:solidFill>
+                <a:srgbClr val="ffffff"/>
+              </a:solidFill>
+              <a:latin typeface="Arial"/>
+            </a:endParaRPr>
+          </a:p>
+          <a:p>
+            <a:pPr algn="ctr">
+              <a:lnSpc>
+                <a:spcPct val="100000"/>
+              </a:lnSpc>
+            </a:pPr>
+            <a:r>
+              <a:rPr b="0" lang="en-US" sz="1100" spc="-1" strike="noStrike">
+                <a:solidFill>
+                  <a:srgbClr val="78ffc8"/>
+                </a:solidFill>
+                <a:latin typeface="Consolas"/>
+                <a:ea typeface="DejaVu Sans"/>
+              </a:rPr>
+              <a:t>        </a:t>
+            </a:r>
+            <a:r>
+              <a:rPr b="0" lang="en-US" sz="1100" spc="-1" strike="noStrike">
+                <a:solidFill>
+                  <a:srgbClr val="78ffc8"/>
+                </a:solidFill>
+                <a:latin typeface="Consolas"/>
+                <a:ea typeface="DejaVu Sans"/>
+              </a:rPr>
+              <a:t>System.out.println(sayilar[0]);</a:t>
+            </a:r>
+            <a:endParaRPr b="0" lang="en-US" sz="1100" spc="-1" strike="noStrike">
+              <a:solidFill>
+                <a:srgbClr val="ffffff"/>
+              </a:solidFill>
+              <a:latin typeface="Arial"/>
+            </a:endParaRPr>
+          </a:p>
+          <a:p>
+            <a:pPr algn="ctr">
+              <a:lnSpc>
+                <a:spcPct val="100000"/>
+              </a:lnSpc>
+            </a:pPr>
+            <a:r>
+              <a:rPr b="0" lang="en-US" sz="1100" spc="-1" strike="noStrike">
+                <a:solidFill>
+                  <a:srgbClr val="78ffc8"/>
+                </a:solidFill>
+                <a:latin typeface="Consolas"/>
+                <a:ea typeface="DejaVu Sans"/>
+              </a:rPr>
+              <a:t>    </a:t>
+            </a:r>
+            <a:r>
+              <a:rPr b="0" lang="en-US" sz="1100" spc="-1" strike="noStrike">
+                <a:solidFill>
+                  <a:srgbClr val="78ffc8"/>
+                </a:solidFill>
+                <a:latin typeface="Consolas"/>
+                <a:ea typeface="DejaVu Sans"/>
+              </a:rPr>
+              <a:t>}</a:t>
+            </a:r>
+            <a:endParaRPr b="0" lang="en-US" sz="1100" spc="-1" strike="noStrike">
+              <a:solidFill>
+                <a:srgbClr val="ffffff"/>
+              </a:solidFill>
+              <a:latin typeface="Arial"/>
+            </a:endParaRPr>
+          </a:p>
+          <a:p>
+            <a:pPr algn="ctr">
+              <a:lnSpc>
+                <a:spcPct val="100000"/>
+              </a:lnSpc>
+            </a:pPr>
+            <a:r>
+              <a:rPr b="0" lang="en-US" sz="1100" spc="-1" strike="noStrike">
+                <a:solidFill>
+                  <a:srgbClr val="78ffc8"/>
+                </a:solidFill>
+                <a:latin typeface="Consolas"/>
+                <a:ea typeface="DejaVu Sans"/>
+              </a:rPr>
+              <a:t>}</a:t>
+            </a:r>
+            <a:endParaRPr b="0" lang="en-US" sz="1100" spc="-1" strike="noStrike">
+              <a:solidFill>
+                <a:srgbClr val="ffffff"/>
+              </a:solidFill>
+              <a:latin typeface="Arial"/>
+            </a:endParaRPr>
+          </a:p>
+        </p:txBody>
+      </p:sp>
+      <p:sp>
+        <p:nvSpPr>
+          <p:cNvPr id="247" name="TextBox 18"/>
+          <p:cNvSpPr/>
+          <p:nvPr/>
+        </p:nvSpPr>
+        <p:spPr>
+          <a:xfrm>
+            <a:off x="4600080" y="6446520"/>
+            <a:ext cx="3051720" cy="363960"/>
           </a:xfrm>
           <a:prstGeom prst="rect">
             <a:avLst/>
@@ -15202,10 +20197,10 @@
   <a:themeElements>
     <a:clrScheme name="Office">
       <a:dk1>
-        <a:sysClr val="windowText" lastClr="000000"/>
+        <a:srgbClr val="000000"/>
       </a:dk1>
       <a:lt1>
-        <a:sysClr val="window" lastClr="FFFFFF"/>
+        <a:srgbClr val="ffffff"/>
       </a:lt1>
       <a:dk2>
         <a:srgbClr val="1f497d"/>

--- a/Java/Java #3/TR/Java #3.pptx
+++ b/Java/Java #3/TR/Java #3.pptx
@@ -6,15 +6,17 @@
     <p:sldMasterId id="2147483661" r:id="rId3"/>
     <p:sldMasterId id="2147483674" r:id="rId4"/>
     <p:sldMasterId id="2147483687" r:id="rId5"/>
+    <p:sldMasterId id="2147483700" r:id="rId6"/>
   </p:sldMasterIdLst>
   <p:sldIdLst>
-    <p:sldId id="256" r:id="rId6"/>
-    <p:sldId id="257" r:id="rId7"/>
-    <p:sldId id="258" r:id="rId8"/>
-    <p:sldId id="259" r:id="rId9"/>
-    <p:sldId id="260" r:id="rId10"/>
-    <p:sldId id="261" r:id="rId11"/>
-    <p:sldId id="262" r:id="rId12"/>
+    <p:sldId id="256" r:id="rId7"/>
+    <p:sldId id="257" r:id="rId8"/>
+    <p:sldId id="258" r:id="rId9"/>
+    <p:sldId id="259" r:id="rId10"/>
+    <p:sldId id="260" r:id="rId11"/>
+    <p:sldId id="261" r:id="rId12"/>
+    <p:sldId id="262" r:id="rId13"/>
+    <p:sldId id="263" r:id="rId14"/>
   </p:sldIdLst>
   <p:sldSz cx="9144000" cy="6858000"/>
   <p:notesSz cx="7772400" cy="10058400"/>
@@ -72,7 +74,7 @@
         <p:txBody>
           <a:bodyPr/>
           <a:p>
-            <a:fld id="{26AEF12F-981A-46E9-A324-87C9E4374D3F}" type="slidenum">
+            <a:fld id="{74DE9142-8A36-451E-BDE9-322E60AA1326}" type="slidenum">
               <a:t>&lt;#&gt;</a:t>
             </a:fld>
           </a:p>
@@ -281,7 +283,7 @@
         <p:txBody>
           <a:bodyPr/>
           <a:p>
-            <a:fld id="{251F816E-153B-400F-8C32-5A5A137A8121}" type="slidenum">
+            <a:fld id="{48EAC6F3-13E5-4237-A43D-74E1A231F4DF}" type="slidenum">
               <a:t>&lt;#&gt;</a:t>
             </a:fld>
           </a:p>
@@ -576,7 +578,7 @@
         <p:txBody>
           <a:bodyPr/>
           <a:p>
-            <a:fld id="{936ABBCF-C40C-4D93-8F88-397C458ADF38}" type="slidenum">
+            <a:fld id="{A8FA498D-5F28-498E-AE45-949789567664}" type="slidenum">
               <a:t>&lt;#&gt;</a:t>
             </a:fld>
           </a:p>
@@ -957,7 +959,7 @@
         <p:txBody>
           <a:bodyPr/>
           <a:p>
-            <a:fld id="{3E837765-98A5-4C15-B6D4-66E376FA46A4}" type="slidenum">
+            <a:fld id="{326992BC-A0AD-4C24-A393-99CE8222DE62}" type="slidenum">
               <a:t>&lt;#&gt;</a:t>
             </a:fld>
           </a:p>
@@ -1810,7 +1812,7 @@
         <p:txBody>
           <a:bodyPr/>
           <a:p>
-            <a:fld id="{F4963DE0-32D2-479C-AF9A-2E702094ACF1}" type="slidenum">
+            <a:fld id="{66222531-DEC3-4E71-B9B2-72DA910D4517}" type="slidenum">
               <a:t>&lt;#&gt;</a:t>
             </a:fld>
           </a:p>
@@ -2977,7 +2979,7 @@
         <p:txBody>
           <a:bodyPr/>
           <a:p>
-            <a:fld id="{09B7127F-880D-4062-8E5D-397253687FF1}" type="slidenum">
+            <a:fld id="{725D8EA0-C311-4C34-A76D-877C68BA6B92}" type="slidenum">
               <a:t>&lt;#&gt;</a:t>
             </a:fld>
           </a:p>
@@ -3140,7 +3142,7 @@
         <p:txBody>
           <a:bodyPr/>
           <a:p>
-            <a:fld id="{07702006-0AE9-4805-B392-85A9359E3A9F}" type="slidenum">
+            <a:fld id="{0BF887EA-E77D-4CC0-AB36-94B7F170D434}" type="slidenum">
               <a:t>&lt;#&gt;</a:t>
             </a:fld>
           </a:p>
@@ -3306,7 +3308,7 @@
         <p:txBody>
           <a:bodyPr/>
           <a:p>
-            <a:fld id="{2EBC6203-6296-4659-9688-924FCF0D4674}" type="slidenum">
+            <a:fld id="{B6DABD1B-3021-447B-8BC8-F73839C2BC33}" type="slidenum">
               <a:t>&lt;#&gt;</a:t>
             </a:fld>
           </a:p>
@@ -3515,7 +3517,7 @@
         <p:txBody>
           <a:bodyPr/>
           <a:p>
-            <a:fld id="{A3E0A3F3-AEE7-4397-9917-37642343B152}" type="slidenum">
+            <a:fld id="{3FD10D14-1618-4ED8-86F5-82C86427A484}" type="slidenum">
               <a:t>&lt;#&gt;</a:t>
             </a:fld>
           </a:p>
@@ -3638,7 +3640,7 @@
         <p:txBody>
           <a:bodyPr/>
           <a:p>
-            <a:fld id="{13B735EC-D6BB-45F1-85C0-1CCAB24C1BDB}" type="slidenum">
+            <a:fld id="{9D553E53-F16F-4122-85FB-5C315ACC743F}" type="slidenum">
               <a:t>&lt;#&gt;</a:t>
             </a:fld>
           </a:p>
@@ -3804,7 +3806,7 @@
         <p:txBody>
           <a:bodyPr/>
           <a:p>
-            <a:fld id="{66E91CD9-C5D1-4AC2-910E-88F2ED442364}" type="slidenum">
+            <a:fld id="{4A707C47-9DE9-4A5B-86D3-ABC143F78181}" type="slidenum">
               <a:t>&lt;#&gt;</a:t>
             </a:fld>
           </a:p>
@@ -3925,7 +3927,7 @@
         <p:txBody>
           <a:bodyPr/>
           <a:p>
-            <a:fld id="{F6958E4D-4D31-479E-AC16-3C80E95C63F1}" type="slidenum">
+            <a:fld id="{6DA7A415-7E63-4078-93D9-05236381A810}" type="slidenum">
               <a:t>&lt;#&gt;</a:t>
             </a:fld>
           </a:p>
@@ -4177,7 +4179,7 @@
         <p:txBody>
           <a:bodyPr/>
           <a:p>
-            <a:fld id="{BBC97CE6-AC7D-4CDA-AD74-841A4E81B9DD}" type="slidenum">
+            <a:fld id="{6FBA71FA-62F0-4A52-9B3D-E7BD72A84C22}" type="slidenum">
               <a:t>&lt;#&gt;</a:t>
             </a:fld>
           </a:p>
@@ -4429,7 +4431,7 @@
         <p:txBody>
           <a:bodyPr/>
           <a:p>
-            <a:fld id="{753E067B-81AC-421F-A30E-1AEB791D900D}" type="slidenum">
+            <a:fld id="{5DAC0218-C97E-40E0-BD7F-F7E7C101904B}" type="slidenum">
               <a:t>&lt;#&gt;</a:t>
             </a:fld>
           </a:p>
@@ -4681,7 +4683,7 @@
         <p:txBody>
           <a:bodyPr/>
           <a:p>
-            <a:fld id="{A1B373B2-EC71-4A5A-A43A-F6456C18646A}" type="slidenum">
+            <a:fld id="{1A3AE893-A461-4C74-9ED8-2CFE37F936B2}" type="slidenum">
               <a:t>&lt;#&gt;</a:t>
             </a:fld>
           </a:p>
@@ -4890,7 +4892,7 @@
         <p:txBody>
           <a:bodyPr/>
           <a:p>
-            <a:fld id="{3E9CAEEB-7BE5-46D1-9DC7-D11189C595CC}" type="slidenum">
+            <a:fld id="{29E034A5-E40C-4D23-895A-0E3869203CF7}" type="slidenum">
               <a:t>&lt;#&gt;</a:t>
             </a:fld>
           </a:p>
@@ -5185,7 +5187,7 @@
         <p:txBody>
           <a:bodyPr/>
           <a:p>
-            <a:fld id="{1724961A-C419-4C37-9C3A-B61DF29777AE}" type="slidenum">
+            <a:fld id="{6821E657-C2EF-41EF-8E0B-CCAC45461B35}" type="slidenum">
               <a:t>&lt;#&gt;</a:t>
             </a:fld>
           </a:p>
@@ -5566,7 +5568,7 @@
         <p:txBody>
           <a:bodyPr/>
           <a:p>
-            <a:fld id="{0F7DD967-A3A3-4AB9-A926-C22CD154A7A2}" type="slidenum">
+            <a:fld id="{1F96F4E3-2F2D-4439-AE14-19466681529B}" type="slidenum">
               <a:t>&lt;#&gt;</a:t>
             </a:fld>
           </a:p>
@@ -5649,7 +5651,7 @@
         <p:txBody>
           <a:bodyPr/>
           <a:p>
-            <a:fld id="{5CA4FF52-99F3-421E-9022-9B85448401BA}" type="slidenum">
+            <a:fld id="{226FB255-4E57-4B51-A8E3-3AD189D74CA5}" type="slidenum">
               <a:t>&lt;#&gt;</a:t>
             </a:fld>
           </a:p>
@@ -5812,7 +5814,7 @@
         <p:txBody>
           <a:bodyPr/>
           <a:p>
-            <a:fld id="{D0822938-4DB6-4C31-AA74-C72C87E788A9}" type="slidenum">
+            <a:fld id="{9D9C7890-E639-437A-BFF5-4951A4853ABB}" type="slidenum">
               <a:t>&lt;#&gt;</a:t>
             </a:fld>
           </a:p>
@@ -5978,7 +5980,7 @@
         <p:txBody>
           <a:bodyPr/>
           <a:p>
-            <a:fld id="{5C99C051-193E-4135-B84B-CF09FF3F540D}" type="slidenum">
+            <a:fld id="{071D7ADA-2189-446C-9736-C7457F92D010}" type="slidenum">
               <a:t>&lt;#&gt;</a:t>
             </a:fld>
           </a:p>
@@ -6187,7 +6189,7 @@
         <p:txBody>
           <a:bodyPr/>
           <a:p>
-            <a:fld id="{5F213A54-310A-4543-ADE4-C56EF5903E1D}" type="slidenum">
+            <a:fld id="{9EFD9EA5-E1E4-420F-8E8E-EE8CBA516A1E}" type="slidenum">
               <a:t>&lt;#&gt;</a:t>
             </a:fld>
           </a:p>
@@ -6396,7 +6398,7 @@
         <p:txBody>
           <a:bodyPr/>
           <a:p>
-            <a:fld id="{795ECFFE-E8DB-4E53-833D-F88DE0E5B3DA}" type="slidenum">
+            <a:fld id="{57E0510E-ACA1-4D9F-87FA-579DB6B58896}" type="slidenum">
               <a:t>&lt;#&gt;</a:t>
             </a:fld>
           </a:p>
@@ -6519,7 +6521,7 @@
         <p:txBody>
           <a:bodyPr/>
           <a:p>
-            <a:fld id="{25996C6C-A068-468D-A86B-6FAE6409F4FC}" type="slidenum">
+            <a:fld id="{671493BB-1860-4696-AD02-ED7CB5E9D3DA}" type="slidenum">
               <a:t>&lt;#&gt;</a:t>
             </a:fld>
           </a:p>
@@ -6640,7 +6642,7 @@
         <p:txBody>
           <a:bodyPr/>
           <a:p>
-            <a:fld id="{DB806164-0EDD-4412-83BB-F6D8BF11E2D9}" type="slidenum">
+            <a:fld id="{016A3E6C-BBBF-48B1-85F7-FAB4CE7202BC}" type="slidenum">
               <a:t>&lt;#&gt;</a:t>
             </a:fld>
           </a:p>
@@ -6892,7 +6894,7 @@
         <p:txBody>
           <a:bodyPr/>
           <a:p>
-            <a:fld id="{3BBF89BD-11B2-49AA-877A-E2156592A0FD}" type="slidenum">
+            <a:fld id="{7F7800C6-2366-4DEB-8942-F267CD535863}" type="slidenum">
               <a:t>&lt;#&gt;</a:t>
             </a:fld>
           </a:p>
@@ -7144,7 +7146,7 @@
         <p:txBody>
           <a:bodyPr/>
           <a:p>
-            <a:fld id="{4D54F922-12CE-4073-ACCC-3D084F846ED9}" type="slidenum">
+            <a:fld id="{69A63457-4272-4164-AA9C-E799F2FB188F}" type="slidenum">
               <a:t>&lt;#&gt;</a:t>
             </a:fld>
           </a:p>
@@ -7396,7 +7398,7 @@
         <p:txBody>
           <a:bodyPr/>
           <a:p>
-            <a:fld id="{0254EDC2-E8D0-485E-A05C-B08119D3ECAD}" type="slidenum">
+            <a:fld id="{CF309757-D6B8-491C-9FC4-4ADF4F3E06D7}" type="slidenum">
               <a:t>&lt;#&gt;</a:t>
             </a:fld>
           </a:p>
@@ -7605,7 +7607,7 @@
         <p:txBody>
           <a:bodyPr/>
           <a:p>
-            <a:fld id="{4274B792-0575-4204-B3C3-6CB663BC52A8}" type="slidenum">
+            <a:fld id="{341610AF-F2FE-4106-BED1-DD542D65BB73}" type="slidenum">
               <a:t>&lt;#&gt;</a:t>
             </a:fld>
           </a:p>
@@ -7900,7 +7902,7 @@
         <p:txBody>
           <a:bodyPr/>
           <a:p>
-            <a:fld id="{DD04FD39-CC2A-4BCA-8C0D-BFC56B493FEA}" type="slidenum">
+            <a:fld id="{92F138CB-35C6-4EA8-8D55-E818CF31F4B6}" type="slidenum">
               <a:t>&lt;#&gt;</a:t>
             </a:fld>
           </a:p>
@@ -8281,7 +8283,7 @@
         <p:txBody>
           <a:bodyPr/>
           <a:p>
-            <a:fld id="{B47CB2A2-82D7-48AD-806D-E16608255E81}" type="slidenum">
+            <a:fld id="{50B11006-1204-42B6-950D-34A3B34D192C}" type="slidenum">
               <a:t>&lt;#&gt;</a:t>
             </a:fld>
           </a:p>
@@ -8295,6 +8297,89 @@
           </p:cNvSpPr>
           <p:nvPr>
             <p:ph type="dt" idx="9"/>
+          </p:nvPr>
+        </p:nvSpPr>
+        <p:spPr/>
+        <p:txBody>
+          <a:bodyPr/>
+          <a:p>
+            <a:r>
+              <a:rPr lang="en-US"/>
+              <a:t/>
+            </a:r>
+          </a:p>
+        </p:txBody>
+      </p:sp>
+    </p:spTree>
+  </p:cSld>
+</p:sldLayout>
+</file>
+
+<file path=ppt/slideLayouts/slideLayout49.xml><?xml version="1.0" encoding="utf-8"?>
+<p:sldLayout xmlns:a="http://schemas.openxmlformats.org/drawingml/2006/main" xmlns:p="http://schemas.openxmlformats.org/presentationml/2006/main" xmlns:r="http://schemas.openxmlformats.org/officeDocument/2006/relationships" xmlns:p14="http://schemas.microsoft.com/office/powerpoint/2010/main" xmlns:p15="http://schemas.microsoft.com/office/powerpoint/2012/main" xmlns:mc="http://schemas.openxmlformats.org/markup-compatibility/2006" type="blank" preserve="1">
+  <p:cSld name="Blank Slide">
+    <p:spTree>
+      <p:nvGrpSpPr>
+        <p:cNvPr id="1" name=""/>
+        <p:cNvGrpSpPr/>
+        <p:nvPr/>
+      </p:nvGrpSpPr>
+      <p:grpSpPr>
+        <a:xfrm>
+          <a:off x="0" y="0"/>
+          <a:ext cx="0" cy="0"/>
+          <a:chOff x="0" y="0"/>
+          <a:chExt cx="0" cy="0"/>
+        </a:xfrm>
+      </p:grpSpPr>
+      <p:sp>
+        <p:nvSpPr>
+          <p:cNvPr id="2" name="PlaceHolder 1"/>
+          <p:cNvSpPr>
+            <a:spLocks noGrp="1"/>
+          </p:cNvSpPr>
+          <p:nvPr>
+            <p:ph type="ftr" idx="10"/>
+          </p:nvPr>
+        </p:nvSpPr>
+        <p:spPr/>
+        <p:txBody>
+          <a:bodyPr/>
+          <a:p>
+            <a:r>
+              <a:t>Footer</a:t>
+            </a:r>
+          </a:p>
+        </p:txBody>
+      </p:sp>
+      <p:sp>
+        <p:nvSpPr>
+          <p:cNvPr id="3" name="PlaceHolder 2"/>
+          <p:cNvSpPr>
+            <a:spLocks noGrp="1"/>
+          </p:cNvSpPr>
+          <p:nvPr>
+            <p:ph type="sldNum" idx="11"/>
+          </p:nvPr>
+        </p:nvSpPr>
+        <p:spPr/>
+        <p:txBody>
+          <a:bodyPr/>
+          <a:p>
+            <a:fld id="{9EFF5084-9E42-42E9-B05E-4A3BCDF581F6}" type="slidenum">
+              <a:t>&lt;#&gt;</a:t>
+            </a:fld>
+          </a:p>
+        </p:txBody>
+      </p:sp>
+      <p:sp>
+        <p:nvSpPr>
+          <p:cNvPr id="4" name="PlaceHolder 3"/>
+          <p:cNvSpPr>
+            <a:spLocks noGrp="1"/>
+          </p:cNvSpPr>
+          <p:nvPr>
+            <p:ph type="dt" idx="12"/>
           </p:nvPr>
         </p:nvSpPr>
         <p:spPr/>
@@ -8404,7 +8489,7 @@
         <p:txBody>
           <a:bodyPr/>
           <a:p>
-            <a:fld id="{426D0E24-AF14-4600-B869-51D788294AF7}" type="slidenum">
+            <a:fld id="{F810CD9A-B235-49AF-A56D-38CEF8066BD7}" type="slidenum">
               <a:t>&lt;#&gt;</a:t>
             </a:fld>
           </a:p>
@@ -8418,6 +8503,2048 @@
           </p:cNvSpPr>
           <p:nvPr>
             <p:ph type="dt" idx="3"/>
+          </p:nvPr>
+        </p:nvSpPr>
+        <p:spPr/>
+        <p:txBody>
+          <a:bodyPr/>
+          <a:p>
+            <a:r>
+              <a:rPr lang="en-US"/>
+              <a:t/>
+            </a:r>
+          </a:p>
+        </p:txBody>
+      </p:sp>
+    </p:spTree>
+  </p:cSld>
+</p:sldLayout>
+</file>
+
+<file path=ppt/slideLayouts/slideLayout50.xml><?xml version="1.0" encoding="utf-8"?>
+<p:sldLayout xmlns:a="http://schemas.openxmlformats.org/drawingml/2006/main" xmlns:p="http://schemas.openxmlformats.org/presentationml/2006/main" xmlns:r="http://schemas.openxmlformats.org/officeDocument/2006/relationships" xmlns:p14="http://schemas.microsoft.com/office/powerpoint/2010/main" xmlns:p15="http://schemas.microsoft.com/office/powerpoint/2012/main" xmlns:mc="http://schemas.openxmlformats.org/markup-compatibility/2006" type="tx" preserve="1">
+  <p:cSld name="Title Slide">
+    <p:spTree>
+      <p:nvGrpSpPr>
+        <p:cNvPr id="1" name=""/>
+        <p:cNvGrpSpPr/>
+        <p:nvPr/>
+      </p:nvGrpSpPr>
+      <p:grpSpPr>
+        <a:xfrm>
+          <a:off x="0" y="0"/>
+          <a:ext cx="0" cy="0"/>
+          <a:chOff x="0" y="0"/>
+          <a:chExt cx="0" cy="0"/>
+        </a:xfrm>
+      </p:grpSpPr>
+      <p:sp>
+        <p:nvSpPr>
+          <p:cNvPr id="166" name="PlaceHolder 1"/>
+          <p:cNvSpPr>
+            <a:spLocks noGrp="1"/>
+          </p:cNvSpPr>
+          <p:nvPr>
+            <p:ph type="title"/>
+          </p:nvPr>
+        </p:nvSpPr>
+        <p:spPr>
+          <a:xfrm>
+            <a:off x="457200" y="273600"/>
+            <a:ext cx="8229240" cy="1144800"/>
+          </a:xfrm>
+          <a:prstGeom prst="rect">
+            <a:avLst/>
+          </a:prstGeom>
+          <a:noFill/>
+          <a:ln w="0">
+            <a:noFill/>
+          </a:ln>
+        </p:spPr>
+        <p:txBody>
+          <a:bodyPr lIns="0" rIns="0" tIns="0" bIns="0" anchor="ctr">
+            <a:noAutofit/>
+          </a:bodyPr>
+          <a:p>
+            <a:pPr indent="0" algn="ctr">
+              <a:buNone/>
+            </a:pPr>
+            <a:endParaRPr b="0" lang="en-US" sz="4400" spc="-1" strike="noStrike">
+              <a:solidFill>
+                <a:srgbClr val="000000"/>
+              </a:solidFill>
+              <a:latin typeface="Arial"/>
+            </a:endParaRPr>
+          </a:p>
+        </p:txBody>
+      </p:sp>
+      <p:sp>
+        <p:nvSpPr>
+          <p:cNvPr id="167" name="PlaceHolder 2"/>
+          <p:cNvSpPr>
+            <a:spLocks noGrp="1"/>
+          </p:cNvSpPr>
+          <p:nvPr>
+            <p:ph type="subTitle"/>
+          </p:nvPr>
+        </p:nvSpPr>
+        <p:spPr>
+          <a:xfrm>
+            <a:off x="457200" y="1604520"/>
+            <a:ext cx="8229240" cy="3977280"/>
+          </a:xfrm>
+          <a:prstGeom prst="rect">
+            <a:avLst/>
+          </a:prstGeom>
+          <a:noFill/>
+          <a:ln w="0">
+            <a:noFill/>
+          </a:ln>
+        </p:spPr>
+        <p:txBody>
+          <a:bodyPr lIns="0" rIns="0" tIns="0" bIns="0" anchor="ctr">
+            <a:noAutofit/>
+          </a:bodyPr>
+          <a:p>
+            <a:pPr indent="0" algn="ctr">
+              <a:buNone/>
+            </a:pPr>
+            <a:endParaRPr b="0" lang="en-US" sz="3200" spc="-1" strike="noStrike">
+              <a:solidFill>
+                <a:srgbClr val="000000"/>
+              </a:solidFill>
+              <a:latin typeface="Arial"/>
+            </a:endParaRPr>
+          </a:p>
+        </p:txBody>
+      </p:sp>
+      <p:sp>
+        <p:nvSpPr>
+          <p:cNvPr id="4" name="PlaceHolder 3"/>
+          <p:cNvSpPr>
+            <a:spLocks noGrp="1"/>
+          </p:cNvSpPr>
+          <p:nvPr>
+            <p:ph type="ftr" idx="10"/>
+          </p:nvPr>
+        </p:nvSpPr>
+        <p:spPr/>
+        <p:txBody>
+          <a:bodyPr/>
+          <a:p>
+            <a:r>
+              <a:t>Footer</a:t>
+            </a:r>
+          </a:p>
+        </p:txBody>
+      </p:sp>
+      <p:sp>
+        <p:nvSpPr>
+          <p:cNvPr id="5" name="PlaceHolder 4"/>
+          <p:cNvSpPr>
+            <a:spLocks noGrp="1"/>
+          </p:cNvSpPr>
+          <p:nvPr>
+            <p:ph type="sldNum" idx="11"/>
+          </p:nvPr>
+        </p:nvSpPr>
+        <p:spPr/>
+        <p:txBody>
+          <a:bodyPr/>
+          <a:p>
+            <a:fld id="{E29DC7CF-D48A-454E-A46F-9AC65C4669E4}" type="slidenum">
+              <a:t>&lt;#&gt;</a:t>
+            </a:fld>
+          </a:p>
+        </p:txBody>
+      </p:sp>
+      <p:sp>
+        <p:nvSpPr>
+          <p:cNvPr id="6" name="PlaceHolder 5"/>
+          <p:cNvSpPr>
+            <a:spLocks noGrp="1"/>
+          </p:cNvSpPr>
+          <p:nvPr>
+            <p:ph type="dt" idx="12"/>
+          </p:nvPr>
+        </p:nvSpPr>
+        <p:spPr/>
+        <p:txBody>
+          <a:bodyPr/>
+          <a:p>
+            <a:r>
+              <a:rPr lang="en-US"/>
+              <a:t/>
+            </a:r>
+          </a:p>
+        </p:txBody>
+      </p:sp>
+    </p:spTree>
+  </p:cSld>
+</p:sldLayout>
+</file>
+
+<file path=ppt/slideLayouts/slideLayout51.xml><?xml version="1.0" encoding="utf-8"?>
+<p:sldLayout xmlns:a="http://schemas.openxmlformats.org/drawingml/2006/main" xmlns:p="http://schemas.openxmlformats.org/presentationml/2006/main" xmlns:r="http://schemas.openxmlformats.org/officeDocument/2006/relationships" xmlns:p14="http://schemas.microsoft.com/office/powerpoint/2010/main" xmlns:p15="http://schemas.microsoft.com/office/powerpoint/2012/main" xmlns:mc="http://schemas.openxmlformats.org/markup-compatibility/2006" type="obj" preserve="1">
+  <p:cSld name="Title, Content">
+    <p:spTree>
+      <p:nvGrpSpPr>
+        <p:cNvPr id="1" name=""/>
+        <p:cNvGrpSpPr/>
+        <p:nvPr/>
+      </p:nvGrpSpPr>
+      <p:grpSpPr>
+        <a:xfrm>
+          <a:off x="0" y="0"/>
+          <a:ext cx="0" cy="0"/>
+          <a:chOff x="0" y="0"/>
+          <a:chExt cx="0" cy="0"/>
+        </a:xfrm>
+      </p:grpSpPr>
+      <p:sp>
+        <p:nvSpPr>
+          <p:cNvPr id="168" name="PlaceHolder 1"/>
+          <p:cNvSpPr>
+            <a:spLocks noGrp="1"/>
+          </p:cNvSpPr>
+          <p:nvPr>
+            <p:ph type="title"/>
+          </p:nvPr>
+        </p:nvSpPr>
+        <p:spPr>
+          <a:xfrm>
+            <a:off x="457200" y="273600"/>
+            <a:ext cx="8229240" cy="1144800"/>
+          </a:xfrm>
+          <a:prstGeom prst="rect">
+            <a:avLst/>
+          </a:prstGeom>
+          <a:noFill/>
+          <a:ln w="0">
+            <a:noFill/>
+          </a:ln>
+        </p:spPr>
+        <p:txBody>
+          <a:bodyPr lIns="0" rIns="0" tIns="0" bIns="0" anchor="ctr">
+            <a:noAutofit/>
+          </a:bodyPr>
+          <a:p>
+            <a:pPr indent="0" algn="ctr">
+              <a:buNone/>
+            </a:pPr>
+            <a:endParaRPr b="0" lang="en-US" sz="4400" spc="-1" strike="noStrike">
+              <a:solidFill>
+                <a:srgbClr val="000000"/>
+              </a:solidFill>
+              <a:latin typeface="Arial"/>
+            </a:endParaRPr>
+          </a:p>
+        </p:txBody>
+      </p:sp>
+      <p:sp>
+        <p:nvSpPr>
+          <p:cNvPr id="169" name="PlaceHolder 2"/>
+          <p:cNvSpPr>
+            <a:spLocks noGrp="1"/>
+          </p:cNvSpPr>
+          <p:nvPr>
+            <p:ph/>
+          </p:nvPr>
+        </p:nvSpPr>
+        <p:spPr>
+          <a:xfrm>
+            <a:off x="457200" y="1604520"/>
+            <a:ext cx="8229240" cy="3977280"/>
+          </a:xfrm>
+          <a:prstGeom prst="rect">
+            <a:avLst/>
+          </a:prstGeom>
+          <a:noFill/>
+          <a:ln w="0">
+            <a:noFill/>
+          </a:ln>
+        </p:spPr>
+        <p:txBody>
+          <a:bodyPr lIns="0" rIns="0" tIns="0" bIns="0" anchor="t">
+            <a:normAutofit/>
+          </a:bodyPr>
+          <a:p>
+            <a:pPr indent="0">
+              <a:spcBef>
+                <a:spcPts val="1417"/>
+              </a:spcBef>
+              <a:buNone/>
+            </a:pPr>
+            <a:endParaRPr b="0" lang="en-US" sz="3200" spc="-1" strike="noStrike">
+              <a:solidFill>
+                <a:srgbClr val="000000"/>
+              </a:solidFill>
+              <a:latin typeface="Arial"/>
+            </a:endParaRPr>
+          </a:p>
+        </p:txBody>
+      </p:sp>
+      <p:sp>
+        <p:nvSpPr>
+          <p:cNvPr id="4" name="PlaceHolder 3"/>
+          <p:cNvSpPr>
+            <a:spLocks noGrp="1"/>
+          </p:cNvSpPr>
+          <p:nvPr>
+            <p:ph type="ftr" idx="10"/>
+          </p:nvPr>
+        </p:nvSpPr>
+        <p:spPr/>
+        <p:txBody>
+          <a:bodyPr/>
+          <a:p>
+            <a:r>
+              <a:t>Footer</a:t>
+            </a:r>
+          </a:p>
+        </p:txBody>
+      </p:sp>
+      <p:sp>
+        <p:nvSpPr>
+          <p:cNvPr id="5" name="PlaceHolder 4"/>
+          <p:cNvSpPr>
+            <a:spLocks noGrp="1"/>
+          </p:cNvSpPr>
+          <p:nvPr>
+            <p:ph type="sldNum" idx="11"/>
+          </p:nvPr>
+        </p:nvSpPr>
+        <p:spPr/>
+        <p:txBody>
+          <a:bodyPr/>
+          <a:p>
+            <a:fld id="{655398A3-7C5A-4FFA-9F01-6AA1ABF346B3}" type="slidenum">
+              <a:t>&lt;#&gt;</a:t>
+            </a:fld>
+          </a:p>
+        </p:txBody>
+      </p:sp>
+      <p:sp>
+        <p:nvSpPr>
+          <p:cNvPr id="6" name="PlaceHolder 5"/>
+          <p:cNvSpPr>
+            <a:spLocks noGrp="1"/>
+          </p:cNvSpPr>
+          <p:nvPr>
+            <p:ph type="dt" idx="12"/>
+          </p:nvPr>
+        </p:nvSpPr>
+        <p:spPr/>
+        <p:txBody>
+          <a:bodyPr/>
+          <a:p>
+            <a:r>
+              <a:rPr lang="en-US"/>
+              <a:t/>
+            </a:r>
+          </a:p>
+        </p:txBody>
+      </p:sp>
+    </p:spTree>
+  </p:cSld>
+</p:sldLayout>
+</file>
+
+<file path=ppt/slideLayouts/slideLayout52.xml><?xml version="1.0" encoding="utf-8"?>
+<p:sldLayout xmlns:a="http://schemas.openxmlformats.org/drawingml/2006/main" xmlns:p="http://schemas.openxmlformats.org/presentationml/2006/main" xmlns:r="http://schemas.openxmlformats.org/officeDocument/2006/relationships" xmlns:p14="http://schemas.microsoft.com/office/powerpoint/2010/main" xmlns:p15="http://schemas.microsoft.com/office/powerpoint/2012/main" xmlns:mc="http://schemas.openxmlformats.org/markup-compatibility/2006" type="twoObj" preserve="1">
+  <p:cSld name="Title, 2 Content">
+    <p:spTree>
+      <p:nvGrpSpPr>
+        <p:cNvPr id="1" name=""/>
+        <p:cNvGrpSpPr/>
+        <p:nvPr/>
+      </p:nvGrpSpPr>
+      <p:grpSpPr>
+        <a:xfrm>
+          <a:off x="0" y="0"/>
+          <a:ext cx="0" cy="0"/>
+          <a:chOff x="0" y="0"/>
+          <a:chExt cx="0" cy="0"/>
+        </a:xfrm>
+      </p:grpSpPr>
+      <p:sp>
+        <p:nvSpPr>
+          <p:cNvPr id="170" name="PlaceHolder 1"/>
+          <p:cNvSpPr>
+            <a:spLocks noGrp="1"/>
+          </p:cNvSpPr>
+          <p:nvPr>
+            <p:ph type="title"/>
+          </p:nvPr>
+        </p:nvSpPr>
+        <p:spPr>
+          <a:xfrm>
+            <a:off x="457200" y="273600"/>
+            <a:ext cx="8229240" cy="1144800"/>
+          </a:xfrm>
+          <a:prstGeom prst="rect">
+            <a:avLst/>
+          </a:prstGeom>
+          <a:noFill/>
+          <a:ln w="0">
+            <a:noFill/>
+          </a:ln>
+        </p:spPr>
+        <p:txBody>
+          <a:bodyPr lIns="0" rIns="0" tIns="0" bIns="0" anchor="ctr">
+            <a:noAutofit/>
+          </a:bodyPr>
+          <a:p>
+            <a:pPr indent="0" algn="ctr">
+              <a:buNone/>
+            </a:pPr>
+            <a:endParaRPr b="0" lang="en-US" sz="4400" spc="-1" strike="noStrike">
+              <a:solidFill>
+                <a:srgbClr val="000000"/>
+              </a:solidFill>
+              <a:latin typeface="Arial"/>
+            </a:endParaRPr>
+          </a:p>
+        </p:txBody>
+      </p:sp>
+      <p:sp>
+        <p:nvSpPr>
+          <p:cNvPr id="171" name="PlaceHolder 2"/>
+          <p:cNvSpPr>
+            <a:spLocks noGrp="1"/>
+          </p:cNvSpPr>
+          <p:nvPr>
+            <p:ph/>
+          </p:nvPr>
+        </p:nvSpPr>
+        <p:spPr>
+          <a:xfrm>
+            <a:off x="457200" y="1604520"/>
+            <a:ext cx="4015800" cy="3977280"/>
+          </a:xfrm>
+          <a:prstGeom prst="rect">
+            <a:avLst/>
+          </a:prstGeom>
+          <a:noFill/>
+          <a:ln w="0">
+            <a:noFill/>
+          </a:ln>
+        </p:spPr>
+        <p:txBody>
+          <a:bodyPr lIns="0" rIns="0" tIns="0" bIns="0" anchor="t">
+            <a:normAutofit/>
+          </a:bodyPr>
+          <a:p>
+            <a:pPr indent="0">
+              <a:spcBef>
+                <a:spcPts val="1417"/>
+              </a:spcBef>
+              <a:buNone/>
+            </a:pPr>
+            <a:endParaRPr b="0" lang="en-US" sz="3200" spc="-1" strike="noStrike">
+              <a:solidFill>
+                <a:srgbClr val="000000"/>
+              </a:solidFill>
+              <a:latin typeface="Arial"/>
+            </a:endParaRPr>
+          </a:p>
+        </p:txBody>
+      </p:sp>
+      <p:sp>
+        <p:nvSpPr>
+          <p:cNvPr id="172" name="PlaceHolder 3"/>
+          <p:cNvSpPr>
+            <a:spLocks noGrp="1"/>
+          </p:cNvSpPr>
+          <p:nvPr>
+            <p:ph/>
+          </p:nvPr>
+        </p:nvSpPr>
+        <p:spPr>
+          <a:xfrm>
+            <a:off x="4674240" y="1604520"/>
+            <a:ext cx="4015800" cy="3977280"/>
+          </a:xfrm>
+          <a:prstGeom prst="rect">
+            <a:avLst/>
+          </a:prstGeom>
+          <a:noFill/>
+          <a:ln w="0">
+            <a:noFill/>
+          </a:ln>
+        </p:spPr>
+        <p:txBody>
+          <a:bodyPr lIns="0" rIns="0" tIns="0" bIns="0" anchor="t">
+            <a:normAutofit/>
+          </a:bodyPr>
+          <a:p>
+            <a:pPr indent="0">
+              <a:spcBef>
+                <a:spcPts val="1417"/>
+              </a:spcBef>
+              <a:buNone/>
+            </a:pPr>
+            <a:endParaRPr b="0" lang="en-US" sz="3200" spc="-1" strike="noStrike">
+              <a:solidFill>
+                <a:srgbClr val="000000"/>
+              </a:solidFill>
+              <a:latin typeface="Arial"/>
+            </a:endParaRPr>
+          </a:p>
+        </p:txBody>
+      </p:sp>
+      <p:sp>
+        <p:nvSpPr>
+          <p:cNvPr id="5" name="PlaceHolder 4"/>
+          <p:cNvSpPr>
+            <a:spLocks noGrp="1"/>
+          </p:cNvSpPr>
+          <p:nvPr>
+            <p:ph type="ftr" idx="10"/>
+          </p:nvPr>
+        </p:nvSpPr>
+        <p:spPr/>
+        <p:txBody>
+          <a:bodyPr/>
+          <a:p>
+            <a:r>
+              <a:t>Footer</a:t>
+            </a:r>
+          </a:p>
+        </p:txBody>
+      </p:sp>
+      <p:sp>
+        <p:nvSpPr>
+          <p:cNvPr id="6" name="PlaceHolder 5"/>
+          <p:cNvSpPr>
+            <a:spLocks noGrp="1"/>
+          </p:cNvSpPr>
+          <p:nvPr>
+            <p:ph type="sldNum" idx="11"/>
+          </p:nvPr>
+        </p:nvSpPr>
+        <p:spPr/>
+        <p:txBody>
+          <a:bodyPr/>
+          <a:p>
+            <a:fld id="{E174C8E5-F55F-4778-96CC-D1CC8EE9167A}" type="slidenum">
+              <a:t>&lt;#&gt;</a:t>
+            </a:fld>
+          </a:p>
+        </p:txBody>
+      </p:sp>
+      <p:sp>
+        <p:nvSpPr>
+          <p:cNvPr id="7" name="PlaceHolder 6"/>
+          <p:cNvSpPr>
+            <a:spLocks noGrp="1"/>
+          </p:cNvSpPr>
+          <p:nvPr>
+            <p:ph type="dt" idx="12"/>
+          </p:nvPr>
+        </p:nvSpPr>
+        <p:spPr/>
+        <p:txBody>
+          <a:bodyPr/>
+          <a:p>
+            <a:r>
+              <a:rPr lang="en-US"/>
+              <a:t/>
+            </a:r>
+          </a:p>
+        </p:txBody>
+      </p:sp>
+    </p:spTree>
+  </p:cSld>
+</p:sldLayout>
+</file>
+
+<file path=ppt/slideLayouts/slideLayout53.xml><?xml version="1.0" encoding="utf-8"?>
+<p:sldLayout xmlns:a="http://schemas.openxmlformats.org/drawingml/2006/main" xmlns:p="http://schemas.openxmlformats.org/presentationml/2006/main" xmlns:r="http://schemas.openxmlformats.org/officeDocument/2006/relationships" xmlns:p14="http://schemas.microsoft.com/office/powerpoint/2010/main" xmlns:p15="http://schemas.microsoft.com/office/powerpoint/2012/main" xmlns:mc="http://schemas.openxmlformats.org/markup-compatibility/2006" type="titleOnly" preserve="1">
+  <p:cSld name="Title Only">
+    <p:spTree>
+      <p:nvGrpSpPr>
+        <p:cNvPr id="1" name=""/>
+        <p:cNvGrpSpPr/>
+        <p:nvPr/>
+      </p:nvGrpSpPr>
+      <p:grpSpPr>
+        <a:xfrm>
+          <a:off x="0" y="0"/>
+          <a:ext cx="0" cy="0"/>
+          <a:chOff x="0" y="0"/>
+          <a:chExt cx="0" cy="0"/>
+        </a:xfrm>
+      </p:grpSpPr>
+      <p:sp>
+        <p:nvSpPr>
+          <p:cNvPr id="173" name="PlaceHolder 1"/>
+          <p:cNvSpPr>
+            <a:spLocks noGrp="1"/>
+          </p:cNvSpPr>
+          <p:nvPr>
+            <p:ph type="title"/>
+          </p:nvPr>
+        </p:nvSpPr>
+        <p:spPr>
+          <a:xfrm>
+            <a:off x="457200" y="273600"/>
+            <a:ext cx="8229240" cy="1144800"/>
+          </a:xfrm>
+          <a:prstGeom prst="rect">
+            <a:avLst/>
+          </a:prstGeom>
+          <a:noFill/>
+          <a:ln w="0">
+            <a:noFill/>
+          </a:ln>
+        </p:spPr>
+        <p:txBody>
+          <a:bodyPr lIns="0" rIns="0" tIns="0" bIns="0" anchor="ctr">
+            <a:noAutofit/>
+          </a:bodyPr>
+          <a:p>
+            <a:pPr indent="0" algn="ctr">
+              <a:buNone/>
+            </a:pPr>
+            <a:endParaRPr b="0" lang="en-US" sz="4400" spc="-1" strike="noStrike">
+              <a:solidFill>
+                <a:srgbClr val="000000"/>
+              </a:solidFill>
+              <a:latin typeface="Arial"/>
+            </a:endParaRPr>
+          </a:p>
+        </p:txBody>
+      </p:sp>
+      <p:sp>
+        <p:nvSpPr>
+          <p:cNvPr id="3" name="PlaceHolder 2"/>
+          <p:cNvSpPr>
+            <a:spLocks noGrp="1"/>
+          </p:cNvSpPr>
+          <p:nvPr>
+            <p:ph type="ftr" idx="10"/>
+          </p:nvPr>
+        </p:nvSpPr>
+        <p:spPr/>
+        <p:txBody>
+          <a:bodyPr/>
+          <a:p>
+            <a:r>
+              <a:t>Footer</a:t>
+            </a:r>
+          </a:p>
+        </p:txBody>
+      </p:sp>
+      <p:sp>
+        <p:nvSpPr>
+          <p:cNvPr id="4" name="PlaceHolder 3"/>
+          <p:cNvSpPr>
+            <a:spLocks noGrp="1"/>
+          </p:cNvSpPr>
+          <p:nvPr>
+            <p:ph type="sldNum" idx="11"/>
+          </p:nvPr>
+        </p:nvSpPr>
+        <p:spPr/>
+        <p:txBody>
+          <a:bodyPr/>
+          <a:p>
+            <a:fld id="{A93670E2-3772-4D65-99AD-1E6C17622CD7}" type="slidenum">
+              <a:t>&lt;#&gt;</a:t>
+            </a:fld>
+          </a:p>
+        </p:txBody>
+      </p:sp>
+      <p:sp>
+        <p:nvSpPr>
+          <p:cNvPr id="5" name="PlaceHolder 4"/>
+          <p:cNvSpPr>
+            <a:spLocks noGrp="1"/>
+          </p:cNvSpPr>
+          <p:nvPr>
+            <p:ph type="dt" idx="12"/>
+          </p:nvPr>
+        </p:nvSpPr>
+        <p:spPr/>
+        <p:txBody>
+          <a:bodyPr/>
+          <a:p>
+            <a:r>
+              <a:rPr lang="en-US"/>
+              <a:t/>
+            </a:r>
+          </a:p>
+        </p:txBody>
+      </p:sp>
+    </p:spTree>
+  </p:cSld>
+</p:sldLayout>
+</file>
+
+<file path=ppt/slideLayouts/slideLayout54.xml><?xml version="1.0" encoding="utf-8"?>
+<p:sldLayout xmlns:a="http://schemas.openxmlformats.org/drawingml/2006/main" xmlns:p="http://schemas.openxmlformats.org/presentationml/2006/main" xmlns:r="http://schemas.openxmlformats.org/officeDocument/2006/relationships" xmlns:p14="http://schemas.microsoft.com/office/powerpoint/2010/main" xmlns:p15="http://schemas.microsoft.com/office/powerpoint/2012/main" xmlns:mc="http://schemas.openxmlformats.org/markup-compatibility/2006" type="objOnly" preserve="1">
+  <p:cSld name="Centered Text">
+    <p:spTree>
+      <p:nvGrpSpPr>
+        <p:cNvPr id="1" name=""/>
+        <p:cNvGrpSpPr/>
+        <p:nvPr/>
+      </p:nvGrpSpPr>
+      <p:grpSpPr>
+        <a:xfrm>
+          <a:off x="0" y="0"/>
+          <a:ext cx="0" cy="0"/>
+          <a:chOff x="0" y="0"/>
+          <a:chExt cx="0" cy="0"/>
+        </a:xfrm>
+      </p:grpSpPr>
+      <p:sp>
+        <p:nvSpPr>
+          <p:cNvPr id="174" name="PlaceHolder 1"/>
+          <p:cNvSpPr>
+            <a:spLocks noGrp="1"/>
+          </p:cNvSpPr>
+          <p:nvPr>
+            <p:ph type="subTitle"/>
+          </p:nvPr>
+        </p:nvSpPr>
+        <p:spPr>
+          <a:xfrm>
+            <a:off x="457200" y="273600"/>
+            <a:ext cx="8229240" cy="5307840"/>
+          </a:xfrm>
+          <a:prstGeom prst="rect">
+            <a:avLst/>
+          </a:prstGeom>
+          <a:noFill/>
+          <a:ln w="0">
+            <a:noFill/>
+          </a:ln>
+        </p:spPr>
+        <p:txBody>
+          <a:bodyPr lIns="0" rIns="0" tIns="0" bIns="0" anchor="ctr">
+            <a:noAutofit/>
+          </a:bodyPr>
+          <a:p>
+            <a:pPr algn="ctr"/>
+            <a:endParaRPr b="0" lang="en-US" sz="3200" spc="-1" strike="noStrike">
+              <a:solidFill>
+                <a:srgbClr val="000000"/>
+              </a:solidFill>
+              <a:latin typeface="Arial"/>
+            </a:endParaRPr>
+          </a:p>
+        </p:txBody>
+      </p:sp>
+      <p:sp>
+        <p:nvSpPr>
+          <p:cNvPr id="3" name="PlaceHolder 2"/>
+          <p:cNvSpPr>
+            <a:spLocks noGrp="1"/>
+          </p:cNvSpPr>
+          <p:nvPr>
+            <p:ph type="ftr" idx="10"/>
+          </p:nvPr>
+        </p:nvSpPr>
+        <p:spPr/>
+        <p:txBody>
+          <a:bodyPr/>
+          <a:p>
+            <a:r>
+              <a:t>Footer</a:t>
+            </a:r>
+          </a:p>
+        </p:txBody>
+      </p:sp>
+      <p:sp>
+        <p:nvSpPr>
+          <p:cNvPr id="4" name="PlaceHolder 3"/>
+          <p:cNvSpPr>
+            <a:spLocks noGrp="1"/>
+          </p:cNvSpPr>
+          <p:nvPr>
+            <p:ph type="sldNum" idx="11"/>
+          </p:nvPr>
+        </p:nvSpPr>
+        <p:spPr/>
+        <p:txBody>
+          <a:bodyPr/>
+          <a:p>
+            <a:fld id="{A63FDB95-FBCB-4956-B304-4F492C37356E}" type="slidenum">
+              <a:t>&lt;#&gt;</a:t>
+            </a:fld>
+          </a:p>
+        </p:txBody>
+      </p:sp>
+      <p:sp>
+        <p:nvSpPr>
+          <p:cNvPr id="5" name="PlaceHolder 4"/>
+          <p:cNvSpPr>
+            <a:spLocks noGrp="1"/>
+          </p:cNvSpPr>
+          <p:nvPr>
+            <p:ph type="dt" idx="12"/>
+          </p:nvPr>
+        </p:nvSpPr>
+        <p:spPr/>
+        <p:txBody>
+          <a:bodyPr/>
+          <a:p>
+            <a:r>
+              <a:rPr lang="en-US"/>
+              <a:t/>
+            </a:r>
+          </a:p>
+        </p:txBody>
+      </p:sp>
+    </p:spTree>
+  </p:cSld>
+</p:sldLayout>
+</file>
+
+<file path=ppt/slideLayouts/slideLayout55.xml><?xml version="1.0" encoding="utf-8"?>
+<p:sldLayout xmlns:a="http://schemas.openxmlformats.org/drawingml/2006/main" xmlns:p="http://schemas.openxmlformats.org/presentationml/2006/main" xmlns:r="http://schemas.openxmlformats.org/officeDocument/2006/relationships" xmlns:p14="http://schemas.microsoft.com/office/powerpoint/2010/main" xmlns:p15="http://schemas.microsoft.com/office/powerpoint/2012/main" xmlns:mc="http://schemas.openxmlformats.org/markup-compatibility/2006" type="twoObjAndObj" preserve="1">
+  <p:cSld name="Title, 2 Content and Content">
+    <p:spTree>
+      <p:nvGrpSpPr>
+        <p:cNvPr id="1" name=""/>
+        <p:cNvGrpSpPr/>
+        <p:nvPr/>
+      </p:nvGrpSpPr>
+      <p:grpSpPr>
+        <a:xfrm>
+          <a:off x="0" y="0"/>
+          <a:ext cx="0" cy="0"/>
+          <a:chOff x="0" y="0"/>
+          <a:chExt cx="0" cy="0"/>
+        </a:xfrm>
+      </p:grpSpPr>
+      <p:sp>
+        <p:nvSpPr>
+          <p:cNvPr id="175" name="PlaceHolder 1"/>
+          <p:cNvSpPr>
+            <a:spLocks noGrp="1"/>
+          </p:cNvSpPr>
+          <p:nvPr>
+            <p:ph type="title"/>
+          </p:nvPr>
+        </p:nvSpPr>
+        <p:spPr>
+          <a:xfrm>
+            <a:off x="457200" y="273600"/>
+            <a:ext cx="8229240" cy="1144800"/>
+          </a:xfrm>
+          <a:prstGeom prst="rect">
+            <a:avLst/>
+          </a:prstGeom>
+          <a:noFill/>
+          <a:ln w="0">
+            <a:noFill/>
+          </a:ln>
+        </p:spPr>
+        <p:txBody>
+          <a:bodyPr lIns="0" rIns="0" tIns="0" bIns="0" anchor="ctr">
+            <a:noAutofit/>
+          </a:bodyPr>
+          <a:p>
+            <a:pPr indent="0" algn="ctr">
+              <a:buNone/>
+            </a:pPr>
+            <a:endParaRPr b="0" lang="en-US" sz="4400" spc="-1" strike="noStrike">
+              <a:solidFill>
+                <a:srgbClr val="000000"/>
+              </a:solidFill>
+              <a:latin typeface="Arial"/>
+            </a:endParaRPr>
+          </a:p>
+        </p:txBody>
+      </p:sp>
+      <p:sp>
+        <p:nvSpPr>
+          <p:cNvPr id="176" name="PlaceHolder 2"/>
+          <p:cNvSpPr>
+            <a:spLocks noGrp="1"/>
+          </p:cNvSpPr>
+          <p:nvPr>
+            <p:ph/>
+          </p:nvPr>
+        </p:nvSpPr>
+        <p:spPr>
+          <a:xfrm>
+            <a:off x="457200" y="1604520"/>
+            <a:ext cx="4015800" cy="1896840"/>
+          </a:xfrm>
+          <a:prstGeom prst="rect">
+            <a:avLst/>
+          </a:prstGeom>
+          <a:noFill/>
+          <a:ln w="0">
+            <a:noFill/>
+          </a:ln>
+        </p:spPr>
+        <p:txBody>
+          <a:bodyPr lIns="0" rIns="0" tIns="0" bIns="0" anchor="t">
+            <a:normAutofit/>
+          </a:bodyPr>
+          <a:p>
+            <a:pPr indent="0">
+              <a:spcBef>
+                <a:spcPts val="1417"/>
+              </a:spcBef>
+              <a:buNone/>
+            </a:pPr>
+            <a:endParaRPr b="0" lang="en-US" sz="3200" spc="-1" strike="noStrike">
+              <a:solidFill>
+                <a:srgbClr val="000000"/>
+              </a:solidFill>
+              <a:latin typeface="Arial"/>
+            </a:endParaRPr>
+          </a:p>
+        </p:txBody>
+      </p:sp>
+      <p:sp>
+        <p:nvSpPr>
+          <p:cNvPr id="177" name="PlaceHolder 3"/>
+          <p:cNvSpPr>
+            <a:spLocks noGrp="1"/>
+          </p:cNvSpPr>
+          <p:nvPr>
+            <p:ph/>
+          </p:nvPr>
+        </p:nvSpPr>
+        <p:spPr>
+          <a:xfrm>
+            <a:off x="4674240" y="1604520"/>
+            <a:ext cx="4015800" cy="3977280"/>
+          </a:xfrm>
+          <a:prstGeom prst="rect">
+            <a:avLst/>
+          </a:prstGeom>
+          <a:noFill/>
+          <a:ln w="0">
+            <a:noFill/>
+          </a:ln>
+        </p:spPr>
+        <p:txBody>
+          <a:bodyPr lIns="0" rIns="0" tIns="0" bIns="0" anchor="t">
+            <a:normAutofit/>
+          </a:bodyPr>
+          <a:p>
+            <a:pPr indent="0">
+              <a:spcBef>
+                <a:spcPts val="1417"/>
+              </a:spcBef>
+              <a:buNone/>
+            </a:pPr>
+            <a:endParaRPr b="0" lang="en-US" sz="3200" spc="-1" strike="noStrike">
+              <a:solidFill>
+                <a:srgbClr val="000000"/>
+              </a:solidFill>
+              <a:latin typeface="Arial"/>
+            </a:endParaRPr>
+          </a:p>
+        </p:txBody>
+      </p:sp>
+      <p:sp>
+        <p:nvSpPr>
+          <p:cNvPr id="178" name="PlaceHolder 4"/>
+          <p:cNvSpPr>
+            <a:spLocks noGrp="1"/>
+          </p:cNvSpPr>
+          <p:nvPr>
+            <p:ph/>
+          </p:nvPr>
+        </p:nvSpPr>
+        <p:spPr>
+          <a:xfrm>
+            <a:off x="457200" y="3682080"/>
+            <a:ext cx="4015800" cy="1896840"/>
+          </a:xfrm>
+          <a:prstGeom prst="rect">
+            <a:avLst/>
+          </a:prstGeom>
+          <a:noFill/>
+          <a:ln w="0">
+            <a:noFill/>
+          </a:ln>
+        </p:spPr>
+        <p:txBody>
+          <a:bodyPr lIns="0" rIns="0" tIns="0" bIns="0" anchor="t">
+            <a:normAutofit/>
+          </a:bodyPr>
+          <a:p>
+            <a:pPr indent="0">
+              <a:spcBef>
+                <a:spcPts val="1417"/>
+              </a:spcBef>
+              <a:buNone/>
+            </a:pPr>
+            <a:endParaRPr b="0" lang="en-US" sz="3200" spc="-1" strike="noStrike">
+              <a:solidFill>
+                <a:srgbClr val="000000"/>
+              </a:solidFill>
+              <a:latin typeface="Arial"/>
+            </a:endParaRPr>
+          </a:p>
+        </p:txBody>
+      </p:sp>
+      <p:sp>
+        <p:nvSpPr>
+          <p:cNvPr id="6" name="PlaceHolder 5"/>
+          <p:cNvSpPr>
+            <a:spLocks noGrp="1"/>
+          </p:cNvSpPr>
+          <p:nvPr>
+            <p:ph type="ftr" idx="10"/>
+          </p:nvPr>
+        </p:nvSpPr>
+        <p:spPr/>
+        <p:txBody>
+          <a:bodyPr/>
+          <a:p>
+            <a:r>
+              <a:t>Footer</a:t>
+            </a:r>
+          </a:p>
+        </p:txBody>
+      </p:sp>
+      <p:sp>
+        <p:nvSpPr>
+          <p:cNvPr id="7" name="PlaceHolder 6"/>
+          <p:cNvSpPr>
+            <a:spLocks noGrp="1"/>
+          </p:cNvSpPr>
+          <p:nvPr>
+            <p:ph type="sldNum" idx="11"/>
+          </p:nvPr>
+        </p:nvSpPr>
+        <p:spPr/>
+        <p:txBody>
+          <a:bodyPr/>
+          <a:p>
+            <a:fld id="{3CB052C0-A1DA-43D9-B6D8-5A901807EA6C}" type="slidenum">
+              <a:t>&lt;#&gt;</a:t>
+            </a:fld>
+          </a:p>
+        </p:txBody>
+      </p:sp>
+      <p:sp>
+        <p:nvSpPr>
+          <p:cNvPr id="8" name="PlaceHolder 7"/>
+          <p:cNvSpPr>
+            <a:spLocks noGrp="1"/>
+          </p:cNvSpPr>
+          <p:nvPr>
+            <p:ph type="dt" idx="12"/>
+          </p:nvPr>
+        </p:nvSpPr>
+        <p:spPr/>
+        <p:txBody>
+          <a:bodyPr/>
+          <a:p>
+            <a:r>
+              <a:rPr lang="en-US"/>
+              <a:t/>
+            </a:r>
+          </a:p>
+        </p:txBody>
+      </p:sp>
+    </p:spTree>
+  </p:cSld>
+</p:sldLayout>
+</file>
+
+<file path=ppt/slideLayouts/slideLayout56.xml><?xml version="1.0" encoding="utf-8"?>
+<p:sldLayout xmlns:a="http://schemas.openxmlformats.org/drawingml/2006/main" xmlns:p="http://schemas.openxmlformats.org/presentationml/2006/main" xmlns:r="http://schemas.openxmlformats.org/officeDocument/2006/relationships" xmlns:p14="http://schemas.microsoft.com/office/powerpoint/2010/main" xmlns:p15="http://schemas.microsoft.com/office/powerpoint/2012/main" xmlns:mc="http://schemas.openxmlformats.org/markup-compatibility/2006" type="objAndTwoObj" preserve="1">
+  <p:cSld name="Title Content and 2 Content">
+    <p:spTree>
+      <p:nvGrpSpPr>
+        <p:cNvPr id="1" name=""/>
+        <p:cNvGrpSpPr/>
+        <p:nvPr/>
+      </p:nvGrpSpPr>
+      <p:grpSpPr>
+        <a:xfrm>
+          <a:off x="0" y="0"/>
+          <a:ext cx="0" cy="0"/>
+          <a:chOff x="0" y="0"/>
+          <a:chExt cx="0" cy="0"/>
+        </a:xfrm>
+      </p:grpSpPr>
+      <p:sp>
+        <p:nvSpPr>
+          <p:cNvPr id="179" name="PlaceHolder 1"/>
+          <p:cNvSpPr>
+            <a:spLocks noGrp="1"/>
+          </p:cNvSpPr>
+          <p:nvPr>
+            <p:ph type="title"/>
+          </p:nvPr>
+        </p:nvSpPr>
+        <p:spPr>
+          <a:xfrm>
+            <a:off x="457200" y="273600"/>
+            <a:ext cx="8229240" cy="1144800"/>
+          </a:xfrm>
+          <a:prstGeom prst="rect">
+            <a:avLst/>
+          </a:prstGeom>
+          <a:noFill/>
+          <a:ln w="0">
+            <a:noFill/>
+          </a:ln>
+        </p:spPr>
+        <p:txBody>
+          <a:bodyPr lIns="0" rIns="0" tIns="0" bIns="0" anchor="ctr">
+            <a:noAutofit/>
+          </a:bodyPr>
+          <a:p>
+            <a:pPr indent="0" algn="ctr">
+              <a:buNone/>
+            </a:pPr>
+            <a:endParaRPr b="0" lang="en-US" sz="4400" spc="-1" strike="noStrike">
+              <a:solidFill>
+                <a:srgbClr val="000000"/>
+              </a:solidFill>
+              <a:latin typeface="Arial"/>
+            </a:endParaRPr>
+          </a:p>
+        </p:txBody>
+      </p:sp>
+      <p:sp>
+        <p:nvSpPr>
+          <p:cNvPr id="180" name="PlaceHolder 2"/>
+          <p:cNvSpPr>
+            <a:spLocks noGrp="1"/>
+          </p:cNvSpPr>
+          <p:nvPr>
+            <p:ph/>
+          </p:nvPr>
+        </p:nvSpPr>
+        <p:spPr>
+          <a:xfrm>
+            <a:off x="457200" y="1604520"/>
+            <a:ext cx="4015800" cy="3977280"/>
+          </a:xfrm>
+          <a:prstGeom prst="rect">
+            <a:avLst/>
+          </a:prstGeom>
+          <a:noFill/>
+          <a:ln w="0">
+            <a:noFill/>
+          </a:ln>
+        </p:spPr>
+        <p:txBody>
+          <a:bodyPr lIns="0" rIns="0" tIns="0" bIns="0" anchor="t">
+            <a:normAutofit/>
+          </a:bodyPr>
+          <a:p>
+            <a:pPr indent="0">
+              <a:spcBef>
+                <a:spcPts val="1417"/>
+              </a:spcBef>
+              <a:buNone/>
+            </a:pPr>
+            <a:endParaRPr b="0" lang="en-US" sz="3200" spc="-1" strike="noStrike">
+              <a:solidFill>
+                <a:srgbClr val="000000"/>
+              </a:solidFill>
+              <a:latin typeface="Arial"/>
+            </a:endParaRPr>
+          </a:p>
+        </p:txBody>
+      </p:sp>
+      <p:sp>
+        <p:nvSpPr>
+          <p:cNvPr id="181" name="PlaceHolder 3"/>
+          <p:cNvSpPr>
+            <a:spLocks noGrp="1"/>
+          </p:cNvSpPr>
+          <p:nvPr>
+            <p:ph/>
+          </p:nvPr>
+        </p:nvSpPr>
+        <p:spPr>
+          <a:xfrm>
+            <a:off x="4674240" y="1604520"/>
+            <a:ext cx="4015800" cy="1896840"/>
+          </a:xfrm>
+          <a:prstGeom prst="rect">
+            <a:avLst/>
+          </a:prstGeom>
+          <a:noFill/>
+          <a:ln w="0">
+            <a:noFill/>
+          </a:ln>
+        </p:spPr>
+        <p:txBody>
+          <a:bodyPr lIns="0" rIns="0" tIns="0" bIns="0" anchor="t">
+            <a:normAutofit/>
+          </a:bodyPr>
+          <a:p>
+            <a:pPr indent="0">
+              <a:spcBef>
+                <a:spcPts val="1417"/>
+              </a:spcBef>
+              <a:buNone/>
+            </a:pPr>
+            <a:endParaRPr b="0" lang="en-US" sz="3200" spc="-1" strike="noStrike">
+              <a:solidFill>
+                <a:srgbClr val="000000"/>
+              </a:solidFill>
+              <a:latin typeface="Arial"/>
+            </a:endParaRPr>
+          </a:p>
+        </p:txBody>
+      </p:sp>
+      <p:sp>
+        <p:nvSpPr>
+          <p:cNvPr id="182" name="PlaceHolder 4"/>
+          <p:cNvSpPr>
+            <a:spLocks noGrp="1"/>
+          </p:cNvSpPr>
+          <p:nvPr>
+            <p:ph/>
+          </p:nvPr>
+        </p:nvSpPr>
+        <p:spPr>
+          <a:xfrm>
+            <a:off x="4674240" y="3682080"/>
+            <a:ext cx="4015800" cy="1896840"/>
+          </a:xfrm>
+          <a:prstGeom prst="rect">
+            <a:avLst/>
+          </a:prstGeom>
+          <a:noFill/>
+          <a:ln w="0">
+            <a:noFill/>
+          </a:ln>
+        </p:spPr>
+        <p:txBody>
+          <a:bodyPr lIns="0" rIns="0" tIns="0" bIns="0" anchor="t">
+            <a:normAutofit/>
+          </a:bodyPr>
+          <a:p>
+            <a:pPr indent="0">
+              <a:spcBef>
+                <a:spcPts val="1417"/>
+              </a:spcBef>
+              <a:buNone/>
+            </a:pPr>
+            <a:endParaRPr b="0" lang="en-US" sz="3200" spc="-1" strike="noStrike">
+              <a:solidFill>
+                <a:srgbClr val="000000"/>
+              </a:solidFill>
+              <a:latin typeface="Arial"/>
+            </a:endParaRPr>
+          </a:p>
+        </p:txBody>
+      </p:sp>
+      <p:sp>
+        <p:nvSpPr>
+          <p:cNvPr id="6" name="PlaceHolder 5"/>
+          <p:cNvSpPr>
+            <a:spLocks noGrp="1"/>
+          </p:cNvSpPr>
+          <p:nvPr>
+            <p:ph type="ftr" idx="10"/>
+          </p:nvPr>
+        </p:nvSpPr>
+        <p:spPr/>
+        <p:txBody>
+          <a:bodyPr/>
+          <a:p>
+            <a:r>
+              <a:t>Footer</a:t>
+            </a:r>
+          </a:p>
+        </p:txBody>
+      </p:sp>
+      <p:sp>
+        <p:nvSpPr>
+          <p:cNvPr id="7" name="PlaceHolder 6"/>
+          <p:cNvSpPr>
+            <a:spLocks noGrp="1"/>
+          </p:cNvSpPr>
+          <p:nvPr>
+            <p:ph type="sldNum" idx="11"/>
+          </p:nvPr>
+        </p:nvSpPr>
+        <p:spPr/>
+        <p:txBody>
+          <a:bodyPr/>
+          <a:p>
+            <a:fld id="{4228782F-2429-4C3A-B532-1B97EFBECB50}" type="slidenum">
+              <a:t>&lt;#&gt;</a:t>
+            </a:fld>
+          </a:p>
+        </p:txBody>
+      </p:sp>
+      <p:sp>
+        <p:nvSpPr>
+          <p:cNvPr id="8" name="PlaceHolder 7"/>
+          <p:cNvSpPr>
+            <a:spLocks noGrp="1"/>
+          </p:cNvSpPr>
+          <p:nvPr>
+            <p:ph type="dt" idx="12"/>
+          </p:nvPr>
+        </p:nvSpPr>
+        <p:spPr/>
+        <p:txBody>
+          <a:bodyPr/>
+          <a:p>
+            <a:r>
+              <a:rPr lang="en-US"/>
+              <a:t/>
+            </a:r>
+          </a:p>
+        </p:txBody>
+      </p:sp>
+    </p:spTree>
+  </p:cSld>
+</p:sldLayout>
+</file>
+
+<file path=ppt/slideLayouts/slideLayout57.xml><?xml version="1.0" encoding="utf-8"?>
+<p:sldLayout xmlns:a="http://schemas.openxmlformats.org/drawingml/2006/main" xmlns:p="http://schemas.openxmlformats.org/presentationml/2006/main" xmlns:r="http://schemas.openxmlformats.org/officeDocument/2006/relationships" xmlns:p14="http://schemas.microsoft.com/office/powerpoint/2010/main" xmlns:p15="http://schemas.microsoft.com/office/powerpoint/2012/main" xmlns:mc="http://schemas.openxmlformats.org/markup-compatibility/2006" type="twoObjOverTx" preserve="1">
+  <p:cSld name="Title, 2 Content over Content">
+    <p:spTree>
+      <p:nvGrpSpPr>
+        <p:cNvPr id="1" name=""/>
+        <p:cNvGrpSpPr/>
+        <p:nvPr/>
+      </p:nvGrpSpPr>
+      <p:grpSpPr>
+        <a:xfrm>
+          <a:off x="0" y="0"/>
+          <a:ext cx="0" cy="0"/>
+          <a:chOff x="0" y="0"/>
+          <a:chExt cx="0" cy="0"/>
+        </a:xfrm>
+      </p:grpSpPr>
+      <p:sp>
+        <p:nvSpPr>
+          <p:cNvPr id="183" name="PlaceHolder 1"/>
+          <p:cNvSpPr>
+            <a:spLocks noGrp="1"/>
+          </p:cNvSpPr>
+          <p:nvPr>
+            <p:ph type="title"/>
+          </p:nvPr>
+        </p:nvSpPr>
+        <p:spPr>
+          <a:xfrm>
+            <a:off x="457200" y="273600"/>
+            <a:ext cx="8229240" cy="1144800"/>
+          </a:xfrm>
+          <a:prstGeom prst="rect">
+            <a:avLst/>
+          </a:prstGeom>
+          <a:noFill/>
+          <a:ln w="0">
+            <a:noFill/>
+          </a:ln>
+        </p:spPr>
+        <p:txBody>
+          <a:bodyPr lIns="0" rIns="0" tIns="0" bIns="0" anchor="ctr">
+            <a:noAutofit/>
+          </a:bodyPr>
+          <a:p>
+            <a:pPr indent="0" algn="ctr">
+              <a:buNone/>
+            </a:pPr>
+            <a:endParaRPr b="0" lang="en-US" sz="4400" spc="-1" strike="noStrike">
+              <a:solidFill>
+                <a:srgbClr val="000000"/>
+              </a:solidFill>
+              <a:latin typeface="Arial"/>
+            </a:endParaRPr>
+          </a:p>
+        </p:txBody>
+      </p:sp>
+      <p:sp>
+        <p:nvSpPr>
+          <p:cNvPr id="184" name="PlaceHolder 2"/>
+          <p:cNvSpPr>
+            <a:spLocks noGrp="1"/>
+          </p:cNvSpPr>
+          <p:nvPr>
+            <p:ph/>
+          </p:nvPr>
+        </p:nvSpPr>
+        <p:spPr>
+          <a:xfrm>
+            <a:off x="457200" y="1604520"/>
+            <a:ext cx="4015800" cy="1896840"/>
+          </a:xfrm>
+          <a:prstGeom prst="rect">
+            <a:avLst/>
+          </a:prstGeom>
+          <a:noFill/>
+          <a:ln w="0">
+            <a:noFill/>
+          </a:ln>
+        </p:spPr>
+        <p:txBody>
+          <a:bodyPr lIns="0" rIns="0" tIns="0" bIns="0" anchor="t">
+            <a:normAutofit/>
+          </a:bodyPr>
+          <a:p>
+            <a:pPr indent="0">
+              <a:spcBef>
+                <a:spcPts val="1417"/>
+              </a:spcBef>
+              <a:buNone/>
+            </a:pPr>
+            <a:endParaRPr b="0" lang="en-US" sz="3200" spc="-1" strike="noStrike">
+              <a:solidFill>
+                <a:srgbClr val="000000"/>
+              </a:solidFill>
+              <a:latin typeface="Arial"/>
+            </a:endParaRPr>
+          </a:p>
+        </p:txBody>
+      </p:sp>
+      <p:sp>
+        <p:nvSpPr>
+          <p:cNvPr id="185" name="PlaceHolder 3"/>
+          <p:cNvSpPr>
+            <a:spLocks noGrp="1"/>
+          </p:cNvSpPr>
+          <p:nvPr>
+            <p:ph/>
+          </p:nvPr>
+        </p:nvSpPr>
+        <p:spPr>
+          <a:xfrm>
+            <a:off x="4674240" y="1604520"/>
+            <a:ext cx="4015800" cy="1896840"/>
+          </a:xfrm>
+          <a:prstGeom prst="rect">
+            <a:avLst/>
+          </a:prstGeom>
+          <a:noFill/>
+          <a:ln w="0">
+            <a:noFill/>
+          </a:ln>
+        </p:spPr>
+        <p:txBody>
+          <a:bodyPr lIns="0" rIns="0" tIns="0" bIns="0" anchor="t">
+            <a:normAutofit/>
+          </a:bodyPr>
+          <a:p>
+            <a:pPr indent="0">
+              <a:spcBef>
+                <a:spcPts val="1417"/>
+              </a:spcBef>
+              <a:buNone/>
+            </a:pPr>
+            <a:endParaRPr b="0" lang="en-US" sz="3200" spc="-1" strike="noStrike">
+              <a:solidFill>
+                <a:srgbClr val="000000"/>
+              </a:solidFill>
+              <a:latin typeface="Arial"/>
+            </a:endParaRPr>
+          </a:p>
+        </p:txBody>
+      </p:sp>
+      <p:sp>
+        <p:nvSpPr>
+          <p:cNvPr id="186" name="PlaceHolder 4"/>
+          <p:cNvSpPr>
+            <a:spLocks noGrp="1"/>
+          </p:cNvSpPr>
+          <p:nvPr>
+            <p:ph/>
+          </p:nvPr>
+        </p:nvSpPr>
+        <p:spPr>
+          <a:xfrm>
+            <a:off x="457200" y="3682080"/>
+            <a:ext cx="8229240" cy="1896840"/>
+          </a:xfrm>
+          <a:prstGeom prst="rect">
+            <a:avLst/>
+          </a:prstGeom>
+          <a:noFill/>
+          <a:ln w="0">
+            <a:noFill/>
+          </a:ln>
+        </p:spPr>
+        <p:txBody>
+          <a:bodyPr lIns="0" rIns="0" tIns="0" bIns="0" anchor="t">
+            <a:normAutofit/>
+          </a:bodyPr>
+          <a:p>
+            <a:pPr indent="0">
+              <a:spcBef>
+                <a:spcPts val="1417"/>
+              </a:spcBef>
+              <a:buNone/>
+            </a:pPr>
+            <a:endParaRPr b="0" lang="en-US" sz="3200" spc="-1" strike="noStrike">
+              <a:solidFill>
+                <a:srgbClr val="000000"/>
+              </a:solidFill>
+              <a:latin typeface="Arial"/>
+            </a:endParaRPr>
+          </a:p>
+        </p:txBody>
+      </p:sp>
+      <p:sp>
+        <p:nvSpPr>
+          <p:cNvPr id="6" name="PlaceHolder 5"/>
+          <p:cNvSpPr>
+            <a:spLocks noGrp="1"/>
+          </p:cNvSpPr>
+          <p:nvPr>
+            <p:ph type="ftr" idx="10"/>
+          </p:nvPr>
+        </p:nvSpPr>
+        <p:spPr/>
+        <p:txBody>
+          <a:bodyPr/>
+          <a:p>
+            <a:r>
+              <a:t>Footer</a:t>
+            </a:r>
+          </a:p>
+        </p:txBody>
+      </p:sp>
+      <p:sp>
+        <p:nvSpPr>
+          <p:cNvPr id="7" name="PlaceHolder 6"/>
+          <p:cNvSpPr>
+            <a:spLocks noGrp="1"/>
+          </p:cNvSpPr>
+          <p:nvPr>
+            <p:ph type="sldNum" idx="11"/>
+          </p:nvPr>
+        </p:nvSpPr>
+        <p:spPr/>
+        <p:txBody>
+          <a:bodyPr/>
+          <a:p>
+            <a:fld id="{DB7A5C4B-34EF-4E6E-A03A-F0DCDAB630C7}" type="slidenum">
+              <a:t>&lt;#&gt;</a:t>
+            </a:fld>
+          </a:p>
+        </p:txBody>
+      </p:sp>
+      <p:sp>
+        <p:nvSpPr>
+          <p:cNvPr id="8" name="PlaceHolder 7"/>
+          <p:cNvSpPr>
+            <a:spLocks noGrp="1"/>
+          </p:cNvSpPr>
+          <p:nvPr>
+            <p:ph type="dt" idx="12"/>
+          </p:nvPr>
+        </p:nvSpPr>
+        <p:spPr/>
+        <p:txBody>
+          <a:bodyPr/>
+          <a:p>
+            <a:r>
+              <a:rPr lang="en-US"/>
+              <a:t/>
+            </a:r>
+          </a:p>
+        </p:txBody>
+      </p:sp>
+    </p:spTree>
+  </p:cSld>
+</p:sldLayout>
+</file>
+
+<file path=ppt/slideLayouts/slideLayout58.xml><?xml version="1.0" encoding="utf-8"?>
+<p:sldLayout xmlns:a="http://schemas.openxmlformats.org/drawingml/2006/main" xmlns:p="http://schemas.openxmlformats.org/presentationml/2006/main" xmlns:r="http://schemas.openxmlformats.org/officeDocument/2006/relationships" xmlns:p14="http://schemas.microsoft.com/office/powerpoint/2010/main" xmlns:p15="http://schemas.microsoft.com/office/powerpoint/2012/main" xmlns:mc="http://schemas.openxmlformats.org/markup-compatibility/2006" type="objOverTx" preserve="1">
+  <p:cSld name="Title, Content over Content">
+    <p:spTree>
+      <p:nvGrpSpPr>
+        <p:cNvPr id="1" name=""/>
+        <p:cNvGrpSpPr/>
+        <p:nvPr/>
+      </p:nvGrpSpPr>
+      <p:grpSpPr>
+        <a:xfrm>
+          <a:off x="0" y="0"/>
+          <a:ext cx="0" cy="0"/>
+          <a:chOff x="0" y="0"/>
+          <a:chExt cx="0" cy="0"/>
+        </a:xfrm>
+      </p:grpSpPr>
+      <p:sp>
+        <p:nvSpPr>
+          <p:cNvPr id="187" name="PlaceHolder 1"/>
+          <p:cNvSpPr>
+            <a:spLocks noGrp="1"/>
+          </p:cNvSpPr>
+          <p:nvPr>
+            <p:ph type="title"/>
+          </p:nvPr>
+        </p:nvSpPr>
+        <p:spPr>
+          <a:xfrm>
+            <a:off x="457200" y="273600"/>
+            <a:ext cx="8229240" cy="1144800"/>
+          </a:xfrm>
+          <a:prstGeom prst="rect">
+            <a:avLst/>
+          </a:prstGeom>
+          <a:noFill/>
+          <a:ln w="0">
+            <a:noFill/>
+          </a:ln>
+        </p:spPr>
+        <p:txBody>
+          <a:bodyPr lIns="0" rIns="0" tIns="0" bIns="0" anchor="ctr">
+            <a:noAutofit/>
+          </a:bodyPr>
+          <a:p>
+            <a:pPr indent="0" algn="ctr">
+              <a:buNone/>
+            </a:pPr>
+            <a:endParaRPr b="0" lang="en-US" sz="4400" spc="-1" strike="noStrike">
+              <a:solidFill>
+                <a:srgbClr val="000000"/>
+              </a:solidFill>
+              <a:latin typeface="Arial"/>
+            </a:endParaRPr>
+          </a:p>
+        </p:txBody>
+      </p:sp>
+      <p:sp>
+        <p:nvSpPr>
+          <p:cNvPr id="188" name="PlaceHolder 2"/>
+          <p:cNvSpPr>
+            <a:spLocks noGrp="1"/>
+          </p:cNvSpPr>
+          <p:nvPr>
+            <p:ph/>
+          </p:nvPr>
+        </p:nvSpPr>
+        <p:spPr>
+          <a:xfrm>
+            <a:off x="457200" y="1604520"/>
+            <a:ext cx="8229240" cy="1896840"/>
+          </a:xfrm>
+          <a:prstGeom prst="rect">
+            <a:avLst/>
+          </a:prstGeom>
+          <a:noFill/>
+          <a:ln w="0">
+            <a:noFill/>
+          </a:ln>
+        </p:spPr>
+        <p:txBody>
+          <a:bodyPr lIns="0" rIns="0" tIns="0" bIns="0" anchor="t">
+            <a:normAutofit/>
+          </a:bodyPr>
+          <a:p>
+            <a:pPr indent="0">
+              <a:spcBef>
+                <a:spcPts val="1417"/>
+              </a:spcBef>
+              <a:buNone/>
+            </a:pPr>
+            <a:endParaRPr b="0" lang="en-US" sz="3200" spc="-1" strike="noStrike">
+              <a:solidFill>
+                <a:srgbClr val="000000"/>
+              </a:solidFill>
+              <a:latin typeface="Arial"/>
+            </a:endParaRPr>
+          </a:p>
+        </p:txBody>
+      </p:sp>
+      <p:sp>
+        <p:nvSpPr>
+          <p:cNvPr id="189" name="PlaceHolder 3"/>
+          <p:cNvSpPr>
+            <a:spLocks noGrp="1"/>
+          </p:cNvSpPr>
+          <p:nvPr>
+            <p:ph/>
+          </p:nvPr>
+        </p:nvSpPr>
+        <p:spPr>
+          <a:xfrm>
+            <a:off x="457200" y="3682080"/>
+            <a:ext cx="8229240" cy="1896840"/>
+          </a:xfrm>
+          <a:prstGeom prst="rect">
+            <a:avLst/>
+          </a:prstGeom>
+          <a:noFill/>
+          <a:ln w="0">
+            <a:noFill/>
+          </a:ln>
+        </p:spPr>
+        <p:txBody>
+          <a:bodyPr lIns="0" rIns="0" tIns="0" bIns="0" anchor="t">
+            <a:normAutofit/>
+          </a:bodyPr>
+          <a:p>
+            <a:pPr indent="0">
+              <a:spcBef>
+                <a:spcPts val="1417"/>
+              </a:spcBef>
+              <a:buNone/>
+            </a:pPr>
+            <a:endParaRPr b="0" lang="en-US" sz="3200" spc="-1" strike="noStrike">
+              <a:solidFill>
+                <a:srgbClr val="000000"/>
+              </a:solidFill>
+              <a:latin typeface="Arial"/>
+            </a:endParaRPr>
+          </a:p>
+        </p:txBody>
+      </p:sp>
+      <p:sp>
+        <p:nvSpPr>
+          <p:cNvPr id="5" name="PlaceHolder 4"/>
+          <p:cNvSpPr>
+            <a:spLocks noGrp="1"/>
+          </p:cNvSpPr>
+          <p:nvPr>
+            <p:ph type="ftr" idx="10"/>
+          </p:nvPr>
+        </p:nvSpPr>
+        <p:spPr/>
+        <p:txBody>
+          <a:bodyPr/>
+          <a:p>
+            <a:r>
+              <a:t>Footer</a:t>
+            </a:r>
+          </a:p>
+        </p:txBody>
+      </p:sp>
+      <p:sp>
+        <p:nvSpPr>
+          <p:cNvPr id="6" name="PlaceHolder 5"/>
+          <p:cNvSpPr>
+            <a:spLocks noGrp="1"/>
+          </p:cNvSpPr>
+          <p:nvPr>
+            <p:ph type="sldNum" idx="11"/>
+          </p:nvPr>
+        </p:nvSpPr>
+        <p:spPr/>
+        <p:txBody>
+          <a:bodyPr/>
+          <a:p>
+            <a:fld id="{DF298583-88D2-4A82-8741-3CDA76EC6871}" type="slidenum">
+              <a:t>&lt;#&gt;</a:t>
+            </a:fld>
+          </a:p>
+        </p:txBody>
+      </p:sp>
+      <p:sp>
+        <p:nvSpPr>
+          <p:cNvPr id="7" name="PlaceHolder 6"/>
+          <p:cNvSpPr>
+            <a:spLocks noGrp="1"/>
+          </p:cNvSpPr>
+          <p:nvPr>
+            <p:ph type="dt" idx="12"/>
+          </p:nvPr>
+        </p:nvSpPr>
+        <p:spPr/>
+        <p:txBody>
+          <a:bodyPr/>
+          <a:p>
+            <a:r>
+              <a:rPr lang="en-US"/>
+              <a:t/>
+            </a:r>
+          </a:p>
+        </p:txBody>
+      </p:sp>
+    </p:spTree>
+  </p:cSld>
+</p:sldLayout>
+</file>
+
+<file path=ppt/slideLayouts/slideLayout59.xml><?xml version="1.0" encoding="utf-8"?>
+<p:sldLayout xmlns:a="http://schemas.openxmlformats.org/drawingml/2006/main" xmlns:p="http://schemas.openxmlformats.org/presentationml/2006/main" xmlns:r="http://schemas.openxmlformats.org/officeDocument/2006/relationships" xmlns:p14="http://schemas.microsoft.com/office/powerpoint/2010/main" xmlns:p15="http://schemas.microsoft.com/office/powerpoint/2012/main" xmlns:mc="http://schemas.openxmlformats.org/markup-compatibility/2006" type="fourObj" preserve="1">
+  <p:cSld name="Title, 4 Content">
+    <p:spTree>
+      <p:nvGrpSpPr>
+        <p:cNvPr id="1" name=""/>
+        <p:cNvGrpSpPr/>
+        <p:nvPr/>
+      </p:nvGrpSpPr>
+      <p:grpSpPr>
+        <a:xfrm>
+          <a:off x="0" y="0"/>
+          <a:ext cx="0" cy="0"/>
+          <a:chOff x="0" y="0"/>
+          <a:chExt cx="0" cy="0"/>
+        </a:xfrm>
+      </p:grpSpPr>
+      <p:sp>
+        <p:nvSpPr>
+          <p:cNvPr id="190" name="PlaceHolder 1"/>
+          <p:cNvSpPr>
+            <a:spLocks noGrp="1"/>
+          </p:cNvSpPr>
+          <p:nvPr>
+            <p:ph type="title"/>
+          </p:nvPr>
+        </p:nvSpPr>
+        <p:spPr>
+          <a:xfrm>
+            <a:off x="457200" y="273600"/>
+            <a:ext cx="8229240" cy="1144800"/>
+          </a:xfrm>
+          <a:prstGeom prst="rect">
+            <a:avLst/>
+          </a:prstGeom>
+          <a:noFill/>
+          <a:ln w="0">
+            <a:noFill/>
+          </a:ln>
+        </p:spPr>
+        <p:txBody>
+          <a:bodyPr lIns="0" rIns="0" tIns="0" bIns="0" anchor="ctr">
+            <a:noAutofit/>
+          </a:bodyPr>
+          <a:p>
+            <a:pPr indent="0" algn="ctr">
+              <a:buNone/>
+            </a:pPr>
+            <a:endParaRPr b="0" lang="en-US" sz="4400" spc="-1" strike="noStrike">
+              <a:solidFill>
+                <a:srgbClr val="000000"/>
+              </a:solidFill>
+              <a:latin typeface="Arial"/>
+            </a:endParaRPr>
+          </a:p>
+        </p:txBody>
+      </p:sp>
+      <p:sp>
+        <p:nvSpPr>
+          <p:cNvPr id="191" name="PlaceHolder 2"/>
+          <p:cNvSpPr>
+            <a:spLocks noGrp="1"/>
+          </p:cNvSpPr>
+          <p:nvPr>
+            <p:ph/>
+          </p:nvPr>
+        </p:nvSpPr>
+        <p:spPr>
+          <a:xfrm>
+            <a:off x="457200" y="1604520"/>
+            <a:ext cx="4015800" cy="1896840"/>
+          </a:xfrm>
+          <a:prstGeom prst="rect">
+            <a:avLst/>
+          </a:prstGeom>
+          <a:noFill/>
+          <a:ln w="0">
+            <a:noFill/>
+          </a:ln>
+        </p:spPr>
+        <p:txBody>
+          <a:bodyPr lIns="0" rIns="0" tIns="0" bIns="0" anchor="t">
+            <a:normAutofit/>
+          </a:bodyPr>
+          <a:p>
+            <a:pPr indent="0">
+              <a:spcBef>
+                <a:spcPts val="1417"/>
+              </a:spcBef>
+              <a:buNone/>
+            </a:pPr>
+            <a:endParaRPr b="0" lang="en-US" sz="3200" spc="-1" strike="noStrike">
+              <a:solidFill>
+                <a:srgbClr val="000000"/>
+              </a:solidFill>
+              <a:latin typeface="Arial"/>
+            </a:endParaRPr>
+          </a:p>
+        </p:txBody>
+      </p:sp>
+      <p:sp>
+        <p:nvSpPr>
+          <p:cNvPr id="192" name="PlaceHolder 3"/>
+          <p:cNvSpPr>
+            <a:spLocks noGrp="1"/>
+          </p:cNvSpPr>
+          <p:nvPr>
+            <p:ph/>
+          </p:nvPr>
+        </p:nvSpPr>
+        <p:spPr>
+          <a:xfrm>
+            <a:off x="4674240" y="1604520"/>
+            <a:ext cx="4015800" cy="1896840"/>
+          </a:xfrm>
+          <a:prstGeom prst="rect">
+            <a:avLst/>
+          </a:prstGeom>
+          <a:noFill/>
+          <a:ln w="0">
+            <a:noFill/>
+          </a:ln>
+        </p:spPr>
+        <p:txBody>
+          <a:bodyPr lIns="0" rIns="0" tIns="0" bIns="0" anchor="t">
+            <a:normAutofit/>
+          </a:bodyPr>
+          <a:p>
+            <a:pPr indent="0">
+              <a:spcBef>
+                <a:spcPts val="1417"/>
+              </a:spcBef>
+              <a:buNone/>
+            </a:pPr>
+            <a:endParaRPr b="0" lang="en-US" sz="3200" spc="-1" strike="noStrike">
+              <a:solidFill>
+                <a:srgbClr val="000000"/>
+              </a:solidFill>
+              <a:latin typeface="Arial"/>
+            </a:endParaRPr>
+          </a:p>
+        </p:txBody>
+      </p:sp>
+      <p:sp>
+        <p:nvSpPr>
+          <p:cNvPr id="193" name="PlaceHolder 4"/>
+          <p:cNvSpPr>
+            <a:spLocks noGrp="1"/>
+          </p:cNvSpPr>
+          <p:nvPr>
+            <p:ph/>
+          </p:nvPr>
+        </p:nvSpPr>
+        <p:spPr>
+          <a:xfrm>
+            <a:off x="457200" y="3682080"/>
+            <a:ext cx="4015800" cy="1896840"/>
+          </a:xfrm>
+          <a:prstGeom prst="rect">
+            <a:avLst/>
+          </a:prstGeom>
+          <a:noFill/>
+          <a:ln w="0">
+            <a:noFill/>
+          </a:ln>
+        </p:spPr>
+        <p:txBody>
+          <a:bodyPr lIns="0" rIns="0" tIns="0" bIns="0" anchor="t">
+            <a:normAutofit/>
+          </a:bodyPr>
+          <a:p>
+            <a:pPr indent="0">
+              <a:spcBef>
+                <a:spcPts val="1417"/>
+              </a:spcBef>
+              <a:buNone/>
+            </a:pPr>
+            <a:endParaRPr b="0" lang="en-US" sz="3200" spc="-1" strike="noStrike">
+              <a:solidFill>
+                <a:srgbClr val="000000"/>
+              </a:solidFill>
+              <a:latin typeface="Arial"/>
+            </a:endParaRPr>
+          </a:p>
+        </p:txBody>
+      </p:sp>
+      <p:sp>
+        <p:nvSpPr>
+          <p:cNvPr id="194" name="PlaceHolder 5"/>
+          <p:cNvSpPr>
+            <a:spLocks noGrp="1"/>
+          </p:cNvSpPr>
+          <p:nvPr>
+            <p:ph/>
+          </p:nvPr>
+        </p:nvSpPr>
+        <p:spPr>
+          <a:xfrm>
+            <a:off x="4674240" y="3682080"/>
+            <a:ext cx="4015800" cy="1896840"/>
+          </a:xfrm>
+          <a:prstGeom prst="rect">
+            <a:avLst/>
+          </a:prstGeom>
+          <a:noFill/>
+          <a:ln w="0">
+            <a:noFill/>
+          </a:ln>
+        </p:spPr>
+        <p:txBody>
+          <a:bodyPr lIns="0" rIns="0" tIns="0" bIns="0" anchor="t">
+            <a:normAutofit/>
+          </a:bodyPr>
+          <a:p>
+            <a:pPr indent="0">
+              <a:spcBef>
+                <a:spcPts val="1417"/>
+              </a:spcBef>
+              <a:buNone/>
+            </a:pPr>
+            <a:endParaRPr b="0" lang="en-US" sz="3200" spc="-1" strike="noStrike">
+              <a:solidFill>
+                <a:srgbClr val="000000"/>
+              </a:solidFill>
+              <a:latin typeface="Arial"/>
+            </a:endParaRPr>
+          </a:p>
+        </p:txBody>
+      </p:sp>
+      <p:sp>
+        <p:nvSpPr>
+          <p:cNvPr id="7" name="PlaceHolder 6"/>
+          <p:cNvSpPr>
+            <a:spLocks noGrp="1"/>
+          </p:cNvSpPr>
+          <p:nvPr>
+            <p:ph type="ftr" idx="10"/>
+          </p:nvPr>
+        </p:nvSpPr>
+        <p:spPr/>
+        <p:txBody>
+          <a:bodyPr/>
+          <a:p>
+            <a:r>
+              <a:t>Footer</a:t>
+            </a:r>
+          </a:p>
+        </p:txBody>
+      </p:sp>
+      <p:sp>
+        <p:nvSpPr>
+          <p:cNvPr id="8" name="PlaceHolder 7"/>
+          <p:cNvSpPr>
+            <a:spLocks noGrp="1"/>
+          </p:cNvSpPr>
+          <p:nvPr>
+            <p:ph type="sldNum" idx="11"/>
+          </p:nvPr>
+        </p:nvSpPr>
+        <p:spPr/>
+        <p:txBody>
+          <a:bodyPr/>
+          <a:p>
+            <a:fld id="{9D8B1598-A87E-4D35-8B4C-B7783F1ED6A2}" type="slidenum">
+              <a:t>&lt;#&gt;</a:t>
+            </a:fld>
+          </a:p>
+        </p:txBody>
+      </p:sp>
+      <p:sp>
+        <p:nvSpPr>
+          <p:cNvPr id="9" name="PlaceHolder 8"/>
+          <p:cNvSpPr>
+            <a:spLocks noGrp="1"/>
+          </p:cNvSpPr>
+          <p:nvPr>
+            <p:ph type="dt" idx="12"/>
           </p:nvPr>
         </p:nvSpPr>
         <p:spPr/>
@@ -8525,7 +10652,7 @@
         <p:txBody>
           <a:bodyPr/>
           <a:p>
-            <a:fld id="{EF148AB7-B635-48E3-A0E8-DD506AEEBF21}" type="slidenum">
+            <a:fld id="{FFA8BC90-DA87-4439-9206-6F6E1670679E}" type="slidenum">
               <a:t>&lt;#&gt;</a:t>
             </a:fld>
           </a:p>
@@ -8539,6 +10666,387 @@
           </p:cNvSpPr>
           <p:nvPr>
             <p:ph type="dt" idx="3"/>
+          </p:nvPr>
+        </p:nvSpPr>
+        <p:spPr/>
+        <p:txBody>
+          <a:bodyPr/>
+          <a:p>
+            <a:r>
+              <a:rPr lang="en-US"/>
+              <a:t/>
+            </a:r>
+          </a:p>
+        </p:txBody>
+      </p:sp>
+    </p:spTree>
+  </p:cSld>
+</p:sldLayout>
+</file>
+
+<file path=ppt/slideLayouts/slideLayout60.xml><?xml version="1.0" encoding="utf-8"?>
+<p:sldLayout xmlns:a="http://schemas.openxmlformats.org/drawingml/2006/main" xmlns:p="http://schemas.openxmlformats.org/presentationml/2006/main" xmlns:r="http://schemas.openxmlformats.org/officeDocument/2006/relationships" xmlns:p14="http://schemas.microsoft.com/office/powerpoint/2010/main" xmlns:p15="http://schemas.microsoft.com/office/powerpoint/2012/main" xmlns:mc="http://schemas.openxmlformats.org/markup-compatibility/2006" type="blank" preserve="1">
+  <p:cSld name="Title, 6 Content">
+    <p:spTree>
+      <p:nvGrpSpPr>
+        <p:cNvPr id="1" name=""/>
+        <p:cNvGrpSpPr/>
+        <p:nvPr/>
+      </p:nvGrpSpPr>
+      <p:grpSpPr>
+        <a:xfrm>
+          <a:off x="0" y="0"/>
+          <a:ext cx="0" cy="0"/>
+          <a:chOff x="0" y="0"/>
+          <a:chExt cx="0" cy="0"/>
+        </a:xfrm>
+      </p:grpSpPr>
+      <p:sp>
+        <p:nvSpPr>
+          <p:cNvPr id="195" name="PlaceHolder 1"/>
+          <p:cNvSpPr>
+            <a:spLocks noGrp="1"/>
+          </p:cNvSpPr>
+          <p:nvPr>
+            <p:ph type="title"/>
+          </p:nvPr>
+        </p:nvSpPr>
+        <p:spPr>
+          <a:xfrm>
+            <a:off x="457200" y="273600"/>
+            <a:ext cx="8229240" cy="1144800"/>
+          </a:xfrm>
+          <a:prstGeom prst="rect">
+            <a:avLst/>
+          </a:prstGeom>
+          <a:noFill/>
+          <a:ln w="0">
+            <a:noFill/>
+          </a:ln>
+        </p:spPr>
+        <p:txBody>
+          <a:bodyPr lIns="0" rIns="0" tIns="0" bIns="0" anchor="ctr">
+            <a:noAutofit/>
+          </a:bodyPr>
+          <a:p>
+            <a:pPr indent="0" algn="ctr">
+              <a:buNone/>
+            </a:pPr>
+            <a:endParaRPr b="0" lang="en-US" sz="4400" spc="-1" strike="noStrike">
+              <a:solidFill>
+                <a:srgbClr val="000000"/>
+              </a:solidFill>
+              <a:latin typeface="Arial"/>
+            </a:endParaRPr>
+          </a:p>
+        </p:txBody>
+      </p:sp>
+      <p:sp>
+        <p:nvSpPr>
+          <p:cNvPr id="196" name="PlaceHolder 2"/>
+          <p:cNvSpPr>
+            <a:spLocks noGrp="1"/>
+          </p:cNvSpPr>
+          <p:nvPr>
+            <p:ph/>
+          </p:nvPr>
+        </p:nvSpPr>
+        <p:spPr>
+          <a:xfrm>
+            <a:off x="457200" y="1604520"/>
+            <a:ext cx="2649600" cy="1896840"/>
+          </a:xfrm>
+          <a:prstGeom prst="rect">
+            <a:avLst/>
+          </a:prstGeom>
+          <a:noFill/>
+          <a:ln w="0">
+            <a:noFill/>
+          </a:ln>
+        </p:spPr>
+        <p:txBody>
+          <a:bodyPr lIns="0" rIns="0" tIns="0" bIns="0" anchor="t">
+            <a:normAutofit/>
+          </a:bodyPr>
+          <a:p>
+            <a:pPr indent="0">
+              <a:spcBef>
+                <a:spcPts val="1417"/>
+              </a:spcBef>
+              <a:buNone/>
+            </a:pPr>
+            <a:endParaRPr b="0" lang="en-US" sz="3200" spc="-1" strike="noStrike">
+              <a:solidFill>
+                <a:srgbClr val="000000"/>
+              </a:solidFill>
+              <a:latin typeface="Arial"/>
+            </a:endParaRPr>
+          </a:p>
+        </p:txBody>
+      </p:sp>
+      <p:sp>
+        <p:nvSpPr>
+          <p:cNvPr id="197" name="PlaceHolder 3"/>
+          <p:cNvSpPr>
+            <a:spLocks noGrp="1"/>
+          </p:cNvSpPr>
+          <p:nvPr>
+            <p:ph/>
+          </p:nvPr>
+        </p:nvSpPr>
+        <p:spPr>
+          <a:xfrm>
+            <a:off x="3239640" y="1604520"/>
+            <a:ext cx="2649600" cy="1896840"/>
+          </a:xfrm>
+          <a:prstGeom prst="rect">
+            <a:avLst/>
+          </a:prstGeom>
+          <a:noFill/>
+          <a:ln w="0">
+            <a:noFill/>
+          </a:ln>
+        </p:spPr>
+        <p:txBody>
+          <a:bodyPr lIns="0" rIns="0" tIns="0" bIns="0" anchor="t">
+            <a:normAutofit/>
+          </a:bodyPr>
+          <a:p>
+            <a:pPr indent="0">
+              <a:spcBef>
+                <a:spcPts val="1417"/>
+              </a:spcBef>
+              <a:buNone/>
+            </a:pPr>
+            <a:endParaRPr b="0" lang="en-US" sz="3200" spc="-1" strike="noStrike">
+              <a:solidFill>
+                <a:srgbClr val="000000"/>
+              </a:solidFill>
+              <a:latin typeface="Arial"/>
+            </a:endParaRPr>
+          </a:p>
+        </p:txBody>
+      </p:sp>
+      <p:sp>
+        <p:nvSpPr>
+          <p:cNvPr id="198" name="PlaceHolder 4"/>
+          <p:cNvSpPr>
+            <a:spLocks noGrp="1"/>
+          </p:cNvSpPr>
+          <p:nvPr>
+            <p:ph/>
+          </p:nvPr>
+        </p:nvSpPr>
+        <p:spPr>
+          <a:xfrm>
+            <a:off x="6022080" y="1604520"/>
+            <a:ext cx="2649600" cy="1896840"/>
+          </a:xfrm>
+          <a:prstGeom prst="rect">
+            <a:avLst/>
+          </a:prstGeom>
+          <a:noFill/>
+          <a:ln w="0">
+            <a:noFill/>
+          </a:ln>
+        </p:spPr>
+        <p:txBody>
+          <a:bodyPr lIns="0" rIns="0" tIns="0" bIns="0" anchor="t">
+            <a:normAutofit/>
+          </a:bodyPr>
+          <a:p>
+            <a:pPr indent="0">
+              <a:spcBef>
+                <a:spcPts val="1417"/>
+              </a:spcBef>
+              <a:buNone/>
+            </a:pPr>
+            <a:endParaRPr b="0" lang="en-US" sz="3200" spc="-1" strike="noStrike">
+              <a:solidFill>
+                <a:srgbClr val="000000"/>
+              </a:solidFill>
+              <a:latin typeface="Arial"/>
+            </a:endParaRPr>
+          </a:p>
+        </p:txBody>
+      </p:sp>
+      <p:sp>
+        <p:nvSpPr>
+          <p:cNvPr id="199" name="PlaceHolder 5"/>
+          <p:cNvSpPr>
+            <a:spLocks noGrp="1"/>
+          </p:cNvSpPr>
+          <p:nvPr>
+            <p:ph/>
+          </p:nvPr>
+        </p:nvSpPr>
+        <p:spPr>
+          <a:xfrm>
+            <a:off x="457200" y="3682080"/>
+            <a:ext cx="2649600" cy="1896840"/>
+          </a:xfrm>
+          <a:prstGeom prst="rect">
+            <a:avLst/>
+          </a:prstGeom>
+          <a:noFill/>
+          <a:ln w="0">
+            <a:noFill/>
+          </a:ln>
+        </p:spPr>
+        <p:txBody>
+          <a:bodyPr lIns="0" rIns="0" tIns="0" bIns="0" anchor="t">
+            <a:normAutofit/>
+          </a:bodyPr>
+          <a:p>
+            <a:pPr indent="0">
+              <a:spcBef>
+                <a:spcPts val="1417"/>
+              </a:spcBef>
+              <a:buNone/>
+            </a:pPr>
+            <a:endParaRPr b="0" lang="en-US" sz="3200" spc="-1" strike="noStrike">
+              <a:solidFill>
+                <a:srgbClr val="000000"/>
+              </a:solidFill>
+              <a:latin typeface="Arial"/>
+            </a:endParaRPr>
+          </a:p>
+        </p:txBody>
+      </p:sp>
+      <p:sp>
+        <p:nvSpPr>
+          <p:cNvPr id="200" name="PlaceHolder 6"/>
+          <p:cNvSpPr>
+            <a:spLocks noGrp="1"/>
+          </p:cNvSpPr>
+          <p:nvPr>
+            <p:ph/>
+          </p:nvPr>
+        </p:nvSpPr>
+        <p:spPr>
+          <a:xfrm>
+            <a:off x="3239640" y="3682080"/>
+            <a:ext cx="2649600" cy="1896840"/>
+          </a:xfrm>
+          <a:prstGeom prst="rect">
+            <a:avLst/>
+          </a:prstGeom>
+          <a:noFill/>
+          <a:ln w="0">
+            <a:noFill/>
+          </a:ln>
+        </p:spPr>
+        <p:txBody>
+          <a:bodyPr lIns="0" rIns="0" tIns="0" bIns="0" anchor="t">
+            <a:normAutofit/>
+          </a:bodyPr>
+          <a:p>
+            <a:pPr indent="0">
+              <a:spcBef>
+                <a:spcPts val="1417"/>
+              </a:spcBef>
+              <a:buNone/>
+            </a:pPr>
+            <a:endParaRPr b="0" lang="en-US" sz="3200" spc="-1" strike="noStrike">
+              <a:solidFill>
+                <a:srgbClr val="000000"/>
+              </a:solidFill>
+              <a:latin typeface="Arial"/>
+            </a:endParaRPr>
+          </a:p>
+        </p:txBody>
+      </p:sp>
+      <p:sp>
+        <p:nvSpPr>
+          <p:cNvPr id="201" name="PlaceHolder 7"/>
+          <p:cNvSpPr>
+            <a:spLocks noGrp="1"/>
+          </p:cNvSpPr>
+          <p:nvPr>
+            <p:ph/>
+          </p:nvPr>
+        </p:nvSpPr>
+        <p:spPr>
+          <a:xfrm>
+            <a:off x="6022080" y="3682080"/>
+            <a:ext cx="2649600" cy="1896840"/>
+          </a:xfrm>
+          <a:prstGeom prst="rect">
+            <a:avLst/>
+          </a:prstGeom>
+          <a:noFill/>
+          <a:ln w="0">
+            <a:noFill/>
+          </a:ln>
+        </p:spPr>
+        <p:txBody>
+          <a:bodyPr lIns="0" rIns="0" tIns="0" bIns="0" anchor="t">
+            <a:normAutofit/>
+          </a:bodyPr>
+          <a:p>
+            <a:pPr indent="0">
+              <a:spcBef>
+                <a:spcPts val="1417"/>
+              </a:spcBef>
+              <a:buNone/>
+            </a:pPr>
+            <a:endParaRPr b="0" lang="en-US" sz="3200" spc="-1" strike="noStrike">
+              <a:solidFill>
+                <a:srgbClr val="000000"/>
+              </a:solidFill>
+              <a:latin typeface="Arial"/>
+            </a:endParaRPr>
+          </a:p>
+        </p:txBody>
+      </p:sp>
+      <p:sp>
+        <p:nvSpPr>
+          <p:cNvPr id="9" name="PlaceHolder 8"/>
+          <p:cNvSpPr>
+            <a:spLocks noGrp="1"/>
+          </p:cNvSpPr>
+          <p:nvPr>
+            <p:ph type="ftr" idx="10"/>
+          </p:nvPr>
+        </p:nvSpPr>
+        <p:spPr/>
+        <p:txBody>
+          <a:bodyPr/>
+          <a:p>
+            <a:r>
+              <a:t>Footer</a:t>
+            </a:r>
+          </a:p>
+        </p:txBody>
+      </p:sp>
+      <p:sp>
+        <p:nvSpPr>
+          <p:cNvPr id="10" name="PlaceHolder 9"/>
+          <p:cNvSpPr>
+            <a:spLocks noGrp="1"/>
+          </p:cNvSpPr>
+          <p:nvPr>
+            <p:ph type="sldNum" idx="11"/>
+          </p:nvPr>
+        </p:nvSpPr>
+        <p:spPr/>
+        <p:txBody>
+          <a:bodyPr/>
+          <a:p>
+            <a:fld id="{F86E381B-6920-4C3A-B1EB-DED03B95BCDF}" type="slidenum">
+              <a:t>&lt;#&gt;</a:t>
+            </a:fld>
+          </a:p>
+        </p:txBody>
+      </p:sp>
+      <p:sp>
+        <p:nvSpPr>
+          <p:cNvPr id="11" name="PlaceHolder 10"/>
+          <p:cNvSpPr>
+            <a:spLocks noGrp="1"/>
+          </p:cNvSpPr>
+          <p:nvPr>
+            <p:ph type="dt" idx="12"/>
           </p:nvPr>
         </p:nvSpPr>
         <p:spPr/>
@@ -8777,7 +11285,7 @@
         <p:txBody>
           <a:bodyPr/>
           <a:p>
-            <a:fld id="{6DF02DB2-5F2F-4B59-98FA-1B1F75B0EDC3}" type="slidenum">
+            <a:fld id="{F7D82CCF-7E95-45C6-B85D-360D828A0B56}" type="slidenum">
               <a:t>&lt;#&gt;</a:t>
             </a:fld>
           </a:p>
@@ -9029,7 +11537,7 @@
         <p:txBody>
           <a:bodyPr/>
           <a:p>
-            <a:fld id="{0933356F-F581-4C6B-A176-C91D0B622E04}" type="slidenum">
+            <a:fld id="{53CCC746-50E8-4295-A004-D8F8B8C55D09}" type="slidenum">
               <a:t>&lt;#&gt;</a:t>
             </a:fld>
           </a:p>
@@ -9281,7 +11789,7 @@
         <p:txBody>
           <a:bodyPr/>
           <a:p>
-            <a:fld id="{5585197C-1903-45F3-8022-F3D6619B2290}" type="slidenum">
+            <a:fld id="{145709BA-67A8-4001-B239-3FBE5B67A8A9}" type="slidenum">
               <a:t>&lt;#&gt;</a:t>
             </a:fld>
           </a:p>
@@ -9350,7 +11858,7 @@
         <p:spPr>
           <a:xfrm>
             <a:off x="3124080" y="6356520"/>
-            <a:ext cx="2892960" cy="362520"/>
+            <a:ext cx="2892600" cy="362160"/>
           </a:xfrm>
           <a:prstGeom prst="rect">
             <a:avLst/>
@@ -9422,7 +11930,7 @@
         <p:spPr>
           <a:xfrm>
             <a:off x="6553080" y="6356520"/>
-            <a:ext cx="2131200" cy="362520"/>
+            <a:ext cx="2130840" cy="362160"/>
           </a:xfrm>
           <a:prstGeom prst="rect">
             <a:avLst/>
@@ -9463,7 +11971,7 @@
                 <a:tab algn="l" pos="0"/>
               </a:tabLst>
             </a:pPr>
-            <a:fld id="{EA487D4D-8FC8-4C3C-B666-4AC78973E9DB}" type="slidenum">
+            <a:fld id="{6C7079D2-1C3F-4C50-A091-616245002A45}" type="slidenum">
               <a:rPr b="0" lang="en-US" sz="1200" spc="-1" strike="noStrike">
                 <a:solidFill>
                   <a:srgbClr val="8b8b8b"/>
@@ -9494,7 +12002,7 @@
         <p:spPr>
           <a:xfrm>
             <a:off x="457200" y="6356520"/>
-            <a:ext cx="2131200" cy="362520"/>
+            <a:ext cx="2130840" cy="362160"/>
           </a:xfrm>
           <a:prstGeom prst="rect">
             <a:avLst/>
@@ -10190,7 +12698,7 @@
         <p:spPr>
           <a:xfrm>
             <a:off x="3124080" y="6356520"/>
-            <a:ext cx="2893680" cy="363240"/>
+            <a:ext cx="2893320" cy="362880"/>
           </a:xfrm>
           <a:prstGeom prst="rect">
             <a:avLst/>
@@ -10262,7 +12770,7 @@
         <p:spPr>
           <a:xfrm>
             <a:off x="6553080" y="6356520"/>
-            <a:ext cx="2131920" cy="363240"/>
+            <a:ext cx="2131560" cy="362880"/>
           </a:xfrm>
           <a:prstGeom prst="rect">
             <a:avLst/>
@@ -10303,7 +12811,7 @@
                 <a:tab algn="l" pos="0"/>
               </a:tabLst>
             </a:pPr>
-            <a:fld id="{D6C588A2-3C40-44BB-8C56-92129942E96F}" type="slidenum">
+            <a:fld id="{B7AEA8ED-2824-4864-98A6-7AE54AD9342D}" type="slidenum">
               <a:rPr b="0" lang="en-US" sz="1200" spc="-1" strike="noStrike">
                 <a:solidFill>
                   <a:srgbClr val="8b8b8b"/>
@@ -10334,7 +12842,7 @@
         <p:spPr>
           <a:xfrm>
             <a:off x="457200" y="6356520"/>
-            <a:ext cx="2131920" cy="363240"/>
+            <a:ext cx="2131560" cy="362880"/>
           </a:xfrm>
           <a:prstGeom prst="rect">
             <a:avLst/>
@@ -10712,7 +13220,7 @@
         <p:spPr>
           <a:xfrm>
             <a:off x="3124080" y="6356520"/>
-            <a:ext cx="2893680" cy="363240"/>
+            <a:ext cx="2893320" cy="362880"/>
           </a:xfrm>
           <a:prstGeom prst="rect">
             <a:avLst/>
@@ -10784,7 +13292,7 @@
         <p:spPr>
           <a:xfrm>
             <a:off x="6553080" y="6356520"/>
-            <a:ext cx="2131920" cy="363240"/>
+            <a:ext cx="2131560" cy="362880"/>
           </a:xfrm>
           <a:prstGeom prst="rect">
             <a:avLst/>
@@ -10825,7 +13333,7 @@
                 <a:tab algn="l" pos="0"/>
               </a:tabLst>
             </a:pPr>
-            <a:fld id="{525F7A22-AC8D-4D6F-997A-909A8152EDAF}" type="slidenum">
+            <a:fld id="{417B2354-4BDC-4850-A1C1-5ABE482FD8D8}" type="slidenum">
               <a:rPr b="0" lang="en-US" sz="1200" spc="-1" strike="noStrike">
                 <a:solidFill>
                   <a:srgbClr val="8b8b8b"/>
@@ -10856,7 +13364,7 @@
         <p:spPr>
           <a:xfrm>
             <a:off x="457200" y="6356520"/>
-            <a:ext cx="2131920" cy="363240"/>
+            <a:ext cx="2131560" cy="362880"/>
           </a:xfrm>
           <a:prstGeom prst="rect">
             <a:avLst/>
@@ -11193,6 +13701,528 @@
     <p:sldLayoutId id="2147483697" r:id="rId11"/>
     <p:sldLayoutId id="2147483698" r:id="rId12"/>
     <p:sldLayoutId id="2147483699" r:id="rId13"/>
+  </p:sldLayoutIdLst>
+</p:sldMaster>
+</file>
+
+<file path=ppt/slideMasters/slideMaster5.xml><?xml version="1.0" encoding="utf-8"?>
+<p:sldMaster xmlns:a="http://schemas.openxmlformats.org/drawingml/2006/main" xmlns:p="http://schemas.openxmlformats.org/presentationml/2006/main" xmlns:r="http://schemas.openxmlformats.org/officeDocument/2006/relationships" xmlns:p14="http://schemas.microsoft.com/office/powerpoint/2010/main" xmlns:p15="http://schemas.microsoft.com/office/powerpoint/2012/main" xmlns:mc="http://schemas.openxmlformats.org/markup-compatibility/2006">
+  <p:cSld>
+    <p:bg>
+      <p:bgPr>
+        <a:solidFill>
+          <a:srgbClr val="ffffff"/>
+        </a:solidFill>
+      </p:bgPr>
+    </p:bg>
+    <p:spTree>
+      <p:nvGrpSpPr>
+        <p:cNvPr id="1" name=""/>
+        <p:cNvGrpSpPr/>
+        <p:nvPr/>
+      </p:nvGrpSpPr>
+      <p:grpSpPr>
+        <a:xfrm>
+          <a:off x="0" y="0"/>
+          <a:ext cx="0" cy="0"/>
+          <a:chOff x="0" y="0"/>
+          <a:chExt cx="0" cy="0"/>
+        </a:xfrm>
+      </p:grpSpPr>
+      <p:sp>
+        <p:nvSpPr>
+          <p:cNvPr id="161" name="PlaceHolder 1"/>
+          <p:cNvSpPr>
+            <a:spLocks noGrp="1"/>
+          </p:cNvSpPr>
+          <p:nvPr>
+            <p:ph type="ftr" idx="10"/>
+          </p:nvPr>
+        </p:nvSpPr>
+        <p:spPr>
+          <a:xfrm>
+            <a:off x="3124080" y="6356520"/>
+            <a:ext cx="2894400" cy="363960"/>
+          </a:xfrm>
+          <a:prstGeom prst="rect">
+            <a:avLst/>
+          </a:prstGeom>
+          <a:noFill/>
+          <a:ln w="0">
+            <a:noFill/>
+          </a:ln>
+        </p:spPr>
+        <p:txBody>
+          <a:bodyPr lIns="90000" rIns="90000" tIns="45000" bIns="45000" anchor="ctr">
+            <a:noAutofit/>
+          </a:bodyPr>
+          <a:lstStyle>
+            <a:lvl1pPr indent="0" algn="ctr">
+              <a:lnSpc>
+                <a:spcPct val="100000"/>
+              </a:lnSpc>
+              <a:buNone/>
+              <a:tabLst>
+                <a:tab algn="l" pos="0"/>
+              </a:tabLst>
+              <a:defRPr b="0" lang="en-US" sz="1400" spc="-1" strike="noStrike">
+                <a:solidFill>
+                  <a:srgbClr val="000000"/>
+                </a:solidFill>
+                <a:latin typeface="Times New Roman"/>
+              </a:defRPr>
+            </a:lvl1pPr>
+          </a:lstStyle>
+          <a:p>
+            <a:pPr indent="0" algn="ctr">
+              <a:lnSpc>
+                <a:spcPct val="100000"/>
+              </a:lnSpc>
+              <a:buNone/>
+              <a:tabLst>
+                <a:tab algn="l" pos="0"/>
+              </a:tabLst>
+            </a:pPr>
+            <a:r>
+              <a:rPr b="0" lang="en-US" sz="1400" spc="-1" strike="noStrike">
+                <a:solidFill>
+                  <a:srgbClr val="000000"/>
+                </a:solidFill>
+                <a:latin typeface="Times New Roman"/>
+              </a:rPr>
+              <a:t>&lt;footer&gt;</a:t>
+            </a:r>
+            <a:endParaRPr b="0" lang="en-US" sz="1400" spc="-1" strike="noStrike">
+              <a:solidFill>
+                <a:srgbClr val="000000"/>
+              </a:solidFill>
+              <a:latin typeface="Times New Roman"/>
+            </a:endParaRPr>
+          </a:p>
+        </p:txBody>
+      </p:sp>
+      <p:sp>
+        <p:nvSpPr>
+          <p:cNvPr id="162" name="PlaceHolder 2"/>
+          <p:cNvSpPr>
+            <a:spLocks noGrp="1"/>
+          </p:cNvSpPr>
+          <p:nvPr>
+            <p:ph type="sldNum" idx="11"/>
+          </p:nvPr>
+        </p:nvSpPr>
+        <p:spPr>
+          <a:xfrm>
+            <a:off x="6553080" y="6356520"/>
+            <a:ext cx="2132640" cy="363960"/>
+          </a:xfrm>
+          <a:prstGeom prst="rect">
+            <a:avLst/>
+          </a:prstGeom>
+          <a:noFill/>
+          <a:ln w="0">
+            <a:noFill/>
+          </a:ln>
+        </p:spPr>
+        <p:txBody>
+          <a:bodyPr lIns="90000" rIns="90000" tIns="45000" bIns="45000" anchor="ctr">
+            <a:noAutofit/>
+          </a:bodyPr>
+          <a:lstStyle>
+            <a:lvl1pPr indent="0" algn="r">
+              <a:lnSpc>
+                <a:spcPct val="100000"/>
+              </a:lnSpc>
+              <a:buNone/>
+              <a:tabLst>
+                <a:tab algn="l" pos="0"/>
+              </a:tabLst>
+              <a:defRPr b="0" lang="en-US" sz="1200" spc="-1" strike="noStrike">
+                <a:solidFill>
+                  <a:srgbClr val="8b8b8b"/>
+                </a:solidFill>
+                <a:latin typeface="Calibri"/>
+              </a:defRPr>
+            </a:lvl1pPr>
+          </a:lstStyle>
+          <a:p>
+            <a:pPr indent="0" algn="r">
+              <a:lnSpc>
+                <a:spcPct val="100000"/>
+              </a:lnSpc>
+              <a:buNone/>
+              <a:tabLst>
+                <a:tab algn="l" pos="0"/>
+              </a:tabLst>
+            </a:pPr>
+            <a:fld id="{107DF149-796C-4740-828A-7EE0DCAE27F7}" type="slidenum">
+              <a:rPr b="0" lang="en-US" sz="1200" spc="-1" strike="noStrike">
+                <a:solidFill>
+                  <a:srgbClr val="8b8b8b"/>
+                </a:solidFill>
+                <a:latin typeface="Calibri"/>
+              </a:rPr>
+              <a:t>&lt;number&gt;</a:t>
+            </a:fld>
+            <a:endParaRPr b="0" lang="en-US" sz="1200" spc="-1" strike="noStrike">
+              <a:solidFill>
+                <a:srgbClr val="000000"/>
+              </a:solidFill>
+              <a:latin typeface="Times New Roman"/>
+            </a:endParaRPr>
+          </a:p>
+        </p:txBody>
+      </p:sp>
+      <p:sp>
+        <p:nvSpPr>
+          <p:cNvPr id="163" name="PlaceHolder 3"/>
+          <p:cNvSpPr>
+            <a:spLocks noGrp="1"/>
+          </p:cNvSpPr>
+          <p:nvPr>
+            <p:ph type="dt" idx="12"/>
+          </p:nvPr>
+        </p:nvSpPr>
+        <p:spPr>
+          <a:xfrm>
+            <a:off x="457200" y="6356520"/>
+            <a:ext cx="2132640" cy="363960"/>
+          </a:xfrm>
+          <a:prstGeom prst="rect">
+            <a:avLst/>
+          </a:prstGeom>
+          <a:noFill/>
+          <a:ln w="0">
+            <a:noFill/>
+          </a:ln>
+        </p:spPr>
+        <p:txBody>
+          <a:bodyPr lIns="90000" rIns="90000" tIns="45000" bIns="45000" anchor="ctr">
+            <a:noAutofit/>
+          </a:bodyPr>
+          <a:lstStyle>
+            <a:lvl1pPr indent="0">
+              <a:buNone/>
+              <a:defRPr b="0" lang="en-US" sz="1400" spc="-1" strike="noStrike">
+                <a:solidFill>
+                  <a:srgbClr val="000000"/>
+                </a:solidFill>
+                <a:latin typeface="Times New Roman"/>
+              </a:defRPr>
+            </a:lvl1pPr>
+          </a:lstStyle>
+          <a:p>
+            <a:pPr indent="0">
+              <a:buNone/>
+            </a:pPr>
+            <a:r>
+              <a:rPr b="0" lang="en-US" sz="1400" spc="-1" strike="noStrike">
+                <a:solidFill>
+                  <a:srgbClr val="000000"/>
+                </a:solidFill>
+                <a:latin typeface="Times New Roman"/>
+              </a:rPr>
+              <a:t>&lt;date/time&gt;</a:t>
+            </a:r>
+            <a:endParaRPr b="0" lang="en-US" sz="1400" spc="-1" strike="noStrike">
+              <a:solidFill>
+                <a:srgbClr val="000000"/>
+              </a:solidFill>
+              <a:latin typeface="Times New Roman"/>
+            </a:endParaRPr>
+          </a:p>
+        </p:txBody>
+      </p:sp>
+      <p:sp>
+        <p:nvSpPr>
+          <p:cNvPr id="164" name="PlaceHolder 4"/>
+          <p:cNvSpPr>
+            <a:spLocks noGrp="1"/>
+          </p:cNvSpPr>
+          <p:nvPr>
+            <p:ph type="title"/>
+          </p:nvPr>
+        </p:nvSpPr>
+        <p:spPr>
+          <a:xfrm>
+            <a:off x="457200" y="273600"/>
+            <a:ext cx="8229240" cy="1144800"/>
+          </a:xfrm>
+          <a:prstGeom prst="rect">
+            <a:avLst/>
+          </a:prstGeom>
+          <a:noFill/>
+          <a:ln w="0">
+            <a:noFill/>
+          </a:ln>
+        </p:spPr>
+        <p:txBody>
+          <a:bodyPr lIns="0" rIns="0" tIns="0" bIns="0" anchor="ctr">
+            <a:noAutofit/>
+          </a:bodyPr>
+          <a:p>
+            <a:pPr indent="0" algn="ctr">
+              <a:buNone/>
+            </a:pPr>
+            <a:r>
+              <a:rPr b="0" lang="en-US" sz="4400" spc="-1" strike="noStrike">
+                <a:solidFill>
+                  <a:srgbClr val="000000"/>
+                </a:solidFill>
+                <a:latin typeface="Arial"/>
+              </a:rPr>
+              <a:t>Click to edit the title text format</a:t>
+            </a:r>
+            <a:endParaRPr b="0" lang="en-US" sz="4400" spc="-1" strike="noStrike">
+              <a:solidFill>
+                <a:srgbClr val="000000"/>
+              </a:solidFill>
+              <a:latin typeface="Arial"/>
+            </a:endParaRPr>
+          </a:p>
+        </p:txBody>
+      </p:sp>
+      <p:sp>
+        <p:nvSpPr>
+          <p:cNvPr id="165" name="PlaceHolder 5"/>
+          <p:cNvSpPr>
+            <a:spLocks noGrp="1"/>
+          </p:cNvSpPr>
+          <p:nvPr>
+            <p:ph type="body"/>
+          </p:nvPr>
+        </p:nvSpPr>
+        <p:spPr>
+          <a:xfrm>
+            <a:off x="457200" y="1604520"/>
+            <a:ext cx="8229240" cy="3977280"/>
+          </a:xfrm>
+          <a:prstGeom prst="rect">
+            <a:avLst/>
+          </a:prstGeom>
+          <a:noFill/>
+          <a:ln w="0">
+            <a:noFill/>
+          </a:ln>
+        </p:spPr>
+        <p:txBody>
+          <a:bodyPr lIns="0" rIns="0" tIns="0" bIns="0" anchor="t">
+            <a:normAutofit/>
+          </a:bodyPr>
+          <a:p>
+            <a:pPr marL="432000" indent="-324000">
+              <a:spcBef>
+                <a:spcPts val="1417"/>
+              </a:spcBef>
+              <a:buClr>
+                <a:srgbClr val="000000"/>
+              </a:buClr>
+              <a:buSzPct val="45000"/>
+              <a:buFont typeface="Wingdings" charset="2"/>
+              <a:buChar char=""/>
+            </a:pPr>
+            <a:r>
+              <a:rPr b="0" lang="en-US" sz="3200" spc="-1" strike="noStrike">
+                <a:solidFill>
+                  <a:srgbClr val="000000"/>
+                </a:solidFill>
+                <a:latin typeface="Arial"/>
+              </a:rPr>
+              <a:t>Click to edit the outline text format</a:t>
+            </a:r>
+            <a:endParaRPr b="0" lang="en-US" sz="3200" spc="-1" strike="noStrike">
+              <a:solidFill>
+                <a:srgbClr val="000000"/>
+              </a:solidFill>
+              <a:latin typeface="Arial"/>
+            </a:endParaRPr>
+          </a:p>
+          <a:p>
+            <a:pPr lvl="1" marL="864000" indent="-324000">
+              <a:spcBef>
+                <a:spcPts val="1134"/>
+              </a:spcBef>
+              <a:buClr>
+                <a:srgbClr val="000000"/>
+              </a:buClr>
+              <a:buSzPct val="75000"/>
+              <a:buFont typeface="Symbol" charset="2"/>
+              <a:buChar char=""/>
+            </a:pPr>
+            <a:r>
+              <a:rPr b="0" lang="en-US" sz="2800" spc="-1" strike="noStrike">
+                <a:solidFill>
+                  <a:srgbClr val="000000"/>
+                </a:solidFill>
+                <a:latin typeface="Arial"/>
+              </a:rPr>
+              <a:t>Second Outline Level</a:t>
+            </a:r>
+            <a:endParaRPr b="0" lang="en-US" sz="2800" spc="-1" strike="noStrike">
+              <a:solidFill>
+                <a:srgbClr val="000000"/>
+              </a:solidFill>
+              <a:latin typeface="Arial"/>
+            </a:endParaRPr>
+          </a:p>
+          <a:p>
+            <a:pPr lvl="2" marL="1296000" indent="-288000">
+              <a:spcBef>
+                <a:spcPts val="850"/>
+              </a:spcBef>
+              <a:buClr>
+                <a:srgbClr val="000000"/>
+              </a:buClr>
+              <a:buSzPct val="45000"/>
+              <a:buFont typeface="Wingdings" charset="2"/>
+              <a:buChar char=""/>
+            </a:pPr>
+            <a:r>
+              <a:rPr b="0" lang="en-US" sz="2400" spc="-1" strike="noStrike">
+                <a:solidFill>
+                  <a:srgbClr val="000000"/>
+                </a:solidFill>
+                <a:latin typeface="Arial"/>
+              </a:rPr>
+              <a:t>Third Outline Level</a:t>
+            </a:r>
+            <a:endParaRPr b="0" lang="en-US" sz="2400" spc="-1" strike="noStrike">
+              <a:solidFill>
+                <a:srgbClr val="000000"/>
+              </a:solidFill>
+              <a:latin typeface="Arial"/>
+            </a:endParaRPr>
+          </a:p>
+          <a:p>
+            <a:pPr lvl="3" marL="1728000" indent="-216000">
+              <a:spcBef>
+                <a:spcPts val="567"/>
+              </a:spcBef>
+              <a:buClr>
+                <a:srgbClr val="000000"/>
+              </a:buClr>
+              <a:buSzPct val="75000"/>
+              <a:buFont typeface="Symbol" charset="2"/>
+              <a:buChar char=""/>
+            </a:pPr>
+            <a:r>
+              <a:rPr b="0" lang="en-US" sz="2000" spc="-1" strike="noStrike">
+                <a:solidFill>
+                  <a:srgbClr val="000000"/>
+                </a:solidFill>
+                <a:latin typeface="Arial"/>
+              </a:rPr>
+              <a:t>Fourth Outline Level</a:t>
+            </a:r>
+            <a:endParaRPr b="0" lang="en-US" sz="2000" spc="-1" strike="noStrike">
+              <a:solidFill>
+                <a:srgbClr val="000000"/>
+              </a:solidFill>
+              <a:latin typeface="Arial"/>
+            </a:endParaRPr>
+          </a:p>
+          <a:p>
+            <a:pPr lvl="4" marL="2160000" indent="-216000">
+              <a:spcBef>
+                <a:spcPts val="283"/>
+              </a:spcBef>
+              <a:buClr>
+                <a:srgbClr val="000000"/>
+              </a:buClr>
+              <a:buSzPct val="45000"/>
+              <a:buFont typeface="Wingdings" charset="2"/>
+              <a:buChar char=""/>
+            </a:pPr>
+            <a:r>
+              <a:rPr b="0" lang="en-US" sz="2000" spc="-1" strike="noStrike">
+                <a:solidFill>
+                  <a:srgbClr val="000000"/>
+                </a:solidFill>
+                <a:latin typeface="Arial"/>
+              </a:rPr>
+              <a:t>Fifth Outline Level</a:t>
+            </a:r>
+            <a:endParaRPr b="0" lang="en-US" sz="2000" spc="-1" strike="noStrike">
+              <a:solidFill>
+                <a:srgbClr val="000000"/>
+              </a:solidFill>
+              <a:latin typeface="Arial"/>
+            </a:endParaRPr>
+          </a:p>
+          <a:p>
+            <a:pPr lvl="5" marL="2592000" indent="-216000">
+              <a:spcBef>
+                <a:spcPts val="283"/>
+              </a:spcBef>
+              <a:buClr>
+                <a:srgbClr val="000000"/>
+              </a:buClr>
+              <a:buSzPct val="45000"/>
+              <a:buFont typeface="Wingdings" charset="2"/>
+              <a:buChar char=""/>
+            </a:pPr>
+            <a:r>
+              <a:rPr b="0" lang="en-US" sz="2000" spc="-1" strike="noStrike">
+                <a:solidFill>
+                  <a:srgbClr val="000000"/>
+                </a:solidFill>
+                <a:latin typeface="Arial"/>
+              </a:rPr>
+              <a:t>Sixth Outline Level</a:t>
+            </a:r>
+            <a:endParaRPr b="0" lang="en-US" sz="2000" spc="-1" strike="noStrike">
+              <a:solidFill>
+                <a:srgbClr val="000000"/>
+              </a:solidFill>
+              <a:latin typeface="Arial"/>
+            </a:endParaRPr>
+          </a:p>
+          <a:p>
+            <a:pPr lvl="6" marL="3024000" indent="-216000">
+              <a:spcBef>
+                <a:spcPts val="283"/>
+              </a:spcBef>
+              <a:buClr>
+                <a:srgbClr val="000000"/>
+              </a:buClr>
+              <a:buSzPct val="45000"/>
+              <a:buFont typeface="Wingdings" charset="2"/>
+              <a:buChar char=""/>
+            </a:pPr>
+            <a:r>
+              <a:rPr b="0" lang="en-US" sz="2000" spc="-1" strike="noStrike">
+                <a:solidFill>
+                  <a:srgbClr val="000000"/>
+                </a:solidFill>
+                <a:latin typeface="Arial"/>
+              </a:rPr>
+              <a:t>Seventh Outline Level</a:t>
+            </a:r>
+            <a:endParaRPr b="0" lang="en-US" sz="2000" spc="-1" strike="noStrike">
+              <a:solidFill>
+                <a:srgbClr val="000000"/>
+              </a:solidFill>
+              <a:latin typeface="Arial"/>
+            </a:endParaRPr>
+          </a:p>
+        </p:txBody>
+      </p:sp>
+    </p:spTree>
+  </p:cSld>
+  <p:clrMap bg1="lt1" bg2="lt2" tx1="dk1" tx2="dk2" accent1="accent1" accent2="accent2" accent3="accent3" accent4="accent4" accent5="accent5" accent6="accent6" hlink="hlink" folHlink="folHlink"/>
+  <p:sldLayoutIdLst>
+    <p:sldLayoutId id="2147483701" r:id="rId2"/>
+    <p:sldLayoutId id="2147483702" r:id="rId3"/>
+    <p:sldLayoutId id="2147483703" r:id="rId4"/>
+    <p:sldLayoutId id="2147483704" r:id="rId5"/>
+    <p:sldLayoutId id="2147483705" r:id="rId6"/>
+    <p:sldLayoutId id="2147483706" r:id="rId7"/>
+    <p:sldLayoutId id="2147483707" r:id="rId8"/>
+    <p:sldLayoutId id="2147483708" r:id="rId9"/>
+    <p:sldLayoutId id="2147483709" r:id="rId10"/>
+    <p:sldLayoutId id="2147483710" r:id="rId11"/>
+    <p:sldLayoutId id="2147483711" r:id="rId12"/>
+    <p:sldLayoutId id="2147483712" r:id="rId13"/>
   </p:sldLayoutIdLst>
 </p:sldMaster>
 </file>
@@ -11216,14 +14246,14 @@
       </p:grpSpPr>
       <p:sp>
         <p:nvSpPr>
-          <p:cNvPr id="161" name="Rectangle 32"/>
+          <p:cNvPr id="202" name="Rectangle 32"/>
           <p:cNvSpPr/>
           <p:nvPr/>
         </p:nvSpPr>
         <p:spPr>
           <a:xfrm>
             <a:off x="0" y="0"/>
-            <a:ext cx="12186360" cy="6855480"/>
+            <a:ext cx="12186000" cy="6855120"/>
           </a:xfrm>
           <a:prstGeom prst="rect">
             <a:avLst/>
@@ -11276,14 +14306,14 @@
       </p:sp>
       <p:sp>
         <p:nvSpPr>
-          <p:cNvPr id="162" name="Rectangle 33"/>
+          <p:cNvPr id="203" name="Rectangle 33"/>
           <p:cNvSpPr/>
           <p:nvPr/>
         </p:nvSpPr>
         <p:spPr>
           <a:xfrm>
             <a:off x="0" y="0"/>
-            <a:ext cx="15840" cy="6855480"/>
+            <a:ext cx="15480" cy="6855120"/>
           </a:xfrm>
           <a:prstGeom prst="rect">
             <a:avLst/>
@@ -11336,14 +14366,14 @@
       </p:sp>
       <p:sp>
         <p:nvSpPr>
-          <p:cNvPr id="163" name="Rectangle 34"/>
+          <p:cNvPr id="204" name="Rectangle 34"/>
           <p:cNvSpPr/>
           <p:nvPr/>
         </p:nvSpPr>
         <p:spPr>
           <a:xfrm>
             <a:off x="914400" y="0"/>
-            <a:ext cx="15840" cy="6855480"/>
+            <a:ext cx="15480" cy="6855120"/>
           </a:xfrm>
           <a:prstGeom prst="rect">
             <a:avLst/>
@@ -11396,14 +14426,14 @@
       </p:sp>
       <p:sp>
         <p:nvSpPr>
-          <p:cNvPr id="164" name="Rectangle 35"/>
+          <p:cNvPr id="205" name="Rectangle 35"/>
           <p:cNvSpPr/>
           <p:nvPr/>
         </p:nvSpPr>
         <p:spPr>
           <a:xfrm>
             <a:off x="1828800" y="0"/>
-            <a:ext cx="15840" cy="6855480"/>
+            <a:ext cx="15480" cy="6855120"/>
           </a:xfrm>
           <a:prstGeom prst="rect">
             <a:avLst/>
@@ -11456,14 +14486,14 @@
       </p:sp>
       <p:sp>
         <p:nvSpPr>
-          <p:cNvPr id="165" name="Rectangle 36"/>
+          <p:cNvPr id="206" name="Rectangle 36"/>
           <p:cNvSpPr/>
           <p:nvPr/>
         </p:nvSpPr>
         <p:spPr>
           <a:xfrm>
             <a:off x="2743200" y="0"/>
-            <a:ext cx="15840" cy="6855480"/>
+            <a:ext cx="15480" cy="6855120"/>
           </a:xfrm>
           <a:prstGeom prst="rect">
             <a:avLst/>
@@ -11516,14 +14546,14 @@
       </p:sp>
       <p:sp>
         <p:nvSpPr>
-          <p:cNvPr id="166" name="Rectangle 37"/>
+          <p:cNvPr id="207" name="Rectangle 37"/>
           <p:cNvSpPr/>
           <p:nvPr/>
         </p:nvSpPr>
         <p:spPr>
           <a:xfrm>
             <a:off x="3657600" y="0"/>
-            <a:ext cx="15840" cy="6855480"/>
+            <a:ext cx="15480" cy="6855120"/>
           </a:xfrm>
           <a:prstGeom prst="rect">
             <a:avLst/>
@@ -11576,14 +14606,14 @@
       </p:sp>
       <p:sp>
         <p:nvSpPr>
-          <p:cNvPr id="167" name="Rectangle 38"/>
+          <p:cNvPr id="208" name="Rectangle 38"/>
           <p:cNvSpPr/>
           <p:nvPr/>
         </p:nvSpPr>
         <p:spPr>
           <a:xfrm>
             <a:off x="4572000" y="0"/>
-            <a:ext cx="15840" cy="6855480"/>
+            <a:ext cx="15480" cy="6855120"/>
           </a:xfrm>
           <a:prstGeom prst="rect">
             <a:avLst/>
@@ -11636,14 +14666,14 @@
       </p:sp>
       <p:sp>
         <p:nvSpPr>
-          <p:cNvPr id="168" name="Rectangle 39"/>
+          <p:cNvPr id="209" name="Rectangle 39"/>
           <p:cNvSpPr/>
           <p:nvPr/>
         </p:nvSpPr>
         <p:spPr>
           <a:xfrm>
             <a:off x="5486400" y="0"/>
-            <a:ext cx="15840" cy="6855480"/>
+            <a:ext cx="15480" cy="6855120"/>
           </a:xfrm>
           <a:prstGeom prst="rect">
             <a:avLst/>
@@ -11696,14 +14726,14 @@
       </p:sp>
       <p:sp>
         <p:nvSpPr>
-          <p:cNvPr id="169" name="Rectangle 40"/>
+          <p:cNvPr id="210" name="Rectangle 40"/>
           <p:cNvSpPr/>
           <p:nvPr/>
         </p:nvSpPr>
         <p:spPr>
           <a:xfrm>
             <a:off x="6400800" y="0"/>
-            <a:ext cx="15840" cy="6855480"/>
+            <a:ext cx="15480" cy="6855120"/>
           </a:xfrm>
           <a:prstGeom prst="rect">
             <a:avLst/>
@@ -11756,14 +14786,14 @@
       </p:sp>
       <p:sp>
         <p:nvSpPr>
-          <p:cNvPr id="170" name="Rectangle 41"/>
+          <p:cNvPr id="211" name="Rectangle 41"/>
           <p:cNvSpPr/>
           <p:nvPr/>
         </p:nvSpPr>
         <p:spPr>
           <a:xfrm>
             <a:off x="7315200" y="0"/>
-            <a:ext cx="15840" cy="6855480"/>
+            <a:ext cx="15480" cy="6855120"/>
           </a:xfrm>
           <a:prstGeom prst="rect">
             <a:avLst/>
@@ -11816,14 +14846,14 @@
       </p:sp>
       <p:sp>
         <p:nvSpPr>
-          <p:cNvPr id="171" name="Rectangle 42"/>
+          <p:cNvPr id="212" name="Rectangle 42"/>
           <p:cNvSpPr/>
           <p:nvPr/>
         </p:nvSpPr>
         <p:spPr>
           <a:xfrm>
             <a:off x="8229600" y="0"/>
-            <a:ext cx="15840" cy="6855480"/>
+            <a:ext cx="15480" cy="6855120"/>
           </a:xfrm>
           <a:prstGeom prst="rect">
             <a:avLst/>
@@ -11876,14 +14906,14 @@
       </p:sp>
       <p:sp>
         <p:nvSpPr>
-          <p:cNvPr id="172" name="Rectangle 43"/>
+          <p:cNvPr id="213" name="Rectangle 43"/>
           <p:cNvSpPr/>
           <p:nvPr/>
         </p:nvSpPr>
         <p:spPr>
           <a:xfrm>
             <a:off x="9144000" y="0"/>
-            <a:ext cx="15840" cy="6855480"/>
+            <a:ext cx="15480" cy="6855120"/>
           </a:xfrm>
           <a:prstGeom prst="rect">
             <a:avLst/>
@@ -11936,14 +14966,14 @@
       </p:sp>
       <p:sp>
         <p:nvSpPr>
-          <p:cNvPr id="173" name="Rectangle 44"/>
+          <p:cNvPr id="214" name="Rectangle 44"/>
           <p:cNvSpPr/>
           <p:nvPr/>
         </p:nvSpPr>
         <p:spPr>
           <a:xfrm>
             <a:off x="10058400" y="0"/>
-            <a:ext cx="15840" cy="6855480"/>
+            <a:ext cx="15480" cy="6855120"/>
           </a:xfrm>
           <a:prstGeom prst="rect">
             <a:avLst/>
@@ -11996,14 +15026,14 @@
       </p:sp>
       <p:sp>
         <p:nvSpPr>
-          <p:cNvPr id="174" name="Rectangle 45"/>
+          <p:cNvPr id="215" name="Rectangle 45"/>
           <p:cNvSpPr/>
           <p:nvPr/>
         </p:nvSpPr>
         <p:spPr>
           <a:xfrm>
             <a:off x="10972800" y="0"/>
-            <a:ext cx="15840" cy="6855480"/>
+            <a:ext cx="15480" cy="6855120"/>
           </a:xfrm>
           <a:prstGeom prst="rect">
             <a:avLst/>
@@ -12056,14 +15086,14 @@
       </p:sp>
       <p:sp>
         <p:nvSpPr>
-          <p:cNvPr id="175" name="Rectangle 46"/>
+          <p:cNvPr id="216" name="Rectangle 46"/>
           <p:cNvSpPr/>
           <p:nvPr/>
         </p:nvSpPr>
         <p:spPr>
           <a:xfrm>
             <a:off x="11887200" y="0"/>
-            <a:ext cx="15840" cy="6855480"/>
+            <a:ext cx="15480" cy="6855120"/>
           </a:xfrm>
           <a:prstGeom prst="rect">
             <a:avLst/>
@@ -12116,14 +15146,14 @@
       </p:sp>
       <p:sp>
         <p:nvSpPr>
-          <p:cNvPr id="176" name="Rectangle 47"/>
+          <p:cNvPr id="217" name="Rectangle 47"/>
           <p:cNvSpPr/>
           <p:nvPr/>
         </p:nvSpPr>
         <p:spPr>
           <a:xfrm>
             <a:off x="0" y="0"/>
-            <a:ext cx="317520" cy="6855480"/>
+            <a:ext cx="317160" cy="6855120"/>
           </a:xfrm>
           <a:prstGeom prst="rect">
             <a:avLst/>
@@ -12176,14 +15206,14 @@
       </p:sp>
       <p:sp>
         <p:nvSpPr>
-          <p:cNvPr id="177" name="Rounded Rectangle 8"/>
+          <p:cNvPr id="218" name="Rounded Rectangle 8"/>
           <p:cNvSpPr/>
           <p:nvPr/>
         </p:nvSpPr>
         <p:spPr>
           <a:xfrm>
             <a:off x="9875520" y="365760"/>
-            <a:ext cx="2009160" cy="500400"/>
+            <a:ext cx="2008800" cy="500040"/>
           </a:xfrm>
           <a:prstGeom prst="roundRect">
             <a:avLst>
@@ -12250,7 +15280,7 @@
       </p:sp>
       <p:sp>
         <p:nvSpPr>
-          <p:cNvPr id="178" name="TextBox 4"/>
+          <p:cNvPr id="219" name="TextBox 4"/>
           <p:cNvSpPr/>
           <p:nvPr/>
         </p:nvSpPr>
@@ -12304,7 +15334,7 @@
       </p:sp>
       <p:sp>
         <p:nvSpPr>
-          <p:cNvPr id="179" name="TextBox 5"/>
+          <p:cNvPr id="220" name="TextBox 5"/>
           <p:cNvSpPr/>
           <p:nvPr/>
         </p:nvSpPr>
@@ -12381,14 +15411,14 @@
       </p:sp>
       <p:sp>
         <p:nvSpPr>
-          <p:cNvPr id="180" name="Rounded Rectangle 9"/>
+          <p:cNvPr id="221" name="Rounded Rectangle 9"/>
           <p:cNvSpPr/>
           <p:nvPr/>
         </p:nvSpPr>
         <p:spPr>
           <a:xfrm>
             <a:off x="987480" y="3182040"/>
-            <a:ext cx="3289320" cy="2740680"/>
+            <a:ext cx="3288960" cy="2740320"/>
           </a:xfrm>
           <a:prstGeom prst="roundRect">
             <a:avLst>
@@ -12443,14 +15473,14 @@
       </p:sp>
       <p:sp>
         <p:nvSpPr>
-          <p:cNvPr id="181" name="Rounded Rectangle 10"/>
+          <p:cNvPr id="222" name="Rounded Rectangle 10"/>
           <p:cNvSpPr/>
           <p:nvPr/>
         </p:nvSpPr>
         <p:spPr>
           <a:xfrm>
             <a:off x="914400" y="3108960"/>
-            <a:ext cx="3289320" cy="3290400"/>
+            <a:ext cx="3288960" cy="3290040"/>
           </a:xfrm>
           <a:prstGeom prst="roundRect">
             <a:avLst>
@@ -12776,14 +15806,14 @@
       </p:sp>
       <p:sp>
         <p:nvSpPr>
-          <p:cNvPr id="182" name="Rounded Rectangle 11"/>
+          <p:cNvPr id="223" name="Rounded Rectangle 11"/>
           <p:cNvSpPr/>
           <p:nvPr/>
         </p:nvSpPr>
         <p:spPr>
           <a:xfrm>
             <a:off x="4507920" y="3182040"/>
-            <a:ext cx="3289320" cy="2740680"/>
+            <a:ext cx="3288960" cy="2740320"/>
           </a:xfrm>
           <a:prstGeom prst="roundRect">
             <a:avLst>
@@ -12838,14 +15868,14 @@
       </p:sp>
       <p:sp>
         <p:nvSpPr>
-          <p:cNvPr id="183" name="Rounded Rectangle 12"/>
+          <p:cNvPr id="224" name="Rounded Rectangle 12"/>
           <p:cNvSpPr/>
           <p:nvPr/>
         </p:nvSpPr>
         <p:spPr>
           <a:xfrm>
             <a:off x="4434840" y="3108960"/>
-            <a:ext cx="3289320" cy="2740680"/>
+            <a:ext cx="3288960" cy="2740320"/>
           </a:xfrm>
           <a:prstGeom prst="roundRect">
             <a:avLst>
@@ -13096,14 +16126,14 @@
       </p:sp>
       <p:sp>
         <p:nvSpPr>
-          <p:cNvPr id="184" name="Rounded Rectangle 13"/>
+          <p:cNvPr id="225" name="Rounded Rectangle 13"/>
           <p:cNvSpPr/>
           <p:nvPr/>
         </p:nvSpPr>
         <p:spPr>
           <a:xfrm>
             <a:off x="8028360" y="3182040"/>
-            <a:ext cx="3289320" cy="2740680"/>
+            <a:ext cx="3288960" cy="2740320"/>
           </a:xfrm>
           <a:prstGeom prst="roundRect">
             <a:avLst>
@@ -13158,14 +16188,14 @@
       </p:sp>
       <p:sp>
         <p:nvSpPr>
-          <p:cNvPr id="185" name="Rounded Rectangle 14"/>
+          <p:cNvPr id="226" name="Rounded Rectangle 14"/>
           <p:cNvSpPr/>
           <p:nvPr/>
         </p:nvSpPr>
         <p:spPr>
           <a:xfrm>
             <a:off x="7955280" y="3108960"/>
-            <a:ext cx="3473280" cy="3290400"/>
+            <a:ext cx="3472920" cy="3290040"/>
           </a:xfrm>
           <a:prstGeom prst="roundRect">
             <a:avLst>
@@ -13495,7 +16525,7 @@
       </p:sp>
       <p:sp>
         <p:nvSpPr>
-          <p:cNvPr id="186" name="TextBox 6"/>
+          <p:cNvPr id="227" name="TextBox 6"/>
           <p:cNvSpPr/>
           <p:nvPr/>
         </p:nvSpPr>
@@ -13579,14 +16609,14 @@
       </p:grpSpPr>
       <p:sp>
         <p:nvSpPr>
-          <p:cNvPr id="187" name="Rectangle 16"/>
+          <p:cNvPr id="228" name="Rectangle 16"/>
           <p:cNvSpPr/>
           <p:nvPr/>
         </p:nvSpPr>
         <p:spPr>
           <a:xfrm>
             <a:off x="0" y="0"/>
-            <a:ext cx="12186360" cy="6855480"/>
+            <a:ext cx="12186000" cy="6855120"/>
           </a:xfrm>
           <a:prstGeom prst="rect">
             <a:avLst/>
@@ -13639,14 +16669,14 @@
       </p:sp>
       <p:sp>
         <p:nvSpPr>
-          <p:cNvPr id="188" name="Rectangle 17"/>
+          <p:cNvPr id="229" name="Rectangle 17"/>
           <p:cNvSpPr/>
           <p:nvPr/>
         </p:nvSpPr>
         <p:spPr>
           <a:xfrm>
             <a:off x="0" y="0"/>
-            <a:ext cx="15840" cy="6855480"/>
+            <a:ext cx="15480" cy="6855120"/>
           </a:xfrm>
           <a:prstGeom prst="rect">
             <a:avLst/>
@@ -13699,14 +16729,14 @@
       </p:sp>
       <p:sp>
         <p:nvSpPr>
-          <p:cNvPr id="189" name="Rectangle 18"/>
+          <p:cNvPr id="230" name="Rectangle 18"/>
           <p:cNvSpPr/>
           <p:nvPr/>
         </p:nvSpPr>
         <p:spPr>
           <a:xfrm>
             <a:off x="914400" y="0"/>
-            <a:ext cx="15840" cy="6855480"/>
+            <a:ext cx="15480" cy="6855120"/>
           </a:xfrm>
           <a:prstGeom prst="rect">
             <a:avLst/>
@@ -13759,14 +16789,14 @@
       </p:sp>
       <p:sp>
         <p:nvSpPr>
-          <p:cNvPr id="190" name="Rectangle 19"/>
+          <p:cNvPr id="231" name="Rectangle 19"/>
           <p:cNvSpPr/>
           <p:nvPr/>
         </p:nvSpPr>
         <p:spPr>
           <a:xfrm>
             <a:off x="1828800" y="0"/>
-            <a:ext cx="15840" cy="6855480"/>
+            <a:ext cx="15480" cy="6855120"/>
           </a:xfrm>
           <a:prstGeom prst="rect">
             <a:avLst/>
@@ -13819,14 +16849,14 @@
       </p:sp>
       <p:sp>
         <p:nvSpPr>
-          <p:cNvPr id="191" name="Rectangle 20"/>
+          <p:cNvPr id="232" name="Rectangle 20"/>
           <p:cNvSpPr/>
           <p:nvPr/>
         </p:nvSpPr>
         <p:spPr>
           <a:xfrm>
             <a:off x="2743200" y="0"/>
-            <a:ext cx="15840" cy="6855480"/>
+            <a:ext cx="15480" cy="6855120"/>
           </a:xfrm>
           <a:prstGeom prst="rect">
             <a:avLst/>
@@ -13879,14 +16909,14 @@
       </p:sp>
       <p:sp>
         <p:nvSpPr>
-          <p:cNvPr id="192" name="Rectangle 21"/>
+          <p:cNvPr id="233" name="Rectangle 21"/>
           <p:cNvSpPr/>
           <p:nvPr/>
         </p:nvSpPr>
         <p:spPr>
           <a:xfrm>
             <a:off x="3657600" y="0"/>
-            <a:ext cx="15840" cy="6855480"/>
+            <a:ext cx="15480" cy="6855120"/>
           </a:xfrm>
           <a:prstGeom prst="rect">
             <a:avLst/>
@@ -13939,14 +16969,14 @@
       </p:sp>
       <p:sp>
         <p:nvSpPr>
-          <p:cNvPr id="193" name="Rectangle 22"/>
+          <p:cNvPr id="234" name="Rectangle 22"/>
           <p:cNvSpPr/>
           <p:nvPr/>
         </p:nvSpPr>
         <p:spPr>
           <a:xfrm>
             <a:off x="4572000" y="0"/>
-            <a:ext cx="15840" cy="6855480"/>
+            <a:ext cx="15480" cy="6855120"/>
           </a:xfrm>
           <a:prstGeom prst="rect">
             <a:avLst/>
@@ -13999,14 +17029,14 @@
       </p:sp>
       <p:sp>
         <p:nvSpPr>
-          <p:cNvPr id="194" name="Rectangle 23"/>
+          <p:cNvPr id="235" name="Rectangle 23"/>
           <p:cNvSpPr/>
           <p:nvPr/>
         </p:nvSpPr>
         <p:spPr>
           <a:xfrm>
             <a:off x="5486400" y="0"/>
-            <a:ext cx="15840" cy="6855480"/>
+            <a:ext cx="15480" cy="6855120"/>
           </a:xfrm>
           <a:prstGeom prst="rect">
             <a:avLst/>
@@ -14059,14 +17089,14 @@
       </p:sp>
       <p:sp>
         <p:nvSpPr>
-          <p:cNvPr id="195" name="Rectangle 24"/>
+          <p:cNvPr id="236" name="Rectangle 24"/>
           <p:cNvSpPr/>
           <p:nvPr/>
         </p:nvSpPr>
         <p:spPr>
           <a:xfrm>
             <a:off x="6400800" y="0"/>
-            <a:ext cx="15840" cy="6855480"/>
+            <a:ext cx="15480" cy="6855120"/>
           </a:xfrm>
           <a:prstGeom prst="rect">
             <a:avLst/>
@@ -14119,14 +17149,14 @@
       </p:sp>
       <p:sp>
         <p:nvSpPr>
-          <p:cNvPr id="196" name="Rectangle 25"/>
+          <p:cNvPr id="237" name="Rectangle 25"/>
           <p:cNvSpPr/>
           <p:nvPr/>
         </p:nvSpPr>
         <p:spPr>
           <a:xfrm>
             <a:off x="7315200" y="0"/>
-            <a:ext cx="15840" cy="6855480"/>
+            <a:ext cx="15480" cy="6855120"/>
           </a:xfrm>
           <a:prstGeom prst="rect">
             <a:avLst/>
@@ -14179,14 +17209,14 @@
       </p:sp>
       <p:sp>
         <p:nvSpPr>
-          <p:cNvPr id="197" name="Rectangle 26"/>
+          <p:cNvPr id="238" name="Rectangle 26"/>
           <p:cNvSpPr/>
           <p:nvPr/>
         </p:nvSpPr>
         <p:spPr>
           <a:xfrm>
             <a:off x="8229600" y="0"/>
-            <a:ext cx="15840" cy="6855480"/>
+            <a:ext cx="15480" cy="6855120"/>
           </a:xfrm>
           <a:prstGeom prst="rect">
             <a:avLst/>
@@ -14239,14 +17269,14 @@
       </p:sp>
       <p:sp>
         <p:nvSpPr>
-          <p:cNvPr id="198" name="Rectangle 27"/>
+          <p:cNvPr id="239" name="Rectangle 27"/>
           <p:cNvSpPr/>
           <p:nvPr/>
         </p:nvSpPr>
         <p:spPr>
           <a:xfrm>
             <a:off x="9144000" y="0"/>
-            <a:ext cx="15840" cy="6855480"/>
+            <a:ext cx="15480" cy="6855120"/>
           </a:xfrm>
           <a:prstGeom prst="rect">
             <a:avLst/>
@@ -14299,14 +17329,14 @@
       </p:sp>
       <p:sp>
         <p:nvSpPr>
-          <p:cNvPr id="199" name="Rectangle 28"/>
+          <p:cNvPr id="240" name="Rectangle 28"/>
           <p:cNvSpPr/>
           <p:nvPr/>
         </p:nvSpPr>
         <p:spPr>
           <a:xfrm>
             <a:off x="10058400" y="0"/>
-            <a:ext cx="15840" cy="6855480"/>
+            <a:ext cx="15480" cy="6855120"/>
           </a:xfrm>
           <a:prstGeom prst="rect">
             <a:avLst/>
@@ -14359,14 +17389,14 @@
       </p:sp>
       <p:sp>
         <p:nvSpPr>
-          <p:cNvPr id="200" name="Rectangle 29"/>
+          <p:cNvPr id="241" name="Rectangle 29"/>
           <p:cNvSpPr/>
           <p:nvPr/>
         </p:nvSpPr>
         <p:spPr>
           <a:xfrm>
             <a:off x="10972800" y="0"/>
-            <a:ext cx="15840" cy="6855480"/>
+            <a:ext cx="15480" cy="6855120"/>
           </a:xfrm>
           <a:prstGeom prst="rect">
             <a:avLst/>
@@ -14419,14 +17449,14 @@
       </p:sp>
       <p:sp>
         <p:nvSpPr>
-          <p:cNvPr id="201" name="Rectangle 30"/>
+          <p:cNvPr id="242" name="Rectangle 30"/>
           <p:cNvSpPr/>
           <p:nvPr/>
         </p:nvSpPr>
         <p:spPr>
           <a:xfrm>
             <a:off x="11887200" y="0"/>
-            <a:ext cx="15840" cy="6855480"/>
+            <a:ext cx="15480" cy="6855120"/>
           </a:xfrm>
           <a:prstGeom prst="rect">
             <a:avLst/>
@@ -14479,14 +17509,14 @@
       </p:sp>
       <p:sp>
         <p:nvSpPr>
-          <p:cNvPr id="202" name="Rectangle 31"/>
+          <p:cNvPr id="243" name="Rectangle 31"/>
           <p:cNvSpPr/>
           <p:nvPr/>
         </p:nvSpPr>
         <p:spPr>
           <a:xfrm>
             <a:off x="0" y="0"/>
-            <a:ext cx="317520" cy="6855480"/>
+            <a:ext cx="317160" cy="6855120"/>
           </a:xfrm>
           <a:prstGeom prst="rect">
             <a:avLst/>
@@ -14539,14 +17569,14 @@
       </p:sp>
       <p:sp>
         <p:nvSpPr>
-          <p:cNvPr id="203" name="Rounded Rectangle 15"/>
+          <p:cNvPr id="244" name="Rounded Rectangle 15"/>
           <p:cNvSpPr/>
           <p:nvPr/>
         </p:nvSpPr>
         <p:spPr>
           <a:xfrm>
             <a:off x="9875520" y="365760"/>
-            <a:ext cx="2009160" cy="500400"/>
+            <a:ext cx="2008800" cy="500040"/>
           </a:xfrm>
           <a:prstGeom prst="roundRect">
             <a:avLst>
@@ -14613,7 +17643,7 @@
       </p:sp>
       <p:sp>
         <p:nvSpPr>
-          <p:cNvPr id="204" name="TextBox 7"/>
+          <p:cNvPr id="245" name="TextBox 7"/>
           <p:cNvSpPr/>
           <p:nvPr/>
         </p:nvSpPr>
@@ -14667,7 +17697,7 @@
       </p:sp>
       <p:sp>
         <p:nvSpPr>
-          <p:cNvPr id="205" name="TextBox 8"/>
+          <p:cNvPr id="246" name="TextBox 8"/>
           <p:cNvSpPr/>
           <p:nvPr/>
         </p:nvSpPr>
@@ -14721,14 +17751,14 @@
       </p:sp>
       <p:sp>
         <p:nvSpPr>
-          <p:cNvPr id="206" name="Rounded Rectangle 16"/>
+          <p:cNvPr id="247" name="Rounded Rectangle 16"/>
           <p:cNvSpPr/>
           <p:nvPr/>
         </p:nvSpPr>
         <p:spPr>
           <a:xfrm>
             <a:off x="987480" y="3182040"/>
-            <a:ext cx="3289320" cy="2740680"/>
+            <a:ext cx="3288960" cy="2740320"/>
           </a:xfrm>
           <a:prstGeom prst="roundRect">
             <a:avLst>
@@ -14783,14 +17813,14 @@
       </p:sp>
       <p:sp>
         <p:nvSpPr>
-          <p:cNvPr id="207" name="Rounded Rectangle 17"/>
+          <p:cNvPr id="248" name="Rounded Rectangle 17"/>
           <p:cNvSpPr/>
           <p:nvPr/>
         </p:nvSpPr>
         <p:spPr>
           <a:xfrm>
             <a:off x="931680" y="2925720"/>
-            <a:ext cx="3182040" cy="3702600"/>
+            <a:ext cx="3181680" cy="3702240"/>
           </a:xfrm>
           <a:prstGeom prst="roundRect">
             <a:avLst>
@@ -15067,14 +18097,14 @@
       </p:sp>
       <p:sp>
         <p:nvSpPr>
-          <p:cNvPr id="208" name="Rounded Rectangle 18"/>
+          <p:cNvPr id="249" name="Rounded Rectangle 18"/>
           <p:cNvSpPr/>
           <p:nvPr/>
         </p:nvSpPr>
         <p:spPr>
           <a:xfrm>
             <a:off x="4507920" y="3182040"/>
-            <a:ext cx="3289320" cy="2740680"/>
+            <a:ext cx="3288960" cy="2740320"/>
           </a:xfrm>
           <a:prstGeom prst="roundRect">
             <a:avLst>
@@ -15129,14 +18159,14 @@
       </p:sp>
       <p:sp>
         <p:nvSpPr>
-          <p:cNvPr id="209" name="Rounded Rectangle 19"/>
+          <p:cNvPr id="250" name="Rounded Rectangle 19"/>
           <p:cNvSpPr/>
           <p:nvPr/>
         </p:nvSpPr>
         <p:spPr>
           <a:xfrm>
             <a:off x="4434840" y="3108960"/>
-            <a:ext cx="3289320" cy="3061800"/>
+            <a:ext cx="3288960" cy="3061440"/>
           </a:xfrm>
           <a:prstGeom prst="roundRect">
             <a:avLst>
@@ -15427,14 +18457,14 @@
       </p:sp>
       <p:sp>
         <p:nvSpPr>
-          <p:cNvPr id="210" name="Rounded Rectangle 20"/>
+          <p:cNvPr id="251" name="Rounded Rectangle 20"/>
           <p:cNvSpPr/>
           <p:nvPr/>
         </p:nvSpPr>
         <p:spPr>
           <a:xfrm>
             <a:off x="8028360" y="3182040"/>
-            <a:ext cx="3289320" cy="2740680"/>
+            <a:ext cx="3288960" cy="2740320"/>
           </a:xfrm>
           <a:prstGeom prst="roundRect">
             <a:avLst>
@@ -15489,14 +18519,14 @@
       </p:sp>
       <p:sp>
         <p:nvSpPr>
-          <p:cNvPr id="211" name="Rounded Rectangle 21"/>
+          <p:cNvPr id="252" name="Rounded Rectangle 21"/>
           <p:cNvSpPr/>
           <p:nvPr/>
         </p:nvSpPr>
         <p:spPr>
           <a:xfrm>
             <a:off x="7955280" y="2971800"/>
-            <a:ext cx="3702240" cy="3427560"/>
+            <a:ext cx="3701880" cy="3427200"/>
           </a:xfrm>
           <a:prstGeom prst="roundRect">
             <a:avLst>
@@ -15856,7 +18886,7 @@
       </p:sp>
       <p:sp>
         <p:nvSpPr>
-          <p:cNvPr id="212" name="TextBox 9"/>
+          <p:cNvPr id="253" name="TextBox 9"/>
           <p:cNvSpPr/>
           <p:nvPr/>
         </p:nvSpPr>
@@ -15940,14 +18970,14 @@
       </p:grpSpPr>
       <p:sp>
         <p:nvSpPr>
-          <p:cNvPr id="213" name="Rectangle 48"/>
+          <p:cNvPr id="254" name="Rectangle 48"/>
           <p:cNvSpPr/>
           <p:nvPr/>
         </p:nvSpPr>
         <p:spPr>
           <a:xfrm>
             <a:off x="0" y="0"/>
-            <a:ext cx="12186360" cy="6855480"/>
+            <a:ext cx="12186000" cy="6855120"/>
           </a:xfrm>
           <a:prstGeom prst="rect">
             <a:avLst/>
@@ -16000,14 +19030,14 @@
       </p:sp>
       <p:sp>
         <p:nvSpPr>
-          <p:cNvPr id="214" name="Rectangle 49"/>
+          <p:cNvPr id="255" name="Rectangle 49"/>
           <p:cNvSpPr/>
           <p:nvPr/>
         </p:nvSpPr>
         <p:spPr>
           <a:xfrm>
             <a:off x="0" y="0"/>
-            <a:ext cx="15840" cy="6855480"/>
+            <a:ext cx="15480" cy="6855120"/>
           </a:xfrm>
           <a:prstGeom prst="rect">
             <a:avLst/>
@@ -16060,14 +19090,14 @@
       </p:sp>
       <p:sp>
         <p:nvSpPr>
-          <p:cNvPr id="215" name="Rectangle 50"/>
+          <p:cNvPr id="256" name="Rectangle 50"/>
           <p:cNvSpPr/>
           <p:nvPr/>
         </p:nvSpPr>
         <p:spPr>
           <a:xfrm>
             <a:off x="914400" y="0"/>
-            <a:ext cx="15840" cy="6855480"/>
+            <a:ext cx="15480" cy="6855120"/>
           </a:xfrm>
           <a:prstGeom prst="rect">
             <a:avLst/>
@@ -16120,14 +19150,14 @@
       </p:sp>
       <p:sp>
         <p:nvSpPr>
-          <p:cNvPr id="216" name="Rectangle 51"/>
+          <p:cNvPr id="257" name="Rectangle 51"/>
           <p:cNvSpPr/>
           <p:nvPr/>
         </p:nvSpPr>
         <p:spPr>
           <a:xfrm>
             <a:off x="1828800" y="0"/>
-            <a:ext cx="15840" cy="6855480"/>
+            <a:ext cx="15480" cy="6855120"/>
           </a:xfrm>
           <a:prstGeom prst="rect">
             <a:avLst/>
@@ -16180,14 +19210,14 @@
       </p:sp>
       <p:sp>
         <p:nvSpPr>
-          <p:cNvPr id="217" name="Rectangle 52"/>
+          <p:cNvPr id="258" name="Rectangle 52"/>
           <p:cNvSpPr/>
           <p:nvPr/>
         </p:nvSpPr>
         <p:spPr>
           <a:xfrm>
             <a:off x="2743200" y="0"/>
-            <a:ext cx="15840" cy="6855480"/>
+            <a:ext cx="15480" cy="6855120"/>
           </a:xfrm>
           <a:prstGeom prst="rect">
             <a:avLst/>
@@ -16240,14 +19270,14 @@
       </p:sp>
       <p:sp>
         <p:nvSpPr>
-          <p:cNvPr id="218" name="Rectangle 53"/>
+          <p:cNvPr id="259" name="Rectangle 53"/>
           <p:cNvSpPr/>
           <p:nvPr/>
         </p:nvSpPr>
         <p:spPr>
           <a:xfrm>
             <a:off x="3657600" y="0"/>
-            <a:ext cx="15840" cy="6855480"/>
+            <a:ext cx="15480" cy="6855120"/>
           </a:xfrm>
           <a:prstGeom prst="rect">
             <a:avLst/>
@@ -16300,14 +19330,14 @@
       </p:sp>
       <p:sp>
         <p:nvSpPr>
-          <p:cNvPr id="219" name="Rectangle 54"/>
+          <p:cNvPr id="260" name="Rectangle 54"/>
           <p:cNvSpPr/>
           <p:nvPr/>
         </p:nvSpPr>
         <p:spPr>
           <a:xfrm>
             <a:off x="4572000" y="0"/>
-            <a:ext cx="15840" cy="6855480"/>
+            <a:ext cx="15480" cy="6855120"/>
           </a:xfrm>
           <a:prstGeom prst="rect">
             <a:avLst/>
@@ -16360,14 +19390,14 @@
       </p:sp>
       <p:sp>
         <p:nvSpPr>
-          <p:cNvPr id="220" name="Rectangle 55"/>
+          <p:cNvPr id="261" name="Rectangle 55"/>
           <p:cNvSpPr/>
           <p:nvPr/>
         </p:nvSpPr>
         <p:spPr>
           <a:xfrm>
             <a:off x="5486400" y="0"/>
-            <a:ext cx="15840" cy="6855480"/>
+            <a:ext cx="15480" cy="6855120"/>
           </a:xfrm>
           <a:prstGeom prst="rect">
             <a:avLst/>
@@ -16420,14 +19450,14 @@
       </p:sp>
       <p:sp>
         <p:nvSpPr>
-          <p:cNvPr id="221" name="Rectangle 56"/>
+          <p:cNvPr id="262" name="Rectangle 56"/>
           <p:cNvSpPr/>
           <p:nvPr/>
         </p:nvSpPr>
         <p:spPr>
           <a:xfrm>
             <a:off x="6400800" y="0"/>
-            <a:ext cx="15840" cy="6855480"/>
+            <a:ext cx="15480" cy="6855120"/>
           </a:xfrm>
           <a:prstGeom prst="rect">
             <a:avLst/>
@@ -16480,14 +19510,14 @@
       </p:sp>
       <p:sp>
         <p:nvSpPr>
-          <p:cNvPr id="222" name="Rectangle 57"/>
+          <p:cNvPr id="263" name="Rectangle 57"/>
           <p:cNvSpPr/>
           <p:nvPr/>
         </p:nvSpPr>
         <p:spPr>
           <a:xfrm>
             <a:off x="7315200" y="0"/>
-            <a:ext cx="15840" cy="6855480"/>
+            <a:ext cx="15480" cy="6855120"/>
           </a:xfrm>
           <a:prstGeom prst="rect">
             <a:avLst/>
@@ -16540,14 +19570,14 @@
       </p:sp>
       <p:sp>
         <p:nvSpPr>
-          <p:cNvPr id="223" name="Rectangle 58"/>
+          <p:cNvPr id="264" name="Rectangle 58"/>
           <p:cNvSpPr/>
           <p:nvPr/>
         </p:nvSpPr>
         <p:spPr>
           <a:xfrm>
             <a:off x="8229600" y="0"/>
-            <a:ext cx="15840" cy="6855480"/>
+            <a:ext cx="15480" cy="6855120"/>
           </a:xfrm>
           <a:prstGeom prst="rect">
             <a:avLst/>
@@ -16600,14 +19630,14 @@
       </p:sp>
       <p:sp>
         <p:nvSpPr>
-          <p:cNvPr id="224" name="Rectangle 59"/>
+          <p:cNvPr id="265" name="Rectangle 59"/>
           <p:cNvSpPr/>
           <p:nvPr/>
         </p:nvSpPr>
         <p:spPr>
           <a:xfrm>
             <a:off x="9144000" y="0"/>
-            <a:ext cx="15840" cy="6855480"/>
+            <a:ext cx="15480" cy="6855120"/>
           </a:xfrm>
           <a:prstGeom prst="rect">
             <a:avLst/>
@@ -16660,14 +19690,14 @@
       </p:sp>
       <p:sp>
         <p:nvSpPr>
-          <p:cNvPr id="225" name="Rectangle 60"/>
+          <p:cNvPr id="266" name="Rectangle 60"/>
           <p:cNvSpPr/>
           <p:nvPr/>
         </p:nvSpPr>
         <p:spPr>
           <a:xfrm>
             <a:off x="10058400" y="0"/>
-            <a:ext cx="15840" cy="6855480"/>
+            <a:ext cx="15480" cy="6855120"/>
           </a:xfrm>
           <a:prstGeom prst="rect">
             <a:avLst/>
@@ -16720,14 +19750,14 @@
       </p:sp>
       <p:sp>
         <p:nvSpPr>
-          <p:cNvPr id="226" name="Rectangle 61"/>
+          <p:cNvPr id="267" name="Rectangle 61"/>
           <p:cNvSpPr/>
           <p:nvPr/>
         </p:nvSpPr>
         <p:spPr>
           <a:xfrm>
             <a:off x="10972800" y="0"/>
-            <a:ext cx="15840" cy="6855480"/>
+            <a:ext cx="15480" cy="6855120"/>
           </a:xfrm>
           <a:prstGeom prst="rect">
             <a:avLst/>
@@ -16780,14 +19810,14 @@
       </p:sp>
       <p:sp>
         <p:nvSpPr>
-          <p:cNvPr id="227" name="Rectangle 62"/>
+          <p:cNvPr id="268" name="Rectangle 62"/>
           <p:cNvSpPr/>
           <p:nvPr/>
         </p:nvSpPr>
         <p:spPr>
           <a:xfrm>
             <a:off x="11887200" y="0"/>
-            <a:ext cx="15840" cy="6855480"/>
+            <a:ext cx="15480" cy="6855120"/>
           </a:xfrm>
           <a:prstGeom prst="rect">
             <a:avLst/>
@@ -16840,14 +19870,14 @@
       </p:sp>
       <p:sp>
         <p:nvSpPr>
-          <p:cNvPr id="228" name="Rectangle 63"/>
+          <p:cNvPr id="269" name="Rectangle 63"/>
           <p:cNvSpPr/>
           <p:nvPr/>
         </p:nvSpPr>
         <p:spPr>
           <a:xfrm>
             <a:off x="0" y="0"/>
-            <a:ext cx="317520" cy="6855480"/>
+            <a:ext cx="317160" cy="6855120"/>
           </a:xfrm>
           <a:prstGeom prst="rect">
             <a:avLst/>
@@ -16900,14 +19930,14 @@
       </p:sp>
       <p:sp>
         <p:nvSpPr>
-          <p:cNvPr id="229" name="Rounded Rectangle 22"/>
+          <p:cNvPr id="270" name="Rounded Rectangle 22"/>
           <p:cNvSpPr/>
           <p:nvPr/>
         </p:nvSpPr>
         <p:spPr>
           <a:xfrm>
             <a:off x="9875520" y="365760"/>
-            <a:ext cx="2009160" cy="500400"/>
+            <a:ext cx="2008800" cy="500040"/>
           </a:xfrm>
           <a:prstGeom prst="roundRect">
             <a:avLst>
@@ -16974,14 +20004,14 @@
       </p:sp>
       <p:sp>
         <p:nvSpPr>
-          <p:cNvPr id="230" name="TextBox 10"/>
+          <p:cNvPr id="271" name="TextBox 10"/>
           <p:cNvSpPr/>
           <p:nvPr/>
         </p:nvSpPr>
         <p:spPr>
           <a:xfrm>
             <a:off x="1357920" y="1005840"/>
-            <a:ext cx="8255520" cy="699120"/>
+            <a:ext cx="8255160" cy="699120"/>
           </a:xfrm>
           <a:prstGeom prst="rect">
             <a:avLst/>
@@ -17028,14 +20058,14 @@
       </p:sp>
       <p:sp>
         <p:nvSpPr>
-          <p:cNvPr id="231" name="TextBox 11"/>
+          <p:cNvPr id="272" name="TextBox 11"/>
           <p:cNvSpPr/>
           <p:nvPr/>
         </p:nvSpPr>
         <p:spPr>
           <a:xfrm>
             <a:off x="1810800" y="1846080"/>
-            <a:ext cx="7408440" cy="668520"/>
+            <a:ext cx="7408080" cy="668520"/>
           </a:xfrm>
           <a:prstGeom prst="rect">
             <a:avLst/>
@@ -17105,14 +20135,14 @@
       </p:sp>
       <p:sp>
         <p:nvSpPr>
-          <p:cNvPr id="232" name="Rounded Rectangle 23"/>
+          <p:cNvPr id="273" name="Rounded Rectangle 23"/>
           <p:cNvSpPr/>
           <p:nvPr/>
         </p:nvSpPr>
         <p:spPr>
           <a:xfrm>
             <a:off x="987480" y="3182040"/>
-            <a:ext cx="3289320" cy="2740680"/>
+            <a:ext cx="3288960" cy="2740320"/>
           </a:xfrm>
           <a:prstGeom prst="roundRect">
             <a:avLst>
@@ -17167,14 +20197,14 @@
       </p:sp>
       <p:sp>
         <p:nvSpPr>
-          <p:cNvPr id="233" name="Rounded Rectangle 24"/>
+          <p:cNvPr id="274" name="Rounded Rectangle 24"/>
           <p:cNvSpPr/>
           <p:nvPr/>
         </p:nvSpPr>
         <p:spPr>
           <a:xfrm>
             <a:off x="685800" y="2743200"/>
-            <a:ext cx="3517920" cy="3656520"/>
+            <a:ext cx="3517560" cy="3656160"/>
           </a:xfrm>
           <a:prstGeom prst="roundRect">
             <a:avLst>
@@ -17441,14 +20471,14 @@
       </p:sp>
       <p:sp>
         <p:nvSpPr>
-          <p:cNvPr id="234" name="Rounded Rectangle 25"/>
+          <p:cNvPr id="275" name="Rounded Rectangle 25"/>
           <p:cNvSpPr/>
           <p:nvPr/>
         </p:nvSpPr>
         <p:spPr>
           <a:xfrm>
             <a:off x="4507920" y="3182040"/>
-            <a:ext cx="3289320" cy="2740680"/>
+            <a:ext cx="3288960" cy="2740320"/>
           </a:xfrm>
           <a:prstGeom prst="roundRect">
             <a:avLst>
@@ -17503,14 +20533,14 @@
       </p:sp>
       <p:sp>
         <p:nvSpPr>
-          <p:cNvPr id="235" name="Rounded Rectangle 26"/>
+          <p:cNvPr id="276" name="Rounded Rectangle 26"/>
           <p:cNvSpPr/>
           <p:nvPr/>
         </p:nvSpPr>
         <p:spPr>
           <a:xfrm>
             <a:off x="4343400" y="2743200"/>
-            <a:ext cx="3380760" cy="3656160"/>
+            <a:ext cx="3380400" cy="3655800"/>
           </a:xfrm>
           <a:prstGeom prst="roundRect">
             <a:avLst>
@@ -18009,14 +21039,14 @@
       </p:sp>
       <p:sp>
         <p:nvSpPr>
-          <p:cNvPr id="236" name="Rounded Rectangle 27"/>
+          <p:cNvPr id="277" name="Rounded Rectangle 27"/>
           <p:cNvSpPr/>
           <p:nvPr/>
         </p:nvSpPr>
         <p:spPr>
           <a:xfrm>
             <a:off x="8028360" y="3182040"/>
-            <a:ext cx="3289320" cy="2740680"/>
+            <a:ext cx="3288960" cy="2740320"/>
           </a:xfrm>
           <a:prstGeom prst="roundRect">
             <a:avLst>
@@ -18071,14 +21101,14 @@
       </p:sp>
       <p:sp>
         <p:nvSpPr>
-          <p:cNvPr id="237" name="Rounded Rectangle 28"/>
+          <p:cNvPr id="278" name="Rounded Rectangle 28"/>
           <p:cNvSpPr/>
           <p:nvPr/>
         </p:nvSpPr>
         <p:spPr>
           <a:xfrm>
             <a:off x="7955280" y="2971800"/>
-            <a:ext cx="3701880" cy="3198960"/>
+            <a:ext cx="3701520" cy="3198600"/>
           </a:xfrm>
           <a:prstGeom prst="roundRect">
             <a:avLst>
@@ -18498,7 +21528,7 @@
       </p:sp>
       <p:sp>
         <p:nvSpPr>
-          <p:cNvPr id="238" name="TextBox 12"/>
+          <p:cNvPr id="279" name="TextBox 12"/>
           <p:cNvSpPr/>
           <p:nvPr/>
         </p:nvSpPr>
@@ -18582,14 +21612,14 @@
       </p:grpSpPr>
       <p:sp>
         <p:nvSpPr>
-          <p:cNvPr id="239" name="Rectangle 80"/>
+          <p:cNvPr id="280" name="Rectangle 80"/>
           <p:cNvSpPr/>
           <p:nvPr/>
         </p:nvSpPr>
         <p:spPr>
           <a:xfrm>
             <a:off x="0" y="0"/>
-            <a:ext cx="12187080" cy="6856200"/>
+            <a:ext cx="12186720" cy="6855840"/>
           </a:xfrm>
           <a:prstGeom prst="rect">
             <a:avLst/>
@@ -18642,14 +21672,14 @@
       </p:sp>
       <p:sp>
         <p:nvSpPr>
-          <p:cNvPr id="240" name="Rectangle 64"/>
+          <p:cNvPr id="281" name="Rectangle 64"/>
           <p:cNvSpPr/>
           <p:nvPr/>
         </p:nvSpPr>
         <p:spPr>
           <a:xfrm>
             <a:off x="0" y="0"/>
-            <a:ext cx="16560" cy="6856200"/>
+            <a:ext cx="16200" cy="6855840"/>
           </a:xfrm>
           <a:prstGeom prst="rect">
             <a:avLst/>
@@ -18702,14 +21732,14 @@
       </p:sp>
       <p:sp>
         <p:nvSpPr>
-          <p:cNvPr id="241" name="Rectangle 65"/>
+          <p:cNvPr id="282" name="Rectangle 65"/>
           <p:cNvSpPr/>
           <p:nvPr/>
         </p:nvSpPr>
         <p:spPr>
           <a:xfrm>
             <a:off x="914400" y="0"/>
-            <a:ext cx="16560" cy="6856200"/>
+            <a:ext cx="16200" cy="6855840"/>
           </a:xfrm>
           <a:prstGeom prst="rect">
             <a:avLst/>
@@ -18762,14 +21792,14 @@
       </p:sp>
       <p:sp>
         <p:nvSpPr>
-          <p:cNvPr id="242" name="Rectangle 66"/>
+          <p:cNvPr id="283" name="Rectangle 66"/>
           <p:cNvSpPr/>
           <p:nvPr/>
         </p:nvSpPr>
         <p:spPr>
           <a:xfrm>
             <a:off x="1828800" y="0"/>
-            <a:ext cx="16560" cy="6856200"/>
+            <a:ext cx="16200" cy="6855840"/>
           </a:xfrm>
           <a:prstGeom prst="rect">
             <a:avLst/>
@@ -18822,14 +21852,14 @@
       </p:sp>
       <p:sp>
         <p:nvSpPr>
-          <p:cNvPr id="243" name="Rectangle 67"/>
+          <p:cNvPr id="284" name="Rectangle 67"/>
           <p:cNvSpPr/>
           <p:nvPr/>
         </p:nvSpPr>
         <p:spPr>
           <a:xfrm>
             <a:off x="2743200" y="0"/>
-            <a:ext cx="16560" cy="6856200"/>
+            <a:ext cx="16200" cy="6855840"/>
           </a:xfrm>
           <a:prstGeom prst="rect">
             <a:avLst/>
@@ -18882,14 +21912,14 @@
       </p:sp>
       <p:sp>
         <p:nvSpPr>
-          <p:cNvPr id="244" name="Rectangle 68"/>
+          <p:cNvPr id="285" name="Rectangle 68"/>
           <p:cNvSpPr/>
           <p:nvPr/>
         </p:nvSpPr>
         <p:spPr>
           <a:xfrm>
             <a:off x="3657600" y="0"/>
-            <a:ext cx="16560" cy="6856200"/>
+            <a:ext cx="16200" cy="6855840"/>
           </a:xfrm>
           <a:prstGeom prst="rect">
             <a:avLst/>
@@ -18942,14 +21972,14 @@
       </p:sp>
       <p:sp>
         <p:nvSpPr>
-          <p:cNvPr id="245" name="Rectangle 69"/>
+          <p:cNvPr id="286" name="Rectangle 69"/>
           <p:cNvSpPr/>
           <p:nvPr/>
         </p:nvSpPr>
         <p:spPr>
           <a:xfrm>
             <a:off x="4572000" y="0"/>
-            <a:ext cx="16560" cy="6856200"/>
+            <a:ext cx="16200" cy="6855840"/>
           </a:xfrm>
           <a:prstGeom prst="rect">
             <a:avLst/>
@@ -19002,14 +22032,14 @@
       </p:sp>
       <p:sp>
         <p:nvSpPr>
-          <p:cNvPr id="246" name="Rectangle 70"/>
+          <p:cNvPr id="287" name="Rectangle 70"/>
           <p:cNvSpPr/>
           <p:nvPr/>
         </p:nvSpPr>
         <p:spPr>
           <a:xfrm>
             <a:off x="5486400" y="0"/>
-            <a:ext cx="16560" cy="6856200"/>
+            <a:ext cx="16200" cy="6855840"/>
           </a:xfrm>
           <a:prstGeom prst="rect">
             <a:avLst/>
@@ -19062,14 +22092,14 @@
       </p:sp>
       <p:sp>
         <p:nvSpPr>
-          <p:cNvPr id="247" name="Rectangle 71"/>
+          <p:cNvPr id="288" name="Rectangle 71"/>
           <p:cNvSpPr/>
           <p:nvPr/>
         </p:nvSpPr>
         <p:spPr>
           <a:xfrm>
             <a:off x="6400800" y="0"/>
-            <a:ext cx="16560" cy="6856200"/>
+            <a:ext cx="16200" cy="6855840"/>
           </a:xfrm>
           <a:prstGeom prst="rect">
             <a:avLst/>
@@ -19122,14 +22152,14 @@
       </p:sp>
       <p:sp>
         <p:nvSpPr>
-          <p:cNvPr id="248" name="Rectangle 72"/>
+          <p:cNvPr id="289" name="Rectangle 72"/>
           <p:cNvSpPr/>
           <p:nvPr/>
         </p:nvSpPr>
         <p:spPr>
           <a:xfrm>
             <a:off x="7315200" y="0"/>
-            <a:ext cx="16560" cy="6856200"/>
+            <a:ext cx="16200" cy="6855840"/>
           </a:xfrm>
           <a:prstGeom prst="rect">
             <a:avLst/>
@@ -19182,14 +22212,14 @@
       </p:sp>
       <p:sp>
         <p:nvSpPr>
-          <p:cNvPr id="249" name="Rectangle 73"/>
+          <p:cNvPr id="290" name="Rectangle 73"/>
           <p:cNvSpPr/>
           <p:nvPr/>
         </p:nvSpPr>
         <p:spPr>
           <a:xfrm>
             <a:off x="8229600" y="0"/>
-            <a:ext cx="16560" cy="6856200"/>
+            <a:ext cx="16200" cy="6855840"/>
           </a:xfrm>
           <a:prstGeom prst="rect">
             <a:avLst/>
@@ -19242,14 +22272,14 @@
       </p:sp>
       <p:sp>
         <p:nvSpPr>
-          <p:cNvPr id="250" name="Rectangle 74"/>
+          <p:cNvPr id="291" name="Rectangle 74"/>
           <p:cNvSpPr/>
           <p:nvPr/>
         </p:nvSpPr>
         <p:spPr>
           <a:xfrm>
             <a:off x="9144000" y="0"/>
-            <a:ext cx="16560" cy="6856200"/>
+            <a:ext cx="16200" cy="6855840"/>
           </a:xfrm>
           <a:prstGeom prst="rect">
             <a:avLst/>
@@ -19302,14 +22332,14 @@
       </p:sp>
       <p:sp>
         <p:nvSpPr>
-          <p:cNvPr id="251" name="Rectangle 75"/>
+          <p:cNvPr id="292" name="Rectangle 75"/>
           <p:cNvSpPr/>
           <p:nvPr/>
         </p:nvSpPr>
         <p:spPr>
           <a:xfrm>
             <a:off x="10058400" y="0"/>
-            <a:ext cx="16560" cy="6856200"/>
+            <a:ext cx="16200" cy="6855840"/>
           </a:xfrm>
           <a:prstGeom prst="rect">
             <a:avLst/>
@@ -19362,14 +22392,14 @@
       </p:sp>
       <p:sp>
         <p:nvSpPr>
-          <p:cNvPr id="252" name="Rectangle 76"/>
+          <p:cNvPr id="293" name="Rectangle 76"/>
           <p:cNvSpPr/>
           <p:nvPr/>
         </p:nvSpPr>
         <p:spPr>
           <a:xfrm>
             <a:off x="10972800" y="0"/>
-            <a:ext cx="16560" cy="6856200"/>
+            <a:ext cx="16200" cy="6855840"/>
           </a:xfrm>
           <a:prstGeom prst="rect">
             <a:avLst/>
@@ -19422,14 +22452,14 @@
       </p:sp>
       <p:sp>
         <p:nvSpPr>
-          <p:cNvPr id="253" name="Rectangle 77"/>
+          <p:cNvPr id="294" name="Rectangle 77"/>
           <p:cNvSpPr/>
           <p:nvPr/>
         </p:nvSpPr>
         <p:spPr>
           <a:xfrm>
             <a:off x="11887200" y="0"/>
-            <a:ext cx="16560" cy="6856200"/>
+            <a:ext cx="16200" cy="6855840"/>
           </a:xfrm>
           <a:prstGeom prst="rect">
             <a:avLst/>
@@ -19482,14 +22512,14 @@
       </p:sp>
       <p:sp>
         <p:nvSpPr>
-          <p:cNvPr id="254" name="Rectangle 78"/>
+          <p:cNvPr id="295" name="Rectangle 78"/>
           <p:cNvSpPr/>
           <p:nvPr/>
         </p:nvSpPr>
         <p:spPr>
           <a:xfrm>
             <a:off x="0" y="0"/>
-            <a:ext cx="318240" cy="6856200"/>
+            <a:ext cx="317880" cy="6855840"/>
           </a:xfrm>
           <a:prstGeom prst="rect">
             <a:avLst/>
@@ -19542,14 +22572,14 @@
       </p:sp>
       <p:sp>
         <p:nvSpPr>
-          <p:cNvPr id="255" name="Rounded Rectangle 29"/>
+          <p:cNvPr id="296" name="Rounded Rectangle 29"/>
           <p:cNvSpPr/>
           <p:nvPr/>
         </p:nvSpPr>
         <p:spPr>
           <a:xfrm>
             <a:off x="9875520" y="365760"/>
-            <a:ext cx="2009880" cy="501120"/>
+            <a:ext cx="2009520" cy="500760"/>
           </a:xfrm>
           <a:prstGeom prst="roundRect">
             <a:avLst>
@@ -19616,14 +22646,14 @@
       </p:sp>
       <p:sp>
         <p:nvSpPr>
-          <p:cNvPr id="256" name="TextBox 13"/>
+          <p:cNvPr id="297" name="TextBox 13"/>
           <p:cNvSpPr/>
           <p:nvPr/>
         </p:nvSpPr>
         <p:spPr>
           <a:xfrm>
             <a:off x="2441520" y="1005840"/>
-            <a:ext cx="6087240" cy="820800"/>
+            <a:ext cx="6086880" cy="820800"/>
           </a:xfrm>
           <a:prstGeom prst="rect">
             <a:avLst/>
@@ -19670,14 +22700,14 @@
       </p:sp>
       <p:sp>
         <p:nvSpPr>
-          <p:cNvPr id="257" name="TextBox 14"/>
+          <p:cNvPr id="298" name="TextBox 14"/>
           <p:cNvSpPr/>
           <p:nvPr/>
         </p:nvSpPr>
         <p:spPr>
           <a:xfrm>
             <a:off x="2802600" y="2074680"/>
-            <a:ext cx="5366520" cy="668520"/>
+            <a:ext cx="5366160" cy="668520"/>
           </a:xfrm>
           <a:prstGeom prst="rect">
             <a:avLst/>
@@ -19747,14 +22777,14 @@
       </p:sp>
       <p:sp>
         <p:nvSpPr>
-          <p:cNvPr id="258" name="Rounded Rectangle 30"/>
+          <p:cNvPr id="299" name="Rounded Rectangle 30"/>
           <p:cNvSpPr/>
           <p:nvPr/>
         </p:nvSpPr>
         <p:spPr>
           <a:xfrm>
             <a:off x="987480" y="3182040"/>
-            <a:ext cx="3290040" cy="2741400"/>
+            <a:ext cx="3289680" cy="2741040"/>
           </a:xfrm>
           <a:prstGeom prst="roundRect">
             <a:avLst>
@@ -19809,14 +22839,14 @@
       </p:sp>
       <p:sp>
         <p:nvSpPr>
-          <p:cNvPr id="259" name="Rounded Rectangle 31"/>
+          <p:cNvPr id="300" name="Rounded Rectangle 31"/>
           <p:cNvSpPr/>
           <p:nvPr/>
         </p:nvSpPr>
         <p:spPr>
           <a:xfrm>
             <a:off x="685800" y="2971800"/>
-            <a:ext cx="3518640" cy="3656880"/>
+            <a:ext cx="3518280" cy="3656520"/>
           </a:xfrm>
           <a:prstGeom prst="roundRect">
             <a:avLst>
@@ -20123,14 +23153,14 @@
       </p:sp>
       <p:sp>
         <p:nvSpPr>
-          <p:cNvPr id="260" name="Rounded Rectangle 32"/>
+          <p:cNvPr id="301" name="Rounded Rectangle 32"/>
           <p:cNvSpPr/>
           <p:nvPr/>
         </p:nvSpPr>
         <p:spPr>
           <a:xfrm>
             <a:off x="4507920" y="3182040"/>
-            <a:ext cx="3290040" cy="2741400"/>
+            <a:ext cx="3289680" cy="2741040"/>
           </a:xfrm>
           <a:prstGeom prst="roundRect">
             <a:avLst>
@@ -20185,14 +23215,14 @@
       </p:sp>
       <p:sp>
         <p:nvSpPr>
-          <p:cNvPr id="261" name="Rounded Rectangle 33"/>
+          <p:cNvPr id="302" name="Rounded Rectangle 33"/>
           <p:cNvSpPr/>
           <p:nvPr/>
         </p:nvSpPr>
         <p:spPr>
           <a:xfrm>
             <a:off x="4434840" y="3108960"/>
-            <a:ext cx="3290040" cy="2741400"/>
+            <a:ext cx="3289680" cy="2741040"/>
           </a:xfrm>
           <a:prstGeom prst="roundRect">
             <a:avLst>
@@ -20414,14 +23444,14 @@
       </p:sp>
       <p:sp>
         <p:nvSpPr>
-          <p:cNvPr id="262" name="Rounded Rectangle 34"/>
+          <p:cNvPr id="303" name="Rounded Rectangle 34"/>
           <p:cNvSpPr/>
           <p:nvPr/>
         </p:nvSpPr>
         <p:spPr>
           <a:xfrm>
             <a:off x="8028360" y="3182040"/>
-            <a:ext cx="3290040" cy="2741400"/>
+            <a:ext cx="3289680" cy="2741040"/>
           </a:xfrm>
           <a:prstGeom prst="roundRect">
             <a:avLst>
@@ -20476,14 +23506,14 @@
       </p:sp>
       <p:sp>
         <p:nvSpPr>
-          <p:cNvPr id="263" name="Rounded Rectangle 35"/>
+          <p:cNvPr id="304" name="Rounded Rectangle 35"/>
           <p:cNvSpPr/>
           <p:nvPr/>
         </p:nvSpPr>
         <p:spPr>
           <a:xfrm>
             <a:off x="7955280" y="3108960"/>
-            <a:ext cx="3702600" cy="3062520"/>
+            <a:ext cx="3702240" cy="3062160"/>
           </a:xfrm>
           <a:prstGeom prst="roundRect">
             <a:avLst>
@@ -20784,7 +23814,7 @@
       </p:sp>
       <p:sp>
         <p:nvSpPr>
-          <p:cNvPr id="264" name="TextBox 15"/>
+          <p:cNvPr id="305" name="TextBox 15"/>
           <p:cNvSpPr/>
           <p:nvPr/>
         </p:nvSpPr>
@@ -20868,14 +23898,14 @@
       </p:grpSpPr>
       <p:sp>
         <p:nvSpPr>
-          <p:cNvPr id="265" name="Rectangle 79"/>
+          <p:cNvPr id="306" name="Rectangle 79"/>
           <p:cNvSpPr/>
           <p:nvPr/>
         </p:nvSpPr>
         <p:spPr>
           <a:xfrm>
             <a:off x="0" y="0"/>
-            <a:ext cx="12187080" cy="6856200"/>
+            <a:ext cx="12186720" cy="6855840"/>
           </a:xfrm>
           <a:prstGeom prst="rect">
             <a:avLst/>
@@ -20928,14 +23958,14 @@
       </p:sp>
       <p:sp>
         <p:nvSpPr>
-          <p:cNvPr id="266" name="Rectangle 81"/>
+          <p:cNvPr id="307" name="Rectangle 81"/>
           <p:cNvSpPr/>
           <p:nvPr/>
         </p:nvSpPr>
         <p:spPr>
           <a:xfrm>
             <a:off x="0" y="0"/>
-            <a:ext cx="16560" cy="6856200"/>
+            <a:ext cx="16200" cy="6855840"/>
           </a:xfrm>
           <a:prstGeom prst="rect">
             <a:avLst/>
@@ -20988,14 +24018,14 @@
       </p:sp>
       <p:sp>
         <p:nvSpPr>
-          <p:cNvPr id="267" name="Rectangle 82"/>
+          <p:cNvPr id="308" name="Rectangle 82"/>
           <p:cNvSpPr/>
           <p:nvPr/>
         </p:nvSpPr>
         <p:spPr>
           <a:xfrm>
             <a:off x="914400" y="0"/>
-            <a:ext cx="16560" cy="6856200"/>
+            <a:ext cx="16200" cy="6855840"/>
           </a:xfrm>
           <a:prstGeom prst="rect">
             <a:avLst/>
@@ -21048,14 +24078,14 @@
       </p:sp>
       <p:sp>
         <p:nvSpPr>
-          <p:cNvPr id="268" name="Rectangle 83"/>
+          <p:cNvPr id="309" name="Rectangle 83"/>
           <p:cNvSpPr/>
           <p:nvPr/>
         </p:nvSpPr>
         <p:spPr>
           <a:xfrm>
             <a:off x="1828800" y="0"/>
-            <a:ext cx="16560" cy="6856200"/>
+            <a:ext cx="16200" cy="6855840"/>
           </a:xfrm>
           <a:prstGeom prst="rect">
             <a:avLst/>
@@ -21108,14 +24138,14 @@
       </p:sp>
       <p:sp>
         <p:nvSpPr>
-          <p:cNvPr id="269" name="Rectangle 84"/>
+          <p:cNvPr id="310" name="Rectangle 84"/>
           <p:cNvSpPr/>
           <p:nvPr/>
         </p:nvSpPr>
         <p:spPr>
           <a:xfrm>
             <a:off x="2743200" y="0"/>
-            <a:ext cx="16560" cy="6856200"/>
+            <a:ext cx="16200" cy="6855840"/>
           </a:xfrm>
           <a:prstGeom prst="rect">
             <a:avLst/>
@@ -21168,14 +24198,14 @@
       </p:sp>
       <p:sp>
         <p:nvSpPr>
-          <p:cNvPr id="270" name="Rectangle 85"/>
+          <p:cNvPr id="311" name="Rectangle 85"/>
           <p:cNvSpPr/>
           <p:nvPr/>
         </p:nvSpPr>
         <p:spPr>
           <a:xfrm>
             <a:off x="3657600" y="0"/>
-            <a:ext cx="16560" cy="6856200"/>
+            <a:ext cx="16200" cy="6855840"/>
           </a:xfrm>
           <a:prstGeom prst="rect">
             <a:avLst/>
@@ -21228,14 +24258,14 @@
       </p:sp>
       <p:sp>
         <p:nvSpPr>
-          <p:cNvPr id="271" name="Rectangle 86"/>
+          <p:cNvPr id="312" name="Rectangle 86"/>
           <p:cNvSpPr/>
           <p:nvPr/>
         </p:nvSpPr>
         <p:spPr>
           <a:xfrm>
             <a:off x="4572000" y="0"/>
-            <a:ext cx="16560" cy="6856200"/>
+            <a:ext cx="16200" cy="6855840"/>
           </a:xfrm>
           <a:prstGeom prst="rect">
             <a:avLst/>
@@ -21288,14 +24318,14 @@
       </p:sp>
       <p:sp>
         <p:nvSpPr>
-          <p:cNvPr id="272" name="Rectangle 87"/>
+          <p:cNvPr id="313" name="Rectangle 87"/>
           <p:cNvSpPr/>
           <p:nvPr/>
         </p:nvSpPr>
         <p:spPr>
           <a:xfrm>
             <a:off x="5486400" y="0"/>
-            <a:ext cx="16560" cy="6856200"/>
+            <a:ext cx="16200" cy="6855840"/>
           </a:xfrm>
           <a:prstGeom prst="rect">
             <a:avLst/>
@@ -21348,14 +24378,14 @@
       </p:sp>
       <p:sp>
         <p:nvSpPr>
-          <p:cNvPr id="273" name="Rectangle 88"/>
+          <p:cNvPr id="314" name="Rectangle 88"/>
           <p:cNvSpPr/>
           <p:nvPr/>
         </p:nvSpPr>
         <p:spPr>
           <a:xfrm>
             <a:off x="6400800" y="0"/>
-            <a:ext cx="16560" cy="6856200"/>
+            <a:ext cx="16200" cy="6855840"/>
           </a:xfrm>
           <a:prstGeom prst="rect">
             <a:avLst/>
@@ -21408,14 +24438,14 @@
       </p:sp>
       <p:sp>
         <p:nvSpPr>
-          <p:cNvPr id="274" name="Rectangle 89"/>
+          <p:cNvPr id="315" name="Rectangle 89"/>
           <p:cNvSpPr/>
           <p:nvPr/>
         </p:nvSpPr>
         <p:spPr>
           <a:xfrm>
             <a:off x="7315200" y="0"/>
-            <a:ext cx="16560" cy="6856200"/>
+            <a:ext cx="16200" cy="6855840"/>
           </a:xfrm>
           <a:prstGeom prst="rect">
             <a:avLst/>
@@ -21468,14 +24498,14 @@
       </p:sp>
       <p:sp>
         <p:nvSpPr>
-          <p:cNvPr id="275" name="Rectangle 90"/>
+          <p:cNvPr id="316" name="Rectangle 90"/>
           <p:cNvSpPr/>
           <p:nvPr/>
         </p:nvSpPr>
         <p:spPr>
           <a:xfrm>
             <a:off x="8229600" y="0"/>
-            <a:ext cx="16560" cy="6856200"/>
+            <a:ext cx="16200" cy="6855840"/>
           </a:xfrm>
           <a:prstGeom prst="rect">
             <a:avLst/>
@@ -21528,14 +24558,14 @@
       </p:sp>
       <p:sp>
         <p:nvSpPr>
-          <p:cNvPr id="276" name="Rectangle 91"/>
+          <p:cNvPr id="317" name="Rectangle 91"/>
           <p:cNvSpPr/>
           <p:nvPr/>
         </p:nvSpPr>
         <p:spPr>
           <a:xfrm>
             <a:off x="9144000" y="0"/>
-            <a:ext cx="16560" cy="6856200"/>
+            <a:ext cx="16200" cy="6855840"/>
           </a:xfrm>
           <a:prstGeom prst="rect">
             <a:avLst/>
@@ -21588,14 +24618,14 @@
       </p:sp>
       <p:sp>
         <p:nvSpPr>
-          <p:cNvPr id="277" name="Rectangle 92"/>
+          <p:cNvPr id="318" name="Rectangle 92"/>
           <p:cNvSpPr/>
           <p:nvPr/>
         </p:nvSpPr>
         <p:spPr>
           <a:xfrm>
             <a:off x="10058400" y="0"/>
-            <a:ext cx="16560" cy="6856200"/>
+            <a:ext cx="16200" cy="6855840"/>
           </a:xfrm>
           <a:prstGeom prst="rect">
             <a:avLst/>
@@ -21648,14 +24678,14 @@
       </p:sp>
       <p:sp>
         <p:nvSpPr>
-          <p:cNvPr id="278" name="Rectangle 93"/>
+          <p:cNvPr id="319" name="Rectangle 93"/>
           <p:cNvSpPr/>
           <p:nvPr/>
         </p:nvSpPr>
         <p:spPr>
           <a:xfrm>
             <a:off x="10972800" y="0"/>
-            <a:ext cx="16560" cy="6856200"/>
+            <a:ext cx="16200" cy="6855840"/>
           </a:xfrm>
           <a:prstGeom prst="rect">
             <a:avLst/>
@@ -21708,14 +24738,14 @@
       </p:sp>
       <p:sp>
         <p:nvSpPr>
-          <p:cNvPr id="279" name="Rectangle 94"/>
+          <p:cNvPr id="320" name="Rectangle 94"/>
           <p:cNvSpPr/>
           <p:nvPr/>
         </p:nvSpPr>
         <p:spPr>
           <a:xfrm>
             <a:off x="11887200" y="0"/>
-            <a:ext cx="16560" cy="6856200"/>
+            <a:ext cx="16200" cy="6855840"/>
           </a:xfrm>
           <a:prstGeom prst="rect">
             <a:avLst/>
@@ -21768,14 +24798,14 @@
       </p:sp>
       <p:sp>
         <p:nvSpPr>
-          <p:cNvPr id="280" name="Rectangle 95"/>
+          <p:cNvPr id="321" name="Rectangle 95"/>
           <p:cNvSpPr/>
           <p:nvPr/>
         </p:nvSpPr>
         <p:spPr>
           <a:xfrm>
             <a:off x="0" y="0"/>
-            <a:ext cx="318240" cy="6856200"/>
+            <a:ext cx="317880" cy="6855840"/>
           </a:xfrm>
           <a:prstGeom prst="rect">
             <a:avLst/>
@@ -21828,14 +24858,14 @@
       </p:sp>
       <p:sp>
         <p:nvSpPr>
-          <p:cNvPr id="281" name="Rounded Rectangle 36"/>
+          <p:cNvPr id="322" name="Rounded Rectangle 36"/>
           <p:cNvSpPr/>
           <p:nvPr/>
         </p:nvSpPr>
         <p:spPr>
           <a:xfrm>
             <a:off x="9875520" y="365760"/>
-            <a:ext cx="2009880" cy="501120"/>
+            <a:ext cx="2009520" cy="500760"/>
           </a:xfrm>
           <a:prstGeom prst="roundRect">
             <a:avLst>
@@ -21902,14 +24932,14 @@
       </p:sp>
       <p:sp>
         <p:nvSpPr>
-          <p:cNvPr id="282" name="TextBox 16"/>
+          <p:cNvPr id="323" name="TextBox 16"/>
           <p:cNvSpPr/>
           <p:nvPr/>
         </p:nvSpPr>
         <p:spPr>
           <a:xfrm>
             <a:off x="1422000" y="1005840"/>
-            <a:ext cx="8126640" cy="638280"/>
+            <a:ext cx="8126280" cy="638280"/>
           </a:xfrm>
           <a:prstGeom prst="rect">
             <a:avLst/>
@@ -21956,14 +24986,14 @@
       </p:sp>
       <p:sp>
         <p:nvSpPr>
-          <p:cNvPr id="283" name="TextBox 17"/>
+          <p:cNvPr id="324" name="TextBox 17"/>
           <p:cNvSpPr/>
           <p:nvPr/>
         </p:nvSpPr>
         <p:spPr>
           <a:xfrm>
             <a:off x="1388160" y="2057400"/>
-            <a:ext cx="8781840" cy="668520"/>
+            <a:ext cx="8781480" cy="668520"/>
           </a:xfrm>
           <a:prstGeom prst="rect">
             <a:avLst/>
@@ -22033,14 +25063,14 @@
       </p:sp>
       <p:sp>
         <p:nvSpPr>
-          <p:cNvPr id="284" name="Rounded Rectangle 37"/>
+          <p:cNvPr id="325" name="Rounded Rectangle 37"/>
           <p:cNvSpPr/>
           <p:nvPr/>
         </p:nvSpPr>
         <p:spPr>
           <a:xfrm>
             <a:off x="987480" y="3182040"/>
-            <a:ext cx="3290040" cy="2741400"/>
+            <a:ext cx="3289680" cy="2741040"/>
           </a:xfrm>
           <a:prstGeom prst="roundRect">
             <a:avLst>
@@ -22095,14 +25125,14 @@
       </p:sp>
       <p:sp>
         <p:nvSpPr>
-          <p:cNvPr id="285" name="Rounded Rectangle 38"/>
+          <p:cNvPr id="326" name="Rounded Rectangle 38"/>
           <p:cNvSpPr/>
           <p:nvPr/>
         </p:nvSpPr>
         <p:spPr>
           <a:xfrm>
             <a:off x="457200" y="2971800"/>
-            <a:ext cx="3747240" cy="3428280"/>
+            <a:ext cx="3746880" cy="3427920"/>
           </a:xfrm>
           <a:prstGeom prst="roundRect">
             <a:avLst>
@@ -22415,14 +25445,14 @@
       </p:sp>
       <p:sp>
         <p:nvSpPr>
-          <p:cNvPr id="286" name="Rounded Rectangle 39"/>
+          <p:cNvPr id="327" name="Rounded Rectangle 39"/>
           <p:cNvSpPr/>
           <p:nvPr/>
         </p:nvSpPr>
         <p:spPr>
           <a:xfrm>
             <a:off x="4507920" y="3182040"/>
-            <a:ext cx="3290040" cy="2741400"/>
+            <a:ext cx="3289680" cy="2741040"/>
           </a:xfrm>
           <a:prstGeom prst="roundRect">
             <a:avLst>
@@ -22477,14 +25507,14 @@
       </p:sp>
       <p:sp>
         <p:nvSpPr>
-          <p:cNvPr id="287" name="Rounded Rectangle 40"/>
+          <p:cNvPr id="328" name="Rounded Rectangle 40"/>
           <p:cNvSpPr/>
           <p:nvPr/>
         </p:nvSpPr>
         <p:spPr>
           <a:xfrm>
             <a:off x="4343400" y="2971800"/>
-            <a:ext cx="3428280" cy="3291120"/>
+            <a:ext cx="3427920" cy="3290760"/>
           </a:xfrm>
           <a:prstGeom prst="roundRect">
             <a:avLst>
@@ -22894,14 +25924,14 @@
       </p:sp>
       <p:sp>
         <p:nvSpPr>
-          <p:cNvPr id="288" name="Rounded Rectangle 41"/>
+          <p:cNvPr id="329" name="Rounded Rectangle 41"/>
           <p:cNvSpPr/>
           <p:nvPr/>
         </p:nvSpPr>
         <p:spPr>
           <a:xfrm>
             <a:off x="8028360" y="3182040"/>
-            <a:ext cx="3290040" cy="2741400"/>
+            <a:ext cx="3289680" cy="2741040"/>
           </a:xfrm>
           <a:prstGeom prst="roundRect">
             <a:avLst>
@@ -22956,14 +25986,14 @@
       </p:sp>
       <p:sp>
         <p:nvSpPr>
-          <p:cNvPr id="289" name="Rounded Rectangle 42"/>
+          <p:cNvPr id="330" name="Rounded Rectangle 42"/>
           <p:cNvSpPr/>
           <p:nvPr/>
         </p:nvSpPr>
         <p:spPr>
           <a:xfrm>
             <a:off x="7955280" y="3108960"/>
-            <a:ext cx="3702600" cy="3062520"/>
+            <a:ext cx="3702240" cy="3062160"/>
           </a:xfrm>
           <a:prstGeom prst="roundRect">
             <a:avLst>
@@ -23396,7 +26426,7 @@
       </p:sp>
       <p:sp>
         <p:nvSpPr>
-          <p:cNvPr id="290" name="TextBox 18"/>
+          <p:cNvPr id="331" name="TextBox 18"/>
           <p:cNvSpPr/>
           <p:nvPr/>
         </p:nvSpPr>
@@ -23480,14 +26510,14 @@
       </p:grpSpPr>
       <p:sp>
         <p:nvSpPr>
-          <p:cNvPr id="291" name="Rectangle 96"/>
+          <p:cNvPr id="332" name="Rectangle 96"/>
           <p:cNvSpPr/>
           <p:nvPr/>
         </p:nvSpPr>
         <p:spPr>
           <a:xfrm>
             <a:off x="0" y="0"/>
-            <a:ext cx="12187080" cy="6856200"/>
+            <a:ext cx="12186720" cy="6855840"/>
           </a:xfrm>
           <a:prstGeom prst="rect">
             <a:avLst/>
@@ -23540,14 +26570,14 @@
       </p:sp>
       <p:sp>
         <p:nvSpPr>
-          <p:cNvPr id="292" name="Rectangle 97"/>
+          <p:cNvPr id="333" name="Rectangle 97"/>
           <p:cNvSpPr/>
           <p:nvPr/>
         </p:nvSpPr>
         <p:spPr>
           <a:xfrm>
             <a:off x="0" y="0"/>
-            <a:ext cx="16560" cy="6856200"/>
+            <a:ext cx="16200" cy="6855840"/>
           </a:xfrm>
           <a:prstGeom prst="rect">
             <a:avLst/>
@@ -23600,14 +26630,14 @@
       </p:sp>
       <p:sp>
         <p:nvSpPr>
-          <p:cNvPr id="293" name="Rectangle 98"/>
+          <p:cNvPr id="334" name="Rectangle 98"/>
           <p:cNvSpPr/>
           <p:nvPr/>
         </p:nvSpPr>
         <p:spPr>
           <a:xfrm>
             <a:off x="914400" y="0"/>
-            <a:ext cx="16560" cy="6856200"/>
+            <a:ext cx="16200" cy="6855840"/>
           </a:xfrm>
           <a:prstGeom prst="rect">
             <a:avLst/>
@@ -23660,14 +26690,14 @@
       </p:sp>
       <p:sp>
         <p:nvSpPr>
-          <p:cNvPr id="294" name="Rectangle 99"/>
+          <p:cNvPr id="335" name="Rectangle 99"/>
           <p:cNvSpPr/>
           <p:nvPr/>
         </p:nvSpPr>
         <p:spPr>
           <a:xfrm>
             <a:off x="1828800" y="0"/>
-            <a:ext cx="16560" cy="6856200"/>
+            <a:ext cx="16200" cy="6855840"/>
           </a:xfrm>
           <a:prstGeom prst="rect">
             <a:avLst/>
@@ -23720,14 +26750,14 @@
       </p:sp>
       <p:sp>
         <p:nvSpPr>
-          <p:cNvPr id="295" name="Rectangle 100"/>
+          <p:cNvPr id="336" name="Rectangle 100"/>
           <p:cNvSpPr/>
           <p:nvPr/>
         </p:nvSpPr>
         <p:spPr>
           <a:xfrm>
             <a:off x="2743200" y="0"/>
-            <a:ext cx="16560" cy="6856200"/>
+            <a:ext cx="16200" cy="6855840"/>
           </a:xfrm>
           <a:prstGeom prst="rect">
             <a:avLst/>
@@ -23780,14 +26810,14 @@
       </p:sp>
       <p:sp>
         <p:nvSpPr>
-          <p:cNvPr id="296" name="Rectangle 101"/>
+          <p:cNvPr id="337" name="Rectangle 101"/>
           <p:cNvSpPr/>
           <p:nvPr/>
         </p:nvSpPr>
         <p:spPr>
           <a:xfrm>
             <a:off x="3657600" y="0"/>
-            <a:ext cx="16560" cy="6856200"/>
+            <a:ext cx="16200" cy="6855840"/>
           </a:xfrm>
           <a:prstGeom prst="rect">
             <a:avLst/>
@@ -23840,14 +26870,14 @@
       </p:sp>
       <p:sp>
         <p:nvSpPr>
-          <p:cNvPr id="297" name="Rectangle 102"/>
+          <p:cNvPr id="338" name="Rectangle 102"/>
           <p:cNvSpPr/>
           <p:nvPr/>
         </p:nvSpPr>
         <p:spPr>
           <a:xfrm>
             <a:off x="4572000" y="0"/>
-            <a:ext cx="16560" cy="6856200"/>
+            <a:ext cx="16200" cy="6855840"/>
           </a:xfrm>
           <a:prstGeom prst="rect">
             <a:avLst/>
@@ -23900,14 +26930,14 @@
       </p:sp>
       <p:sp>
         <p:nvSpPr>
-          <p:cNvPr id="298" name="Rectangle 103"/>
+          <p:cNvPr id="339" name="Rectangle 103"/>
           <p:cNvSpPr/>
           <p:nvPr/>
         </p:nvSpPr>
         <p:spPr>
           <a:xfrm>
             <a:off x="5486400" y="0"/>
-            <a:ext cx="16560" cy="6856200"/>
+            <a:ext cx="16200" cy="6855840"/>
           </a:xfrm>
           <a:prstGeom prst="rect">
             <a:avLst/>
@@ -23960,14 +26990,14 @@
       </p:sp>
       <p:sp>
         <p:nvSpPr>
-          <p:cNvPr id="299" name="Rectangle 104"/>
+          <p:cNvPr id="340" name="Rectangle 104"/>
           <p:cNvSpPr/>
           <p:nvPr/>
         </p:nvSpPr>
         <p:spPr>
           <a:xfrm>
             <a:off x="6400800" y="0"/>
-            <a:ext cx="16560" cy="6856200"/>
+            <a:ext cx="16200" cy="6855840"/>
           </a:xfrm>
           <a:prstGeom prst="rect">
             <a:avLst/>
@@ -24020,14 +27050,14 @@
       </p:sp>
       <p:sp>
         <p:nvSpPr>
-          <p:cNvPr id="300" name="Rectangle 105"/>
+          <p:cNvPr id="341" name="Rectangle 105"/>
           <p:cNvSpPr/>
           <p:nvPr/>
         </p:nvSpPr>
         <p:spPr>
           <a:xfrm>
             <a:off x="7315200" y="0"/>
-            <a:ext cx="16560" cy="6856200"/>
+            <a:ext cx="16200" cy="6855840"/>
           </a:xfrm>
           <a:prstGeom prst="rect">
             <a:avLst/>
@@ -24080,14 +27110,14 @@
       </p:sp>
       <p:sp>
         <p:nvSpPr>
-          <p:cNvPr id="301" name="Rectangle 106"/>
+          <p:cNvPr id="342" name="Rectangle 106"/>
           <p:cNvSpPr/>
           <p:nvPr/>
         </p:nvSpPr>
         <p:spPr>
           <a:xfrm>
             <a:off x="8229600" y="0"/>
-            <a:ext cx="16560" cy="6856200"/>
+            <a:ext cx="16200" cy="6855840"/>
           </a:xfrm>
           <a:prstGeom prst="rect">
             <a:avLst/>
@@ -24140,14 +27170,14 @@
       </p:sp>
       <p:sp>
         <p:nvSpPr>
-          <p:cNvPr id="302" name="Rectangle 107"/>
+          <p:cNvPr id="343" name="Rectangle 107"/>
           <p:cNvSpPr/>
           <p:nvPr/>
         </p:nvSpPr>
         <p:spPr>
           <a:xfrm>
             <a:off x="9144000" y="0"/>
-            <a:ext cx="16560" cy="6856200"/>
+            <a:ext cx="16200" cy="6855840"/>
           </a:xfrm>
           <a:prstGeom prst="rect">
             <a:avLst/>
@@ -24200,14 +27230,14 @@
       </p:sp>
       <p:sp>
         <p:nvSpPr>
-          <p:cNvPr id="303" name="Rectangle 108"/>
+          <p:cNvPr id="344" name="Rectangle 108"/>
           <p:cNvSpPr/>
           <p:nvPr/>
         </p:nvSpPr>
         <p:spPr>
           <a:xfrm>
             <a:off x="10058400" y="0"/>
-            <a:ext cx="16560" cy="6856200"/>
+            <a:ext cx="16200" cy="6855840"/>
           </a:xfrm>
           <a:prstGeom prst="rect">
             <a:avLst/>
@@ -24260,14 +27290,14 @@
       </p:sp>
       <p:sp>
         <p:nvSpPr>
-          <p:cNvPr id="304" name="Rectangle 109"/>
+          <p:cNvPr id="345" name="Rectangle 109"/>
           <p:cNvSpPr/>
           <p:nvPr/>
         </p:nvSpPr>
         <p:spPr>
           <a:xfrm>
             <a:off x="10972800" y="0"/>
-            <a:ext cx="16560" cy="6856200"/>
+            <a:ext cx="16200" cy="6855840"/>
           </a:xfrm>
           <a:prstGeom prst="rect">
             <a:avLst/>
@@ -24320,14 +27350,14 @@
       </p:sp>
       <p:sp>
         <p:nvSpPr>
-          <p:cNvPr id="305" name="Rectangle 110"/>
+          <p:cNvPr id="346" name="Rectangle 110"/>
           <p:cNvSpPr/>
           <p:nvPr/>
         </p:nvSpPr>
         <p:spPr>
           <a:xfrm>
             <a:off x="11887200" y="0"/>
-            <a:ext cx="16560" cy="6856200"/>
+            <a:ext cx="16200" cy="6855840"/>
           </a:xfrm>
           <a:prstGeom prst="rect">
             <a:avLst/>
@@ -24380,14 +27410,14 @@
       </p:sp>
       <p:sp>
         <p:nvSpPr>
-          <p:cNvPr id="306" name="Rectangle 111"/>
+          <p:cNvPr id="347" name="Rectangle 111"/>
           <p:cNvSpPr/>
           <p:nvPr/>
         </p:nvSpPr>
         <p:spPr>
           <a:xfrm>
             <a:off x="0" y="0"/>
-            <a:ext cx="318240" cy="6856200"/>
+            <a:ext cx="317880" cy="6855840"/>
           </a:xfrm>
           <a:prstGeom prst="rect">
             <a:avLst/>
@@ -24440,14 +27470,14 @@
       </p:sp>
       <p:sp>
         <p:nvSpPr>
-          <p:cNvPr id="307" name="Rounded Rectangle 43"/>
+          <p:cNvPr id="348" name="Rounded Rectangle 43"/>
           <p:cNvSpPr/>
           <p:nvPr/>
         </p:nvSpPr>
         <p:spPr>
           <a:xfrm>
             <a:off x="9875520" y="365760"/>
-            <a:ext cx="2009880" cy="501120"/>
+            <a:ext cx="2009520" cy="500760"/>
           </a:xfrm>
           <a:prstGeom prst="roundRect">
             <a:avLst>
@@ -24514,14 +27544,14 @@
       </p:sp>
       <p:sp>
         <p:nvSpPr>
-          <p:cNvPr id="308" name="TextBox 19"/>
+          <p:cNvPr id="349" name="TextBox 19"/>
           <p:cNvSpPr/>
           <p:nvPr/>
         </p:nvSpPr>
         <p:spPr>
           <a:xfrm>
             <a:off x="1252800" y="1005840"/>
-            <a:ext cx="8465040" cy="729720"/>
+            <a:ext cx="8464680" cy="729720"/>
           </a:xfrm>
           <a:prstGeom prst="rect">
             <a:avLst/>
@@ -24568,14 +27598,14 @@
       </p:sp>
       <p:sp>
         <p:nvSpPr>
-          <p:cNvPr id="309" name="TextBox 20"/>
+          <p:cNvPr id="350" name="TextBox 20"/>
           <p:cNvSpPr/>
           <p:nvPr/>
         </p:nvSpPr>
         <p:spPr>
           <a:xfrm>
             <a:off x="1866960" y="1828800"/>
-            <a:ext cx="7237080" cy="668520"/>
+            <a:ext cx="7236720" cy="668520"/>
           </a:xfrm>
           <a:prstGeom prst="rect">
             <a:avLst/>
@@ -24645,14 +27675,14 @@
       </p:sp>
       <p:sp>
         <p:nvSpPr>
-          <p:cNvPr id="310" name="Rounded Rectangle 44"/>
+          <p:cNvPr id="351" name="Rounded Rectangle 44"/>
           <p:cNvSpPr/>
           <p:nvPr/>
         </p:nvSpPr>
         <p:spPr>
           <a:xfrm>
             <a:off x="987480" y="3182040"/>
-            <a:ext cx="3290040" cy="2741400"/>
+            <a:ext cx="3289680" cy="2741040"/>
           </a:xfrm>
           <a:prstGeom prst="roundRect">
             <a:avLst>
@@ -24707,14 +27737,14 @@
       </p:sp>
       <p:sp>
         <p:nvSpPr>
-          <p:cNvPr id="311" name="Rounded Rectangle 45"/>
+          <p:cNvPr id="352" name="Rounded Rectangle 45"/>
           <p:cNvSpPr/>
           <p:nvPr/>
         </p:nvSpPr>
         <p:spPr>
           <a:xfrm>
             <a:off x="475560" y="2514600"/>
-            <a:ext cx="3728880" cy="3885480"/>
+            <a:ext cx="3728520" cy="3885120"/>
           </a:xfrm>
           <a:prstGeom prst="roundRect">
             <a:avLst>
@@ -25086,14 +28116,14 @@
       </p:sp>
       <p:sp>
         <p:nvSpPr>
-          <p:cNvPr id="312" name="Rounded Rectangle 46"/>
+          <p:cNvPr id="353" name="Rounded Rectangle 46"/>
           <p:cNvSpPr/>
           <p:nvPr/>
         </p:nvSpPr>
         <p:spPr>
           <a:xfrm>
             <a:off x="4507920" y="3182040"/>
-            <a:ext cx="3290040" cy="2741400"/>
+            <a:ext cx="3289680" cy="2741040"/>
           </a:xfrm>
           <a:prstGeom prst="roundRect">
             <a:avLst>
@@ -25148,14 +28178,14 @@
       </p:sp>
       <p:sp>
         <p:nvSpPr>
-          <p:cNvPr id="313" name="Rounded Rectangle 47"/>
+          <p:cNvPr id="354" name="Rounded Rectangle 47"/>
           <p:cNvSpPr/>
           <p:nvPr/>
         </p:nvSpPr>
         <p:spPr>
           <a:xfrm>
             <a:off x="4434840" y="3108960"/>
-            <a:ext cx="3290040" cy="2741400"/>
+            <a:ext cx="3289680" cy="2741040"/>
           </a:xfrm>
           <a:prstGeom prst="roundRect">
             <a:avLst>
@@ -25410,14 +28440,14 @@
       </p:sp>
       <p:sp>
         <p:nvSpPr>
-          <p:cNvPr id="314" name="Rounded Rectangle 48"/>
+          <p:cNvPr id="355" name="Rounded Rectangle 48"/>
           <p:cNvSpPr/>
           <p:nvPr/>
         </p:nvSpPr>
         <p:spPr>
           <a:xfrm>
             <a:off x="8028360" y="3182040"/>
-            <a:ext cx="3290040" cy="2741400"/>
+            <a:ext cx="3289680" cy="2741040"/>
           </a:xfrm>
           <a:prstGeom prst="roundRect">
             <a:avLst>
@@ -25472,14 +28502,14 @@
       </p:sp>
       <p:sp>
         <p:nvSpPr>
-          <p:cNvPr id="315" name="Rounded Rectangle 49"/>
+          <p:cNvPr id="356" name="Rounded Rectangle 49"/>
           <p:cNvSpPr/>
           <p:nvPr/>
         </p:nvSpPr>
         <p:spPr>
           <a:xfrm>
             <a:off x="7955280" y="2304000"/>
-            <a:ext cx="3931560" cy="3619440"/>
+            <a:ext cx="3931200" cy="3619080"/>
           </a:xfrm>
           <a:prstGeom prst="roundRect">
             <a:avLst>
@@ -25866,7 +28896,7 @@
       </p:sp>
       <p:sp>
         <p:nvSpPr>
-          <p:cNvPr id="316" name="TextBox 21"/>
+          <p:cNvPr id="357" name="TextBox 21"/>
           <p:cNvSpPr/>
           <p:nvPr/>
         </p:nvSpPr>
@@ -25950,14 +28980,14 @@
       </p:grpSpPr>
       <p:sp>
         <p:nvSpPr>
-          <p:cNvPr id="317" name="Rectangle 112"/>
+          <p:cNvPr id="358" name="Rectangle 112"/>
           <p:cNvSpPr/>
           <p:nvPr/>
         </p:nvSpPr>
         <p:spPr>
           <a:xfrm>
             <a:off x="0" y="0"/>
-            <a:ext cx="12187080" cy="6856200"/>
+            <a:ext cx="12186720" cy="6855840"/>
           </a:xfrm>
           <a:prstGeom prst="rect">
             <a:avLst/>
@@ -26010,14 +29040,14 @@
       </p:sp>
       <p:sp>
         <p:nvSpPr>
-          <p:cNvPr id="318" name="Rectangle 113"/>
+          <p:cNvPr id="359" name="Rectangle 113"/>
           <p:cNvSpPr/>
           <p:nvPr/>
         </p:nvSpPr>
         <p:spPr>
           <a:xfrm>
             <a:off x="0" y="0"/>
-            <a:ext cx="16560" cy="6856200"/>
+            <a:ext cx="16200" cy="6855840"/>
           </a:xfrm>
           <a:prstGeom prst="rect">
             <a:avLst/>
@@ -26070,14 +29100,14 @@
       </p:sp>
       <p:sp>
         <p:nvSpPr>
-          <p:cNvPr id="319" name="Rectangle 114"/>
+          <p:cNvPr id="360" name="Rectangle 114"/>
           <p:cNvSpPr/>
           <p:nvPr/>
         </p:nvSpPr>
         <p:spPr>
           <a:xfrm>
             <a:off x="914400" y="0"/>
-            <a:ext cx="16560" cy="6856200"/>
+            <a:ext cx="16200" cy="6855840"/>
           </a:xfrm>
           <a:prstGeom prst="rect">
             <a:avLst/>
@@ -26130,14 +29160,14 @@
       </p:sp>
       <p:sp>
         <p:nvSpPr>
-          <p:cNvPr id="320" name="Rectangle 115"/>
+          <p:cNvPr id="361" name="Rectangle 115"/>
           <p:cNvSpPr/>
           <p:nvPr/>
         </p:nvSpPr>
         <p:spPr>
           <a:xfrm>
             <a:off x="1828800" y="0"/>
-            <a:ext cx="16560" cy="6856200"/>
+            <a:ext cx="16200" cy="6855840"/>
           </a:xfrm>
           <a:prstGeom prst="rect">
             <a:avLst/>
@@ -26190,14 +29220,14 @@
       </p:sp>
       <p:sp>
         <p:nvSpPr>
-          <p:cNvPr id="321" name="Rectangle 116"/>
+          <p:cNvPr id="362" name="Rectangle 116"/>
           <p:cNvSpPr/>
           <p:nvPr/>
         </p:nvSpPr>
         <p:spPr>
           <a:xfrm>
             <a:off x="2743200" y="0"/>
-            <a:ext cx="16560" cy="6856200"/>
+            <a:ext cx="16200" cy="6855840"/>
           </a:xfrm>
           <a:prstGeom prst="rect">
             <a:avLst/>
@@ -26250,14 +29280,14 @@
       </p:sp>
       <p:sp>
         <p:nvSpPr>
-          <p:cNvPr id="322" name="Rectangle 117"/>
+          <p:cNvPr id="363" name="Rectangle 117"/>
           <p:cNvSpPr/>
           <p:nvPr/>
         </p:nvSpPr>
         <p:spPr>
           <a:xfrm>
             <a:off x="3657600" y="0"/>
-            <a:ext cx="16560" cy="6856200"/>
+            <a:ext cx="16200" cy="6855840"/>
           </a:xfrm>
           <a:prstGeom prst="rect">
             <a:avLst/>
@@ -26310,14 +29340,14 @@
       </p:sp>
       <p:sp>
         <p:nvSpPr>
-          <p:cNvPr id="323" name="Rectangle 118"/>
+          <p:cNvPr id="364" name="Rectangle 118"/>
           <p:cNvSpPr/>
           <p:nvPr/>
         </p:nvSpPr>
         <p:spPr>
           <a:xfrm>
             <a:off x="4572000" y="0"/>
-            <a:ext cx="16560" cy="6856200"/>
+            <a:ext cx="16200" cy="6855840"/>
           </a:xfrm>
           <a:prstGeom prst="rect">
             <a:avLst/>
@@ -26370,14 +29400,14 @@
       </p:sp>
       <p:sp>
         <p:nvSpPr>
-          <p:cNvPr id="324" name="Rectangle 119"/>
+          <p:cNvPr id="365" name="Rectangle 119"/>
           <p:cNvSpPr/>
           <p:nvPr/>
         </p:nvSpPr>
         <p:spPr>
           <a:xfrm>
             <a:off x="5486400" y="0"/>
-            <a:ext cx="16560" cy="6856200"/>
+            <a:ext cx="16200" cy="6855840"/>
           </a:xfrm>
           <a:prstGeom prst="rect">
             <a:avLst/>
@@ -26430,14 +29460,14 @@
       </p:sp>
       <p:sp>
         <p:nvSpPr>
-          <p:cNvPr id="325" name="Rectangle 120"/>
+          <p:cNvPr id="366" name="Rectangle 120"/>
           <p:cNvSpPr/>
           <p:nvPr/>
         </p:nvSpPr>
         <p:spPr>
           <a:xfrm>
             <a:off x="6400800" y="0"/>
-            <a:ext cx="16560" cy="6856200"/>
+            <a:ext cx="16200" cy="6855840"/>
           </a:xfrm>
           <a:prstGeom prst="rect">
             <a:avLst/>
@@ -26490,14 +29520,14 @@
       </p:sp>
       <p:sp>
         <p:nvSpPr>
-          <p:cNvPr id="326" name="Rectangle 121"/>
+          <p:cNvPr id="367" name="Rectangle 121"/>
           <p:cNvSpPr/>
           <p:nvPr/>
         </p:nvSpPr>
         <p:spPr>
           <a:xfrm>
             <a:off x="7315200" y="0"/>
-            <a:ext cx="16560" cy="6856200"/>
+            <a:ext cx="16200" cy="6855840"/>
           </a:xfrm>
           <a:prstGeom prst="rect">
             <a:avLst/>
@@ -26550,14 +29580,14 @@
       </p:sp>
       <p:sp>
         <p:nvSpPr>
-          <p:cNvPr id="327" name="Rectangle 122"/>
+          <p:cNvPr id="368" name="Rectangle 122"/>
           <p:cNvSpPr/>
           <p:nvPr/>
         </p:nvSpPr>
         <p:spPr>
           <a:xfrm>
             <a:off x="8229600" y="0"/>
-            <a:ext cx="16560" cy="6856200"/>
+            <a:ext cx="16200" cy="6855840"/>
           </a:xfrm>
           <a:prstGeom prst="rect">
             <a:avLst/>
@@ -26610,14 +29640,14 @@
       </p:sp>
       <p:sp>
         <p:nvSpPr>
-          <p:cNvPr id="328" name="Rectangle 123"/>
+          <p:cNvPr id="369" name="Rectangle 123"/>
           <p:cNvSpPr/>
           <p:nvPr/>
         </p:nvSpPr>
         <p:spPr>
           <a:xfrm>
             <a:off x="9144000" y="0"/>
-            <a:ext cx="16560" cy="6856200"/>
+            <a:ext cx="16200" cy="6855840"/>
           </a:xfrm>
           <a:prstGeom prst="rect">
             <a:avLst/>
@@ -26670,14 +29700,14 @@
       </p:sp>
       <p:sp>
         <p:nvSpPr>
-          <p:cNvPr id="329" name="Rectangle 124"/>
+          <p:cNvPr id="370" name="Rectangle 124"/>
           <p:cNvSpPr/>
           <p:nvPr/>
         </p:nvSpPr>
         <p:spPr>
           <a:xfrm>
             <a:off x="10058400" y="0"/>
-            <a:ext cx="16560" cy="6856200"/>
+            <a:ext cx="16200" cy="6855840"/>
           </a:xfrm>
           <a:prstGeom prst="rect">
             <a:avLst/>
@@ -26730,14 +29760,14 @@
       </p:sp>
       <p:sp>
         <p:nvSpPr>
-          <p:cNvPr id="330" name="Rectangle 125"/>
+          <p:cNvPr id="371" name="Rectangle 125"/>
           <p:cNvSpPr/>
           <p:nvPr/>
         </p:nvSpPr>
         <p:spPr>
           <a:xfrm>
             <a:off x="10972800" y="0"/>
-            <a:ext cx="16560" cy="6856200"/>
+            <a:ext cx="16200" cy="6855840"/>
           </a:xfrm>
           <a:prstGeom prst="rect">
             <a:avLst/>
@@ -26790,14 +29820,14 @@
       </p:sp>
       <p:sp>
         <p:nvSpPr>
-          <p:cNvPr id="331" name="Rectangle 126"/>
+          <p:cNvPr id="372" name="Rectangle 126"/>
           <p:cNvSpPr/>
           <p:nvPr/>
         </p:nvSpPr>
         <p:spPr>
           <a:xfrm>
             <a:off x="11887200" y="0"/>
-            <a:ext cx="16560" cy="6856200"/>
+            <a:ext cx="16200" cy="6855840"/>
           </a:xfrm>
           <a:prstGeom prst="rect">
             <a:avLst/>
@@ -26850,14 +29880,14 @@
       </p:sp>
       <p:sp>
         <p:nvSpPr>
-          <p:cNvPr id="332" name="Rectangle 127"/>
+          <p:cNvPr id="373" name="Rectangle 127"/>
           <p:cNvSpPr/>
           <p:nvPr/>
         </p:nvSpPr>
         <p:spPr>
           <a:xfrm>
             <a:off x="0" y="0"/>
-            <a:ext cx="318240" cy="6856200"/>
+            <a:ext cx="317880" cy="6855840"/>
           </a:xfrm>
           <a:prstGeom prst="rect">
             <a:avLst/>
@@ -26910,14 +29940,14 @@
       </p:sp>
       <p:sp>
         <p:nvSpPr>
-          <p:cNvPr id="333" name="Rounded Rectangle 50"/>
+          <p:cNvPr id="374" name="Rounded Rectangle 50"/>
           <p:cNvSpPr/>
           <p:nvPr/>
         </p:nvSpPr>
         <p:spPr>
           <a:xfrm>
             <a:off x="9875520" y="365760"/>
-            <a:ext cx="2009880" cy="501120"/>
+            <a:ext cx="2009520" cy="500760"/>
           </a:xfrm>
           <a:prstGeom prst="roundRect">
             <a:avLst>
@@ -26984,14 +30014,14 @@
       </p:sp>
       <p:sp>
         <p:nvSpPr>
-          <p:cNvPr id="334" name="TextBox 22"/>
+          <p:cNvPr id="375" name="TextBox 22"/>
           <p:cNvSpPr/>
           <p:nvPr/>
         </p:nvSpPr>
         <p:spPr>
           <a:xfrm>
             <a:off x="2667240" y="1005840"/>
-            <a:ext cx="5636520" cy="820800"/>
+            <a:ext cx="5636160" cy="820800"/>
           </a:xfrm>
           <a:prstGeom prst="rect">
             <a:avLst/>
@@ -27038,14 +30068,14 @@
       </p:sp>
       <p:sp>
         <p:nvSpPr>
-          <p:cNvPr id="335" name="TextBox 23"/>
+          <p:cNvPr id="376" name="TextBox 23"/>
           <p:cNvSpPr/>
           <p:nvPr/>
         </p:nvSpPr>
         <p:spPr>
           <a:xfrm>
             <a:off x="2033640" y="2074680"/>
-            <a:ext cx="6919920" cy="668520"/>
+            <a:ext cx="6919560" cy="668520"/>
           </a:xfrm>
           <a:prstGeom prst="rect">
             <a:avLst/>
@@ -27115,14 +30145,14 @@
       </p:sp>
       <p:sp>
         <p:nvSpPr>
-          <p:cNvPr id="336" name="Rounded Rectangle 51"/>
+          <p:cNvPr id="377" name="Rounded Rectangle 51"/>
           <p:cNvSpPr/>
           <p:nvPr/>
         </p:nvSpPr>
         <p:spPr>
           <a:xfrm>
             <a:off x="987480" y="3182040"/>
-            <a:ext cx="3290040" cy="2741400"/>
+            <a:ext cx="3289680" cy="2741040"/>
           </a:xfrm>
           <a:prstGeom prst="roundRect">
             <a:avLst>
@@ -27177,14 +30207,14 @@
       </p:sp>
       <p:sp>
         <p:nvSpPr>
-          <p:cNvPr id="337" name="Rounded Rectangle 52"/>
+          <p:cNvPr id="378" name="Rounded Rectangle 52"/>
           <p:cNvSpPr/>
           <p:nvPr/>
         </p:nvSpPr>
         <p:spPr>
           <a:xfrm>
             <a:off x="685800" y="2971800"/>
-            <a:ext cx="3518640" cy="3428640"/>
+            <a:ext cx="3518280" cy="3428280"/>
           </a:xfrm>
           <a:prstGeom prst="roundRect">
             <a:avLst>
@@ -27451,14 +30481,14 @@
       </p:sp>
       <p:sp>
         <p:nvSpPr>
-          <p:cNvPr id="338" name="Rounded Rectangle 53"/>
+          <p:cNvPr id="379" name="Rounded Rectangle 53"/>
           <p:cNvSpPr/>
           <p:nvPr/>
         </p:nvSpPr>
         <p:spPr>
           <a:xfrm>
             <a:off x="4507920" y="3182040"/>
-            <a:ext cx="3290040" cy="2741400"/>
+            <a:ext cx="3289680" cy="2741040"/>
           </a:xfrm>
           <a:prstGeom prst="roundRect">
             <a:avLst>
@@ -27513,14 +30543,14 @@
       </p:sp>
       <p:sp>
         <p:nvSpPr>
-          <p:cNvPr id="339" name="Rounded Rectangle 54"/>
+          <p:cNvPr id="380" name="Rounded Rectangle 54"/>
           <p:cNvSpPr/>
           <p:nvPr/>
         </p:nvSpPr>
         <p:spPr>
           <a:xfrm>
             <a:off x="4434840" y="3108960"/>
-            <a:ext cx="3290040" cy="2741400"/>
+            <a:ext cx="3289680" cy="2741040"/>
           </a:xfrm>
           <a:prstGeom prst="roundRect">
             <a:avLst>
@@ -27854,14 +30884,14 @@
       </p:sp>
       <p:sp>
         <p:nvSpPr>
-          <p:cNvPr id="340" name="Rounded Rectangle 55"/>
+          <p:cNvPr id="381" name="Rounded Rectangle 55"/>
           <p:cNvSpPr/>
           <p:nvPr/>
         </p:nvSpPr>
         <p:spPr>
           <a:xfrm>
             <a:off x="8028360" y="3182040"/>
-            <a:ext cx="3290040" cy="2741400"/>
+            <a:ext cx="3289680" cy="2741040"/>
           </a:xfrm>
           <a:prstGeom prst="roundRect">
             <a:avLst>
@@ -27916,14 +30946,14 @@
       </p:sp>
       <p:sp>
         <p:nvSpPr>
-          <p:cNvPr id="341" name="Rounded Rectangle 56"/>
+          <p:cNvPr id="382" name="Rounded Rectangle 56"/>
           <p:cNvSpPr/>
           <p:nvPr/>
         </p:nvSpPr>
         <p:spPr>
           <a:xfrm>
             <a:off x="7955280" y="2971800"/>
-            <a:ext cx="3474000" cy="2971080"/>
+            <a:ext cx="3473640" cy="2970720"/>
           </a:xfrm>
           <a:prstGeom prst="roundRect">
             <a:avLst>
@@ -28244,7 +31274,7 @@
       </p:sp>
       <p:sp>
         <p:nvSpPr>
-          <p:cNvPr id="342" name="TextBox 24"/>
+          <p:cNvPr id="383" name="TextBox 24"/>
           <p:cNvSpPr/>
           <p:nvPr/>
         </p:nvSpPr>
@@ -28252,6 +31282,2361 @@
           <a:xfrm>
             <a:off x="4600080" y="6446520"/>
             <a:ext cx="3051000" cy="363960"/>
+          </a:xfrm>
+          <a:prstGeom prst="rect">
+            <a:avLst/>
+          </a:prstGeom>
+          <a:noFill/>
+          <a:ln w="0">
+            <a:noFill/>
+          </a:ln>
+        </p:spPr>
+        <p:style>
+          <a:lnRef idx="0"/>
+          <a:fillRef idx="0"/>
+          <a:effectRef idx="0"/>
+          <a:fontRef idx="minor"/>
+        </p:style>
+        <p:txBody>
+          <a:bodyPr wrap="none" lIns="90000" rIns="90000" tIns="45000" bIns="45000" anchor="t">
+            <a:spAutoFit/>
+          </a:bodyPr>
+          <a:p>
+            <a:pPr>
+              <a:lnSpc>
+                <a:spcPct val="100000"/>
+              </a:lnSpc>
+            </a:pPr>
+            <a:r>
+              <a:rPr b="0" lang="en-US" sz="1800" spc="-1" strike="noStrike">
+                <a:solidFill>
+                  <a:srgbClr val="000000"/>
+                </a:solidFill>
+                <a:latin typeface="Calibri"/>
+                <a:ea typeface="DejaVu Sans"/>
+              </a:rPr>
+              <a:t>Java • Ultra Premium Template</a:t>
+            </a:r>
+            <a:endParaRPr b="0" lang="en-US" sz="1800" spc="-1" strike="noStrike">
+              <a:solidFill>
+                <a:srgbClr val="000000"/>
+              </a:solidFill>
+              <a:latin typeface="Arial"/>
+            </a:endParaRPr>
+          </a:p>
+        </p:txBody>
+      </p:sp>
+    </p:spTree>
+  </p:cSld>
+  <mc:AlternateContent>
+    <mc:Choice Requires="p14">
+      <p:transition spd="slow" p14:dur="2000"/>
+    </mc:Choice>
+    <mc:Fallback>
+      <p:transition spd="slow"/>
+    </mc:Fallback>
+  </mc:AlternateContent>
+</p:sld>
+</file>
+
+<file path=ppt/slides/slide8.xml><?xml version="1.0" encoding="utf-8"?>
+<p:sld xmlns:a="http://schemas.openxmlformats.org/drawingml/2006/main" xmlns:p="http://schemas.openxmlformats.org/presentationml/2006/main" xmlns:r="http://schemas.openxmlformats.org/officeDocument/2006/relationships" xmlns:p14="http://schemas.microsoft.com/office/powerpoint/2010/main" xmlns:p15="http://schemas.microsoft.com/office/powerpoint/2012/main" xmlns:mc="http://schemas.openxmlformats.org/markup-compatibility/2006">
+  <p:cSld>
+    <p:spTree>
+      <p:nvGrpSpPr>
+        <p:cNvPr id="1" name=""/>
+        <p:cNvGrpSpPr/>
+        <p:nvPr/>
+      </p:nvGrpSpPr>
+      <p:grpSpPr>
+        <a:xfrm>
+          <a:off x="0" y="0"/>
+          <a:ext cx="0" cy="0"/>
+          <a:chOff x="0" y="0"/>
+          <a:chExt cx="0" cy="0"/>
+        </a:xfrm>
+      </p:grpSpPr>
+      <p:sp>
+        <p:nvSpPr>
+          <p:cNvPr id="384" name="Rectangle 128"/>
+          <p:cNvSpPr/>
+          <p:nvPr/>
+        </p:nvSpPr>
+        <p:spPr>
+          <a:xfrm>
+            <a:off x="0" y="0"/>
+            <a:ext cx="12187800" cy="6856920"/>
+          </a:xfrm>
+          <a:prstGeom prst="rect">
+            <a:avLst/>
+          </a:prstGeom>
+          <a:solidFill>
+            <a:srgbClr val="0b0b0d"/>
+          </a:solidFill>
+          <a:ln>
+            <a:noFill/>
+          </a:ln>
+          <a:effectLst>
+            <a:outerShdw blurRad="39960" dir="5400000" dist="23040" rotWithShape="0">
+              <a:srgbClr val="000000">
+                <a:alpha val="35000"/>
+              </a:srgbClr>
+            </a:outerShdw>
+          </a:effectLst>
+        </p:spPr>
+        <p:style>
+          <a:lnRef idx="1">
+            <a:schemeClr val="accent1"/>
+          </a:lnRef>
+          <a:fillRef idx="3">
+            <a:schemeClr val="accent1"/>
+          </a:fillRef>
+          <a:effectRef idx="2">
+            <a:schemeClr val="accent1"/>
+          </a:effectRef>
+          <a:fontRef idx="minor"/>
+        </p:style>
+        <p:txBody>
+          <a:bodyPr lIns="90000" rIns="90000" tIns="45000" bIns="45000" anchor="ctr">
+            <a:noAutofit/>
+          </a:bodyPr>
+          <a:p>
+            <a:endParaRPr b="0" lang="en-US" sz="1800" spc="-1" strike="noStrike">
+              <a:solidFill>
+                <a:schemeClr val="lt1"/>
+              </a:solidFill>
+              <a:latin typeface="Calibri"/>
+              <a:ea typeface="DejaVu Sans"/>
+            </a:endParaRPr>
+          </a:p>
+        </p:txBody>
+      </p:sp>
+      <p:sp>
+        <p:nvSpPr>
+          <p:cNvPr id="385" name="Rectangle 129"/>
+          <p:cNvSpPr/>
+          <p:nvPr/>
+        </p:nvSpPr>
+        <p:spPr>
+          <a:xfrm>
+            <a:off x="0" y="0"/>
+            <a:ext cx="17280" cy="6856920"/>
+          </a:xfrm>
+          <a:prstGeom prst="rect">
+            <a:avLst/>
+          </a:prstGeom>
+          <a:solidFill>
+            <a:srgbClr val="121216"/>
+          </a:solidFill>
+          <a:ln>
+            <a:noFill/>
+          </a:ln>
+          <a:effectLst>
+            <a:outerShdw blurRad="39960" dir="5400000" dist="23040" rotWithShape="0">
+              <a:srgbClr val="000000">
+                <a:alpha val="35000"/>
+              </a:srgbClr>
+            </a:outerShdw>
+          </a:effectLst>
+        </p:spPr>
+        <p:style>
+          <a:lnRef idx="1">
+            <a:schemeClr val="accent1"/>
+          </a:lnRef>
+          <a:fillRef idx="3">
+            <a:schemeClr val="accent1"/>
+          </a:fillRef>
+          <a:effectRef idx="2">
+            <a:schemeClr val="accent1"/>
+          </a:effectRef>
+          <a:fontRef idx="minor"/>
+        </p:style>
+        <p:txBody>
+          <a:bodyPr lIns="90000" rIns="90000" tIns="45000" bIns="45000" anchor="ctr">
+            <a:noAutofit/>
+          </a:bodyPr>
+          <a:p>
+            <a:endParaRPr b="0" lang="en-US" sz="1800" spc="-1" strike="noStrike">
+              <a:solidFill>
+                <a:schemeClr val="lt1"/>
+              </a:solidFill>
+              <a:latin typeface="Calibri"/>
+              <a:ea typeface="DejaVu Sans"/>
+            </a:endParaRPr>
+          </a:p>
+        </p:txBody>
+      </p:sp>
+      <p:sp>
+        <p:nvSpPr>
+          <p:cNvPr id="386" name="Rectangle 130"/>
+          <p:cNvSpPr/>
+          <p:nvPr/>
+        </p:nvSpPr>
+        <p:spPr>
+          <a:xfrm>
+            <a:off x="914400" y="0"/>
+            <a:ext cx="17280" cy="6856920"/>
+          </a:xfrm>
+          <a:prstGeom prst="rect">
+            <a:avLst/>
+          </a:prstGeom>
+          <a:solidFill>
+            <a:srgbClr val="121216"/>
+          </a:solidFill>
+          <a:ln>
+            <a:noFill/>
+          </a:ln>
+          <a:effectLst>
+            <a:outerShdw blurRad="39960" dir="5400000" dist="23040" rotWithShape="0">
+              <a:srgbClr val="000000">
+                <a:alpha val="35000"/>
+              </a:srgbClr>
+            </a:outerShdw>
+          </a:effectLst>
+        </p:spPr>
+        <p:style>
+          <a:lnRef idx="1">
+            <a:schemeClr val="accent1"/>
+          </a:lnRef>
+          <a:fillRef idx="3">
+            <a:schemeClr val="accent1"/>
+          </a:fillRef>
+          <a:effectRef idx="2">
+            <a:schemeClr val="accent1"/>
+          </a:effectRef>
+          <a:fontRef idx="minor"/>
+        </p:style>
+        <p:txBody>
+          <a:bodyPr lIns="90000" rIns="90000" tIns="45000" bIns="45000" anchor="ctr">
+            <a:noAutofit/>
+          </a:bodyPr>
+          <a:p>
+            <a:endParaRPr b="0" lang="en-US" sz="1800" spc="-1" strike="noStrike">
+              <a:solidFill>
+                <a:schemeClr val="lt1"/>
+              </a:solidFill>
+              <a:latin typeface="Calibri"/>
+              <a:ea typeface="DejaVu Sans"/>
+            </a:endParaRPr>
+          </a:p>
+        </p:txBody>
+      </p:sp>
+      <p:sp>
+        <p:nvSpPr>
+          <p:cNvPr id="387" name="Rectangle 131"/>
+          <p:cNvSpPr/>
+          <p:nvPr/>
+        </p:nvSpPr>
+        <p:spPr>
+          <a:xfrm>
+            <a:off x="1828800" y="0"/>
+            <a:ext cx="17280" cy="6856920"/>
+          </a:xfrm>
+          <a:prstGeom prst="rect">
+            <a:avLst/>
+          </a:prstGeom>
+          <a:solidFill>
+            <a:srgbClr val="121216"/>
+          </a:solidFill>
+          <a:ln>
+            <a:noFill/>
+          </a:ln>
+          <a:effectLst>
+            <a:outerShdw blurRad="39960" dir="5400000" dist="23040" rotWithShape="0">
+              <a:srgbClr val="000000">
+                <a:alpha val="35000"/>
+              </a:srgbClr>
+            </a:outerShdw>
+          </a:effectLst>
+        </p:spPr>
+        <p:style>
+          <a:lnRef idx="1">
+            <a:schemeClr val="accent1"/>
+          </a:lnRef>
+          <a:fillRef idx="3">
+            <a:schemeClr val="accent1"/>
+          </a:fillRef>
+          <a:effectRef idx="2">
+            <a:schemeClr val="accent1"/>
+          </a:effectRef>
+          <a:fontRef idx="minor"/>
+        </p:style>
+        <p:txBody>
+          <a:bodyPr lIns="90000" rIns="90000" tIns="45000" bIns="45000" anchor="ctr">
+            <a:noAutofit/>
+          </a:bodyPr>
+          <a:p>
+            <a:endParaRPr b="0" lang="en-US" sz="1800" spc="-1" strike="noStrike">
+              <a:solidFill>
+                <a:schemeClr val="lt1"/>
+              </a:solidFill>
+              <a:latin typeface="Calibri"/>
+              <a:ea typeface="DejaVu Sans"/>
+            </a:endParaRPr>
+          </a:p>
+        </p:txBody>
+      </p:sp>
+      <p:sp>
+        <p:nvSpPr>
+          <p:cNvPr id="388" name="Rectangle 132"/>
+          <p:cNvSpPr/>
+          <p:nvPr/>
+        </p:nvSpPr>
+        <p:spPr>
+          <a:xfrm>
+            <a:off x="2743200" y="0"/>
+            <a:ext cx="17280" cy="6856920"/>
+          </a:xfrm>
+          <a:prstGeom prst="rect">
+            <a:avLst/>
+          </a:prstGeom>
+          <a:solidFill>
+            <a:srgbClr val="121216"/>
+          </a:solidFill>
+          <a:ln>
+            <a:noFill/>
+          </a:ln>
+          <a:effectLst>
+            <a:outerShdw blurRad="39960" dir="5400000" dist="23040" rotWithShape="0">
+              <a:srgbClr val="000000">
+                <a:alpha val="35000"/>
+              </a:srgbClr>
+            </a:outerShdw>
+          </a:effectLst>
+        </p:spPr>
+        <p:style>
+          <a:lnRef idx="1">
+            <a:schemeClr val="accent1"/>
+          </a:lnRef>
+          <a:fillRef idx="3">
+            <a:schemeClr val="accent1"/>
+          </a:fillRef>
+          <a:effectRef idx="2">
+            <a:schemeClr val="accent1"/>
+          </a:effectRef>
+          <a:fontRef idx="minor"/>
+        </p:style>
+        <p:txBody>
+          <a:bodyPr lIns="90000" rIns="90000" tIns="45000" bIns="45000" anchor="ctr">
+            <a:noAutofit/>
+          </a:bodyPr>
+          <a:p>
+            <a:endParaRPr b="0" lang="en-US" sz="1800" spc="-1" strike="noStrike">
+              <a:solidFill>
+                <a:schemeClr val="lt1"/>
+              </a:solidFill>
+              <a:latin typeface="Calibri"/>
+              <a:ea typeface="DejaVu Sans"/>
+            </a:endParaRPr>
+          </a:p>
+        </p:txBody>
+      </p:sp>
+      <p:sp>
+        <p:nvSpPr>
+          <p:cNvPr id="389" name="Rectangle 133"/>
+          <p:cNvSpPr/>
+          <p:nvPr/>
+        </p:nvSpPr>
+        <p:spPr>
+          <a:xfrm>
+            <a:off x="3657600" y="0"/>
+            <a:ext cx="17280" cy="6856920"/>
+          </a:xfrm>
+          <a:prstGeom prst="rect">
+            <a:avLst/>
+          </a:prstGeom>
+          <a:solidFill>
+            <a:srgbClr val="121216"/>
+          </a:solidFill>
+          <a:ln>
+            <a:noFill/>
+          </a:ln>
+          <a:effectLst>
+            <a:outerShdw blurRad="39960" dir="5400000" dist="23040" rotWithShape="0">
+              <a:srgbClr val="000000">
+                <a:alpha val="35000"/>
+              </a:srgbClr>
+            </a:outerShdw>
+          </a:effectLst>
+        </p:spPr>
+        <p:style>
+          <a:lnRef idx="1">
+            <a:schemeClr val="accent1"/>
+          </a:lnRef>
+          <a:fillRef idx="3">
+            <a:schemeClr val="accent1"/>
+          </a:fillRef>
+          <a:effectRef idx="2">
+            <a:schemeClr val="accent1"/>
+          </a:effectRef>
+          <a:fontRef idx="minor"/>
+        </p:style>
+        <p:txBody>
+          <a:bodyPr lIns="90000" rIns="90000" tIns="45000" bIns="45000" anchor="ctr">
+            <a:noAutofit/>
+          </a:bodyPr>
+          <a:p>
+            <a:endParaRPr b="0" lang="en-US" sz="1800" spc="-1" strike="noStrike">
+              <a:solidFill>
+                <a:schemeClr val="lt1"/>
+              </a:solidFill>
+              <a:latin typeface="Calibri"/>
+              <a:ea typeface="DejaVu Sans"/>
+            </a:endParaRPr>
+          </a:p>
+        </p:txBody>
+      </p:sp>
+      <p:sp>
+        <p:nvSpPr>
+          <p:cNvPr id="390" name="Rectangle 134"/>
+          <p:cNvSpPr/>
+          <p:nvPr/>
+        </p:nvSpPr>
+        <p:spPr>
+          <a:xfrm>
+            <a:off x="4572000" y="0"/>
+            <a:ext cx="17280" cy="6856920"/>
+          </a:xfrm>
+          <a:prstGeom prst="rect">
+            <a:avLst/>
+          </a:prstGeom>
+          <a:solidFill>
+            <a:srgbClr val="121216"/>
+          </a:solidFill>
+          <a:ln>
+            <a:noFill/>
+          </a:ln>
+          <a:effectLst>
+            <a:outerShdw blurRad="39960" dir="5400000" dist="23040" rotWithShape="0">
+              <a:srgbClr val="000000">
+                <a:alpha val="35000"/>
+              </a:srgbClr>
+            </a:outerShdw>
+          </a:effectLst>
+        </p:spPr>
+        <p:style>
+          <a:lnRef idx="1">
+            <a:schemeClr val="accent1"/>
+          </a:lnRef>
+          <a:fillRef idx="3">
+            <a:schemeClr val="accent1"/>
+          </a:fillRef>
+          <a:effectRef idx="2">
+            <a:schemeClr val="accent1"/>
+          </a:effectRef>
+          <a:fontRef idx="minor"/>
+        </p:style>
+        <p:txBody>
+          <a:bodyPr lIns="90000" rIns="90000" tIns="45000" bIns="45000" anchor="ctr">
+            <a:noAutofit/>
+          </a:bodyPr>
+          <a:p>
+            <a:endParaRPr b="0" lang="en-US" sz="1800" spc="-1" strike="noStrike">
+              <a:solidFill>
+                <a:schemeClr val="lt1"/>
+              </a:solidFill>
+              <a:latin typeface="Calibri"/>
+              <a:ea typeface="DejaVu Sans"/>
+            </a:endParaRPr>
+          </a:p>
+        </p:txBody>
+      </p:sp>
+      <p:sp>
+        <p:nvSpPr>
+          <p:cNvPr id="391" name="Rectangle 135"/>
+          <p:cNvSpPr/>
+          <p:nvPr/>
+        </p:nvSpPr>
+        <p:spPr>
+          <a:xfrm>
+            <a:off x="5486400" y="0"/>
+            <a:ext cx="17280" cy="6856920"/>
+          </a:xfrm>
+          <a:prstGeom prst="rect">
+            <a:avLst/>
+          </a:prstGeom>
+          <a:solidFill>
+            <a:srgbClr val="121216"/>
+          </a:solidFill>
+          <a:ln>
+            <a:noFill/>
+          </a:ln>
+          <a:effectLst>
+            <a:outerShdw blurRad="39960" dir="5400000" dist="23040" rotWithShape="0">
+              <a:srgbClr val="000000">
+                <a:alpha val="35000"/>
+              </a:srgbClr>
+            </a:outerShdw>
+          </a:effectLst>
+        </p:spPr>
+        <p:style>
+          <a:lnRef idx="1">
+            <a:schemeClr val="accent1"/>
+          </a:lnRef>
+          <a:fillRef idx="3">
+            <a:schemeClr val="accent1"/>
+          </a:fillRef>
+          <a:effectRef idx="2">
+            <a:schemeClr val="accent1"/>
+          </a:effectRef>
+          <a:fontRef idx="minor"/>
+        </p:style>
+        <p:txBody>
+          <a:bodyPr lIns="90000" rIns="90000" tIns="45000" bIns="45000" anchor="ctr">
+            <a:noAutofit/>
+          </a:bodyPr>
+          <a:p>
+            <a:endParaRPr b="0" lang="en-US" sz="1800" spc="-1" strike="noStrike">
+              <a:solidFill>
+                <a:schemeClr val="lt1"/>
+              </a:solidFill>
+              <a:latin typeface="Calibri"/>
+              <a:ea typeface="DejaVu Sans"/>
+            </a:endParaRPr>
+          </a:p>
+        </p:txBody>
+      </p:sp>
+      <p:sp>
+        <p:nvSpPr>
+          <p:cNvPr id="392" name="Rectangle 136"/>
+          <p:cNvSpPr/>
+          <p:nvPr/>
+        </p:nvSpPr>
+        <p:spPr>
+          <a:xfrm>
+            <a:off x="6400800" y="0"/>
+            <a:ext cx="17280" cy="6856920"/>
+          </a:xfrm>
+          <a:prstGeom prst="rect">
+            <a:avLst/>
+          </a:prstGeom>
+          <a:solidFill>
+            <a:srgbClr val="121216"/>
+          </a:solidFill>
+          <a:ln>
+            <a:noFill/>
+          </a:ln>
+          <a:effectLst>
+            <a:outerShdw blurRad="39960" dir="5400000" dist="23040" rotWithShape="0">
+              <a:srgbClr val="000000">
+                <a:alpha val="35000"/>
+              </a:srgbClr>
+            </a:outerShdw>
+          </a:effectLst>
+        </p:spPr>
+        <p:style>
+          <a:lnRef idx="1">
+            <a:schemeClr val="accent1"/>
+          </a:lnRef>
+          <a:fillRef idx="3">
+            <a:schemeClr val="accent1"/>
+          </a:fillRef>
+          <a:effectRef idx="2">
+            <a:schemeClr val="accent1"/>
+          </a:effectRef>
+          <a:fontRef idx="minor"/>
+        </p:style>
+        <p:txBody>
+          <a:bodyPr lIns="90000" rIns="90000" tIns="45000" bIns="45000" anchor="ctr">
+            <a:noAutofit/>
+          </a:bodyPr>
+          <a:p>
+            <a:endParaRPr b="0" lang="en-US" sz="1800" spc="-1" strike="noStrike">
+              <a:solidFill>
+                <a:schemeClr val="lt1"/>
+              </a:solidFill>
+              <a:latin typeface="Calibri"/>
+              <a:ea typeface="DejaVu Sans"/>
+            </a:endParaRPr>
+          </a:p>
+        </p:txBody>
+      </p:sp>
+      <p:sp>
+        <p:nvSpPr>
+          <p:cNvPr id="393" name="Rectangle 137"/>
+          <p:cNvSpPr/>
+          <p:nvPr/>
+        </p:nvSpPr>
+        <p:spPr>
+          <a:xfrm>
+            <a:off x="7315200" y="0"/>
+            <a:ext cx="17280" cy="6856920"/>
+          </a:xfrm>
+          <a:prstGeom prst="rect">
+            <a:avLst/>
+          </a:prstGeom>
+          <a:solidFill>
+            <a:srgbClr val="121216"/>
+          </a:solidFill>
+          <a:ln>
+            <a:noFill/>
+          </a:ln>
+          <a:effectLst>
+            <a:outerShdw blurRad="39960" dir="5400000" dist="23040" rotWithShape="0">
+              <a:srgbClr val="000000">
+                <a:alpha val="35000"/>
+              </a:srgbClr>
+            </a:outerShdw>
+          </a:effectLst>
+        </p:spPr>
+        <p:style>
+          <a:lnRef idx="1">
+            <a:schemeClr val="accent1"/>
+          </a:lnRef>
+          <a:fillRef idx="3">
+            <a:schemeClr val="accent1"/>
+          </a:fillRef>
+          <a:effectRef idx="2">
+            <a:schemeClr val="accent1"/>
+          </a:effectRef>
+          <a:fontRef idx="minor"/>
+        </p:style>
+        <p:txBody>
+          <a:bodyPr lIns="90000" rIns="90000" tIns="45000" bIns="45000" anchor="ctr">
+            <a:noAutofit/>
+          </a:bodyPr>
+          <a:p>
+            <a:endParaRPr b="0" lang="en-US" sz="1800" spc="-1" strike="noStrike">
+              <a:solidFill>
+                <a:schemeClr val="lt1"/>
+              </a:solidFill>
+              <a:latin typeface="Calibri"/>
+              <a:ea typeface="DejaVu Sans"/>
+            </a:endParaRPr>
+          </a:p>
+        </p:txBody>
+      </p:sp>
+      <p:sp>
+        <p:nvSpPr>
+          <p:cNvPr id="394" name="Rectangle 138"/>
+          <p:cNvSpPr/>
+          <p:nvPr/>
+        </p:nvSpPr>
+        <p:spPr>
+          <a:xfrm>
+            <a:off x="8229600" y="0"/>
+            <a:ext cx="17280" cy="6856920"/>
+          </a:xfrm>
+          <a:prstGeom prst="rect">
+            <a:avLst/>
+          </a:prstGeom>
+          <a:solidFill>
+            <a:srgbClr val="121216"/>
+          </a:solidFill>
+          <a:ln>
+            <a:noFill/>
+          </a:ln>
+          <a:effectLst>
+            <a:outerShdw blurRad="39960" dir="5400000" dist="23040" rotWithShape="0">
+              <a:srgbClr val="000000">
+                <a:alpha val="35000"/>
+              </a:srgbClr>
+            </a:outerShdw>
+          </a:effectLst>
+        </p:spPr>
+        <p:style>
+          <a:lnRef idx="1">
+            <a:schemeClr val="accent1"/>
+          </a:lnRef>
+          <a:fillRef idx="3">
+            <a:schemeClr val="accent1"/>
+          </a:fillRef>
+          <a:effectRef idx="2">
+            <a:schemeClr val="accent1"/>
+          </a:effectRef>
+          <a:fontRef idx="minor"/>
+        </p:style>
+        <p:txBody>
+          <a:bodyPr lIns="90000" rIns="90000" tIns="45000" bIns="45000" anchor="ctr">
+            <a:noAutofit/>
+          </a:bodyPr>
+          <a:p>
+            <a:endParaRPr b="0" lang="en-US" sz="1800" spc="-1" strike="noStrike">
+              <a:solidFill>
+                <a:schemeClr val="lt1"/>
+              </a:solidFill>
+              <a:latin typeface="Calibri"/>
+              <a:ea typeface="DejaVu Sans"/>
+            </a:endParaRPr>
+          </a:p>
+        </p:txBody>
+      </p:sp>
+      <p:sp>
+        <p:nvSpPr>
+          <p:cNvPr id="395" name="Rectangle 139"/>
+          <p:cNvSpPr/>
+          <p:nvPr/>
+        </p:nvSpPr>
+        <p:spPr>
+          <a:xfrm>
+            <a:off x="9144000" y="0"/>
+            <a:ext cx="17280" cy="6856920"/>
+          </a:xfrm>
+          <a:prstGeom prst="rect">
+            <a:avLst/>
+          </a:prstGeom>
+          <a:solidFill>
+            <a:srgbClr val="121216"/>
+          </a:solidFill>
+          <a:ln>
+            <a:noFill/>
+          </a:ln>
+          <a:effectLst>
+            <a:outerShdw blurRad="39960" dir="5400000" dist="23040" rotWithShape="0">
+              <a:srgbClr val="000000">
+                <a:alpha val="35000"/>
+              </a:srgbClr>
+            </a:outerShdw>
+          </a:effectLst>
+        </p:spPr>
+        <p:style>
+          <a:lnRef idx="1">
+            <a:schemeClr val="accent1"/>
+          </a:lnRef>
+          <a:fillRef idx="3">
+            <a:schemeClr val="accent1"/>
+          </a:fillRef>
+          <a:effectRef idx="2">
+            <a:schemeClr val="accent1"/>
+          </a:effectRef>
+          <a:fontRef idx="minor"/>
+        </p:style>
+        <p:txBody>
+          <a:bodyPr lIns="90000" rIns="90000" tIns="45000" bIns="45000" anchor="ctr">
+            <a:noAutofit/>
+          </a:bodyPr>
+          <a:p>
+            <a:endParaRPr b="0" lang="en-US" sz="1800" spc="-1" strike="noStrike">
+              <a:solidFill>
+                <a:schemeClr val="lt1"/>
+              </a:solidFill>
+              <a:latin typeface="Calibri"/>
+              <a:ea typeface="DejaVu Sans"/>
+            </a:endParaRPr>
+          </a:p>
+        </p:txBody>
+      </p:sp>
+      <p:sp>
+        <p:nvSpPr>
+          <p:cNvPr id="396" name="Rectangle 140"/>
+          <p:cNvSpPr/>
+          <p:nvPr/>
+        </p:nvSpPr>
+        <p:spPr>
+          <a:xfrm>
+            <a:off x="10058400" y="0"/>
+            <a:ext cx="17280" cy="6856920"/>
+          </a:xfrm>
+          <a:prstGeom prst="rect">
+            <a:avLst/>
+          </a:prstGeom>
+          <a:solidFill>
+            <a:srgbClr val="121216"/>
+          </a:solidFill>
+          <a:ln>
+            <a:noFill/>
+          </a:ln>
+          <a:effectLst>
+            <a:outerShdw blurRad="39960" dir="5400000" dist="23040" rotWithShape="0">
+              <a:srgbClr val="000000">
+                <a:alpha val="35000"/>
+              </a:srgbClr>
+            </a:outerShdw>
+          </a:effectLst>
+        </p:spPr>
+        <p:style>
+          <a:lnRef idx="1">
+            <a:schemeClr val="accent1"/>
+          </a:lnRef>
+          <a:fillRef idx="3">
+            <a:schemeClr val="accent1"/>
+          </a:fillRef>
+          <a:effectRef idx="2">
+            <a:schemeClr val="accent1"/>
+          </a:effectRef>
+          <a:fontRef idx="minor"/>
+        </p:style>
+        <p:txBody>
+          <a:bodyPr lIns="90000" rIns="90000" tIns="45000" bIns="45000" anchor="ctr">
+            <a:noAutofit/>
+          </a:bodyPr>
+          <a:p>
+            <a:endParaRPr b="0" lang="en-US" sz="1800" spc="-1" strike="noStrike">
+              <a:solidFill>
+                <a:schemeClr val="lt1"/>
+              </a:solidFill>
+              <a:latin typeface="Calibri"/>
+              <a:ea typeface="DejaVu Sans"/>
+            </a:endParaRPr>
+          </a:p>
+        </p:txBody>
+      </p:sp>
+      <p:sp>
+        <p:nvSpPr>
+          <p:cNvPr id="397" name="Rectangle 141"/>
+          <p:cNvSpPr/>
+          <p:nvPr/>
+        </p:nvSpPr>
+        <p:spPr>
+          <a:xfrm>
+            <a:off x="10972800" y="0"/>
+            <a:ext cx="17280" cy="6856920"/>
+          </a:xfrm>
+          <a:prstGeom prst="rect">
+            <a:avLst/>
+          </a:prstGeom>
+          <a:solidFill>
+            <a:srgbClr val="121216"/>
+          </a:solidFill>
+          <a:ln>
+            <a:noFill/>
+          </a:ln>
+          <a:effectLst>
+            <a:outerShdw blurRad="39960" dir="5400000" dist="23040" rotWithShape="0">
+              <a:srgbClr val="000000">
+                <a:alpha val="35000"/>
+              </a:srgbClr>
+            </a:outerShdw>
+          </a:effectLst>
+        </p:spPr>
+        <p:style>
+          <a:lnRef idx="1">
+            <a:schemeClr val="accent1"/>
+          </a:lnRef>
+          <a:fillRef idx="3">
+            <a:schemeClr val="accent1"/>
+          </a:fillRef>
+          <a:effectRef idx="2">
+            <a:schemeClr val="accent1"/>
+          </a:effectRef>
+          <a:fontRef idx="minor"/>
+        </p:style>
+        <p:txBody>
+          <a:bodyPr lIns="90000" rIns="90000" tIns="45000" bIns="45000" anchor="ctr">
+            <a:noAutofit/>
+          </a:bodyPr>
+          <a:p>
+            <a:endParaRPr b="0" lang="en-US" sz="1800" spc="-1" strike="noStrike">
+              <a:solidFill>
+                <a:schemeClr val="lt1"/>
+              </a:solidFill>
+              <a:latin typeface="Calibri"/>
+              <a:ea typeface="DejaVu Sans"/>
+            </a:endParaRPr>
+          </a:p>
+        </p:txBody>
+      </p:sp>
+      <p:sp>
+        <p:nvSpPr>
+          <p:cNvPr id="398" name="Rectangle 142"/>
+          <p:cNvSpPr/>
+          <p:nvPr/>
+        </p:nvSpPr>
+        <p:spPr>
+          <a:xfrm>
+            <a:off x="11887200" y="0"/>
+            <a:ext cx="17280" cy="6856920"/>
+          </a:xfrm>
+          <a:prstGeom prst="rect">
+            <a:avLst/>
+          </a:prstGeom>
+          <a:solidFill>
+            <a:srgbClr val="121216"/>
+          </a:solidFill>
+          <a:ln>
+            <a:noFill/>
+          </a:ln>
+          <a:effectLst>
+            <a:outerShdw blurRad="39960" dir="5400000" dist="23040" rotWithShape="0">
+              <a:srgbClr val="000000">
+                <a:alpha val="35000"/>
+              </a:srgbClr>
+            </a:outerShdw>
+          </a:effectLst>
+        </p:spPr>
+        <p:style>
+          <a:lnRef idx="1">
+            <a:schemeClr val="accent1"/>
+          </a:lnRef>
+          <a:fillRef idx="3">
+            <a:schemeClr val="accent1"/>
+          </a:fillRef>
+          <a:effectRef idx="2">
+            <a:schemeClr val="accent1"/>
+          </a:effectRef>
+          <a:fontRef idx="minor"/>
+        </p:style>
+        <p:txBody>
+          <a:bodyPr lIns="90000" rIns="90000" tIns="45000" bIns="45000" anchor="ctr">
+            <a:noAutofit/>
+          </a:bodyPr>
+          <a:p>
+            <a:endParaRPr b="0" lang="en-US" sz="1800" spc="-1" strike="noStrike">
+              <a:solidFill>
+                <a:schemeClr val="lt1"/>
+              </a:solidFill>
+              <a:latin typeface="Calibri"/>
+              <a:ea typeface="DejaVu Sans"/>
+            </a:endParaRPr>
+          </a:p>
+        </p:txBody>
+      </p:sp>
+      <p:sp>
+        <p:nvSpPr>
+          <p:cNvPr id="399" name="Rectangle 143"/>
+          <p:cNvSpPr/>
+          <p:nvPr/>
+        </p:nvSpPr>
+        <p:spPr>
+          <a:xfrm>
+            <a:off x="0" y="0"/>
+            <a:ext cx="318960" cy="6856920"/>
+          </a:xfrm>
+          <a:prstGeom prst="rect">
+            <a:avLst/>
+          </a:prstGeom>
+          <a:solidFill>
+            <a:srgbClr val="ff8c00"/>
+          </a:solidFill>
+          <a:ln>
+            <a:noFill/>
+          </a:ln>
+          <a:effectLst>
+            <a:outerShdw blurRad="39960" dir="5400000" dist="23040" rotWithShape="0">
+              <a:srgbClr val="000000">
+                <a:alpha val="35000"/>
+              </a:srgbClr>
+            </a:outerShdw>
+          </a:effectLst>
+        </p:spPr>
+        <p:style>
+          <a:lnRef idx="1">
+            <a:schemeClr val="accent1"/>
+          </a:lnRef>
+          <a:fillRef idx="3">
+            <a:schemeClr val="accent1"/>
+          </a:fillRef>
+          <a:effectRef idx="2">
+            <a:schemeClr val="accent1"/>
+          </a:effectRef>
+          <a:fontRef idx="minor"/>
+        </p:style>
+        <p:txBody>
+          <a:bodyPr lIns="90000" rIns="90000" tIns="45000" bIns="45000" anchor="ctr">
+            <a:noAutofit/>
+          </a:bodyPr>
+          <a:p>
+            <a:endParaRPr b="0" lang="en-US" sz="1800" spc="-1" strike="noStrike">
+              <a:solidFill>
+                <a:schemeClr val="lt1"/>
+              </a:solidFill>
+              <a:latin typeface="Calibri"/>
+              <a:ea typeface="DejaVu Sans"/>
+            </a:endParaRPr>
+          </a:p>
+        </p:txBody>
+      </p:sp>
+      <p:sp>
+        <p:nvSpPr>
+          <p:cNvPr id="400" name="Rounded Rectangle 57"/>
+          <p:cNvSpPr/>
+          <p:nvPr/>
+        </p:nvSpPr>
+        <p:spPr>
+          <a:xfrm>
+            <a:off x="9875520" y="365760"/>
+            <a:ext cx="2010600" cy="501840"/>
+          </a:xfrm>
+          <a:prstGeom prst="roundRect">
+            <a:avLst>
+              <a:gd name="adj" fmla="val 16667"/>
+            </a:avLst>
+          </a:prstGeom>
+          <a:solidFill>
+            <a:srgbClr val="1e1e24"/>
+          </a:solidFill>
+          <a:ln>
+            <a:solidFill>
+              <a:srgbClr val="ff8c00"/>
+            </a:solidFill>
+            <a:round/>
+          </a:ln>
+          <a:effectLst>
+            <a:outerShdw blurRad="39960" dir="5400000" dist="23040" rotWithShape="0">
+              <a:srgbClr val="000000">
+                <a:alpha val="35000"/>
+              </a:srgbClr>
+            </a:outerShdw>
+          </a:effectLst>
+        </p:spPr>
+        <p:style>
+          <a:lnRef idx="1">
+            <a:schemeClr val="accent1"/>
+          </a:lnRef>
+          <a:fillRef idx="3">
+            <a:schemeClr val="accent1"/>
+          </a:fillRef>
+          <a:effectRef idx="2">
+            <a:schemeClr val="accent1"/>
+          </a:effectRef>
+          <a:fontRef idx="minor"/>
+        </p:style>
+        <p:txBody>
+          <a:bodyPr lIns="90000" rIns="90000" tIns="45000" bIns="45000" anchor="ctr">
+            <a:noAutofit/>
+          </a:bodyPr>
+          <a:p>
+            <a:pPr algn="ctr">
+              <a:lnSpc>
+                <a:spcPct val="100000"/>
+              </a:lnSpc>
+            </a:pPr>
+            <a:r>
+              <a:rPr b="1" lang="en-US" sz="1400" spc="-1" strike="noStrike">
+                <a:solidFill>
+                  <a:srgbClr val="ffb45a"/>
+                </a:solidFill>
+                <a:latin typeface="Calibri"/>
+                <a:ea typeface="DejaVu Sans"/>
+              </a:rPr>
+              <a:t>JAVA TEMELLERI</a:t>
+            </a:r>
+            <a:endParaRPr b="0" lang="en-US" sz="1400" spc="-1" strike="noStrike">
+              <a:solidFill>
+                <a:srgbClr val="ffffff"/>
+              </a:solidFill>
+              <a:latin typeface="Arial"/>
+            </a:endParaRPr>
+          </a:p>
+        </p:txBody>
+      </p:sp>
+      <p:sp>
+        <p:nvSpPr>
+          <p:cNvPr id="401" name="TextBox 25"/>
+          <p:cNvSpPr/>
+          <p:nvPr/>
+        </p:nvSpPr>
+        <p:spPr>
+          <a:xfrm>
+            <a:off x="2837520" y="1005840"/>
+            <a:ext cx="5298840" cy="820800"/>
+          </a:xfrm>
+          <a:prstGeom prst="rect">
+            <a:avLst/>
+          </a:prstGeom>
+          <a:noFill/>
+          <a:ln w="0">
+            <a:noFill/>
+          </a:ln>
+        </p:spPr>
+        <p:style>
+          <a:lnRef idx="0"/>
+          <a:fillRef idx="0"/>
+          <a:effectRef idx="0"/>
+          <a:fontRef idx="minor"/>
+        </p:style>
+        <p:txBody>
+          <a:bodyPr wrap="none" lIns="90000" rIns="90000" tIns="45000" bIns="45000" anchor="t">
+            <a:spAutoFit/>
+          </a:bodyPr>
+          <a:p>
+            <a:pPr>
+              <a:lnSpc>
+                <a:spcPct val="100000"/>
+              </a:lnSpc>
+            </a:pPr>
+            <a:r>
+              <a:rPr b="1" lang="en-US" sz="4800" spc="-1" strike="noStrike">
+                <a:solidFill>
+                  <a:srgbClr val="f5f5f5"/>
+                </a:solidFill>
+                <a:latin typeface="Calibri"/>
+                <a:ea typeface="DejaVu Sans"/>
+              </a:rPr>
+              <a:t>WRAPPER SINIFLARI</a:t>
+            </a:r>
+            <a:endParaRPr b="0" lang="en-US" sz="4800" spc="-1" strike="noStrike">
+              <a:solidFill>
+                <a:srgbClr val="000000"/>
+              </a:solidFill>
+              <a:latin typeface="Arial"/>
+            </a:endParaRPr>
+          </a:p>
+        </p:txBody>
+      </p:sp>
+      <p:sp>
+        <p:nvSpPr>
+          <p:cNvPr id="402" name="TextBox 26"/>
+          <p:cNvSpPr/>
+          <p:nvPr/>
+        </p:nvSpPr>
+        <p:spPr>
+          <a:xfrm>
+            <a:off x="3007440" y="2194560"/>
+            <a:ext cx="4957200" cy="668520"/>
+          </a:xfrm>
+          <a:prstGeom prst="rect">
+            <a:avLst/>
+          </a:prstGeom>
+          <a:noFill/>
+          <a:ln w="0">
+            <a:noFill/>
+          </a:ln>
+        </p:spPr>
+        <p:style>
+          <a:lnRef idx="0"/>
+          <a:fillRef idx="0"/>
+          <a:effectRef idx="0"/>
+          <a:fontRef idx="minor"/>
+        </p:style>
+        <p:txBody>
+          <a:bodyPr wrap="none" lIns="90000" rIns="90000" tIns="45000" bIns="45000" anchor="t">
+            <a:spAutoFit/>
+          </a:bodyPr>
+          <a:p>
+            <a:pPr>
+              <a:lnSpc>
+                <a:spcPct val="100000"/>
+              </a:lnSpc>
+            </a:pPr>
+            <a:r>
+              <a:rPr b="0" lang="en-US" sz="1900" spc="-1" strike="noStrike">
+                <a:solidFill>
+                  <a:srgbClr val="aaaaaa"/>
+                </a:solidFill>
+                <a:latin typeface="Calibri"/>
+                <a:ea typeface="DejaVu Sans"/>
+              </a:rPr>
+              <a:t>Wrapper sınıfları, Java’da primitive veri tiplerinin </a:t>
+            </a:r>
+            <a:endParaRPr b="0" lang="en-US" sz="1900" spc="-1" strike="noStrike">
+              <a:solidFill>
+                <a:srgbClr val="000000"/>
+              </a:solidFill>
+              <a:latin typeface="Arial"/>
+            </a:endParaRPr>
+          </a:p>
+          <a:p>
+            <a:pPr>
+              <a:lnSpc>
+                <a:spcPct val="100000"/>
+              </a:lnSpc>
+            </a:pPr>
+            <a:r>
+              <a:rPr b="0" lang="en-US" sz="1900" spc="-1" strike="noStrike">
+                <a:solidFill>
+                  <a:srgbClr val="aaaaaa"/>
+                </a:solidFill>
+                <a:latin typeface="Calibri"/>
+                <a:ea typeface="DejaVu Sans"/>
+              </a:rPr>
+              <a:t>nesne (object) olarak kullanılmasını sağlar.</a:t>
+            </a:r>
+            <a:endParaRPr b="0" lang="en-US" sz="1900" spc="-1" strike="noStrike">
+              <a:solidFill>
+                <a:srgbClr val="000000"/>
+              </a:solidFill>
+              <a:latin typeface="Arial"/>
+            </a:endParaRPr>
+          </a:p>
+        </p:txBody>
+      </p:sp>
+      <p:sp>
+        <p:nvSpPr>
+          <p:cNvPr id="403" name="Rounded Rectangle 58"/>
+          <p:cNvSpPr/>
+          <p:nvPr/>
+        </p:nvSpPr>
+        <p:spPr>
+          <a:xfrm>
+            <a:off x="987480" y="3182040"/>
+            <a:ext cx="3290760" cy="2742120"/>
+          </a:xfrm>
+          <a:prstGeom prst="roundRect">
+            <a:avLst>
+              <a:gd name="adj" fmla="val 16667"/>
+            </a:avLst>
+          </a:prstGeom>
+          <a:solidFill>
+            <a:srgbClr val="08080a"/>
+          </a:solidFill>
+          <a:ln>
+            <a:noFill/>
+          </a:ln>
+          <a:effectLst>
+            <a:outerShdw blurRad="39960" dir="5400000" dist="23040" rotWithShape="0">
+              <a:srgbClr val="000000">
+                <a:alpha val="35000"/>
+              </a:srgbClr>
+            </a:outerShdw>
+          </a:effectLst>
+        </p:spPr>
+        <p:style>
+          <a:lnRef idx="1">
+            <a:schemeClr val="accent1"/>
+          </a:lnRef>
+          <a:fillRef idx="3">
+            <a:schemeClr val="accent1"/>
+          </a:fillRef>
+          <a:effectRef idx="2">
+            <a:schemeClr val="accent1"/>
+          </a:effectRef>
+          <a:fontRef idx="minor"/>
+        </p:style>
+        <p:txBody>
+          <a:bodyPr lIns="90000" rIns="90000" tIns="45000" bIns="45000" anchor="ctr">
+            <a:noAutofit/>
+          </a:bodyPr>
+          <a:p>
+            <a:endParaRPr b="0" lang="en-US" sz="1800" spc="-1" strike="noStrike">
+              <a:solidFill>
+                <a:schemeClr val="lt1"/>
+              </a:solidFill>
+              <a:latin typeface="Calibri"/>
+              <a:ea typeface="DejaVu Sans"/>
+            </a:endParaRPr>
+          </a:p>
+        </p:txBody>
+      </p:sp>
+      <p:sp>
+        <p:nvSpPr>
+          <p:cNvPr id="404" name="Rounded Rectangle 59"/>
+          <p:cNvSpPr/>
+          <p:nvPr/>
+        </p:nvSpPr>
+        <p:spPr>
+          <a:xfrm>
+            <a:off x="685800" y="3108960"/>
+            <a:ext cx="3519360" cy="3291840"/>
+          </a:xfrm>
+          <a:prstGeom prst="roundRect">
+            <a:avLst>
+              <a:gd name="adj" fmla="val 16667"/>
+            </a:avLst>
+          </a:prstGeom>
+          <a:solidFill>
+            <a:srgbClr val="16161c"/>
+          </a:solidFill>
+          <a:ln>
+            <a:solidFill>
+              <a:srgbClr val="464655"/>
+            </a:solidFill>
+            <a:round/>
+          </a:ln>
+          <a:effectLst>
+            <a:outerShdw blurRad="39960" dir="5400000" dist="23040" rotWithShape="0">
+              <a:srgbClr val="000000">
+                <a:alpha val="35000"/>
+              </a:srgbClr>
+            </a:outerShdw>
+          </a:effectLst>
+        </p:spPr>
+        <p:style>
+          <a:lnRef idx="1">
+            <a:schemeClr val="accent1"/>
+          </a:lnRef>
+          <a:fillRef idx="3">
+            <a:schemeClr val="accent1"/>
+          </a:fillRef>
+          <a:effectRef idx="2">
+            <a:schemeClr val="accent1"/>
+          </a:effectRef>
+          <a:fontRef idx="minor"/>
+        </p:style>
+        <p:txBody>
+          <a:bodyPr lIns="90000" rIns="90000" tIns="45000" bIns="45000" anchor="ctr">
+            <a:noAutofit/>
+          </a:bodyPr>
+          <a:p>
+            <a:pPr>
+              <a:lnSpc>
+                <a:spcPct val="100000"/>
+              </a:lnSpc>
+            </a:pPr>
+            <a:r>
+              <a:rPr b="0" lang="en-US" sz="1400" spc="-1" strike="noStrike">
+                <a:solidFill>
+                  <a:schemeClr val="lt1"/>
+                </a:solidFill>
+                <a:latin typeface="Calibri"/>
+                <a:ea typeface="DejaVu Sans"/>
+              </a:rPr>
+              <a:t>Wrapper sınıfları primitive değerleri nesnelere dönüştürür.</a:t>
+            </a:r>
+            <a:endParaRPr b="0" lang="en-US" sz="1400" spc="-1" strike="noStrike">
+              <a:solidFill>
+                <a:srgbClr val="ffffff"/>
+              </a:solidFill>
+              <a:latin typeface="Arial"/>
+            </a:endParaRPr>
+          </a:p>
+          <a:p>
+            <a:pPr>
+              <a:lnSpc>
+                <a:spcPct val="100000"/>
+              </a:lnSpc>
+            </a:pPr>
+            <a:r>
+              <a:rPr b="0" lang="en-US" sz="1400" spc="-1" strike="noStrike">
+                <a:solidFill>
+                  <a:schemeClr val="lt1"/>
+                </a:solidFill>
+                <a:latin typeface="Calibri"/>
+                <a:ea typeface="DejaVu Sans"/>
+              </a:rPr>
+              <a:t>Genellikle koleksiyonlarda ve nesne tabanlı işlemlerde kullanılır.</a:t>
+            </a:r>
+            <a:endParaRPr b="0" lang="en-US" sz="1400" spc="-1" strike="noStrike">
+              <a:solidFill>
+                <a:srgbClr val="ffffff"/>
+              </a:solidFill>
+              <a:latin typeface="Arial"/>
+            </a:endParaRPr>
+          </a:p>
+          <a:p>
+            <a:pPr>
+              <a:lnSpc>
+                <a:spcPct val="100000"/>
+              </a:lnSpc>
+            </a:pPr>
+            <a:endParaRPr b="0" lang="en-US" sz="1400" spc="-1" strike="noStrike">
+              <a:solidFill>
+                <a:srgbClr val="ffffff"/>
+              </a:solidFill>
+              <a:latin typeface="Arial"/>
+            </a:endParaRPr>
+          </a:p>
+          <a:p>
+            <a:pPr>
+              <a:lnSpc>
+                <a:spcPct val="100000"/>
+              </a:lnSpc>
+            </a:pPr>
+            <a:r>
+              <a:rPr b="1" lang="en-US" sz="1400" spc="-1" strike="noStrike">
+                <a:solidFill>
+                  <a:schemeClr val="lt1"/>
+                </a:solidFill>
+                <a:latin typeface="Calibri"/>
+                <a:ea typeface="DejaVu Sans"/>
+              </a:rPr>
+              <a:t>Primitive</a:t>
+            </a:r>
+            <a:r>
+              <a:rPr b="0" lang="en-US" sz="1400" spc="-1" strike="noStrike">
+                <a:solidFill>
+                  <a:schemeClr val="lt1"/>
+                </a:solidFill>
+                <a:latin typeface="Calibri"/>
+                <a:ea typeface="DejaVu Sans"/>
+              </a:rPr>
+              <a:t> → Wrapper örnekleri</a:t>
+            </a:r>
+            <a:endParaRPr b="0" lang="en-US" sz="1400" spc="-1" strike="noStrike">
+              <a:solidFill>
+                <a:srgbClr val="ffffff"/>
+              </a:solidFill>
+              <a:latin typeface="Arial"/>
+            </a:endParaRPr>
+          </a:p>
+          <a:p>
+            <a:pPr>
+              <a:lnSpc>
+                <a:spcPct val="100000"/>
+              </a:lnSpc>
+            </a:pPr>
+            <a:endParaRPr b="0" lang="en-US" sz="1400" spc="-1" strike="noStrike">
+              <a:solidFill>
+                <a:srgbClr val="ffffff"/>
+              </a:solidFill>
+              <a:latin typeface="Arial"/>
+            </a:endParaRPr>
+          </a:p>
+          <a:p>
+            <a:pPr>
+              <a:lnSpc>
+                <a:spcPct val="100000"/>
+              </a:lnSpc>
+            </a:pPr>
+            <a:r>
+              <a:rPr b="1" lang="en-US" sz="1400" spc="-1" strike="noStrike">
+                <a:solidFill>
+                  <a:schemeClr val="lt1"/>
+                </a:solidFill>
+                <a:latin typeface="Calibri"/>
+                <a:ea typeface="DejaVu Sans"/>
+              </a:rPr>
+              <a:t>int</a:t>
+            </a:r>
+            <a:r>
+              <a:rPr b="0" lang="en-US" sz="1400" spc="-1" strike="noStrike">
+                <a:solidFill>
+                  <a:schemeClr val="lt1"/>
+                </a:solidFill>
+                <a:latin typeface="Calibri"/>
+                <a:ea typeface="DejaVu Sans"/>
+              </a:rPr>
+              <a:t> → Integer</a:t>
+            </a:r>
+            <a:endParaRPr b="0" lang="en-US" sz="1400" spc="-1" strike="noStrike">
+              <a:solidFill>
+                <a:srgbClr val="ffffff"/>
+              </a:solidFill>
+              <a:latin typeface="Arial"/>
+            </a:endParaRPr>
+          </a:p>
+          <a:p>
+            <a:pPr>
+              <a:lnSpc>
+                <a:spcPct val="100000"/>
+              </a:lnSpc>
+            </a:pPr>
+            <a:r>
+              <a:rPr b="1" lang="en-US" sz="1400" spc="-1" strike="noStrike">
+                <a:solidFill>
+                  <a:schemeClr val="lt1"/>
+                </a:solidFill>
+                <a:latin typeface="Calibri"/>
+                <a:ea typeface="DejaVu Sans"/>
+              </a:rPr>
+              <a:t>double</a:t>
+            </a:r>
+            <a:r>
+              <a:rPr b="0" lang="en-US" sz="1400" spc="-1" strike="noStrike">
+                <a:solidFill>
+                  <a:schemeClr val="lt1"/>
+                </a:solidFill>
+                <a:latin typeface="Calibri"/>
+                <a:ea typeface="DejaVu Sans"/>
+              </a:rPr>
+              <a:t> → Double</a:t>
+            </a:r>
+            <a:endParaRPr b="0" lang="en-US" sz="1400" spc="-1" strike="noStrike">
+              <a:solidFill>
+                <a:srgbClr val="ffffff"/>
+              </a:solidFill>
+              <a:latin typeface="Arial"/>
+            </a:endParaRPr>
+          </a:p>
+          <a:p>
+            <a:pPr>
+              <a:lnSpc>
+                <a:spcPct val="100000"/>
+              </a:lnSpc>
+            </a:pPr>
+            <a:r>
+              <a:rPr b="1" lang="en-US" sz="1400" spc="-1" strike="noStrike">
+                <a:solidFill>
+                  <a:schemeClr val="lt1"/>
+                </a:solidFill>
+                <a:latin typeface="Calibri"/>
+                <a:ea typeface="DejaVu Sans"/>
+              </a:rPr>
+              <a:t>char</a:t>
+            </a:r>
+            <a:r>
+              <a:rPr b="0" lang="en-US" sz="1400" spc="-1" strike="noStrike">
+                <a:solidFill>
+                  <a:schemeClr val="lt1"/>
+                </a:solidFill>
+                <a:latin typeface="Calibri"/>
+                <a:ea typeface="DejaVu Sans"/>
+              </a:rPr>
+              <a:t> → Character</a:t>
+            </a:r>
+            <a:endParaRPr b="0" lang="en-US" sz="1400" spc="-1" strike="noStrike">
+              <a:solidFill>
+                <a:srgbClr val="ffffff"/>
+              </a:solidFill>
+              <a:latin typeface="Arial"/>
+            </a:endParaRPr>
+          </a:p>
+          <a:p>
+            <a:pPr>
+              <a:lnSpc>
+                <a:spcPct val="100000"/>
+              </a:lnSpc>
+            </a:pPr>
+            <a:r>
+              <a:rPr b="1" lang="en-US" sz="1400" spc="-1" strike="noStrike">
+                <a:solidFill>
+                  <a:schemeClr val="lt1"/>
+                </a:solidFill>
+                <a:latin typeface="Calibri"/>
+                <a:ea typeface="DejaVu Sans"/>
+              </a:rPr>
+              <a:t>boolean</a:t>
+            </a:r>
+            <a:r>
+              <a:rPr b="0" lang="en-US" sz="1400" spc="-1" strike="noStrike">
+                <a:solidFill>
+                  <a:schemeClr val="lt1"/>
+                </a:solidFill>
+                <a:latin typeface="Calibri"/>
+                <a:ea typeface="DejaVu Sans"/>
+              </a:rPr>
+              <a:t> → Boolean</a:t>
+            </a:r>
+            <a:endParaRPr b="0" lang="en-US" sz="1400" spc="-1" strike="noStrike">
+              <a:solidFill>
+                <a:srgbClr val="ffffff"/>
+              </a:solidFill>
+              <a:latin typeface="Arial"/>
+            </a:endParaRPr>
+          </a:p>
+          <a:p>
+            <a:pPr>
+              <a:lnSpc>
+                <a:spcPct val="100000"/>
+              </a:lnSpc>
+            </a:pPr>
+            <a:endParaRPr b="0" lang="en-US" sz="1400" spc="-1" strike="noStrike">
+              <a:solidFill>
+                <a:srgbClr val="ffffff"/>
+              </a:solidFill>
+              <a:latin typeface="Arial"/>
+            </a:endParaRPr>
+          </a:p>
+          <a:p>
+            <a:pPr>
+              <a:lnSpc>
+                <a:spcPct val="100000"/>
+              </a:lnSpc>
+            </a:pPr>
+            <a:r>
+              <a:rPr b="0" lang="en-US" sz="1400" spc="-1" strike="noStrike">
+                <a:solidFill>
+                  <a:schemeClr val="lt1"/>
+                </a:solidFill>
+                <a:latin typeface="Calibri"/>
+                <a:ea typeface="DejaVu Sans"/>
+              </a:rPr>
+              <a:t>Wrapper sınıfları dönüşüm ve veri işleme için kullanışlı metodlar sağlar.</a:t>
+            </a:r>
+            <a:endParaRPr b="0" lang="en-US" sz="1400" spc="-1" strike="noStrike">
+              <a:solidFill>
+                <a:srgbClr val="ffffff"/>
+              </a:solidFill>
+              <a:latin typeface="Arial"/>
+            </a:endParaRPr>
+          </a:p>
+        </p:txBody>
+      </p:sp>
+      <p:sp>
+        <p:nvSpPr>
+          <p:cNvPr id="405" name="Rounded Rectangle 60"/>
+          <p:cNvSpPr/>
+          <p:nvPr/>
+        </p:nvSpPr>
+        <p:spPr>
+          <a:xfrm>
+            <a:off x="4507920" y="3182040"/>
+            <a:ext cx="3290760" cy="2742120"/>
+          </a:xfrm>
+          <a:prstGeom prst="roundRect">
+            <a:avLst>
+              <a:gd name="adj" fmla="val 16667"/>
+            </a:avLst>
+          </a:prstGeom>
+          <a:solidFill>
+            <a:srgbClr val="08080a"/>
+          </a:solidFill>
+          <a:ln>
+            <a:noFill/>
+          </a:ln>
+          <a:effectLst>
+            <a:outerShdw blurRad="39960" dir="5400000" dist="23040" rotWithShape="0">
+              <a:srgbClr val="000000">
+                <a:alpha val="35000"/>
+              </a:srgbClr>
+            </a:outerShdw>
+          </a:effectLst>
+        </p:spPr>
+        <p:style>
+          <a:lnRef idx="1">
+            <a:schemeClr val="accent1"/>
+          </a:lnRef>
+          <a:fillRef idx="3">
+            <a:schemeClr val="accent1"/>
+          </a:fillRef>
+          <a:effectRef idx="2">
+            <a:schemeClr val="accent1"/>
+          </a:effectRef>
+          <a:fontRef idx="minor"/>
+        </p:style>
+        <p:txBody>
+          <a:bodyPr lIns="90000" rIns="90000" tIns="45000" bIns="45000" anchor="ctr">
+            <a:noAutofit/>
+          </a:bodyPr>
+          <a:p>
+            <a:endParaRPr b="0" lang="en-US" sz="1800" spc="-1" strike="noStrike">
+              <a:solidFill>
+                <a:schemeClr val="lt1"/>
+              </a:solidFill>
+              <a:latin typeface="Calibri"/>
+              <a:ea typeface="DejaVu Sans"/>
+            </a:endParaRPr>
+          </a:p>
+        </p:txBody>
+      </p:sp>
+      <p:sp>
+        <p:nvSpPr>
+          <p:cNvPr id="406" name="Rounded Rectangle 61"/>
+          <p:cNvSpPr/>
+          <p:nvPr/>
+        </p:nvSpPr>
+        <p:spPr>
+          <a:xfrm>
+            <a:off x="4434840" y="3108960"/>
+            <a:ext cx="3290760" cy="2742120"/>
+          </a:xfrm>
+          <a:prstGeom prst="roundRect">
+            <a:avLst>
+              <a:gd name="adj" fmla="val 16667"/>
+            </a:avLst>
+          </a:prstGeom>
+          <a:solidFill>
+            <a:srgbClr val="16161c"/>
+          </a:solidFill>
+          <a:ln>
+            <a:solidFill>
+              <a:srgbClr val="464655"/>
+            </a:solidFill>
+            <a:round/>
+          </a:ln>
+          <a:effectLst>
+            <a:outerShdw blurRad="39960" dir="5400000" dist="23040" rotWithShape="0">
+              <a:srgbClr val="000000">
+                <a:alpha val="35000"/>
+              </a:srgbClr>
+            </a:outerShdw>
+          </a:effectLst>
+        </p:spPr>
+        <p:style>
+          <a:lnRef idx="1">
+            <a:schemeClr val="accent1"/>
+          </a:lnRef>
+          <a:fillRef idx="3">
+            <a:schemeClr val="accent1"/>
+          </a:fillRef>
+          <a:effectRef idx="2">
+            <a:schemeClr val="accent1"/>
+          </a:effectRef>
+          <a:fontRef idx="minor"/>
+        </p:style>
+        <p:txBody>
+          <a:bodyPr lIns="90000" rIns="90000" tIns="45000" bIns="45000" anchor="ctr">
+            <a:noAutofit/>
+          </a:bodyPr>
+          <a:p>
+            <a:pPr>
+              <a:lnSpc>
+                <a:spcPct val="100000"/>
+              </a:lnSpc>
+            </a:pPr>
+            <a:r>
+              <a:rPr b="0" lang="en-US" sz="1300" spc="-1" strike="noStrike">
+                <a:solidFill>
+                  <a:schemeClr val="lt1"/>
+                </a:solidFill>
+                <a:latin typeface="Calibri"/>
+                <a:ea typeface="DejaVu Sans"/>
+              </a:rPr>
+              <a:t>Primitive Değer</a:t>
+            </a:r>
+            <a:endParaRPr b="0" lang="en-US" sz="1300" spc="-1" strike="noStrike">
+              <a:solidFill>
+                <a:srgbClr val="ffffff"/>
+              </a:solidFill>
+              <a:latin typeface="Arial"/>
+            </a:endParaRPr>
+          </a:p>
+          <a:p>
+            <a:pPr>
+              <a:lnSpc>
+                <a:spcPct val="100000"/>
+              </a:lnSpc>
+            </a:pPr>
+            <a:r>
+              <a:rPr b="0" lang="en-US" sz="1300" spc="-1" strike="noStrike">
+                <a:solidFill>
+                  <a:schemeClr val="lt1"/>
+                </a:solidFill>
+                <a:latin typeface="Calibri"/>
+                <a:ea typeface="DejaVu Sans"/>
+              </a:rPr>
+              <a:t>↓</a:t>
+            </a:r>
+            <a:endParaRPr b="0" lang="en-US" sz="1300" spc="-1" strike="noStrike">
+              <a:solidFill>
+                <a:srgbClr val="ffffff"/>
+              </a:solidFill>
+              <a:latin typeface="Arial"/>
+            </a:endParaRPr>
+          </a:p>
+          <a:p>
+            <a:pPr>
+              <a:lnSpc>
+                <a:spcPct val="100000"/>
+              </a:lnSpc>
+            </a:pPr>
+            <a:r>
+              <a:rPr b="0" lang="en-US" sz="1300" spc="-1" strike="noStrike">
+                <a:solidFill>
+                  <a:schemeClr val="lt1"/>
+                </a:solidFill>
+                <a:latin typeface="Calibri"/>
+                <a:ea typeface="DejaVu Sans"/>
+              </a:rPr>
+              <a:t>Wrapper Sınıfına Dönüştürme</a:t>
+            </a:r>
+            <a:endParaRPr b="0" lang="en-US" sz="1300" spc="-1" strike="noStrike">
+              <a:solidFill>
+                <a:srgbClr val="ffffff"/>
+              </a:solidFill>
+              <a:latin typeface="Arial"/>
+            </a:endParaRPr>
+          </a:p>
+          <a:p>
+            <a:pPr>
+              <a:lnSpc>
+                <a:spcPct val="100000"/>
+              </a:lnSpc>
+            </a:pPr>
+            <a:r>
+              <a:rPr b="0" lang="en-US" sz="1300" spc="-1" strike="noStrike">
+                <a:solidFill>
+                  <a:schemeClr val="lt1"/>
+                </a:solidFill>
+                <a:latin typeface="Calibri"/>
+                <a:ea typeface="DejaVu Sans"/>
+              </a:rPr>
+              <a:t>↓</a:t>
+            </a:r>
+            <a:endParaRPr b="0" lang="en-US" sz="1300" spc="-1" strike="noStrike">
+              <a:solidFill>
+                <a:srgbClr val="ffffff"/>
+              </a:solidFill>
+              <a:latin typeface="Arial"/>
+            </a:endParaRPr>
+          </a:p>
+          <a:p>
+            <a:pPr>
+              <a:lnSpc>
+                <a:spcPct val="100000"/>
+              </a:lnSpc>
+            </a:pPr>
+            <a:r>
+              <a:rPr b="0" lang="en-US" sz="1300" spc="-1" strike="noStrike">
+                <a:solidFill>
+                  <a:schemeClr val="lt1"/>
+                </a:solidFill>
+                <a:latin typeface="Calibri"/>
+                <a:ea typeface="DejaVu Sans"/>
+              </a:rPr>
+              <a:t>Nesne Temsili</a:t>
+            </a:r>
+            <a:endParaRPr b="0" lang="en-US" sz="1300" spc="-1" strike="noStrike">
+              <a:solidFill>
+                <a:srgbClr val="ffffff"/>
+              </a:solidFill>
+              <a:latin typeface="Arial"/>
+            </a:endParaRPr>
+          </a:p>
+          <a:p>
+            <a:pPr>
+              <a:lnSpc>
+                <a:spcPct val="100000"/>
+              </a:lnSpc>
+            </a:pPr>
+            <a:r>
+              <a:rPr b="0" lang="en-US" sz="1300" spc="-1" strike="noStrike">
+                <a:solidFill>
+                  <a:schemeClr val="lt1"/>
+                </a:solidFill>
+                <a:latin typeface="Calibri"/>
+                <a:ea typeface="DejaVu Sans"/>
+              </a:rPr>
+              <a:t>↓</a:t>
+            </a:r>
+            <a:endParaRPr b="0" lang="en-US" sz="1300" spc="-1" strike="noStrike">
+              <a:solidFill>
+                <a:srgbClr val="ffffff"/>
+              </a:solidFill>
+              <a:latin typeface="Arial"/>
+            </a:endParaRPr>
+          </a:p>
+          <a:p>
+            <a:pPr>
+              <a:lnSpc>
+                <a:spcPct val="100000"/>
+              </a:lnSpc>
+            </a:pPr>
+            <a:r>
+              <a:rPr b="0" lang="en-US" sz="1300" spc="-1" strike="noStrike">
+                <a:solidFill>
+                  <a:schemeClr val="lt1"/>
+                </a:solidFill>
+                <a:latin typeface="Calibri"/>
+                <a:ea typeface="DejaVu Sans"/>
+              </a:rPr>
+              <a:t>Koleksiyonlarda / Metotlarda Kullanım</a:t>
+            </a:r>
+            <a:endParaRPr b="0" lang="en-US" sz="1300" spc="-1" strike="noStrike">
+              <a:solidFill>
+                <a:srgbClr val="ffffff"/>
+              </a:solidFill>
+              <a:latin typeface="Arial"/>
+            </a:endParaRPr>
+          </a:p>
+          <a:p>
+            <a:pPr>
+              <a:lnSpc>
+                <a:spcPct val="100000"/>
+              </a:lnSpc>
+            </a:pPr>
+            <a:endParaRPr b="0" lang="en-US" sz="1300" spc="-1" strike="noStrike">
+              <a:solidFill>
+                <a:srgbClr val="ffffff"/>
+              </a:solidFill>
+              <a:latin typeface="Arial"/>
+            </a:endParaRPr>
+          </a:p>
+          <a:p>
+            <a:pPr>
+              <a:lnSpc>
+                <a:spcPct val="100000"/>
+              </a:lnSpc>
+            </a:pPr>
+            <a:r>
+              <a:rPr b="0" lang="en-US" sz="1300" spc="-1" strike="noStrike">
+                <a:solidFill>
+                  <a:schemeClr val="lt1"/>
+                </a:solidFill>
+                <a:latin typeface="Calibri"/>
+                <a:ea typeface="DejaVu Sans"/>
+              </a:rPr>
+              <a:t>Örnekler</a:t>
+            </a:r>
+            <a:endParaRPr b="0" lang="en-US" sz="1300" spc="-1" strike="noStrike">
+              <a:solidFill>
+                <a:srgbClr val="ffffff"/>
+              </a:solidFill>
+              <a:latin typeface="Arial"/>
+            </a:endParaRPr>
+          </a:p>
+          <a:p>
+            <a:pPr>
+              <a:lnSpc>
+                <a:spcPct val="100000"/>
+              </a:lnSpc>
+            </a:pPr>
+            <a:endParaRPr b="0" lang="en-US" sz="1300" spc="-1" strike="noStrike">
+              <a:solidFill>
+                <a:srgbClr val="ffffff"/>
+              </a:solidFill>
+              <a:latin typeface="Arial"/>
+            </a:endParaRPr>
+          </a:p>
+          <a:p>
+            <a:pPr>
+              <a:lnSpc>
+                <a:spcPct val="100000"/>
+              </a:lnSpc>
+            </a:pPr>
+            <a:r>
+              <a:rPr b="0" lang="en-US" sz="1300" spc="-1" strike="noStrike">
+                <a:solidFill>
+                  <a:schemeClr val="lt1"/>
+                </a:solidFill>
+                <a:latin typeface="Calibri"/>
+                <a:ea typeface="DejaVu Sans"/>
+              </a:rPr>
+              <a:t>int → Integer</a:t>
+            </a:r>
+            <a:endParaRPr b="0" lang="en-US" sz="1300" spc="-1" strike="noStrike">
+              <a:solidFill>
+                <a:srgbClr val="ffffff"/>
+              </a:solidFill>
+              <a:latin typeface="Arial"/>
+            </a:endParaRPr>
+          </a:p>
+          <a:p>
+            <a:pPr>
+              <a:lnSpc>
+                <a:spcPct val="100000"/>
+              </a:lnSpc>
+            </a:pPr>
+            <a:r>
+              <a:rPr b="0" lang="en-US" sz="1300" spc="-1" strike="noStrike">
+                <a:solidFill>
+                  <a:schemeClr val="lt1"/>
+                </a:solidFill>
+                <a:latin typeface="Calibri"/>
+                <a:ea typeface="DejaVu Sans"/>
+              </a:rPr>
+              <a:t>double → Double</a:t>
+            </a:r>
+            <a:endParaRPr b="0" lang="en-US" sz="1300" spc="-1" strike="noStrike">
+              <a:solidFill>
+                <a:srgbClr val="ffffff"/>
+              </a:solidFill>
+              <a:latin typeface="Arial"/>
+            </a:endParaRPr>
+          </a:p>
+          <a:p>
+            <a:pPr>
+              <a:lnSpc>
+                <a:spcPct val="100000"/>
+              </a:lnSpc>
+            </a:pPr>
+            <a:r>
+              <a:rPr b="0" lang="en-US" sz="1300" spc="-1" strike="noStrike">
+                <a:solidFill>
+                  <a:schemeClr val="lt1"/>
+                </a:solidFill>
+                <a:latin typeface="Calibri"/>
+                <a:ea typeface="DejaVu Sans"/>
+              </a:rPr>
+              <a:t>boolean → Boolean</a:t>
+            </a:r>
+            <a:endParaRPr b="0" lang="en-US" sz="1300" spc="-1" strike="noStrike">
+              <a:solidFill>
+                <a:srgbClr val="ffffff"/>
+              </a:solidFill>
+              <a:latin typeface="Arial"/>
+            </a:endParaRPr>
+          </a:p>
+        </p:txBody>
+      </p:sp>
+      <p:sp>
+        <p:nvSpPr>
+          <p:cNvPr id="407" name="Rounded Rectangle 62"/>
+          <p:cNvSpPr/>
+          <p:nvPr/>
+        </p:nvSpPr>
+        <p:spPr>
+          <a:xfrm>
+            <a:off x="8028360" y="3182040"/>
+            <a:ext cx="3290760" cy="2742120"/>
+          </a:xfrm>
+          <a:prstGeom prst="roundRect">
+            <a:avLst>
+              <a:gd name="adj" fmla="val 16667"/>
+            </a:avLst>
+          </a:prstGeom>
+          <a:solidFill>
+            <a:srgbClr val="08080a"/>
+          </a:solidFill>
+          <a:ln>
+            <a:noFill/>
+          </a:ln>
+          <a:effectLst>
+            <a:outerShdw blurRad="39960" dir="5400000" dist="23040" rotWithShape="0">
+              <a:srgbClr val="000000">
+                <a:alpha val="35000"/>
+              </a:srgbClr>
+            </a:outerShdw>
+          </a:effectLst>
+        </p:spPr>
+        <p:style>
+          <a:lnRef idx="1">
+            <a:schemeClr val="accent1"/>
+          </a:lnRef>
+          <a:fillRef idx="3">
+            <a:schemeClr val="accent1"/>
+          </a:fillRef>
+          <a:effectRef idx="2">
+            <a:schemeClr val="accent1"/>
+          </a:effectRef>
+          <a:fontRef idx="minor"/>
+        </p:style>
+        <p:txBody>
+          <a:bodyPr lIns="90000" rIns="90000" tIns="45000" bIns="45000" anchor="ctr">
+            <a:noAutofit/>
+          </a:bodyPr>
+          <a:p>
+            <a:endParaRPr b="0" lang="en-US" sz="1800" spc="-1" strike="noStrike">
+              <a:solidFill>
+                <a:schemeClr val="lt1"/>
+              </a:solidFill>
+              <a:latin typeface="Calibri"/>
+              <a:ea typeface="DejaVu Sans"/>
+            </a:endParaRPr>
+          </a:p>
+        </p:txBody>
+      </p:sp>
+      <p:sp>
+        <p:nvSpPr>
+          <p:cNvPr id="408" name="Rounded Rectangle 63"/>
+          <p:cNvSpPr/>
+          <p:nvPr/>
+        </p:nvSpPr>
+        <p:spPr>
+          <a:xfrm>
+            <a:off x="7955280" y="2743200"/>
+            <a:ext cx="3474720" cy="3657600"/>
+          </a:xfrm>
+          <a:prstGeom prst="roundRect">
+            <a:avLst>
+              <a:gd name="adj" fmla="val 16667"/>
+            </a:avLst>
+          </a:prstGeom>
+          <a:solidFill>
+            <a:srgbClr val="16161c"/>
+          </a:solidFill>
+          <a:ln>
+            <a:solidFill>
+              <a:srgbClr val="464655"/>
+            </a:solidFill>
+            <a:round/>
+          </a:ln>
+          <a:effectLst>
+            <a:outerShdw blurRad="39960" dir="5400000" dist="23040" rotWithShape="0">
+              <a:srgbClr val="000000">
+                <a:alpha val="35000"/>
+              </a:srgbClr>
+            </a:outerShdw>
+          </a:effectLst>
+        </p:spPr>
+        <p:style>
+          <a:lnRef idx="1">
+            <a:schemeClr val="accent1"/>
+          </a:lnRef>
+          <a:fillRef idx="3">
+            <a:schemeClr val="accent1"/>
+          </a:fillRef>
+          <a:effectRef idx="2">
+            <a:schemeClr val="accent1"/>
+          </a:effectRef>
+          <a:fontRef idx="minor"/>
+        </p:style>
+        <p:txBody>
+          <a:bodyPr lIns="90000" rIns="90000" tIns="45000" bIns="45000" anchor="ctr">
+            <a:noAutofit/>
+          </a:bodyPr>
+          <a:p>
+            <a:pPr algn="ctr">
+              <a:lnSpc>
+                <a:spcPct val="100000"/>
+              </a:lnSpc>
+            </a:pPr>
+            <a:r>
+              <a:rPr b="0" lang="en-US" sz="1300" spc="-1" strike="noStrike">
+                <a:solidFill>
+                  <a:srgbClr val="78ffc8"/>
+                </a:solidFill>
+                <a:latin typeface="Consolas"/>
+                <a:ea typeface="DejaVu Sans"/>
+              </a:rPr>
+              <a:t>public class WrapperOrnek {</a:t>
+            </a:r>
+            <a:endParaRPr b="0" lang="en-US" sz="1300" spc="-1" strike="noStrike">
+              <a:solidFill>
+                <a:srgbClr val="ffffff"/>
+              </a:solidFill>
+              <a:latin typeface="Arial"/>
+            </a:endParaRPr>
+          </a:p>
+          <a:p>
+            <a:pPr algn="ctr">
+              <a:lnSpc>
+                <a:spcPct val="100000"/>
+              </a:lnSpc>
+            </a:pPr>
+            <a:r>
+              <a:rPr b="0" lang="en-US" sz="1300" spc="-1" strike="noStrike">
+                <a:solidFill>
+                  <a:srgbClr val="78ffc8"/>
+                </a:solidFill>
+                <a:latin typeface="Consolas"/>
+                <a:ea typeface="DejaVu Sans"/>
+              </a:rPr>
+              <a:t>    </a:t>
+            </a:r>
+            <a:r>
+              <a:rPr b="0" lang="en-US" sz="1300" spc="-1" strike="noStrike">
+                <a:solidFill>
+                  <a:srgbClr val="78ffc8"/>
+                </a:solidFill>
+                <a:latin typeface="Consolas"/>
+                <a:ea typeface="DejaVu Sans"/>
+              </a:rPr>
+              <a:t>public static void main(String[] args) {</a:t>
+            </a:r>
+            <a:endParaRPr b="0" lang="en-US" sz="1300" spc="-1" strike="noStrike">
+              <a:solidFill>
+                <a:srgbClr val="ffffff"/>
+              </a:solidFill>
+              <a:latin typeface="Arial"/>
+            </a:endParaRPr>
+          </a:p>
+          <a:p>
+            <a:pPr algn="ctr">
+              <a:lnSpc>
+                <a:spcPct val="100000"/>
+              </a:lnSpc>
+            </a:pPr>
+            <a:r>
+              <a:rPr b="0" lang="en-US" sz="1300" spc="-1" strike="noStrike">
+                <a:solidFill>
+                  <a:srgbClr val="78ffc8"/>
+                </a:solidFill>
+                <a:latin typeface="Consolas"/>
+                <a:ea typeface="DejaVu Sans"/>
+              </a:rPr>
+              <a:t>        </a:t>
+            </a:r>
+            <a:r>
+              <a:rPr b="0" lang="en-US" sz="1300" spc="-1" strike="noStrike">
+                <a:solidFill>
+                  <a:srgbClr val="78ffc8"/>
+                </a:solidFill>
+                <a:latin typeface="Consolas"/>
+                <a:ea typeface="DejaVu Sans"/>
+              </a:rPr>
+              <a:t>int number = 10;</a:t>
+            </a:r>
+            <a:endParaRPr b="0" lang="en-US" sz="1300" spc="-1" strike="noStrike">
+              <a:solidFill>
+                <a:srgbClr val="ffffff"/>
+              </a:solidFill>
+              <a:latin typeface="Arial"/>
+            </a:endParaRPr>
+          </a:p>
+          <a:p>
+            <a:pPr algn="ctr">
+              <a:lnSpc>
+                <a:spcPct val="100000"/>
+              </a:lnSpc>
+            </a:pPr>
+            <a:r>
+              <a:rPr b="0" lang="en-US" sz="1300" spc="-1" strike="noStrike">
+                <a:solidFill>
+                  <a:srgbClr val="78ffc8"/>
+                </a:solidFill>
+                <a:latin typeface="Consolas"/>
+                <a:ea typeface="DejaVu Sans"/>
+              </a:rPr>
+              <a:t>        </a:t>
+            </a:r>
+            <a:r>
+              <a:rPr b="0" lang="en-US" sz="1300" spc="-1" strike="noStrike">
+                <a:solidFill>
+                  <a:srgbClr val="78ffc8"/>
+                </a:solidFill>
+                <a:latin typeface="Consolas"/>
+                <a:ea typeface="DejaVu Sans"/>
+              </a:rPr>
+              <a:t>Integer wrapperNumber = number;   // otomatik kutulama (autoboxing)</a:t>
+            </a:r>
+            <a:endParaRPr b="0" lang="en-US" sz="1300" spc="-1" strike="noStrike">
+              <a:solidFill>
+                <a:srgbClr val="ffffff"/>
+              </a:solidFill>
+              <a:latin typeface="Arial"/>
+            </a:endParaRPr>
+          </a:p>
+          <a:p>
+            <a:pPr algn="ctr">
+              <a:lnSpc>
+                <a:spcPct val="100000"/>
+              </a:lnSpc>
+            </a:pPr>
+            <a:r>
+              <a:rPr b="0" lang="en-US" sz="1300" spc="-1" strike="noStrike">
+                <a:solidFill>
+                  <a:srgbClr val="78ffc8"/>
+                </a:solidFill>
+                <a:latin typeface="Consolas"/>
+                <a:ea typeface="DejaVu Sans"/>
+              </a:rPr>
+              <a:t>        </a:t>
+            </a:r>
+            <a:r>
+              <a:rPr b="0" lang="en-US" sz="1300" spc="-1" strike="noStrike">
+                <a:solidFill>
+                  <a:srgbClr val="78ffc8"/>
+                </a:solidFill>
+                <a:latin typeface="Consolas"/>
+                <a:ea typeface="DejaVu Sans"/>
+              </a:rPr>
+              <a:t>double price = 19.99;</a:t>
+            </a:r>
+            <a:endParaRPr b="0" lang="en-US" sz="1300" spc="-1" strike="noStrike">
+              <a:solidFill>
+                <a:srgbClr val="ffffff"/>
+              </a:solidFill>
+              <a:latin typeface="Arial"/>
+            </a:endParaRPr>
+          </a:p>
+          <a:p>
+            <a:pPr algn="ctr">
+              <a:lnSpc>
+                <a:spcPct val="100000"/>
+              </a:lnSpc>
+            </a:pPr>
+            <a:r>
+              <a:rPr b="0" lang="en-US" sz="1300" spc="-1" strike="noStrike">
+                <a:solidFill>
+                  <a:srgbClr val="78ffc8"/>
+                </a:solidFill>
+                <a:latin typeface="Consolas"/>
+                <a:ea typeface="DejaVu Sans"/>
+              </a:rPr>
+              <a:t>        </a:t>
+            </a:r>
+            <a:r>
+              <a:rPr b="0" lang="en-US" sz="1300" spc="-1" strike="noStrike">
+                <a:solidFill>
+                  <a:srgbClr val="78ffc8"/>
+                </a:solidFill>
+                <a:latin typeface="Consolas"/>
+                <a:ea typeface="DejaVu Sans"/>
+              </a:rPr>
+              <a:t>Double wrapperPrice = price;</a:t>
+            </a:r>
+            <a:endParaRPr b="0" lang="en-US" sz="1300" spc="-1" strike="noStrike">
+              <a:solidFill>
+                <a:srgbClr val="ffffff"/>
+              </a:solidFill>
+              <a:latin typeface="Arial"/>
+            </a:endParaRPr>
+          </a:p>
+          <a:p>
+            <a:pPr algn="ctr">
+              <a:lnSpc>
+                <a:spcPct val="100000"/>
+              </a:lnSpc>
+            </a:pPr>
+            <a:r>
+              <a:rPr b="0" lang="en-US" sz="1300" spc="-1" strike="noStrike">
+                <a:solidFill>
+                  <a:srgbClr val="78ffc8"/>
+                </a:solidFill>
+                <a:latin typeface="Consolas"/>
+                <a:ea typeface="DejaVu Sans"/>
+              </a:rPr>
+              <a:t>        </a:t>
+            </a:r>
+            <a:r>
+              <a:rPr b="0" lang="en-US" sz="1300" spc="-1" strike="noStrike">
+                <a:solidFill>
+                  <a:srgbClr val="78ffc8"/>
+                </a:solidFill>
+                <a:latin typeface="Consolas"/>
+                <a:ea typeface="DejaVu Sans"/>
+              </a:rPr>
+              <a:t>System.out.println(wrapperNumber);</a:t>
+            </a:r>
+            <a:endParaRPr b="0" lang="en-US" sz="1300" spc="-1" strike="noStrike">
+              <a:solidFill>
+                <a:srgbClr val="ffffff"/>
+              </a:solidFill>
+              <a:latin typeface="Arial"/>
+            </a:endParaRPr>
+          </a:p>
+          <a:p>
+            <a:pPr algn="ctr">
+              <a:lnSpc>
+                <a:spcPct val="100000"/>
+              </a:lnSpc>
+            </a:pPr>
+            <a:r>
+              <a:rPr b="0" lang="en-US" sz="1300" spc="-1" strike="noStrike">
+                <a:solidFill>
+                  <a:srgbClr val="78ffc8"/>
+                </a:solidFill>
+                <a:latin typeface="Consolas"/>
+                <a:ea typeface="DejaVu Sans"/>
+              </a:rPr>
+              <a:t>        </a:t>
+            </a:r>
+            <a:r>
+              <a:rPr b="0" lang="en-US" sz="1300" spc="-1" strike="noStrike">
+                <a:solidFill>
+                  <a:srgbClr val="78ffc8"/>
+                </a:solidFill>
+                <a:latin typeface="Consolas"/>
+                <a:ea typeface="DejaVu Sans"/>
+              </a:rPr>
+              <a:t>System.out.println(wrapperPrice);</a:t>
+            </a:r>
+            <a:endParaRPr b="0" lang="en-US" sz="1300" spc="-1" strike="noStrike">
+              <a:solidFill>
+                <a:srgbClr val="ffffff"/>
+              </a:solidFill>
+              <a:latin typeface="Arial"/>
+            </a:endParaRPr>
+          </a:p>
+          <a:p>
+            <a:pPr algn="ctr">
+              <a:lnSpc>
+                <a:spcPct val="100000"/>
+              </a:lnSpc>
+            </a:pPr>
+            <a:r>
+              <a:rPr b="0" lang="en-US" sz="1300" spc="-1" strike="noStrike">
+                <a:solidFill>
+                  <a:srgbClr val="78ffc8"/>
+                </a:solidFill>
+                <a:latin typeface="Consolas"/>
+                <a:ea typeface="DejaVu Sans"/>
+              </a:rPr>
+              <a:t>    </a:t>
+            </a:r>
+            <a:r>
+              <a:rPr b="0" lang="en-US" sz="1300" spc="-1" strike="noStrike">
+                <a:solidFill>
+                  <a:srgbClr val="78ffc8"/>
+                </a:solidFill>
+                <a:latin typeface="Consolas"/>
+                <a:ea typeface="DejaVu Sans"/>
+              </a:rPr>
+              <a:t>}</a:t>
+            </a:r>
+            <a:endParaRPr b="0" lang="en-US" sz="1300" spc="-1" strike="noStrike">
+              <a:solidFill>
+                <a:srgbClr val="ffffff"/>
+              </a:solidFill>
+              <a:latin typeface="Arial"/>
+            </a:endParaRPr>
+          </a:p>
+          <a:p>
+            <a:pPr algn="ctr">
+              <a:lnSpc>
+                <a:spcPct val="100000"/>
+              </a:lnSpc>
+            </a:pPr>
+            <a:r>
+              <a:rPr b="0" lang="en-US" sz="1300" spc="-1" strike="noStrike">
+                <a:solidFill>
+                  <a:srgbClr val="78ffc8"/>
+                </a:solidFill>
+                <a:latin typeface="Consolas"/>
+                <a:ea typeface="DejaVu Sans"/>
+              </a:rPr>
+              <a:t>}</a:t>
+            </a:r>
+            <a:endParaRPr b="0" lang="en-US" sz="1300" spc="-1" strike="noStrike">
+              <a:solidFill>
+                <a:srgbClr val="ffffff"/>
+              </a:solidFill>
+              <a:latin typeface="Arial"/>
+            </a:endParaRPr>
+          </a:p>
+        </p:txBody>
+      </p:sp>
+      <p:sp>
+        <p:nvSpPr>
+          <p:cNvPr id="409" name="TextBox 27"/>
+          <p:cNvSpPr/>
+          <p:nvPr/>
+        </p:nvSpPr>
+        <p:spPr>
+          <a:xfrm>
+            <a:off x="4600080" y="6446520"/>
+            <a:ext cx="3051720" cy="363960"/>
           </a:xfrm>
           <a:prstGeom prst="rect">
             <a:avLst/>
@@ -29211,4 +34596,230 @@
     </a:fmtScheme>
   </a:themeElements>
 </a:theme>
+</file>
+
+<file path=ppt/theme/theme5.xml><?xml version="1.0" encoding="utf-8"?>
+<a:theme xmlns:a="http://schemas.openxmlformats.org/drawingml/2006/main" name="Office Theme">
+  <a:themeElements>
+    <a:clrScheme name="Office">
+      <a:dk1>
+        <a:sysClr val="windowText" lastClr="000000"/>
+      </a:dk1>
+      <a:lt1>
+        <a:sysClr val="window" lastClr="FFFFFF"/>
+      </a:lt1>
+      <a:dk2>
+        <a:srgbClr val="1f497d"/>
+      </a:dk2>
+      <a:lt2>
+        <a:srgbClr val="eeece1"/>
+      </a:lt2>
+      <a:accent1>
+        <a:srgbClr val="4f81bd"/>
+      </a:accent1>
+      <a:accent2>
+        <a:srgbClr val="c0504d"/>
+      </a:accent2>
+      <a:accent3>
+        <a:srgbClr val="9bbb59"/>
+      </a:accent3>
+      <a:accent4>
+        <a:srgbClr val="8064a2"/>
+      </a:accent4>
+      <a:accent5>
+        <a:srgbClr val="4bacc6"/>
+      </a:accent5>
+      <a:accent6>
+        <a:srgbClr val="f79646"/>
+      </a:accent6>
+      <a:hlink>
+        <a:srgbClr val="0000ff"/>
+      </a:hlink>
+      <a:folHlink>
+        <a:srgbClr val="800080"/>
+      </a:folHlink>
+    </a:clrScheme>
+    <a:fontScheme name="Office">
+      <a:majorFont>
+        <a:latin typeface="Arial"/>
+        <a:ea typeface="DejaVu Sans"/>
+        <a:cs typeface="DejaVu Sans"/>
+      </a:majorFont>
+      <a:minorFont>
+        <a:latin typeface="Arial"/>
+        <a:ea typeface="DejaVu Sans"/>
+        <a:cs typeface="DejaVu Sans"/>
+      </a:minorFont>
+    </a:fontScheme>
+    <a:fmtScheme name="Office">
+      <a:fillStyleLst>
+        <a:solidFill>
+          <a:schemeClr val="phClr"/>
+        </a:solidFill>
+        <a:gradFill rotWithShape="1">
+          <a:gsLst>
+            <a:gs pos="0">
+              <a:schemeClr val="phClr">
+                <a:tint val="50000"/>
+                <a:satMod val="300000"/>
+              </a:schemeClr>
+            </a:gs>
+            <a:gs pos="35000">
+              <a:schemeClr val="phClr">
+                <a:tint val="37000"/>
+                <a:satMod val="300000"/>
+              </a:schemeClr>
+            </a:gs>
+            <a:gs pos="100000">
+              <a:schemeClr val="phClr">
+                <a:tint val="15000"/>
+                <a:satMod val="350000"/>
+              </a:schemeClr>
+            </a:gs>
+          </a:gsLst>
+          <a:lin ang="16200000" scaled="1"/>
+        </a:gradFill>
+        <a:gradFill rotWithShape="1">
+          <a:gsLst>
+            <a:gs pos="0">
+              <a:schemeClr val="phClr">
+                <a:shade val="51000"/>
+                <a:satMod val="130000"/>
+              </a:schemeClr>
+            </a:gs>
+            <a:gs pos="80000">
+              <a:schemeClr val="phClr">
+                <a:shade val="93000"/>
+                <a:satMod val="130000"/>
+              </a:schemeClr>
+            </a:gs>
+            <a:gs pos="100000">
+              <a:schemeClr val="phClr">
+                <a:shade val="94000"/>
+                <a:satMod val="135000"/>
+              </a:schemeClr>
+            </a:gs>
+          </a:gsLst>
+          <a:lin ang="16200000" scaled="0"/>
+        </a:gradFill>
+      </a:fillStyleLst>
+      <a:lnStyleLst>
+        <a:ln w="9525" cap="flat" cmpd="sng" algn="ctr">
+          <a:solidFill>
+            <a:schemeClr val="phClr">
+              <a:shade val="95000"/>
+              <a:satMod val="105000"/>
+            </a:schemeClr>
+          </a:solidFill>
+          <a:prstDash val="solid"/>
+          <a:miter/>
+        </a:ln>
+        <a:ln w="25400" cap="flat" cmpd="sng" algn="ctr">
+          <a:solidFill>
+            <a:schemeClr val="phClr"/>
+          </a:solidFill>
+          <a:prstDash val="solid"/>
+          <a:miter/>
+        </a:ln>
+        <a:ln w="38100" cap="flat" cmpd="sng" algn="ctr">
+          <a:solidFill>
+            <a:schemeClr val="phClr"/>
+          </a:solidFill>
+          <a:prstDash val="solid"/>
+          <a:miter/>
+        </a:ln>
+      </a:lnStyleLst>
+      <a:effectStyleLst>
+        <a:effectStyle>
+          <a:effectLst>
+            <a:outerShdw blurRad="40000" dist="20000" dir="5400000" rotWithShape="0">
+              <a:srgbClr val="000000">
+                <a:alpha val="38000"/>
+              </a:srgbClr>
+            </a:outerShdw>
+          </a:effectLst>
+        </a:effectStyle>
+        <a:effectStyle>
+          <a:effectLst>
+            <a:outerShdw blurRad="40000" dist="23000" dir="5400000" rotWithShape="0">
+              <a:srgbClr val="000000">
+                <a:alpha val="35000"/>
+              </a:srgbClr>
+            </a:outerShdw>
+          </a:effectLst>
+        </a:effectStyle>
+        <a:effectStyle>
+          <a:effectLst>
+            <a:outerShdw blurRad="40000" dist="23000" dir="5400000" rotWithShape="0">
+              <a:srgbClr val="000000">
+                <a:alpha val="35000"/>
+              </a:srgbClr>
+            </a:outerShdw>
+          </a:effectLst>
+          <a:scene3d>
+            <a:camera prst="orthographicFront">
+              <a:rot lat="0" lon="0" rev="0"/>
+            </a:camera>
+            <a:lightRig rig="threePt" dir="t">
+              <a:rot lat="0" lon="0" rev="1200000"/>
+            </a:lightRig>
+          </a:scene3d>
+          <a:sp3d>
+            <a:bevelT w="63500" h="25400"/>
+          </a:sp3d>
+        </a:effectStyle>
+      </a:effectStyleLst>
+      <a:bgFillStyleLst>
+        <a:solidFill>
+          <a:schemeClr val="phClr"/>
+        </a:solidFill>
+        <a:gradFill rotWithShape="1">
+          <a:gsLst>
+            <a:gs pos="0">
+              <a:schemeClr val="phClr">
+                <a:tint val="40000"/>
+                <a:satMod val="350000"/>
+              </a:schemeClr>
+            </a:gs>
+            <a:gs pos="40000">
+              <a:schemeClr val="phClr">
+                <a:tint val="45000"/>
+                <a:shade val="99000"/>
+                <a:satMod val="350000"/>
+              </a:schemeClr>
+            </a:gs>
+            <a:gs pos="100000">
+              <a:schemeClr val="phClr">
+                <a:shade val="20000"/>
+                <a:satMod val="255000"/>
+              </a:schemeClr>
+            </a:gs>
+          </a:gsLst>
+          <a:path path="circle">
+            <a:fillToRect l="50000" t="-80000" r="50000" b="180000"/>
+          </a:path>
+        </a:gradFill>
+        <a:gradFill rotWithShape="1">
+          <a:gsLst>
+            <a:gs pos="0">
+              <a:schemeClr val="phClr">
+                <a:tint val="80000"/>
+                <a:satMod val="300000"/>
+              </a:schemeClr>
+            </a:gs>
+            <a:gs pos="100000">
+              <a:schemeClr val="phClr">
+                <a:shade val="30000"/>
+                <a:satMod val="200000"/>
+              </a:schemeClr>
+            </a:gs>
+          </a:gsLst>
+          <a:path path="circle">
+            <a:fillToRect l="50000" t="50000" r="50000" b="50000"/>
+          </a:path>
+        </a:gradFill>
+      </a:bgFillStyleLst>
+    </a:fmtScheme>
+  </a:themeElements>
+</a:theme>
 </file>